--- a/Slides-Day2.pptx
+++ b/Slides-Day2.pptx
@@ -7,6 +7,10 @@
   <p:sldIdLst>
     <p:sldId id="259" r:id="rId2"/>
     <p:sldId id="260" r:id="rId3"/>
+    <p:sldId id="263" r:id="rId4"/>
+    <p:sldId id="264" r:id="rId5"/>
+    <p:sldId id="265" r:id="rId6"/>
+    <p:sldId id="261" r:id="rId7"/>
   </p:sldIdLst>
   <p:sldSz cx="12192000" cy="6858000"/>
   <p:notesSz cx="6858000" cy="9144000"/>
@@ -260,7 +264,7 @@
           <a:p>
             <a:fld id="{CD989C08-BA69-4AD3-98E9-D53C63F6E1B1}" type="datetimeFigureOut">
               <a:rPr lang="en-US" smtClean="0"/>
-              <a:t>3/7/2025</a:t>
+              <a:t>3/8/2025</a:t>
             </a:fld>
             <a:endParaRPr lang="en-US"/>
           </a:p>
@@ -458,7 +462,7 @@
           <a:p>
             <a:fld id="{CD989C08-BA69-4AD3-98E9-D53C63F6E1B1}" type="datetimeFigureOut">
               <a:rPr lang="en-US" smtClean="0"/>
-              <a:t>3/7/2025</a:t>
+              <a:t>3/8/2025</a:t>
             </a:fld>
             <a:endParaRPr lang="en-US"/>
           </a:p>
@@ -666,7 +670,7 @@
           <a:p>
             <a:fld id="{CD989C08-BA69-4AD3-98E9-D53C63F6E1B1}" type="datetimeFigureOut">
               <a:rPr lang="en-US" smtClean="0"/>
-              <a:t>3/7/2025</a:t>
+              <a:t>3/8/2025</a:t>
             </a:fld>
             <a:endParaRPr lang="en-US"/>
           </a:p>
@@ -864,7 +868,7 @@
           <a:p>
             <a:fld id="{CD989C08-BA69-4AD3-98E9-D53C63F6E1B1}" type="datetimeFigureOut">
               <a:rPr lang="en-US" smtClean="0"/>
-              <a:t>3/7/2025</a:t>
+              <a:t>3/8/2025</a:t>
             </a:fld>
             <a:endParaRPr lang="en-US"/>
           </a:p>
@@ -1139,7 +1143,7 @@
           <a:p>
             <a:fld id="{CD989C08-BA69-4AD3-98E9-D53C63F6E1B1}" type="datetimeFigureOut">
               <a:rPr lang="en-US" smtClean="0"/>
-              <a:t>3/7/2025</a:t>
+              <a:t>3/8/2025</a:t>
             </a:fld>
             <a:endParaRPr lang="en-US"/>
           </a:p>
@@ -1404,7 +1408,7 @@
           <a:p>
             <a:fld id="{CD989C08-BA69-4AD3-98E9-D53C63F6E1B1}" type="datetimeFigureOut">
               <a:rPr lang="en-US" smtClean="0"/>
-              <a:t>3/7/2025</a:t>
+              <a:t>3/8/2025</a:t>
             </a:fld>
             <a:endParaRPr lang="en-US"/>
           </a:p>
@@ -1816,7 +1820,7 @@
           <a:p>
             <a:fld id="{CD989C08-BA69-4AD3-98E9-D53C63F6E1B1}" type="datetimeFigureOut">
               <a:rPr lang="en-US" smtClean="0"/>
-              <a:t>3/7/2025</a:t>
+              <a:t>3/8/2025</a:t>
             </a:fld>
             <a:endParaRPr lang="en-US"/>
           </a:p>
@@ -1957,7 +1961,7 @@
           <a:p>
             <a:fld id="{CD989C08-BA69-4AD3-98E9-D53C63F6E1B1}" type="datetimeFigureOut">
               <a:rPr lang="en-US" smtClean="0"/>
-              <a:t>3/7/2025</a:t>
+              <a:t>3/8/2025</a:t>
             </a:fld>
             <a:endParaRPr lang="en-US"/>
           </a:p>
@@ -2070,7 +2074,7 @@
           <a:p>
             <a:fld id="{CD989C08-BA69-4AD3-98E9-D53C63F6E1B1}" type="datetimeFigureOut">
               <a:rPr lang="en-US" smtClean="0"/>
-              <a:t>3/7/2025</a:t>
+              <a:t>3/8/2025</a:t>
             </a:fld>
             <a:endParaRPr lang="en-US"/>
           </a:p>
@@ -2381,7 +2385,7 @@
           <a:p>
             <a:fld id="{CD989C08-BA69-4AD3-98E9-D53C63F6E1B1}" type="datetimeFigureOut">
               <a:rPr lang="en-US" smtClean="0"/>
-              <a:t>3/7/2025</a:t>
+              <a:t>3/8/2025</a:t>
             </a:fld>
             <a:endParaRPr lang="en-US"/>
           </a:p>
@@ -2669,7 +2673,7 @@
           <a:p>
             <a:fld id="{CD989C08-BA69-4AD3-98E9-D53C63F6E1B1}" type="datetimeFigureOut">
               <a:rPr lang="en-US" smtClean="0"/>
-              <a:t>3/7/2025</a:t>
+              <a:t>3/8/2025</a:t>
             </a:fld>
             <a:endParaRPr lang="en-US"/>
           </a:p>
@@ -2910,7 +2914,7 @@
           <a:p>
             <a:fld id="{CD989C08-BA69-4AD3-98E9-D53C63F6E1B1}" type="datetimeFigureOut">
               <a:rPr lang="en-US" smtClean="0"/>
-              <a:t>3/7/2025</a:t>
+              <a:t>3/8/2025</a:t>
             </a:fld>
             <a:endParaRPr lang="en-US"/>
           </a:p>
@@ -3712,6 +3716,1284 @@
         </p:blipFill>
         <p:spPr>
           <a:xfrm>
+            <a:off x="-179881" y="-116295"/>
+            <a:ext cx="12192000" cy="6891129"/>
+          </a:xfrm>
+          <a:prstGeom prst="rect">
+            <a:avLst/>
+          </a:prstGeom>
+        </p:spPr>
+      </p:pic>
+      <p:sp>
+        <p:nvSpPr>
+          <p:cNvPr id="4" name="TextBox 3">
+            <a:extLst>
+              <a:ext uri="{FF2B5EF4-FFF2-40B4-BE49-F238E27FC236}">
+                <a16:creationId xmlns:a16="http://schemas.microsoft.com/office/drawing/2014/main" id="{86E05592-F352-416E-AA02-F64ACB2D6B5E}"/>
+              </a:ext>
+            </a:extLst>
+          </p:cNvPr>
+          <p:cNvSpPr txBox="1"/>
+          <p:nvPr/>
+        </p:nvSpPr>
+        <p:spPr>
+          <a:xfrm>
+            <a:off x="589277" y="-110431"/>
+            <a:ext cx="10391019" cy="646331"/>
+          </a:xfrm>
+          <a:prstGeom prst="rect">
+            <a:avLst/>
+          </a:prstGeom>
+          <a:noFill/>
+        </p:spPr>
+        <p:txBody>
+          <a:bodyPr wrap="square" rtlCol="0">
+            <a:spAutoFit/>
+          </a:bodyPr>
+          <a:lstStyle/>
+          <a:p>
+            <a:r>
+              <a:rPr lang="en-US" sz="3600">
+                <a:solidFill>
+                  <a:schemeClr val="accent1">
+                    <a:lumMod val="50000"/>
+                  </a:schemeClr>
+                </a:solidFill>
+                <a:latin typeface="Arial" panose="020B0604020202020204" pitchFamily="34" charset="0"/>
+                <a:cs typeface="Arial" panose="020B0604020202020204" pitchFamily="34" charset="0"/>
+              </a:rPr>
+              <a:t>Secure Iteration Practices</a:t>
+            </a:r>
+          </a:p>
+        </p:txBody>
+      </p:sp>
+      <p:sp>
+        <p:nvSpPr>
+          <p:cNvPr id="5" name="TextBox 4">
+            <a:extLst>
+              <a:ext uri="{FF2B5EF4-FFF2-40B4-BE49-F238E27FC236}">
+                <a16:creationId xmlns:a16="http://schemas.microsoft.com/office/drawing/2014/main" id="{97633B80-D681-05C8-937E-80D895C6C127}"/>
+              </a:ext>
+            </a:extLst>
+          </p:cNvPr>
+          <p:cNvSpPr txBox="1"/>
+          <p:nvPr/>
+        </p:nvSpPr>
+        <p:spPr>
+          <a:xfrm>
+            <a:off x="589277" y="535900"/>
+            <a:ext cx="11422842" cy="5786199"/>
+          </a:xfrm>
+          <a:prstGeom prst="rect">
+            <a:avLst/>
+          </a:prstGeom>
+          <a:noFill/>
+        </p:spPr>
+        <p:txBody>
+          <a:bodyPr wrap="square" rtlCol="0">
+            <a:spAutoFit/>
+          </a:bodyPr>
+          <a:lstStyle/>
+          <a:p>
+            <a:pPr marL="231775" lvl="1" indent="-231775">
+              <a:buFont typeface="Arial" panose="020B0604020202020204" pitchFamily="34" charset="0"/>
+              <a:buChar char="•"/>
+            </a:pPr>
+            <a:r>
+              <a:rPr lang="en-US" sz="2400">
+                <a:solidFill>
+                  <a:schemeClr val="accent1">
+                    <a:lumMod val="50000"/>
+                  </a:schemeClr>
+                </a:solidFill>
+                <a:latin typeface="Arial" panose="020B0604020202020204" pitchFamily="34" charset="0"/>
+                <a:cs typeface="Arial" panose="020B0604020202020204" pitchFamily="34" charset="0"/>
+              </a:rPr>
+              <a:t>Avoid Infinite Loops and Ensure Proper Termination</a:t>
+            </a:r>
+          </a:p>
+          <a:p>
+            <a:pPr marL="231775" lvl="1" indent="-231775">
+              <a:buFont typeface="Arial" panose="020B0604020202020204" pitchFamily="34" charset="0"/>
+              <a:buChar char="•"/>
+            </a:pPr>
+            <a:endParaRPr lang="en-US" sz="2400">
+              <a:solidFill>
+                <a:schemeClr val="accent1">
+                  <a:lumMod val="50000"/>
+                </a:schemeClr>
+              </a:solidFill>
+              <a:latin typeface="Arial" panose="020B0604020202020204" pitchFamily="34" charset="0"/>
+              <a:cs typeface="Arial" panose="020B0604020202020204" pitchFamily="34" charset="0"/>
+            </a:endParaRPr>
+          </a:p>
+          <a:p>
+            <a:pPr marL="231775" lvl="1" indent="-231775">
+              <a:buFont typeface="Arial" panose="020B0604020202020204" pitchFamily="34" charset="0"/>
+              <a:buChar char="•"/>
+            </a:pPr>
+            <a:r>
+              <a:rPr lang="en-US" sz="2400">
+                <a:solidFill>
+                  <a:schemeClr val="accent1">
+                    <a:lumMod val="50000"/>
+                  </a:schemeClr>
+                </a:solidFill>
+                <a:latin typeface="Arial" panose="020B0604020202020204" pitchFamily="34" charset="0"/>
+                <a:cs typeface="Arial" panose="020B0604020202020204" pitchFamily="34" charset="0"/>
+              </a:rPr>
+              <a:t>Infinite loops can cause a program to become unresponsive, consume excessive system resources, or create security vulnerabilities such as denial-of-service (DoS) risks. </a:t>
+            </a:r>
+          </a:p>
+          <a:p>
+            <a:pPr marL="231775" lvl="1" indent="-231775">
+              <a:buFont typeface="Arial" panose="020B0604020202020204" pitchFamily="34" charset="0"/>
+              <a:buChar char="•"/>
+            </a:pPr>
+            <a:endParaRPr lang="en-US" sz="2400">
+              <a:solidFill>
+                <a:schemeClr val="accent1">
+                  <a:lumMod val="50000"/>
+                </a:schemeClr>
+              </a:solidFill>
+              <a:latin typeface="Arial" panose="020B0604020202020204" pitchFamily="34" charset="0"/>
+              <a:cs typeface="Arial" panose="020B0604020202020204" pitchFamily="34" charset="0"/>
+            </a:endParaRPr>
+          </a:p>
+          <a:p>
+            <a:pPr marL="231775" lvl="1" indent="-231775">
+              <a:buFont typeface="Arial" panose="020B0604020202020204" pitchFamily="34" charset="0"/>
+              <a:buChar char="•"/>
+            </a:pPr>
+            <a:r>
+              <a:rPr lang="en-US" sz="2400">
+                <a:solidFill>
+                  <a:schemeClr val="accent1">
+                    <a:lumMod val="50000"/>
+                  </a:schemeClr>
+                </a:solidFill>
+                <a:latin typeface="Arial" panose="020B0604020202020204" pitchFamily="34" charset="0"/>
+                <a:cs typeface="Arial" panose="020B0604020202020204" pitchFamily="34" charset="0"/>
+              </a:rPr>
+              <a:t>To ensure proper termination of loops, follow these best practices:</a:t>
+            </a:r>
+          </a:p>
+          <a:p>
+            <a:pPr marL="231775" lvl="1" indent="-231775">
+              <a:buFont typeface="Arial" panose="020B0604020202020204" pitchFamily="34" charset="0"/>
+              <a:buChar char="•"/>
+            </a:pPr>
+            <a:endParaRPr lang="en-US" sz="2400">
+              <a:solidFill>
+                <a:schemeClr val="accent1">
+                  <a:lumMod val="50000"/>
+                </a:schemeClr>
+              </a:solidFill>
+              <a:latin typeface="Arial" panose="020B0604020202020204" pitchFamily="34" charset="0"/>
+              <a:cs typeface="Arial" panose="020B0604020202020204" pitchFamily="34" charset="0"/>
+            </a:endParaRPr>
+          </a:p>
+          <a:p>
+            <a:pPr marL="231775" lvl="1" indent="-231775">
+              <a:buFont typeface="Arial" panose="020B0604020202020204" pitchFamily="34" charset="0"/>
+              <a:buChar char="•"/>
+            </a:pPr>
+            <a:r>
+              <a:rPr lang="en-US" sz="2400">
+                <a:solidFill>
+                  <a:schemeClr val="accent1">
+                    <a:lumMod val="50000"/>
+                  </a:schemeClr>
+                </a:solidFill>
+                <a:latin typeface="Arial" panose="020B0604020202020204" pitchFamily="34" charset="0"/>
+                <a:cs typeface="Arial" panose="020B0604020202020204" pitchFamily="34" charset="0"/>
+              </a:rPr>
+              <a:t>Use Explicit Loop Conditions: ensure loops have well-defined termination conditions.</a:t>
+            </a:r>
+          </a:p>
+          <a:p>
+            <a:pPr marL="231775" lvl="1" indent="-231775">
+              <a:buFont typeface="Arial" panose="020B0604020202020204" pitchFamily="34" charset="0"/>
+              <a:buChar char="•"/>
+            </a:pPr>
+            <a:endParaRPr lang="en-US" sz="1000">
+              <a:solidFill>
+                <a:schemeClr val="accent1">
+                  <a:lumMod val="50000"/>
+                </a:schemeClr>
+              </a:solidFill>
+              <a:latin typeface="Arial" panose="020B0604020202020204" pitchFamily="34" charset="0"/>
+              <a:cs typeface="Arial" panose="020B0604020202020204" pitchFamily="34" charset="0"/>
+            </a:endParaRPr>
+          </a:p>
+          <a:p>
+            <a:pPr lvl="1"/>
+            <a:r>
+              <a:rPr lang="en-US" sz="2400" b="1">
+                <a:solidFill>
+                  <a:schemeClr val="accent1">
+                    <a:lumMod val="50000"/>
+                  </a:schemeClr>
+                </a:solidFill>
+                <a:latin typeface="Consolas" panose="020B0609020204030204" pitchFamily="49" charset="0"/>
+                <a:cs typeface="Arial" panose="020B0604020202020204" pitchFamily="34" charset="0"/>
+              </a:rPr>
+              <a:t>count = 0</a:t>
+            </a:r>
+          </a:p>
+          <a:p>
+            <a:pPr lvl="1"/>
+            <a:r>
+              <a:rPr lang="en-US" sz="2400" b="1">
+                <a:solidFill>
+                  <a:schemeClr val="accent1">
+                    <a:lumMod val="50000"/>
+                  </a:schemeClr>
+                </a:solidFill>
+                <a:latin typeface="Consolas" panose="020B0609020204030204" pitchFamily="49" charset="0"/>
+                <a:cs typeface="Arial" panose="020B0604020202020204" pitchFamily="34" charset="0"/>
+              </a:rPr>
+              <a:t>while count &lt; 10:  # Proper termination condition</a:t>
+            </a:r>
+          </a:p>
+          <a:p>
+            <a:pPr lvl="1"/>
+            <a:r>
+              <a:rPr lang="en-US" sz="2400" b="1">
+                <a:solidFill>
+                  <a:schemeClr val="accent1">
+                    <a:lumMod val="50000"/>
+                  </a:schemeClr>
+                </a:solidFill>
+                <a:latin typeface="Consolas" panose="020B0609020204030204" pitchFamily="49" charset="0"/>
+                <a:cs typeface="Arial" panose="020B0604020202020204" pitchFamily="34" charset="0"/>
+              </a:rPr>
+              <a:t>    print(count)</a:t>
+            </a:r>
+          </a:p>
+          <a:p>
+            <a:pPr lvl="1"/>
+            <a:r>
+              <a:rPr lang="en-US" sz="2400" b="1">
+                <a:solidFill>
+                  <a:schemeClr val="accent1">
+                    <a:lumMod val="50000"/>
+                  </a:schemeClr>
+                </a:solidFill>
+                <a:latin typeface="Consolas" panose="020B0609020204030204" pitchFamily="49" charset="0"/>
+                <a:cs typeface="Arial" panose="020B0604020202020204" pitchFamily="34" charset="0"/>
+              </a:rPr>
+              <a:t>    count += 1  # Ensuring progress towards termination</a:t>
+            </a:r>
+          </a:p>
+          <a:p>
+            <a:pPr lvl="1"/>
+            <a:endParaRPr lang="en-US" sz="2400" b="1">
+              <a:solidFill>
+                <a:schemeClr val="accent1">
+                  <a:lumMod val="50000"/>
+                </a:schemeClr>
+              </a:solidFill>
+              <a:latin typeface="Consolas" panose="020B0609020204030204" pitchFamily="49" charset="0"/>
+              <a:cs typeface="Arial" panose="020B0604020202020204" pitchFamily="34" charset="0"/>
+            </a:endParaRPr>
+          </a:p>
+        </p:txBody>
+      </p:sp>
+    </p:spTree>
+    <p:extLst>
+      <p:ext uri="{BB962C8B-B14F-4D97-AF65-F5344CB8AC3E}">
+        <p14:creationId xmlns:p14="http://schemas.microsoft.com/office/powerpoint/2010/main" val="2724772504"/>
+      </p:ext>
+    </p:extLst>
+  </p:cSld>
+  <p:clrMapOvr>
+    <a:masterClrMapping/>
+  </p:clrMapOvr>
+</p:sld>
+</file>
+
+<file path=ppt/slides/slide3.xml><?xml version="1.0" encoding="utf-8"?>
+<p:sld xmlns:a="http://schemas.openxmlformats.org/drawingml/2006/main" xmlns:r="http://schemas.openxmlformats.org/officeDocument/2006/relationships" xmlns:p="http://schemas.openxmlformats.org/presentationml/2006/main">
+  <p:cSld>
+    <p:spTree>
+      <p:nvGrpSpPr>
+        <p:cNvPr id="1" name="">
+          <a:extLst>
+            <a:ext uri="{FF2B5EF4-FFF2-40B4-BE49-F238E27FC236}">
+              <a16:creationId xmlns:a16="http://schemas.microsoft.com/office/drawing/2014/main" id="{6F256B82-5655-80DC-B95E-BB3147A9B791}"/>
+            </a:ext>
+          </a:extLst>
+        </p:cNvPr>
+        <p:cNvGrpSpPr/>
+        <p:nvPr/>
+      </p:nvGrpSpPr>
+      <p:grpSpPr>
+        <a:xfrm>
+          <a:off x="0" y="0"/>
+          <a:ext cx="0" cy="0"/>
+          <a:chOff x="0" y="0"/>
+          <a:chExt cx="0" cy="0"/>
+        </a:xfrm>
+      </p:grpSpPr>
+      <p:pic>
+        <p:nvPicPr>
+          <p:cNvPr id="3" name="Picture 2" descr="A white and blue background&#10;&#10;Description automatically generated">
+            <a:extLst>
+              <a:ext uri="{FF2B5EF4-FFF2-40B4-BE49-F238E27FC236}">
+                <a16:creationId xmlns:a16="http://schemas.microsoft.com/office/drawing/2014/main" id="{03607B2A-90F3-C259-916F-6E23284FA4EC}"/>
+              </a:ext>
+            </a:extLst>
+          </p:cNvPr>
+          <p:cNvPicPr>
+            <a:picLocks noChangeAspect="1"/>
+          </p:cNvPicPr>
+          <p:nvPr/>
+        </p:nvPicPr>
+        <p:blipFill>
+          <a:blip r:embed="rId2"/>
+          <a:stretch>
+            <a:fillRect/>
+          </a:stretch>
+        </p:blipFill>
+        <p:spPr>
+          <a:xfrm>
+            <a:off x="-123838" y="-352269"/>
+            <a:ext cx="12192000" cy="6867117"/>
+          </a:xfrm>
+          <a:prstGeom prst="rect">
+            <a:avLst/>
+          </a:prstGeom>
+        </p:spPr>
+      </p:pic>
+      <p:sp>
+        <p:nvSpPr>
+          <p:cNvPr id="4" name="TextBox 3">
+            <a:extLst>
+              <a:ext uri="{FF2B5EF4-FFF2-40B4-BE49-F238E27FC236}">
+                <a16:creationId xmlns:a16="http://schemas.microsoft.com/office/drawing/2014/main" id="{D78D5220-DB27-992D-3281-C3574B62771B}"/>
+              </a:ext>
+            </a:extLst>
+          </p:cNvPr>
+          <p:cNvSpPr txBox="1"/>
+          <p:nvPr/>
+        </p:nvSpPr>
+        <p:spPr>
+          <a:xfrm>
+            <a:off x="776653" y="-68494"/>
+            <a:ext cx="10391019" cy="646331"/>
+          </a:xfrm>
+          <a:prstGeom prst="rect">
+            <a:avLst/>
+          </a:prstGeom>
+          <a:noFill/>
+        </p:spPr>
+        <p:txBody>
+          <a:bodyPr wrap="square" rtlCol="0">
+            <a:spAutoFit/>
+          </a:bodyPr>
+          <a:lstStyle/>
+          <a:p>
+            <a:r>
+              <a:rPr lang="en-US" sz="3600">
+                <a:solidFill>
+                  <a:schemeClr val="accent1">
+                    <a:lumMod val="50000"/>
+                  </a:schemeClr>
+                </a:solidFill>
+                <a:latin typeface="Arial" panose="020B0604020202020204" pitchFamily="34" charset="0"/>
+                <a:cs typeface="Arial" panose="020B0604020202020204" pitchFamily="34" charset="0"/>
+              </a:rPr>
+              <a:t>Secure Iteration Practices</a:t>
+            </a:r>
+          </a:p>
+        </p:txBody>
+      </p:sp>
+      <p:sp>
+        <p:nvSpPr>
+          <p:cNvPr id="5" name="TextBox 4">
+            <a:extLst>
+              <a:ext uri="{FF2B5EF4-FFF2-40B4-BE49-F238E27FC236}">
+                <a16:creationId xmlns:a16="http://schemas.microsoft.com/office/drawing/2014/main" id="{B0825409-4923-2548-3BC3-99C4029F2471}"/>
+              </a:ext>
+            </a:extLst>
+          </p:cNvPr>
+          <p:cNvSpPr txBox="1"/>
+          <p:nvPr/>
+        </p:nvSpPr>
+        <p:spPr>
+          <a:xfrm>
+            <a:off x="776653" y="601685"/>
+            <a:ext cx="11155517" cy="6001643"/>
+          </a:xfrm>
+          <a:prstGeom prst="rect">
+            <a:avLst/>
+          </a:prstGeom>
+          <a:noFill/>
+        </p:spPr>
+        <p:txBody>
+          <a:bodyPr wrap="square" rtlCol="0">
+            <a:spAutoFit/>
+          </a:bodyPr>
+          <a:lstStyle/>
+          <a:p>
+            <a:pPr marL="284163" lvl="1" indent="-282575">
+              <a:buFont typeface="Arial" panose="020B0604020202020204" pitchFamily="34" charset="0"/>
+              <a:buChar char="•"/>
+            </a:pPr>
+            <a:r>
+              <a:rPr lang="en-US" sz="2400">
+                <a:solidFill>
+                  <a:schemeClr val="accent1">
+                    <a:lumMod val="50000"/>
+                  </a:schemeClr>
+                </a:solidFill>
+                <a:latin typeface="Arial" panose="020B0604020202020204" pitchFamily="34" charset="0"/>
+                <a:cs typeface="Arial" panose="020B0604020202020204" pitchFamily="34" charset="0"/>
+              </a:rPr>
+              <a:t>Avoid Using while True Without a Break Condition</a:t>
+            </a:r>
+          </a:p>
+          <a:p>
+            <a:pPr lvl="1"/>
+            <a:endParaRPr lang="en-US" sz="2400">
+              <a:solidFill>
+                <a:schemeClr val="accent1">
+                  <a:lumMod val="50000"/>
+                </a:schemeClr>
+              </a:solidFill>
+              <a:latin typeface="Arial" panose="020B0604020202020204" pitchFamily="34" charset="0"/>
+              <a:cs typeface="Arial" panose="020B0604020202020204" pitchFamily="34" charset="0"/>
+            </a:endParaRPr>
+          </a:p>
+          <a:p>
+            <a:pPr lvl="1"/>
+            <a:r>
+              <a:rPr lang="en-US" sz="2400" b="1">
+                <a:solidFill>
+                  <a:schemeClr val="accent1">
+                    <a:lumMod val="50000"/>
+                  </a:schemeClr>
+                </a:solidFill>
+                <a:latin typeface="Consolas" panose="020B0609020204030204" pitchFamily="49" charset="0"/>
+                <a:cs typeface="Arial" panose="020B0604020202020204" pitchFamily="34" charset="0"/>
+              </a:rPr>
+              <a:t>while True:</a:t>
+            </a:r>
+          </a:p>
+          <a:p>
+            <a:pPr lvl="1"/>
+            <a:r>
+              <a:rPr lang="en-US" sz="2400" b="1">
+                <a:solidFill>
+                  <a:schemeClr val="accent1">
+                    <a:lumMod val="50000"/>
+                  </a:schemeClr>
+                </a:solidFill>
+                <a:latin typeface="Consolas" panose="020B0609020204030204" pitchFamily="49" charset="0"/>
+                <a:cs typeface="Arial" panose="020B0604020202020204" pitchFamily="34" charset="0"/>
+              </a:rPr>
+              <a:t>    user_input = input("Enter 'exit' to stop: ")</a:t>
+            </a:r>
+          </a:p>
+          <a:p>
+            <a:pPr lvl="1"/>
+            <a:r>
+              <a:rPr lang="en-US" sz="2400" b="1">
+                <a:solidFill>
+                  <a:schemeClr val="accent1">
+                    <a:lumMod val="50000"/>
+                  </a:schemeClr>
+                </a:solidFill>
+                <a:latin typeface="Consolas" panose="020B0609020204030204" pitchFamily="49" charset="0"/>
+                <a:cs typeface="Arial" panose="020B0604020202020204" pitchFamily="34" charset="0"/>
+              </a:rPr>
+              <a:t>    if user_input.lower() == 'exit':</a:t>
+            </a:r>
+          </a:p>
+          <a:p>
+            <a:pPr lvl="1"/>
+            <a:r>
+              <a:rPr lang="en-US" sz="2400" b="1">
+                <a:solidFill>
+                  <a:schemeClr val="accent1">
+                    <a:lumMod val="50000"/>
+                  </a:schemeClr>
+                </a:solidFill>
+                <a:latin typeface="Consolas" panose="020B0609020204030204" pitchFamily="49" charset="0"/>
+                <a:cs typeface="Arial" panose="020B0604020202020204" pitchFamily="34" charset="0"/>
+              </a:rPr>
+              <a:t>        break  # Ensure termination</a:t>
+            </a:r>
+            <a:endParaRPr lang="en-US" sz="2400" b="1">
+              <a:solidFill>
+                <a:schemeClr val="accent1">
+                  <a:lumMod val="50000"/>
+                </a:schemeClr>
+              </a:solidFill>
+              <a:latin typeface="Arial" panose="020B0604020202020204" pitchFamily="34" charset="0"/>
+              <a:cs typeface="Arial" panose="020B0604020202020204" pitchFamily="34" charset="0"/>
+            </a:endParaRPr>
+          </a:p>
+          <a:p>
+            <a:pPr lvl="1"/>
+            <a:endParaRPr lang="en-US" sz="2400" b="1">
+              <a:solidFill>
+                <a:schemeClr val="accent1">
+                  <a:lumMod val="50000"/>
+                </a:schemeClr>
+              </a:solidFill>
+              <a:latin typeface="Arial" panose="020B0604020202020204" pitchFamily="34" charset="0"/>
+              <a:cs typeface="Arial" panose="020B0604020202020204" pitchFamily="34" charset="0"/>
+            </a:endParaRPr>
+          </a:p>
+          <a:p>
+            <a:pPr lvl="1"/>
+            <a:endParaRPr lang="en-US" sz="2400" b="1">
+              <a:solidFill>
+                <a:schemeClr val="accent1">
+                  <a:lumMod val="50000"/>
+                </a:schemeClr>
+              </a:solidFill>
+              <a:latin typeface="Arial" panose="020B0604020202020204" pitchFamily="34" charset="0"/>
+              <a:cs typeface="Arial" panose="020B0604020202020204" pitchFamily="34" charset="0"/>
+            </a:endParaRPr>
+          </a:p>
+          <a:p>
+            <a:pPr lvl="1"/>
+            <a:endParaRPr lang="en-US" sz="2400" b="1">
+              <a:solidFill>
+                <a:schemeClr val="accent1">
+                  <a:lumMod val="50000"/>
+                </a:schemeClr>
+              </a:solidFill>
+              <a:latin typeface="Arial" panose="020B0604020202020204" pitchFamily="34" charset="0"/>
+              <a:cs typeface="Arial" panose="020B0604020202020204" pitchFamily="34" charset="0"/>
+            </a:endParaRPr>
+          </a:p>
+          <a:p>
+            <a:pPr lvl="1"/>
+            <a:endParaRPr lang="en-US" sz="2400" b="1">
+              <a:solidFill>
+                <a:schemeClr val="accent1">
+                  <a:lumMod val="50000"/>
+                </a:schemeClr>
+              </a:solidFill>
+              <a:latin typeface="Arial" panose="020B0604020202020204" pitchFamily="34" charset="0"/>
+              <a:cs typeface="Arial" panose="020B0604020202020204" pitchFamily="34" charset="0"/>
+            </a:endParaRPr>
+          </a:p>
+          <a:p>
+            <a:pPr lvl="1"/>
+            <a:endParaRPr lang="en-US" sz="2400" b="1">
+              <a:solidFill>
+                <a:schemeClr val="accent1">
+                  <a:lumMod val="50000"/>
+                </a:schemeClr>
+              </a:solidFill>
+              <a:latin typeface="Arial" panose="020B0604020202020204" pitchFamily="34" charset="0"/>
+              <a:cs typeface="Arial" panose="020B0604020202020204" pitchFamily="34" charset="0"/>
+            </a:endParaRPr>
+          </a:p>
+          <a:p>
+            <a:pPr lvl="1"/>
+            <a:endParaRPr lang="en-US" sz="2400" b="1">
+              <a:solidFill>
+                <a:schemeClr val="accent1">
+                  <a:lumMod val="50000"/>
+                </a:schemeClr>
+              </a:solidFill>
+              <a:latin typeface="Arial" panose="020B0604020202020204" pitchFamily="34" charset="0"/>
+              <a:cs typeface="Arial" panose="020B0604020202020204" pitchFamily="34" charset="0"/>
+            </a:endParaRPr>
+          </a:p>
+          <a:p>
+            <a:pPr lvl="1"/>
+            <a:endParaRPr lang="en-US" sz="2400" b="1">
+              <a:solidFill>
+                <a:schemeClr val="accent1">
+                  <a:lumMod val="50000"/>
+                </a:schemeClr>
+              </a:solidFill>
+              <a:latin typeface="Arial" panose="020B0604020202020204" pitchFamily="34" charset="0"/>
+              <a:cs typeface="Arial" panose="020B0604020202020204" pitchFamily="34" charset="0"/>
+            </a:endParaRPr>
+          </a:p>
+          <a:p>
+            <a:pPr lvl="1"/>
+            <a:endParaRPr lang="en-US" sz="2400" b="1">
+              <a:solidFill>
+                <a:schemeClr val="accent1">
+                  <a:lumMod val="50000"/>
+                </a:schemeClr>
+              </a:solidFill>
+              <a:latin typeface="Arial" panose="020B0604020202020204" pitchFamily="34" charset="0"/>
+              <a:cs typeface="Arial" panose="020B0604020202020204" pitchFamily="34" charset="0"/>
+            </a:endParaRPr>
+          </a:p>
+          <a:p>
+            <a:pPr lvl="1"/>
+            <a:endParaRPr lang="en-US" sz="2400" b="1">
+              <a:solidFill>
+                <a:schemeClr val="accent1">
+                  <a:lumMod val="50000"/>
+                </a:schemeClr>
+              </a:solidFill>
+              <a:latin typeface="Arial" panose="020B0604020202020204" pitchFamily="34" charset="0"/>
+              <a:cs typeface="Arial" panose="020B0604020202020204" pitchFamily="34" charset="0"/>
+            </a:endParaRPr>
+          </a:p>
+          <a:p>
+            <a:pPr lvl="1"/>
+            <a:endParaRPr lang="en-US" sz="2400" b="1">
+              <a:solidFill>
+                <a:schemeClr val="accent1">
+                  <a:lumMod val="50000"/>
+                </a:schemeClr>
+              </a:solidFill>
+              <a:latin typeface="Consolas" panose="020B0609020204030204" pitchFamily="49" charset="0"/>
+              <a:cs typeface="Arial" panose="020B0604020202020204" pitchFamily="34" charset="0"/>
+            </a:endParaRPr>
+          </a:p>
+        </p:txBody>
+      </p:sp>
+    </p:spTree>
+    <p:extLst>
+      <p:ext uri="{BB962C8B-B14F-4D97-AF65-F5344CB8AC3E}">
+        <p14:creationId xmlns:p14="http://schemas.microsoft.com/office/powerpoint/2010/main" val="1212907822"/>
+      </p:ext>
+    </p:extLst>
+  </p:cSld>
+  <p:clrMapOvr>
+    <a:masterClrMapping/>
+  </p:clrMapOvr>
+</p:sld>
+</file>
+
+<file path=ppt/slides/slide4.xml><?xml version="1.0" encoding="utf-8"?>
+<p:sld xmlns:a="http://schemas.openxmlformats.org/drawingml/2006/main" xmlns:r="http://schemas.openxmlformats.org/officeDocument/2006/relationships" xmlns:p="http://schemas.openxmlformats.org/presentationml/2006/main">
+  <p:cSld>
+    <p:spTree>
+      <p:nvGrpSpPr>
+        <p:cNvPr id="1" name="">
+          <a:extLst>
+            <a:ext uri="{FF2B5EF4-FFF2-40B4-BE49-F238E27FC236}">
+              <a16:creationId xmlns:a16="http://schemas.microsoft.com/office/drawing/2014/main" id="{225FFF4A-D725-A5AD-5084-9FED149DEA50}"/>
+            </a:ext>
+          </a:extLst>
+        </p:cNvPr>
+        <p:cNvGrpSpPr/>
+        <p:nvPr/>
+      </p:nvGrpSpPr>
+      <p:grpSpPr>
+        <a:xfrm>
+          <a:off x="0" y="0"/>
+          <a:ext cx="0" cy="0"/>
+          <a:chOff x="0" y="0"/>
+          <a:chExt cx="0" cy="0"/>
+        </a:xfrm>
+      </p:grpSpPr>
+      <p:pic>
+        <p:nvPicPr>
+          <p:cNvPr id="3" name="Picture 2" descr="A white and blue background&#10;&#10;Description automatically generated">
+            <a:extLst>
+              <a:ext uri="{FF2B5EF4-FFF2-40B4-BE49-F238E27FC236}">
+                <a16:creationId xmlns:a16="http://schemas.microsoft.com/office/drawing/2014/main" id="{429554FA-A0B1-BED0-CE63-C900E18F46ED}"/>
+              </a:ext>
+            </a:extLst>
+          </p:cNvPr>
+          <p:cNvPicPr>
+            <a:picLocks noChangeAspect="1"/>
+          </p:cNvPicPr>
+          <p:nvPr/>
+        </p:nvPicPr>
+        <p:blipFill>
+          <a:blip r:embed="rId2"/>
+          <a:stretch>
+            <a:fillRect/>
+          </a:stretch>
+        </p:blipFill>
+        <p:spPr>
+          <a:xfrm>
+            <a:off x="0" y="-16565"/>
+            <a:ext cx="12192000" cy="6891129"/>
+          </a:xfrm>
+          <a:prstGeom prst="rect">
+            <a:avLst/>
+          </a:prstGeom>
+        </p:spPr>
+      </p:pic>
+      <p:sp>
+        <p:nvSpPr>
+          <p:cNvPr id="4" name="TextBox 3">
+            <a:extLst>
+              <a:ext uri="{FF2B5EF4-FFF2-40B4-BE49-F238E27FC236}">
+                <a16:creationId xmlns:a16="http://schemas.microsoft.com/office/drawing/2014/main" id="{6E6327D3-7C70-ECA1-AE3E-ED235635765E}"/>
+              </a:ext>
+            </a:extLst>
+          </p:cNvPr>
+          <p:cNvSpPr txBox="1"/>
+          <p:nvPr/>
+        </p:nvSpPr>
+        <p:spPr>
+          <a:xfrm>
+            <a:off x="776652" y="-50812"/>
+            <a:ext cx="10391019" cy="646331"/>
+          </a:xfrm>
+          <a:prstGeom prst="rect">
+            <a:avLst/>
+          </a:prstGeom>
+          <a:noFill/>
+        </p:spPr>
+        <p:txBody>
+          <a:bodyPr wrap="square" rtlCol="0">
+            <a:spAutoFit/>
+          </a:bodyPr>
+          <a:lstStyle/>
+          <a:p>
+            <a:r>
+              <a:rPr lang="en-US" sz="3600">
+                <a:solidFill>
+                  <a:schemeClr val="accent1">
+                    <a:lumMod val="50000"/>
+                  </a:schemeClr>
+                </a:solidFill>
+                <a:latin typeface="Arial" panose="020B0604020202020204" pitchFamily="34" charset="0"/>
+                <a:cs typeface="Arial" panose="020B0604020202020204" pitchFamily="34" charset="0"/>
+              </a:rPr>
+              <a:t>Secure Iteration Practices</a:t>
+            </a:r>
+          </a:p>
+        </p:txBody>
+      </p:sp>
+      <p:sp>
+        <p:nvSpPr>
+          <p:cNvPr id="5" name="TextBox 4">
+            <a:extLst>
+              <a:ext uri="{FF2B5EF4-FFF2-40B4-BE49-F238E27FC236}">
+                <a16:creationId xmlns:a16="http://schemas.microsoft.com/office/drawing/2014/main" id="{6A0FDFBA-5990-4792-5F3E-62939E91F250}"/>
+              </a:ext>
+            </a:extLst>
+          </p:cNvPr>
+          <p:cNvSpPr txBox="1"/>
+          <p:nvPr/>
+        </p:nvSpPr>
+        <p:spPr>
+          <a:xfrm>
+            <a:off x="810380" y="680430"/>
+            <a:ext cx="10323564" cy="4893647"/>
+          </a:xfrm>
+          <a:prstGeom prst="rect">
+            <a:avLst/>
+          </a:prstGeom>
+          <a:noFill/>
+        </p:spPr>
+        <p:txBody>
+          <a:bodyPr wrap="square" rtlCol="0">
+            <a:spAutoFit/>
+          </a:bodyPr>
+          <a:lstStyle/>
+          <a:p>
+            <a:pPr marL="231775" lvl="1" indent="-230188">
+              <a:buFont typeface="Arial" panose="020B0604020202020204" pitchFamily="34" charset="0"/>
+              <a:buChar char="•"/>
+            </a:pPr>
+            <a:r>
+              <a:rPr lang="en-US" sz="2400">
+                <a:solidFill>
+                  <a:schemeClr val="accent1">
+                    <a:lumMod val="50000"/>
+                  </a:schemeClr>
+                </a:solidFill>
+                <a:latin typeface="Arial" panose="020B0604020202020204" pitchFamily="34" charset="0"/>
+                <a:cs typeface="Arial" panose="020B0604020202020204" pitchFamily="34" charset="0"/>
+              </a:rPr>
+              <a:t>When processing user input or external data, avoid infinite loops by implementing timeouts or iteration limits.</a:t>
+            </a:r>
+          </a:p>
+          <a:p>
+            <a:pPr lvl="1"/>
+            <a:endParaRPr lang="en-US" sz="2400">
+              <a:solidFill>
+                <a:schemeClr val="accent1">
+                  <a:lumMod val="50000"/>
+                </a:schemeClr>
+              </a:solidFill>
+              <a:latin typeface="Arial" panose="020B0604020202020204" pitchFamily="34" charset="0"/>
+              <a:cs typeface="Arial" panose="020B0604020202020204" pitchFamily="34" charset="0"/>
+            </a:endParaRPr>
+          </a:p>
+          <a:p>
+            <a:pPr lvl="1"/>
+            <a:r>
+              <a:rPr lang="en-US" sz="2400" b="1">
+                <a:solidFill>
+                  <a:schemeClr val="accent1">
+                    <a:lumMod val="50000"/>
+                  </a:schemeClr>
+                </a:solidFill>
+                <a:latin typeface="Consolas" panose="020B0609020204030204" pitchFamily="49" charset="0"/>
+                <a:cs typeface="Arial" panose="020B0604020202020204" pitchFamily="34" charset="0"/>
+              </a:rPr>
+              <a:t>import time</a:t>
+            </a:r>
+          </a:p>
+          <a:p>
+            <a:pPr lvl="1"/>
+            <a:endParaRPr lang="en-US" sz="2400" b="1">
+              <a:solidFill>
+                <a:schemeClr val="accent1">
+                  <a:lumMod val="50000"/>
+                </a:schemeClr>
+              </a:solidFill>
+              <a:latin typeface="Consolas" panose="020B0609020204030204" pitchFamily="49" charset="0"/>
+              <a:cs typeface="Arial" panose="020B0604020202020204" pitchFamily="34" charset="0"/>
+            </a:endParaRPr>
+          </a:p>
+          <a:p>
+            <a:pPr lvl="1"/>
+            <a:r>
+              <a:rPr lang="en-US" sz="2400" b="1">
+                <a:solidFill>
+                  <a:schemeClr val="accent1">
+                    <a:lumMod val="50000"/>
+                  </a:schemeClr>
+                </a:solidFill>
+                <a:latin typeface="Consolas" panose="020B0609020204030204" pitchFamily="49" charset="0"/>
+                <a:cs typeface="Arial" panose="020B0604020202020204" pitchFamily="34" charset="0"/>
+              </a:rPr>
+              <a:t>start_time = time.time()</a:t>
+            </a:r>
+          </a:p>
+          <a:p>
+            <a:pPr lvl="1"/>
+            <a:r>
+              <a:rPr lang="en-US" sz="2400" b="1">
+                <a:solidFill>
+                  <a:schemeClr val="accent1">
+                    <a:lumMod val="50000"/>
+                  </a:schemeClr>
+                </a:solidFill>
+                <a:latin typeface="Consolas" panose="020B0609020204030204" pitchFamily="49" charset="0"/>
+                <a:cs typeface="Arial" panose="020B0604020202020204" pitchFamily="34" charset="0"/>
+              </a:rPr>
+              <a:t>timeout = 5  # seconds</a:t>
+            </a:r>
+          </a:p>
+          <a:p>
+            <a:pPr lvl="1"/>
+            <a:endParaRPr lang="en-US" sz="2400" b="1">
+              <a:solidFill>
+                <a:schemeClr val="accent1">
+                  <a:lumMod val="50000"/>
+                </a:schemeClr>
+              </a:solidFill>
+              <a:latin typeface="Consolas" panose="020B0609020204030204" pitchFamily="49" charset="0"/>
+              <a:cs typeface="Arial" panose="020B0604020202020204" pitchFamily="34" charset="0"/>
+            </a:endParaRPr>
+          </a:p>
+          <a:p>
+            <a:pPr lvl="1"/>
+            <a:r>
+              <a:rPr lang="en-US" sz="2400" b="1">
+                <a:solidFill>
+                  <a:schemeClr val="accent1">
+                    <a:lumMod val="50000"/>
+                  </a:schemeClr>
+                </a:solidFill>
+                <a:latin typeface="Consolas" panose="020B0609020204030204" pitchFamily="49" charset="0"/>
+                <a:cs typeface="Arial" panose="020B0604020202020204" pitchFamily="34" charset="0"/>
+              </a:rPr>
+              <a:t>while time.time() - start_time &lt; timeout:</a:t>
+            </a:r>
+          </a:p>
+          <a:p>
+            <a:pPr lvl="1"/>
+            <a:r>
+              <a:rPr lang="en-US" sz="2400" b="1">
+                <a:solidFill>
+                  <a:schemeClr val="accent1">
+                    <a:lumMod val="50000"/>
+                  </a:schemeClr>
+                </a:solidFill>
+                <a:latin typeface="Consolas" panose="020B0609020204030204" pitchFamily="49" charset="0"/>
+                <a:cs typeface="Arial" panose="020B0604020202020204" pitchFamily="34" charset="0"/>
+              </a:rPr>
+              <a:t>    if some_condition():  # Replace with actual condition</a:t>
+            </a:r>
+          </a:p>
+          <a:p>
+            <a:pPr lvl="1"/>
+            <a:r>
+              <a:rPr lang="en-US" sz="2400" b="1">
+                <a:solidFill>
+                  <a:schemeClr val="accent1">
+                    <a:lumMod val="50000"/>
+                  </a:schemeClr>
+                </a:solidFill>
+                <a:latin typeface="Consolas" panose="020B0609020204030204" pitchFamily="49" charset="0"/>
+                <a:cs typeface="Arial" panose="020B0604020202020204" pitchFamily="34" charset="0"/>
+              </a:rPr>
+              <a:t>        break</a:t>
+            </a:r>
+          </a:p>
+          <a:p>
+            <a:pPr lvl="1"/>
+            <a:endParaRPr lang="en-US" sz="2400">
+              <a:solidFill>
+                <a:schemeClr val="accent1">
+                  <a:lumMod val="50000"/>
+                </a:schemeClr>
+              </a:solidFill>
+              <a:latin typeface="Arial" panose="020B0604020202020204" pitchFamily="34" charset="0"/>
+              <a:cs typeface="Arial" panose="020B0604020202020204" pitchFamily="34" charset="0"/>
+            </a:endParaRPr>
+          </a:p>
+          <a:p>
+            <a:pPr lvl="1"/>
+            <a:endParaRPr lang="en-US" sz="2400">
+              <a:solidFill>
+                <a:schemeClr val="accent1">
+                  <a:lumMod val="50000"/>
+                </a:schemeClr>
+              </a:solidFill>
+              <a:latin typeface="Arial" panose="020B0604020202020204" pitchFamily="34" charset="0"/>
+              <a:cs typeface="Arial" panose="020B0604020202020204" pitchFamily="34" charset="0"/>
+            </a:endParaRPr>
+          </a:p>
+        </p:txBody>
+      </p:sp>
+    </p:spTree>
+    <p:extLst>
+      <p:ext uri="{BB962C8B-B14F-4D97-AF65-F5344CB8AC3E}">
+        <p14:creationId xmlns:p14="http://schemas.microsoft.com/office/powerpoint/2010/main" val="557014511"/>
+      </p:ext>
+    </p:extLst>
+  </p:cSld>
+  <p:clrMapOvr>
+    <a:masterClrMapping/>
+  </p:clrMapOvr>
+</p:sld>
+</file>
+
+<file path=ppt/slides/slide5.xml><?xml version="1.0" encoding="utf-8"?>
+<p:sld xmlns:a="http://schemas.openxmlformats.org/drawingml/2006/main" xmlns:r="http://schemas.openxmlformats.org/officeDocument/2006/relationships" xmlns:p="http://schemas.openxmlformats.org/presentationml/2006/main">
+  <p:cSld>
+    <p:spTree>
+      <p:nvGrpSpPr>
+        <p:cNvPr id="1" name="">
+          <a:extLst>
+            <a:ext uri="{FF2B5EF4-FFF2-40B4-BE49-F238E27FC236}">
+              <a16:creationId xmlns:a16="http://schemas.microsoft.com/office/drawing/2014/main" id="{DFEB32ED-9C55-13BC-E694-1F94CEBD03B6}"/>
+            </a:ext>
+          </a:extLst>
+        </p:cNvPr>
+        <p:cNvGrpSpPr/>
+        <p:nvPr/>
+      </p:nvGrpSpPr>
+      <p:grpSpPr>
+        <a:xfrm>
+          <a:off x="0" y="0"/>
+          <a:ext cx="0" cy="0"/>
+          <a:chOff x="0" y="0"/>
+          <a:chExt cx="0" cy="0"/>
+        </a:xfrm>
+      </p:grpSpPr>
+      <p:pic>
+        <p:nvPicPr>
+          <p:cNvPr id="3" name="Picture 2" descr="A white and blue background&#10;&#10;Description automatically generated">
+            <a:extLst>
+              <a:ext uri="{FF2B5EF4-FFF2-40B4-BE49-F238E27FC236}">
+                <a16:creationId xmlns:a16="http://schemas.microsoft.com/office/drawing/2014/main" id="{CFF4FFB4-165E-7AE3-C1F5-BF62A8C5D3D9}"/>
+              </a:ext>
+            </a:extLst>
+          </p:cNvPr>
+          <p:cNvPicPr>
+            <a:picLocks noChangeAspect="1"/>
+          </p:cNvPicPr>
+          <p:nvPr/>
+        </p:nvPicPr>
+        <p:blipFill>
+          <a:blip r:embed="rId2"/>
+          <a:stretch>
+            <a:fillRect/>
+          </a:stretch>
+        </p:blipFill>
+        <p:spPr>
+          <a:xfrm>
+            <a:off x="1" y="0"/>
+            <a:ext cx="12192000" cy="6891129"/>
+          </a:xfrm>
+          <a:prstGeom prst="rect">
+            <a:avLst/>
+          </a:prstGeom>
+        </p:spPr>
+      </p:pic>
+      <p:sp>
+        <p:nvSpPr>
+          <p:cNvPr id="4" name="TextBox 3">
+            <a:extLst>
+              <a:ext uri="{FF2B5EF4-FFF2-40B4-BE49-F238E27FC236}">
+                <a16:creationId xmlns:a16="http://schemas.microsoft.com/office/drawing/2014/main" id="{8745C227-D9C6-33AF-9513-8684A978EFD2}"/>
+              </a:ext>
+            </a:extLst>
+          </p:cNvPr>
+          <p:cNvSpPr txBox="1"/>
+          <p:nvPr/>
+        </p:nvSpPr>
+        <p:spPr>
+          <a:xfrm>
+            <a:off x="776653" y="0"/>
+            <a:ext cx="10391019" cy="646331"/>
+          </a:xfrm>
+          <a:prstGeom prst="rect">
+            <a:avLst/>
+          </a:prstGeom>
+          <a:noFill/>
+        </p:spPr>
+        <p:txBody>
+          <a:bodyPr wrap="square" rtlCol="0">
+            <a:spAutoFit/>
+          </a:bodyPr>
+          <a:lstStyle/>
+          <a:p>
+            <a:r>
+              <a:rPr lang="en-US" sz="3600">
+                <a:solidFill>
+                  <a:schemeClr val="accent1">
+                    <a:lumMod val="50000"/>
+                  </a:schemeClr>
+                </a:solidFill>
+                <a:latin typeface="Arial" panose="020B0604020202020204" pitchFamily="34" charset="0"/>
+                <a:cs typeface="Arial" panose="020B0604020202020204" pitchFamily="34" charset="0"/>
+              </a:rPr>
+              <a:t>Secure Iteration Practices</a:t>
+            </a:r>
+          </a:p>
+        </p:txBody>
+      </p:sp>
+      <p:sp>
+        <p:nvSpPr>
+          <p:cNvPr id="5" name="TextBox 4">
+            <a:extLst>
+              <a:ext uri="{FF2B5EF4-FFF2-40B4-BE49-F238E27FC236}">
+                <a16:creationId xmlns:a16="http://schemas.microsoft.com/office/drawing/2014/main" id="{0B70D187-6906-8F02-8757-FD3F8DA1AC46}"/>
+              </a:ext>
+            </a:extLst>
+          </p:cNvPr>
+          <p:cNvSpPr txBox="1"/>
+          <p:nvPr/>
+        </p:nvSpPr>
+        <p:spPr>
+          <a:xfrm>
+            <a:off x="776653" y="798798"/>
+            <a:ext cx="10323564" cy="4154984"/>
+          </a:xfrm>
+          <a:prstGeom prst="rect">
+            <a:avLst/>
+          </a:prstGeom>
+          <a:noFill/>
+        </p:spPr>
+        <p:txBody>
+          <a:bodyPr wrap="square" rtlCol="0">
+            <a:spAutoFit/>
+          </a:bodyPr>
+          <a:lstStyle/>
+          <a:p>
+            <a:pPr marL="231775" lvl="1" indent="-230188">
+              <a:buFont typeface="Arial" panose="020B0604020202020204" pitchFamily="34" charset="0"/>
+              <a:buChar char="•"/>
+            </a:pPr>
+            <a:r>
+              <a:rPr lang="en-US" sz="2400">
+                <a:solidFill>
+                  <a:schemeClr val="accent1">
+                    <a:lumMod val="50000"/>
+                  </a:schemeClr>
+                </a:solidFill>
+                <a:latin typeface="Arial" panose="020B0604020202020204" pitchFamily="34" charset="0"/>
+                <a:cs typeface="Arial" panose="020B0604020202020204" pitchFamily="34" charset="0"/>
+              </a:rPr>
+              <a:t>Instead of looping through large datasets, use generators to iterate over data securely and avoid excessive memory usage.</a:t>
+            </a:r>
+          </a:p>
+          <a:p>
+            <a:pPr marL="231775" lvl="1" indent="-230188">
+              <a:buFont typeface="Arial" panose="020B0604020202020204" pitchFamily="34" charset="0"/>
+              <a:buChar char="•"/>
+            </a:pPr>
+            <a:r>
+              <a:rPr lang="en-US" sz="2400">
+                <a:solidFill>
+                  <a:schemeClr val="accent1">
+                    <a:lumMod val="50000"/>
+                  </a:schemeClr>
+                </a:solidFill>
+                <a:latin typeface="Arial" panose="020B0604020202020204" pitchFamily="34" charset="0"/>
+                <a:cs typeface="Arial" panose="020B0604020202020204" pitchFamily="34" charset="0"/>
+              </a:rPr>
+              <a:t>secure_generator produces one value at a time instead of returning an entire list</a:t>
+            </a:r>
+          </a:p>
+          <a:p>
+            <a:pPr lvl="1"/>
+            <a:endParaRPr lang="en-US" sz="2400">
+              <a:solidFill>
+                <a:schemeClr val="accent1">
+                  <a:lumMod val="50000"/>
+                </a:schemeClr>
+              </a:solidFill>
+              <a:latin typeface="Arial" panose="020B0604020202020204" pitchFamily="34" charset="0"/>
+              <a:cs typeface="Arial" panose="020B0604020202020204" pitchFamily="34" charset="0"/>
+            </a:endParaRPr>
+          </a:p>
+          <a:p>
+            <a:pPr lvl="1"/>
+            <a:r>
+              <a:rPr lang="en-US" sz="2400" b="1">
+                <a:solidFill>
+                  <a:schemeClr val="accent1">
+                    <a:lumMod val="50000"/>
+                  </a:schemeClr>
+                </a:solidFill>
+                <a:latin typeface="Consolas" panose="020B0609020204030204" pitchFamily="49" charset="0"/>
+                <a:cs typeface="Arial" panose="020B0604020202020204" pitchFamily="34" charset="0"/>
+              </a:rPr>
+              <a:t>def secure_generator(n):</a:t>
+            </a:r>
+          </a:p>
+          <a:p>
+            <a:pPr lvl="1"/>
+            <a:r>
+              <a:rPr lang="en-US" sz="2400" b="1">
+                <a:solidFill>
+                  <a:schemeClr val="accent1">
+                    <a:lumMod val="50000"/>
+                  </a:schemeClr>
+                </a:solidFill>
+                <a:latin typeface="Consolas" panose="020B0609020204030204" pitchFamily="49" charset="0"/>
+                <a:cs typeface="Arial" panose="020B0604020202020204" pitchFamily="34" charset="0"/>
+              </a:rPr>
+              <a:t>    for i in range(n):</a:t>
+            </a:r>
+          </a:p>
+          <a:p>
+            <a:pPr lvl="1"/>
+            <a:r>
+              <a:rPr lang="en-US" sz="2400" b="1">
+                <a:solidFill>
+                  <a:schemeClr val="accent1">
+                    <a:lumMod val="50000"/>
+                  </a:schemeClr>
+                </a:solidFill>
+                <a:latin typeface="Consolas" panose="020B0609020204030204" pitchFamily="49" charset="0"/>
+                <a:cs typeface="Arial" panose="020B0604020202020204" pitchFamily="34" charset="0"/>
+              </a:rPr>
+              <a:t>        yield i  # Generates values on demand</a:t>
+            </a:r>
+          </a:p>
+          <a:p>
+            <a:pPr lvl="1"/>
+            <a:endParaRPr lang="en-US" sz="2400" b="1">
+              <a:solidFill>
+                <a:schemeClr val="accent1">
+                  <a:lumMod val="50000"/>
+                </a:schemeClr>
+              </a:solidFill>
+              <a:latin typeface="Consolas" panose="020B0609020204030204" pitchFamily="49" charset="0"/>
+              <a:cs typeface="Arial" panose="020B0604020202020204" pitchFamily="34" charset="0"/>
+            </a:endParaRPr>
+          </a:p>
+          <a:p>
+            <a:pPr lvl="1"/>
+            <a:r>
+              <a:rPr lang="en-US" sz="2400" b="1">
+                <a:solidFill>
+                  <a:schemeClr val="accent1">
+                    <a:lumMod val="50000"/>
+                  </a:schemeClr>
+                </a:solidFill>
+                <a:latin typeface="Consolas" panose="020B0609020204030204" pitchFamily="49" charset="0"/>
+                <a:cs typeface="Arial" panose="020B0604020202020204" pitchFamily="34" charset="0"/>
+              </a:rPr>
+              <a:t>for value in secure_generator(10):</a:t>
+            </a:r>
+          </a:p>
+          <a:p>
+            <a:pPr lvl="1"/>
+            <a:r>
+              <a:rPr lang="en-US" sz="2400" b="1">
+                <a:solidFill>
+                  <a:schemeClr val="accent1">
+                    <a:lumMod val="50000"/>
+                  </a:schemeClr>
+                </a:solidFill>
+                <a:latin typeface="Consolas" panose="020B0609020204030204" pitchFamily="49" charset="0"/>
+                <a:cs typeface="Arial" panose="020B0604020202020204" pitchFamily="34" charset="0"/>
+              </a:rPr>
+              <a:t>    print(value)</a:t>
+            </a:r>
+          </a:p>
+        </p:txBody>
+      </p:sp>
+    </p:spTree>
+    <p:extLst>
+      <p:ext uri="{BB962C8B-B14F-4D97-AF65-F5344CB8AC3E}">
+        <p14:creationId xmlns:p14="http://schemas.microsoft.com/office/powerpoint/2010/main" val="1492608149"/>
+      </p:ext>
+    </p:extLst>
+  </p:cSld>
+  <p:clrMapOvr>
+    <a:masterClrMapping/>
+  </p:clrMapOvr>
+</p:sld>
+</file>
+
+<file path=ppt/slides/slide6.xml><?xml version="1.0" encoding="utf-8"?>
+<p:sld xmlns:a="http://schemas.openxmlformats.org/drawingml/2006/main" xmlns:r="http://schemas.openxmlformats.org/officeDocument/2006/relationships" xmlns:p="http://schemas.openxmlformats.org/presentationml/2006/main">
+  <p:cSld>
+    <p:spTree>
+      <p:nvGrpSpPr>
+        <p:cNvPr id="1" name="">
+          <a:extLst>
+            <a:ext uri="{FF2B5EF4-FFF2-40B4-BE49-F238E27FC236}">
+              <a16:creationId xmlns:a16="http://schemas.microsoft.com/office/drawing/2014/main" id="{6EC88150-13A5-8006-D83E-4EA146DC254F}"/>
+            </a:ext>
+          </a:extLst>
+        </p:cNvPr>
+        <p:cNvGrpSpPr/>
+        <p:nvPr/>
+      </p:nvGrpSpPr>
+      <p:grpSpPr>
+        <a:xfrm>
+          <a:off x="0" y="0"/>
+          <a:ext cx="0" cy="0"/>
+          <a:chOff x="0" y="0"/>
+          <a:chExt cx="0" cy="0"/>
+        </a:xfrm>
+      </p:grpSpPr>
+      <p:pic>
+        <p:nvPicPr>
+          <p:cNvPr id="3" name="Picture 2" descr="A white and blue background&#10;&#10;Description automatically generated">
+            <a:extLst>
+              <a:ext uri="{FF2B5EF4-FFF2-40B4-BE49-F238E27FC236}">
+                <a16:creationId xmlns:a16="http://schemas.microsoft.com/office/drawing/2014/main" id="{4CDF7F6D-1FBE-DCF5-5F95-D0C632B892F6}"/>
+              </a:ext>
+            </a:extLst>
+          </p:cNvPr>
+          <p:cNvPicPr>
+            <a:picLocks noChangeAspect="1"/>
+          </p:cNvPicPr>
+          <p:nvPr/>
+        </p:nvPicPr>
+        <p:blipFill>
+          <a:blip r:embed="rId2"/>
+          <a:stretch>
+            <a:fillRect/>
+          </a:stretch>
+        </p:blipFill>
+        <p:spPr>
+          <a:xfrm>
             <a:off x="112427" y="-269823"/>
             <a:ext cx="12192000" cy="6891129"/>
           </a:xfrm>
@@ -3725,7 +5007,7 @@
           <p:cNvPr id="4" name="TextBox 3">
             <a:extLst>
               <a:ext uri="{FF2B5EF4-FFF2-40B4-BE49-F238E27FC236}">
-                <a16:creationId xmlns:a16="http://schemas.microsoft.com/office/drawing/2014/main" id="{86E05592-F352-416E-AA02-F64ACB2D6B5E}"/>
+                <a16:creationId xmlns:a16="http://schemas.microsoft.com/office/drawing/2014/main" id="{73A1F57E-483E-7C53-CA64-0AA5EEE584EF}"/>
               </a:ext>
             </a:extLst>
           </p:cNvPr>
@@ -3772,7 +5054,7 @@
           <p:cNvPr id="5" name="TextBox 4">
             <a:extLst>
               <a:ext uri="{FF2B5EF4-FFF2-40B4-BE49-F238E27FC236}">
-                <a16:creationId xmlns:a16="http://schemas.microsoft.com/office/drawing/2014/main" id="{97633B80-D681-05C8-937E-80D895C6C127}"/>
+                <a16:creationId xmlns:a16="http://schemas.microsoft.com/office/drawing/2014/main" id="{96ADB709-10E8-F656-E6A6-713225485BEC}"/>
               </a:ext>
             </a:extLst>
           </p:cNvPr>
@@ -4069,7 +5351,7 @@
     </p:spTree>
     <p:extLst>
       <p:ext uri="{BB962C8B-B14F-4D97-AF65-F5344CB8AC3E}">
-        <p14:creationId xmlns:p14="http://schemas.microsoft.com/office/powerpoint/2010/main" val="2724772504"/>
+        <p14:creationId xmlns:p14="http://schemas.microsoft.com/office/powerpoint/2010/main" val="3268408513"/>
       </p:ext>
     </p:extLst>
   </p:cSld>

--- a/Slides-Day2.pptx
+++ b/Slides-Day2.pptx
@@ -10,7 +10,14 @@
     <p:sldId id="263" r:id="rId4"/>
     <p:sldId id="264" r:id="rId5"/>
     <p:sldId id="265" r:id="rId6"/>
-    <p:sldId id="261" r:id="rId7"/>
+    <p:sldId id="266" r:id="rId7"/>
+    <p:sldId id="261" r:id="rId8"/>
+    <p:sldId id="271" r:id="rId9"/>
+    <p:sldId id="272" r:id="rId10"/>
+    <p:sldId id="267" r:id="rId11"/>
+    <p:sldId id="268" r:id="rId12"/>
+    <p:sldId id="269" r:id="rId13"/>
+    <p:sldId id="270" r:id="rId14"/>
   </p:sldIdLst>
   <p:sldSz cx="12192000" cy="6858000"/>
   <p:notesSz cx="6858000" cy="9144000"/>
@@ -264,7 +271,7 @@
           <a:p>
             <a:fld id="{CD989C08-BA69-4AD3-98E9-D53C63F6E1B1}" type="datetimeFigureOut">
               <a:rPr lang="en-US" smtClean="0"/>
-              <a:t>3/8/2025</a:t>
+              <a:t>3/13/2025</a:t>
             </a:fld>
             <a:endParaRPr lang="en-US"/>
           </a:p>
@@ -462,7 +469,7 @@
           <a:p>
             <a:fld id="{CD989C08-BA69-4AD3-98E9-D53C63F6E1B1}" type="datetimeFigureOut">
               <a:rPr lang="en-US" smtClean="0"/>
-              <a:t>3/8/2025</a:t>
+              <a:t>3/13/2025</a:t>
             </a:fld>
             <a:endParaRPr lang="en-US"/>
           </a:p>
@@ -670,7 +677,7 @@
           <a:p>
             <a:fld id="{CD989C08-BA69-4AD3-98E9-D53C63F6E1B1}" type="datetimeFigureOut">
               <a:rPr lang="en-US" smtClean="0"/>
-              <a:t>3/8/2025</a:t>
+              <a:t>3/13/2025</a:t>
             </a:fld>
             <a:endParaRPr lang="en-US"/>
           </a:p>
@@ -868,7 +875,7 @@
           <a:p>
             <a:fld id="{CD989C08-BA69-4AD3-98E9-D53C63F6E1B1}" type="datetimeFigureOut">
               <a:rPr lang="en-US" smtClean="0"/>
-              <a:t>3/8/2025</a:t>
+              <a:t>3/13/2025</a:t>
             </a:fld>
             <a:endParaRPr lang="en-US"/>
           </a:p>
@@ -1143,7 +1150,7 @@
           <a:p>
             <a:fld id="{CD989C08-BA69-4AD3-98E9-D53C63F6E1B1}" type="datetimeFigureOut">
               <a:rPr lang="en-US" smtClean="0"/>
-              <a:t>3/8/2025</a:t>
+              <a:t>3/13/2025</a:t>
             </a:fld>
             <a:endParaRPr lang="en-US"/>
           </a:p>
@@ -1408,7 +1415,7 @@
           <a:p>
             <a:fld id="{CD989C08-BA69-4AD3-98E9-D53C63F6E1B1}" type="datetimeFigureOut">
               <a:rPr lang="en-US" smtClean="0"/>
-              <a:t>3/8/2025</a:t>
+              <a:t>3/13/2025</a:t>
             </a:fld>
             <a:endParaRPr lang="en-US"/>
           </a:p>
@@ -1820,7 +1827,7 @@
           <a:p>
             <a:fld id="{CD989C08-BA69-4AD3-98E9-D53C63F6E1B1}" type="datetimeFigureOut">
               <a:rPr lang="en-US" smtClean="0"/>
-              <a:t>3/8/2025</a:t>
+              <a:t>3/13/2025</a:t>
             </a:fld>
             <a:endParaRPr lang="en-US"/>
           </a:p>
@@ -1961,7 +1968,7 @@
           <a:p>
             <a:fld id="{CD989C08-BA69-4AD3-98E9-D53C63F6E1B1}" type="datetimeFigureOut">
               <a:rPr lang="en-US" smtClean="0"/>
-              <a:t>3/8/2025</a:t>
+              <a:t>3/13/2025</a:t>
             </a:fld>
             <a:endParaRPr lang="en-US"/>
           </a:p>
@@ -2074,7 +2081,7 @@
           <a:p>
             <a:fld id="{CD989C08-BA69-4AD3-98E9-D53C63F6E1B1}" type="datetimeFigureOut">
               <a:rPr lang="en-US" smtClean="0"/>
-              <a:t>3/8/2025</a:t>
+              <a:t>3/13/2025</a:t>
             </a:fld>
             <a:endParaRPr lang="en-US"/>
           </a:p>
@@ -2385,7 +2392,7 @@
           <a:p>
             <a:fld id="{CD989C08-BA69-4AD3-98E9-D53C63F6E1B1}" type="datetimeFigureOut">
               <a:rPr lang="en-US" smtClean="0"/>
-              <a:t>3/8/2025</a:t>
+              <a:t>3/13/2025</a:t>
             </a:fld>
             <a:endParaRPr lang="en-US"/>
           </a:p>
@@ -2673,7 +2680,7 @@
           <a:p>
             <a:fld id="{CD989C08-BA69-4AD3-98E9-D53C63F6E1B1}" type="datetimeFigureOut">
               <a:rPr lang="en-US" smtClean="0"/>
-              <a:t>3/8/2025</a:t>
+              <a:t>3/13/2025</a:t>
             </a:fld>
             <a:endParaRPr lang="en-US"/>
           </a:p>
@@ -2914,7 +2921,7 @@
           <a:p>
             <a:fld id="{CD989C08-BA69-4AD3-98E9-D53C63F6E1B1}" type="datetimeFigureOut">
               <a:rPr lang="en-US" smtClean="0"/>
-              <a:t>3/8/2025</a:t>
+              <a:t>3/13/2025</a:t>
             </a:fld>
             <a:endParaRPr lang="en-US"/>
           </a:p>
@@ -3428,7 +3435,7 @@
         <p:spPr>
           <a:xfrm>
             <a:off x="604267" y="1221698"/>
-            <a:ext cx="10323564" cy="4524315"/>
+            <a:ext cx="10323564" cy="4154984"/>
           </a:xfrm>
           <a:prstGeom prst="rect">
             <a:avLst/>
@@ -3459,6 +3466,24 @@
             </a:r>
           </a:p>
           <a:p>
+            <a:pPr marL="457200" indent="-457200">
+              <a:buFont typeface="+mj-lt"/>
+              <a:buAutoNum type="arabicPeriod"/>
+            </a:pPr>
+            <a:r>
+              <a:rPr lang="en-US" sz="2400">
+                <a:solidFill>
+                  <a:schemeClr val="accent1">
+                    <a:lumMod val="50000"/>
+                  </a:schemeClr>
+                </a:solidFill>
+                <a:latin typeface="Arial" panose="020B0604020202020204" pitchFamily="34" charset="0"/>
+                <a:cs typeface="Arial" panose="020B0604020202020204" pitchFamily="34" charset="0"/>
+              </a:rPr>
+              <a:t>Secure Data Handling:</a:t>
+            </a:r>
+          </a:p>
+          <a:p>
             <a:pPr marL="914400" lvl="1" indent="-457200">
               <a:buFont typeface="Arial" panose="020B0604020202020204" pitchFamily="34" charset="0"/>
               <a:buChar char="•"/>
@@ -3473,7 +3498,61 @@
                 <a:latin typeface="Arial" panose="020B0604020202020204" pitchFamily="34" charset="0"/>
                 <a:cs typeface="Arial" panose="020B0604020202020204" pitchFamily="34" charset="0"/>
               </a:rPr>
-              <a:t>data structures and secure programming</a:t>
+              <a:t>best practices for handling sensitive information</a:t>
+            </a:r>
+          </a:p>
+          <a:p>
+            <a:pPr marL="914400" lvl="1" indent="-457200">
+              <a:buFont typeface="Arial" panose="020B0604020202020204" pitchFamily="34" charset="0"/>
+              <a:buChar char="•"/>
+            </a:pPr>
+            <a:r>
+              <a:rPr lang="en-US" sz="2400">
+                <a:solidFill>
+                  <a:schemeClr val="accent1">
+                    <a:lumMod val="50000"/>
+                  </a:schemeClr>
+                </a:solidFill>
+                <a:latin typeface="Arial" panose="020B0604020202020204" pitchFamily="34" charset="0"/>
+                <a:cs typeface="Arial" panose="020B0604020202020204" pitchFamily="34" charset="0"/>
+              </a:rPr>
+              <a:t>input validation</a:t>
+            </a:r>
+          </a:p>
+          <a:p>
+            <a:pPr marL="914400" lvl="1" indent="-457200">
+              <a:buFont typeface="Arial" panose="020B0604020202020204" pitchFamily="34" charset="0"/>
+              <a:buChar char="•"/>
+            </a:pPr>
+            <a:r>
+              <a:rPr lang="en-US" sz="2400">
+                <a:solidFill>
+                  <a:schemeClr val="accent1">
+                    <a:lumMod val="50000"/>
+                  </a:schemeClr>
+                </a:solidFill>
+                <a:latin typeface="Arial" panose="020B0604020202020204" pitchFamily="34" charset="0"/>
+                <a:cs typeface="Arial" panose="020B0604020202020204" pitchFamily="34" charset="0"/>
+              </a:rPr>
+              <a:t>data sanitization</a:t>
+            </a:r>
+          </a:p>
+          <a:p>
+            <a:pPr marL="914400" lvl="1" indent="-457200">
+              <a:buFont typeface="Arial" panose="020B0604020202020204" pitchFamily="34" charset="0"/>
+              <a:buChar char="•"/>
+            </a:pPr>
+            <a:r>
+              <a:rPr lang="en-US" sz="2400">
+                <a:solidFill>
+                  <a:schemeClr val="accent1">
+                    <a:lumMod val="50000"/>
+                  </a:schemeClr>
+                </a:solidFill>
+                <a:latin typeface="Arial" panose="020B0604020202020204" pitchFamily="34" charset="0"/>
+                <a:cs typeface="Arial" panose="020B0604020202020204" pitchFamily="34" charset="0"/>
+              </a:rPr>
+              <a:t>secure randomization</a:t>
             </a:r>
           </a:p>
           <a:p>
@@ -3491,7 +3570,7 @@
                 <a:latin typeface="Arial" panose="020B0604020202020204" pitchFamily="34" charset="0"/>
                 <a:cs typeface="Arial" panose="020B0604020202020204" pitchFamily="34" charset="0"/>
               </a:rPr>
-              <a:t>Secure Data Handling:</a:t>
+              <a:t>Functions, Modules, Classes, and Exceptions</a:t>
             </a:r>
           </a:p>
           <a:p>
@@ -3509,7 +3588,25 @@
                 <a:latin typeface="Arial" panose="020B0604020202020204" pitchFamily="34" charset="0"/>
                 <a:cs typeface="Arial" panose="020B0604020202020204" pitchFamily="34" charset="0"/>
               </a:rPr>
-              <a:t>best practices for handling sensitive information</a:t>
+              <a:t>Secure design principles in modular programming</a:t>
+            </a:r>
+          </a:p>
+          <a:p>
+            <a:pPr marL="457200" indent="-457200">
+              <a:buFont typeface="+mj-lt"/>
+              <a:buAutoNum type="arabicPeriod"/>
+            </a:pPr>
+            <a:r>
+              <a:rPr lang="en-US" sz="2400">
+                <a:solidFill>
+                  <a:schemeClr val="accent1">
+                    <a:lumMod val="50000"/>
+                  </a:schemeClr>
+                </a:solidFill>
+                <a:latin typeface="Arial" panose="020B0604020202020204" pitchFamily="34" charset="0"/>
+                <a:cs typeface="Arial" panose="020B0604020202020204" pitchFamily="34" charset="0"/>
+              </a:rPr>
+              <a:t>Secure Error Handling:</a:t>
             </a:r>
           </a:p>
           <a:p>
@@ -3527,7 +3624,7 @@
                 <a:latin typeface="Arial" panose="020B0604020202020204" pitchFamily="34" charset="0"/>
                 <a:cs typeface="Arial" panose="020B0604020202020204" pitchFamily="34" charset="0"/>
               </a:rPr>
-              <a:t>input validation</a:t>
+              <a:t>Avoiding information leakage</a:t>
             </a:r>
           </a:p>
           <a:p>
@@ -3545,7 +3642,1076 @@
                 <a:latin typeface="Arial" panose="020B0604020202020204" pitchFamily="34" charset="0"/>
                 <a:cs typeface="Arial" panose="020B0604020202020204" pitchFamily="34" charset="0"/>
               </a:rPr>
-              <a:t>data sanitization</a:t>
+              <a:t>Logging errors securely</a:t>
+            </a:r>
+          </a:p>
+        </p:txBody>
+      </p:sp>
+    </p:spTree>
+    <p:extLst>
+      <p:ext uri="{BB962C8B-B14F-4D97-AF65-F5344CB8AC3E}">
+        <p14:creationId xmlns:p14="http://schemas.microsoft.com/office/powerpoint/2010/main" val="1171906858"/>
+      </p:ext>
+    </p:extLst>
+  </p:cSld>
+  <p:clrMapOvr>
+    <a:masterClrMapping/>
+  </p:clrMapOvr>
+</p:sld>
+</file>
+
+<file path=ppt/slides/slide10.xml><?xml version="1.0" encoding="utf-8"?>
+<p:sld xmlns:a="http://schemas.openxmlformats.org/drawingml/2006/main" xmlns:r="http://schemas.openxmlformats.org/officeDocument/2006/relationships" xmlns:p="http://schemas.openxmlformats.org/presentationml/2006/main">
+  <p:cSld>
+    <p:spTree>
+      <p:nvGrpSpPr>
+        <p:cNvPr id="1" name="">
+          <a:extLst>
+            <a:ext uri="{FF2B5EF4-FFF2-40B4-BE49-F238E27FC236}">
+              <a16:creationId xmlns:a16="http://schemas.microsoft.com/office/drawing/2014/main" id="{56D78D33-3B3B-23A1-9109-CD864116276A}"/>
+            </a:ext>
+          </a:extLst>
+        </p:cNvPr>
+        <p:cNvGrpSpPr/>
+        <p:nvPr/>
+      </p:nvGrpSpPr>
+      <p:grpSpPr>
+        <a:xfrm>
+          <a:off x="0" y="0"/>
+          <a:ext cx="0" cy="0"/>
+          <a:chOff x="0" y="0"/>
+          <a:chExt cx="0" cy="0"/>
+        </a:xfrm>
+      </p:grpSpPr>
+      <p:pic>
+        <p:nvPicPr>
+          <p:cNvPr id="3" name="Picture 2" descr="A white and blue background&#10;&#10;Description automatically generated">
+            <a:extLst>
+              <a:ext uri="{FF2B5EF4-FFF2-40B4-BE49-F238E27FC236}">
+                <a16:creationId xmlns:a16="http://schemas.microsoft.com/office/drawing/2014/main" id="{FAAAB76E-220B-AC3B-A601-1FFDF95FD296}"/>
+              </a:ext>
+            </a:extLst>
+          </p:cNvPr>
+          <p:cNvPicPr>
+            <a:picLocks noChangeAspect="1"/>
+          </p:cNvPicPr>
+          <p:nvPr/>
+        </p:nvPicPr>
+        <p:blipFill>
+          <a:blip r:embed="rId2"/>
+          <a:stretch>
+            <a:fillRect/>
+          </a:stretch>
+        </p:blipFill>
+        <p:spPr>
+          <a:xfrm>
+            <a:off x="0" y="-33129"/>
+            <a:ext cx="12192000" cy="6891129"/>
+          </a:xfrm>
+          <a:prstGeom prst="rect">
+            <a:avLst/>
+          </a:prstGeom>
+        </p:spPr>
+      </p:pic>
+      <p:sp>
+        <p:nvSpPr>
+          <p:cNvPr id="4" name="TextBox 3">
+            <a:extLst>
+              <a:ext uri="{FF2B5EF4-FFF2-40B4-BE49-F238E27FC236}">
+                <a16:creationId xmlns:a16="http://schemas.microsoft.com/office/drawing/2014/main" id="{D04513C8-0307-D960-FBB8-961FCDB76C7B}"/>
+              </a:ext>
+            </a:extLst>
+          </p:cNvPr>
+          <p:cNvSpPr txBox="1"/>
+          <p:nvPr/>
+        </p:nvSpPr>
+        <p:spPr>
+          <a:xfrm>
+            <a:off x="604266" y="136955"/>
+            <a:ext cx="10391019" cy="646331"/>
+          </a:xfrm>
+          <a:prstGeom prst="rect">
+            <a:avLst/>
+          </a:prstGeom>
+          <a:noFill/>
+        </p:spPr>
+        <p:txBody>
+          <a:bodyPr wrap="square" rtlCol="0">
+            <a:spAutoFit/>
+          </a:bodyPr>
+          <a:lstStyle/>
+          <a:p>
+            <a:r>
+              <a:rPr lang="en-US" sz="3600">
+                <a:solidFill>
+                  <a:schemeClr val="accent1">
+                    <a:lumMod val="50000"/>
+                  </a:schemeClr>
+                </a:solidFill>
+                <a:latin typeface="Arial" panose="020B0604020202020204" pitchFamily="34" charset="0"/>
+                <a:cs typeface="Arial" panose="020B0604020202020204" pitchFamily="34" charset="0"/>
+              </a:rPr>
+              <a:t>Copying Lists</a:t>
+            </a:r>
+          </a:p>
+        </p:txBody>
+      </p:sp>
+      <p:sp>
+        <p:nvSpPr>
+          <p:cNvPr id="5" name="TextBox 4">
+            <a:extLst>
+              <a:ext uri="{FF2B5EF4-FFF2-40B4-BE49-F238E27FC236}">
+                <a16:creationId xmlns:a16="http://schemas.microsoft.com/office/drawing/2014/main" id="{B86ECEB9-CE05-E523-6248-A9F8D754CF62}"/>
+              </a:ext>
+            </a:extLst>
+          </p:cNvPr>
+          <p:cNvSpPr txBox="1"/>
+          <p:nvPr/>
+        </p:nvSpPr>
+        <p:spPr>
+          <a:xfrm>
+            <a:off x="836614" y="906971"/>
+            <a:ext cx="10323564" cy="5262979"/>
+          </a:xfrm>
+          <a:prstGeom prst="rect">
+            <a:avLst/>
+          </a:prstGeom>
+          <a:noFill/>
+        </p:spPr>
+        <p:txBody>
+          <a:bodyPr wrap="square" rtlCol="0">
+            <a:spAutoFit/>
+          </a:bodyPr>
+          <a:lstStyle/>
+          <a:p>
+            <a:pPr marL="231775" indent="-231775">
+              <a:buFont typeface="Arial" panose="020B0604020202020204" pitchFamily="34" charset="0"/>
+              <a:buChar char="•"/>
+            </a:pPr>
+            <a:r>
+              <a:rPr lang="en-US" sz="2400">
+                <a:solidFill>
+                  <a:schemeClr val="accent1">
+                    <a:lumMod val="50000"/>
+                  </a:schemeClr>
+                </a:solidFill>
+                <a:latin typeface="Arial" panose="020B0604020202020204" pitchFamily="34" charset="0"/>
+                <a:cs typeface="Arial" panose="020B0604020202020204" pitchFamily="34" charset="0"/>
+              </a:rPr>
+              <a:t>Prevent unintended data modifications in lists by using tuples for data that should remain unchanged, and by making copies of lists before passing them to functions if modification is not intended.</a:t>
+            </a:r>
+          </a:p>
+          <a:p>
+            <a:pPr marL="231775" indent="-231775">
+              <a:buFont typeface="Arial" panose="020B0604020202020204" pitchFamily="34" charset="0"/>
+              <a:buChar char="•"/>
+            </a:pPr>
+            <a:r>
+              <a:rPr lang="en-US" sz="2400">
+                <a:solidFill>
+                  <a:schemeClr val="accent1">
+                    <a:lumMod val="50000"/>
+                  </a:schemeClr>
+                </a:solidFill>
+                <a:latin typeface="Arial" panose="020B0604020202020204" pitchFamily="34" charset="0"/>
+                <a:cs typeface="Arial" panose="020B0604020202020204" pitchFamily="34" charset="0"/>
+              </a:rPr>
+              <a:t>Copying lists ensures that modifications to copied objects do not unintentionally affect the original (particularly when dealing with mutable and nested data structures).</a:t>
+            </a:r>
+          </a:p>
+          <a:p>
+            <a:pPr marL="231775" indent="-231775">
+              <a:buFont typeface="Arial" panose="020B0604020202020204" pitchFamily="34" charset="0"/>
+              <a:buChar char="•"/>
+            </a:pPr>
+            <a:r>
+              <a:rPr lang="en-US" sz="2400">
+                <a:solidFill>
+                  <a:schemeClr val="accent1">
+                    <a:lumMod val="50000"/>
+                  </a:schemeClr>
+                </a:solidFill>
+                <a:latin typeface="Arial" panose="020B0604020202020204" pitchFamily="34" charset="0"/>
+                <a:cs typeface="Arial" panose="020B0604020202020204" pitchFamily="34" charset="0"/>
+              </a:rPr>
+              <a:t>list.copy() performs a shallow copy, meaning it only copies the outer list and keeps references to mutable elements inside.</a:t>
+            </a:r>
+          </a:p>
+          <a:p>
+            <a:pPr marL="231775" indent="-231775">
+              <a:buFont typeface="Arial" panose="020B0604020202020204" pitchFamily="34" charset="0"/>
+              <a:buChar char="•"/>
+            </a:pPr>
+            <a:r>
+              <a:rPr lang="en-US" sz="2400">
+                <a:solidFill>
+                  <a:schemeClr val="accent1">
+                    <a:lumMod val="50000"/>
+                  </a:schemeClr>
+                </a:solidFill>
+                <a:latin typeface="Arial" panose="020B0604020202020204" pitchFamily="34" charset="0"/>
+                <a:cs typeface="Arial" panose="020B0604020202020204" pitchFamily="34" charset="0"/>
+              </a:rPr>
+              <a:t>The </a:t>
+            </a:r>
+            <a:r>
+              <a:rPr lang="en-US" sz="2400">
+                <a:solidFill>
+                  <a:schemeClr val="accent1">
+                    <a:lumMod val="50000"/>
+                  </a:schemeClr>
+                </a:solidFill>
+                <a:latin typeface="Arial" panose="020B0604020202020204" pitchFamily="34" charset="0"/>
+                <a:cs typeface="Arial" panose="020B0604020202020204" pitchFamily="34" charset="0"/>
+                <a:hlinkClick r:id="rId3"/>
+              </a:rPr>
+              <a:t>copy module </a:t>
+            </a:r>
+            <a:r>
+              <a:rPr lang="en-US" sz="2400">
+                <a:solidFill>
+                  <a:schemeClr val="accent1">
+                    <a:lumMod val="50000"/>
+                  </a:schemeClr>
+                </a:solidFill>
+                <a:latin typeface="Arial" panose="020B0604020202020204" pitchFamily="34" charset="0"/>
+                <a:cs typeface="Arial" panose="020B0604020202020204" pitchFamily="34" charset="0"/>
+              </a:rPr>
+              <a:t>allows programmers to create both shallow and deep copies of objects, </a:t>
+            </a:r>
+          </a:p>
+          <a:p>
+            <a:pPr marL="231775" indent="-231775">
+              <a:buFont typeface="Arial" panose="020B0604020202020204" pitchFamily="34" charset="0"/>
+              <a:buChar char="•"/>
+            </a:pPr>
+            <a:r>
+              <a:rPr lang="en-US" sz="2400">
+                <a:solidFill>
+                  <a:schemeClr val="accent1">
+                    <a:lumMod val="50000"/>
+                  </a:schemeClr>
+                </a:solidFill>
+                <a:latin typeface="Arial" panose="020B0604020202020204" pitchFamily="34" charset="0"/>
+                <a:cs typeface="Arial" panose="020B0604020202020204" pitchFamily="34" charset="0"/>
+              </a:rPr>
+              <a:t>A deep copy constructs a new compound object and then, recursively, inserts copies into it of the objects found in the original.</a:t>
+            </a:r>
+          </a:p>
+          <a:p>
+            <a:pPr marL="231775" indent="-231775">
+              <a:buFont typeface="Arial" panose="020B0604020202020204" pitchFamily="34" charset="0"/>
+              <a:buChar char="•"/>
+            </a:pPr>
+            <a:r>
+              <a:rPr lang="en-US" sz="2400">
+                <a:solidFill>
+                  <a:schemeClr val="accent1">
+                    <a:lumMod val="50000"/>
+                  </a:schemeClr>
+                </a:solidFill>
+                <a:latin typeface="Arial" panose="020B0604020202020204" pitchFamily="34" charset="0"/>
+                <a:cs typeface="Arial" panose="020B0604020202020204" pitchFamily="34" charset="0"/>
+              </a:rPr>
+              <a:t>This difference is only relevant for compound objects (objects that contain other objects, like lists or class instances).</a:t>
+            </a:r>
+          </a:p>
+        </p:txBody>
+      </p:sp>
+    </p:spTree>
+    <p:extLst>
+      <p:ext uri="{BB962C8B-B14F-4D97-AF65-F5344CB8AC3E}">
+        <p14:creationId xmlns:p14="http://schemas.microsoft.com/office/powerpoint/2010/main" val="3334303769"/>
+      </p:ext>
+    </p:extLst>
+  </p:cSld>
+  <p:clrMapOvr>
+    <a:masterClrMapping/>
+  </p:clrMapOvr>
+</p:sld>
+</file>
+
+<file path=ppt/slides/slide11.xml><?xml version="1.0" encoding="utf-8"?>
+<p:sld xmlns:a="http://schemas.openxmlformats.org/drawingml/2006/main" xmlns:r="http://schemas.openxmlformats.org/officeDocument/2006/relationships" xmlns:p="http://schemas.openxmlformats.org/presentationml/2006/main">
+  <p:cSld>
+    <p:spTree>
+      <p:nvGrpSpPr>
+        <p:cNvPr id="1" name="">
+          <a:extLst>
+            <a:ext uri="{FF2B5EF4-FFF2-40B4-BE49-F238E27FC236}">
+              <a16:creationId xmlns:a16="http://schemas.microsoft.com/office/drawing/2014/main" id="{F9094C49-3D26-1027-B6FF-8A55BCA76EC2}"/>
+            </a:ext>
+          </a:extLst>
+        </p:cNvPr>
+        <p:cNvGrpSpPr/>
+        <p:nvPr/>
+      </p:nvGrpSpPr>
+      <p:grpSpPr>
+        <a:xfrm>
+          <a:off x="0" y="0"/>
+          <a:ext cx="0" cy="0"/>
+          <a:chOff x="0" y="0"/>
+          <a:chExt cx="0" cy="0"/>
+        </a:xfrm>
+      </p:grpSpPr>
+      <p:pic>
+        <p:nvPicPr>
+          <p:cNvPr id="3" name="Picture 2" descr="A white and blue background&#10;&#10;Description automatically generated">
+            <a:extLst>
+              <a:ext uri="{FF2B5EF4-FFF2-40B4-BE49-F238E27FC236}">
+                <a16:creationId xmlns:a16="http://schemas.microsoft.com/office/drawing/2014/main" id="{0ACD6AFE-F850-3817-492B-3BD17356E0EC}"/>
+              </a:ext>
+            </a:extLst>
+          </p:cNvPr>
+          <p:cNvPicPr>
+            <a:picLocks noChangeAspect="1"/>
+          </p:cNvPicPr>
+          <p:nvPr/>
+        </p:nvPicPr>
+        <p:blipFill>
+          <a:blip r:embed="rId2"/>
+          <a:stretch>
+            <a:fillRect/>
+          </a:stretch>
+        </p:blipFill>
+        <p:spPr>
+          <a:xfrm>
+            <a:off x="104932" y="-33129"/>
+            <a:ext cx="12192000" cy="6891129"/>
+          </a:xfrm>
+          <a:prstGeom prst="rect">
+            <a:avLst/>
+          </a:prstGeom>
+        </p:spPr>
+      </p:pic>
+      <p:sp>
+        <p:nvSpPr>
+          <p:cNvPr id="4" name="TextBox 3">
+            <a:extLst>
+              <a:ext uri="{FF2B5EF4-FFF2-40B4-BE49-F238E27FC236}">
+                <a16:creationId xmlns:a16="http://schemas.microsoft.com/office/drawing/2014/main" id="{BF07656B-BA7F-E294-5B3E-6CEF7E9157AD}"/>
+              </a:ext>
+            </a:extLst>
+          </p:cNvPr>
+          <p:cNvSpPr txBox="1"/>
+          <p:nvPr/>
+        </p:nvSpPr>
+        <p:spPr>
+          <a:xfrm>
+            <a:off x="604266" y="136955"/>
+            <a:ext cx="10391019" cy="646331"/>
+          </a:xfrm>
+          <a:prstGeom prst="rect">
+            <a:avLst/>
+          </a:prstGeom>
+          <a:noFill/>
+        </p:spPr>
+        <p:txBody>
+          <a:bodyPr wrap="square" rtlCol="0">
+            <a:spAutoFit/>
+          </a:bodyPr>
+          <a:lstStyle/>
+          <a:p>
+            <a:r>
+              <a:rPr lang="en-US" sz="3600">
+                <a:solidFill>
+                  <a:schemeClr val="accent1">
+                    <a:lumMod val="50000"/>
+                  </a:schemeClr>
+                </a:solidFill>
+                <a:latin typeface="Arial" panose="020B0604020202020204" pitchFamily="34" charset="0"/>
+                <a:cs typeface="Arial" panose="020B0604020202020204" pitchFamily="34" charset="0"/>
+              </a:rPr>
+              <a:t>Copying Lists: The Shallow Copy Problem</a:t>
+            </a:r>
+          </a:p>
+        </p:txBody>
+      </p:sp>
+      <p:sp>
+        <p:nvSpPr>
+          <p:cNvPr id="5" name="TextBox 4">
+            <a:extLst>
+              <a:ext uri="{FF2B5EF4-FFF2-40B4-BE49-F238E27FC236}">
+                <a16:creationId xmlns:a16="http://schemas.microsoft.com/office/drawing/2014/main" id="{23C4A6DA-4772-77CF-63FA-971BF68B5A11}"/>
+              </a:ext>
+            </a:extLst>
+          </p:cNvPr>
+          <p:cNvSpPr txBox="1"/>
+          <p:nvPr/>
+        </p:nvSpPr>
+        <p:spPr>
+          <a:xfrm>
+            <a:off x="836614" y="906971"/>
+            <a:ext cx="10323564" cy="4955203"/>
+          </a:xfrm>
+          <a:prstGeom prst="rect">
+            <a:avLst/>
+          </a:prstGeom>
+          <a:noFill/>
+        </p:spPr>
+        <p:txBody>
+          <a:bodyPr wrap="square" rtlCol="0">
+            <a:spAutoFit/>
+          </a:bodyPr>
+          <a:lstStyle/>
+          <a:p>
+            <a:pPr marL="231775" indent="-230188">
+              <a:buFont typeface="Arial" panose="020B0604020202020204" pitchFamily="34" charset="0"/>
+              <a:buChar char="•"/>
+            </a:pPr>
+            <a:r>
+              <a:rPr lang="en-US" sz="2400">
+                <a:solidFill>
+                  <a:schemeClr val="accent1">
+                    <a:lumMod val="50000"/>
+                  </a:schemeClr>
+                </a:solidFill>
+                <a:latin typeface="Arial" panose="020B0604020202020204" pitchFamily="34" charset="0"/>
+                <a:cs typeface="Arial" panose="020B0604020202020204" pitchFamily="34" charset="0"/>
+              </a:rPr>
+              <a:t>Since shallow_copy only copied references to the inner lists, modifying an element inside shallow_copy also affected the original_list.</a:t>
+            </a:r>
+            <a:endParaRPr lang="en-US" sz="2400" b="1">
+              <a:solidFill>
+                <a:schemeClr val="accent1">
+                  <a:lumMod val="50000"/>
+                </a:schemeClr>
+              </a:solidFill>
+              <a:latin typeface="Consolas" panose="020B0609020204030204" pitchFamily="49" charset="0"/>
+              <a:cs typeface="Arial" panose="020B0604020202020204" pitchFamily="34" charset="0"/>
+            </a:endParaRPr>
+          </a:p>
+          <a:p>
+            <a:pPr marL="457200"/>
+            <a:endParaRPr lang="en-US" sz="2400" b="1">
+              <a:solidFill>
+                <a:schemeClr val="accent1">
+                  <a:lumMod val="50000"/>
+                </a:schemeClr>
+              </a:solidFill>
+              <a:latin typeface="Consolas" panose="020B0609020204030204" pitchFamily="49" charset="0"/>
+              <a:cs typeface="Arial" panose="020B0604020202020204" pitchFamily="34" charset="0"/>
+            </a:endParaRPr>
+          </a:p>
+          <a:p>
+            <a:pPr marL="457200"/>
+            <a:r>
+              <a:rPr lang="en-US" sz="2000" b="1">
+                <a:solidFill>
+                  <a:schemeClr val="accent1">
+                    <a:lumMod val="50000"/>
+                  </a:schemeClr>
+                </a:solidFill>
+                <a:latin typeface="Consolas" panose="020B0609020204030204" pitchFamily="49" charset="0"/>
+                <a:cs typeface="Arial" panose="020B0604020202020204" pitchFamily="34" charset="0"/>
+              </a:rPr>
+              <a:t>import copy</a:t>
+            </a:r>
+          </a:p>
+          <a:p>
+            <a:pPr marL="457200"/>
+            <a:endParaRPr lang="en-US" sz="2000" b="1">
+              <a:solidFill>
+                <a:schemeClr val="accent1">
+                  <a:lumMod val="50000"/>
+                </a:schemeClr>
+              </a:solidFill>
+              <a:latin typeface="Consolas" panose="020B0609020204030204" pitchFamily="49" charset="0"/>
+              <a:cs typeface="Arial" panose="020B0604020202020204" pitchFamily="34" charset="0"/>
+            </a:endParaRPr>
+          </a:p>
+          <a:p>
+            <a:pPr marL="457200"/>
+            <a:r>
+              <a:rPr lang="en-US" sz="2000" b="1">
+                <a:solidFill>
+                  <a:schemeClr val="accent1">
+                    <a:lumMod val="50000"/>
+                  </a:schemeClr>
+                </a:solidFill>
+                <a:latin typeface="Consolas" panose="020B0609020204030204" pitchFamily="49" charset="0"/>
+                <a:cs typeface="Arial" panose="020B0604020202020204" pitchFamily="34" charset="0"/>
+              </a:rPr>
+              <a:t>original_list = [[1, 2, 3], [4, 5, 6]]</a:t>
+            </a:r>
+          </a:p>
+          <a:p>
+            <a:pPr marL="457200"/>
+            <a:r>
+              <a:rPr lang="en-US" sz="2000" b="1">
+                <a:solidFill>
+                  <a:schemeClr val="accent1">
+                    <a:lumMod val="50000"/>
+                  </a:schemeClr>
+                </a:solidFill>
+                <a:latin typeface="Consolas" panose="020B0609020204030204" pitchFamily="49" charset="0"/>
+                <a:cs typeface="Arial" panose="020B0604020202020204" pitchFamily="34" charset="0"/>
+              </a:rPr>
+              <a:t>shallow_copy = copy.copy(original_list)</a:t>
+            </a:r>
+          </a:p>
+          <a:p>
+            <a:pPr marL="457200"/>
+            <a:endParaRPr lang="en-US" sz="2000" b="1">
+              <a:solidFill>
+                <a:schemeClr val="accent1">
+                  <a:lumMod val="50000"/>
+                </a:schemeClr>
+              </a:solidFill>
+              <a:latin typeface="Consolas" panose="020B0609020204030204" pitchFamily="49" charset="0"/>
+              <a:cs typeface="Arial" panose="020B0604020202020204" pitchFamily="34" charset="0"/>
+            </a:endParaRPr>
+          </a:p>
+          <a:p>
+            <a:pPr marL="457200"/>
+            <a:r>
+              <a:rPr lang="en-US" sz="2000" b="1">
+                <a:solidFill>
+                  <a:schemeClr val="accent1">
+                    <a:lumMod val="50000"/>
+                  </a:schemeClr>
+                </a:solidFill>
+                <a:latin typeface="Consolas" panose="020B0609020204030204" pitchFamily="49" charset="0"/>
+                <a:cs typeface="Arial" panose="020B0604020202020204" pitchFamily="34" charset="0"/>
+              </a:rPr>
+              <a:t># Modifying an inner list</a:t>
+            </a:r>
+          </a:p>
+          <a:p>
+            <a:pPr marL="457200"/>
+            <a:endParaRPr lang="en-US" sz="2000" b="1">
+              <a:solidFill>
+                <a:schemeClr val="accent1">
+                  <a:lumMod val="50000"/>
+                </a:schemeClr>
+              </a:solidFill>
+              <a:latin typeface="Consolas" panose="020B0609020204030204" pitchFamily="49" charset="0"/>
+              <a:cs typeface="Arial" panose="020B0604020202020204" pitchFamily="34" charset="0"/>
+            </a:endParaRPr>
+          </a:p>
+          <a:p>
+            <a:pPr marL="457200"/>
+            <a:r>
+              <a:rPr lang="en-US" sz="2000" b="1">
+                <a:solidFill>
+                  <a:schemeClr val="accent1">
+                    <a:lumMod val="50000"/>
+                  </a:schemeClr>
+                </a:solidFill>
+                <a:latin typeface="Consolas" panose="020B0609020204030204" pitchFamily="49" charset="0"/>
+                <a:cs typeface="Arial" panose="020B0604020202020204" pitchFamily="34" charset="0"/>
+              </a:rPr>
+              <a:t>shallow_copy[0][0] = 99</a:t>
+            </a:r>
+          </a:p>
+          <a:p>
+            <a:pPr marL="457200"/>
+            <a:endParaRPr lang="en-US" sz="2000" b="1">
+              <a:solidFill>
+                <a:schemeClr val="accent1">
+                  <a:lumMod val="50000"/>
+                </a:schemeClr>
+              </a:solidFill>
+              <a:latin typeface="Consolas" panose="020B0609020204030204" pitchFamily="49" charset="0"/>
+              <a:cs typeface="Arial" panose="020B0604020202020204" pitchFamily="34" charset="0"/>
+            </a:endParaRPr>
+          </a:p>
+          <a:p>
+            <a:pPr marL="457200"/>
+            <a:r>
+              <a:rPr lang="en-US" sz="2000" b="1">
+                <a:solidFill>
+                  <a:schemeClr val="accent1">
+                    <a:lumMod val="50000"/>
+                  </a:schemeClr>
+                </a:solidFill>
+                <a:latin typeface="Consolas" panose="020B0609020204030204" pitchFamily="49" charset="0"/>
+                <a:cs typeface="Arial" panose="020B0604020202020204" pitchFamily="34" charset="0"/>
+              </a:rPr>
+              <a:t>print(original_list)  # Output: [[99, 2, 3], [4, 5, 6]]</a:t>
+            </a:r>
+          </a:p>
+          <a:p>
+            <a:pPr marL="457200"/>
+            <a:r>
+              <a:rPr lang="en-US" sz="2000" b="1">
+                <a:solidFill>
+                  <a:schemeClr val="accent1">
+                    <a:lumMod val="50000"/>
+                  </a:schemeClr>
+                </a:solidFill>
+                <a:latin typeface="Consolas" panose="020B0609020204030204" pitchFamily="49" charset="0"/>
+                <a:cs typeface="Arial" panose="020B0604020202020204" pitchFamily="34" charset="0"/>
+              </a:rPr>
+              <a:t>print(shallow_copy)   # Output: [[99, 2, 3], [4, 5, 6]]</a:t>
+            </a:r>
+          </a:p>
+          <a:p>
+            <a:endParaRPr lang="en-US" sz="2400" b="1">
+              <a:solidFill>
+                <a:schemeClr val="accent1">
+                  <a:lumMod val="50000"/>
+                </a:schemeClr>
+              </a:solidFill>
+              <a:latin typeface="Consolas" panose="020B0609020204030204" pitchFamily="49" charset="0"/>
+              <a:cs typeface="Arial" panose="020B0604020202020204" pitchFamily="34" charset="0"/>
+            </a:endParaRPr>
+          </a:p>
+        </p:txBody>
+      </p:sp>
+    </p:spTree>
+    <p:extLst>
+      <p:ext uri="{BB962C8B-B14F-4D97-AF65-F5344CB8AC3E}">
+        <p14:creationId xmlns:p14="http://schemas.microsoft.com/office/powerpoint/2010/main" val="1626937124"/>
+      </p:ext>
+    </p:extLst>
+  </p:cSld>
+  <p:clrMapOvr>
+    <a:masterClrMapping/>
+  </p:clrMapOvr>
+</p:sld>
+</file>
+
+<file path=ppt/slides/slide12.xml><?xml version="1.0" encoding="utf-8"?>
+<p:sld xmlns:a="http://schemas.openxmlformats.org/drawingml/2006/main" xmlns:r="http://schemas.openxmlformats.org/officeDocument/2006/relationships" xmlns:p="http://schemas.openxmlformats.org/presentationml/2006/main">
+  <p:cSld>
+    <p:spTree>
+      <p:nvGrpSpPr>
+        <p:cNvPr id="1" name="">
+          <a:extLst>
+            <a:ext uri="{FF2B5EF4-FFF2-40B4-BE49-F238E27FC236}">
+              <a16:creationId xmlns:a16="http://schemas.microsoft.com/office/drawing/2014/main" id="{C6A1BB4F-3769-7951-6DDB-B4459AF4B679}"/>
+            </a:ext>
+          </a:extLst>
+        </p:cNvPr>
+        <p:cNvGrpSpPr/>
+        <p:nvPr/>
+      </p:nvGrpSpPr>
+      <p:grpSpPr>
+        <a:xfrm>
+          <a:off x="0" y="0"/>
+          <a:ext cx="0" cy="0"/>
+          <a:chOff x="0" y="0"/>
+          <a:chExt cx="0" cy="0"/>
+        </a:xfrm>
+      </p:grpSpPr>
+      <p:pic>
+        <p:nvPicPr>
+          <p:cNvPr id="3" name="Picture 2" descr="A white and blue background&#10;&#10;Description automatically generated">
+            <a:extLst>
+              <a:ext uri="{FF2B5EF4-FFF2-40B4-BE49-F238E27FC236}">
+                <a16:creationId xmlns:a16="http://schemas.microsoft.com/office/drawing/2014/main" id="{E1DA22A0-0AFA-F362-8511-C368E2BB6BD2}"/>
+              </a:ext>
+            </a:extLst>
+          </p:cNvPr>
+          <p:cNvPicPr>
+            <a:picLocks noChangeAspect="1"/>
+          </p:cNvPicPr>
+          <p:nvPr/>
+        </p:nvPicPr>
+        <p:blipFill>
+          <a:blip r:embed="rId2"/>
+          <a:stretch>
+            <a:fillRect/>
+          </a:stretch>
+        </p:blipFill>
+        <p:spPr>
+          <a:xfrm>
+            <a:off x="0" y="-33129"/>
+            <a:ext cx="12192000" cy="6891129"/>
+          </a:xfrm>
+          <a:prstGeom prst="rect">
+            <a:avLst/>
+          </a:prstGeom>
+        </p:spPr>
+      </p:pic>
+      <p:sp>
+        <p:nvSpPr>
+          <p:cNvPr id="4" name="TextBox 3">
+            <a:extLst>
+              <a:ext uri="{FF2B5EF4-FFF2-40B4-BE49-F238E27FC236}">
+                <a16:creationId xmlns:a16="http://schemas.microsoft.com/office/drawing/2014/main" id="{A2B31251-0586-4A77-9A63-913889698303}"/>
+              </a:ext>
+            </a:extLst>
+          </p:cNvPr>
+          <p:cNvSpPr txBox="1"/>
+          <p:nvPr/>
+        </p:nvSpPr>
+        <p:spPr>
+          <a:xfrm>
+            <a:off x="604266" y="136955"/>
+            <a:ext cx="10391019" cy="646331"/>
+          </a:xfrm>
+          <a:prstGeom prst="rect">
+            <a:avLst/>
+          </a:prstGeom>
+          <a:noFill/>
+        </p:spPr>
+        <p:txBody>
+          <a:bodyPr wrap="square" rtlCol="0">
+            <a:spAutoFit/>
+          </a:bodyPr>
+          <a:lstStyle/>
+          <a:p>
+            <a:r>
+              <a:rPr lang="en-US" sz="3600">
+                <a:solidFill>
+                  <a:schemeClr val="accent1">
+                    <a:lumMod val="50000"/>
+                  </a:schemeClr>
+                </a:solidFill>
+                <a:latin typeface="Arial" panose="020B0604020202020204" pitchFamily="34" charset="0"/>
+                <a:cs typeface="Arial" panose="020B0604020202020204" pitchFamily="34" charset="0"/>
+              </a:rPr>
+              <a:t>Copying Lists: Deep Copies</a:t>
+            </a:r>
+          </a:p>
+        </p:txBody>
+      </p:sp>
+      <p:sp>
+        <p:nvSpPr>
+          <p:cNvPr id="5" name="TextBox 4">
+            <a:extLst>
+              <a:ext uri="{FF2B5EF4-FFF2-40B4-BE49-F238E27FC236}">
+                <a16:creationId xmlns:a16="http://schemas.microsoft.com/office/drawing/2014/main" id="{B78E1D95-078B-5BA2-8A5B-EE10D42C153F}"/>
+              </a:ext>
+            </a:extLst>
+          </p:cNvPr>
+          <p:cNvSpPr txBox="1"/>
+          <p:nvPr/>
+        </p:nvSpPr>
+        <p:spPr>
+          <a:xfrm>
+            <a:off x="836614" y="906971"/>
+            <a:ext cx="10323564" cy="4462760"/>
+          </a:xfrm>
+          <a:prstGeom prst="rect">
+            <a:avLst/>
+          </a:prstGeom>
+          <a:noFill/>
+        </p:spPr>
+        <p:txBody>
+          <a:bodyPr wrap="square" rtlCol="0">
+            <a:spAutoFit/>
+          </a:bodyPr>
+          <a:lstStyle/>
+          <a:p>
+            <a:pPr marL="231775" indent="-230188">
+              <a:buFont typeface="Arial" panose="020B0604020202020204" pitchFamily="34" charset="0"/>
+              <a:buChar char="•"/>
+            </a:pPr>
+            <a:r>
+              <a:rPr lang="en-US" sz="2400">
+                <a:solidFill>
+                  <a:schemeClr val="accent1">
+                    <a:lumMod val="50000"/>
+                  </a:schemeClr>
+                </a:solidFill>
+                <a:latin typeface="Arial" panose="020B0604020202020204" pitchFamily="34" charset="0"/>
+                <a:cs typeface="Arial" panose="020B0604020202020204" pitchFamily="34" charset="0"/>
+              </a:rPr>
+              <a:t>copy.deepcopy() creates a new object and recursively copies all objects within it, ensuring that nested mutable objects are fully duplicated rather than just referenced so the copied object is completely independent.</a:t>
+            </a:r>
+          </a:p>
+          <a:p>
+            <a:pPr marL="457200"/>
+            <a:endParaRPr lang="en-US" sz="2400" b="1">
+              <a:solidFill>
+                <a:schemeClr val="accent1">
+                  <a:lumMod val="50000"/>
+                </a:schemeClr>
+              </a:solidFill>
+              <a:latin typeface="Consolas" panose="020B0609020204030204" pitchFamily="49" charset="0"/>
+              <a:cs typeface="Arial" panose="020B0604020202020204" pitchFamily="34" charset="0"/>
+            </a:endParaRPr>
+          </a:p>
+          <a:p>
+            <a:pPr marL="457200"/>
+            <a:r>
+              <a:rPr lang="en-US" sz="2000" b="1">
+                <a:solidFill>
+                  <a:schemeClr val="accent1">
+                    <a:lumMod val="50000"/>
+                  </a:schemeClr>
+                </a:solidFill>
+                <a:latin typeface="Consolas" panose="020B0609020204030204" pitchFamily="49" charset="0"/>
+                <a:cs typeface="Arial" panose="020B0604020202020204" pitchFamily="34" charset="0"/>
+              </a:rPr>
+              <a:t>import copy</a:t>
+            </a:r>
+          </a:p>
+          <a:p>
+            <a:pPr marL="457200"/>
+            <a:r>
+              <a:rPr lang="en-US" sz="2000" b="1">
+                <a:solidFill>
+                  <a:schemeClr val="accent1">
+                    <a:lumMod val="50000"/>
+                  </a:schemeClr>
+                </a:solidFill>
+                <a:latin typeface="Consolas" panose="020B0609020204030204" pitchFamily="49" charset="0"/>
+                <a:cs typeface="Arial" panose="020B0604020202020204" pitchFamily="34" charset="0"/>
+              </a:rPr>
+              <a:t>original_list = [[1, 2, 3], [4, 5, 6]]</a:t>
+            </a:r>
+          </a:p>
+          <a:p>
+            <a:pPr marL="457200"/>
+            <a:r>
+              <a:rPr lang="en-US" sz="2000" b="1">
+                <a:solidFill>
+                  <a:schemeClr val="accent1">
+                    <a:lumMod val="50000"/>
+                  </a:schemeClr>
+                </a:solidFill>
+                <a:latin typeface="Consolas" panose="020B0609020204030204" pitchFamily="49" charset="0"/>
+                <a:cs typeface="Arial" panose="020B0604020202020204" pitchFamily="34" charset="0"/>
+              </a:rPr>
+              <a:t>deep_copy = copy.deepcopy(original_list)</a:t>
+            </a:r>
+          </a:p>
+          <a:p>
+            <a:pPr marL="457200"/>
+            <a:endParaRPr lang="en-US" sz="2000" b="1">
+              <a:solidFill>
+                <a:schemeClr val="accent1">
+                  <a:lumMod val="50000"/>
+                </a:schemeClr>
+              </a:solidFill>
+              <a:latin typeface="Consolas" panose="020B0609020204030204" pitchFamily="49" charset="0"/>
+              <a:cs typeface="Arial" panose="020B0604020202020204" pitchFamily="34" charset="0"/>
+            </a:endParaRPr>
+          </a:p>
+          <a:p>
+            <a:pPr marL="457200"/>
+            <a:r>
+              <a:rPr lang="en-US" sz="2000" b="1">
+                <a:solidFill>
+                  <a:schemeClr val="accent1">
+                    <a:lumMod val="50000"/>
+                  </a:schemeClr>
+                </a:solidFill>
+                <a:latin typeface="Consolas" panose="020B0609020204030204" pitchFamily="49" charset="0"/>
+                <a:cs typeface="Arial" panose="020B0604020202020204" pitchFamily="34" charset="0"/>
+              </a:rPr>
+              <a:t># Modifying an inner list</a:t>
+            </a:r>
+          </a:p>
+          <a:p>
+            <a:pPr marL="457200"/>
+            <a:r>
+              <a:rPr lang="en-US" sz="2000" b="1">
+                <a:solidFill>
+                  <a:schemeClr val="accent1">
+                    <a:lumMod val="50000"/>
+                  </a:schemeClr>
+                </a:solidFill>
+                <a:latin typeface="Consolas" panose="020B0609020204030204" pitchFamily="49" charset="0"/>
+                <a:cs typeface="Arial" panose="020B0604020202020204" pitchFamily="34" charset="0"/>
+              </a:rPr>
+              <a:t>deep_copy[0][0] = 99</a:t>
+            </a:r>
+          </a:p>
+          <a:p>
+            <a:pPr marL="457200"/>
+            <a:endParaRPr lang="en-US" sz="2000" b="1">
+              <a:solidFill>
+                <a:schemeClr val="accent1">
+                  <a:lumMod val="50000"/>
+                </a:schemeClr>
+              </a:solidFill>
+              <a:latin typeface="Consolas" panose="020B0609020204030204" pitchFamily="49" charset="0"/>
+              <a:cs typeface="Arial" panose="020B0604020202020204" pitchFamily="34" charset="0"/>
+            </a:endParaRPr>
+          </a:p>
+          <a:p>
+            <a:pPr marL="457200"/>
+            <a:r>
+              <a:rPr lang="en-US" sz="2000" b="1">
+                <a:solidFill>
+                  <a:schemeClr val="accent1">
+                    <a:lumMod val="50000"/>
+                  </a:schemeClr>
+                </a:solidFill>
+                <a:latin typeface="Consolas" panose="020B0609020204030204" pitchFamily="49" charset="0"/>
+                <a:cs typeface="Arial" panose="020B0604020202020204" pitchFamily="34" charset="0"/>
+              </a:rPr>
+              <a:t>print(original_list)  # Output: [[1, 2, 3], [4, 5, 6]]  (Unchanged)</a:t>
+            </a:r>
+          </a:p>
+          <a:p>
+            <a:pPr marL="457200"/>
+            <a:r>
+              <a:rPr lang="en-US" sz="2000" b="1">
+                <a:solidFill>
+                  <a:schemeClr val="accent1">
+                    <a:lumMod val="50000"/>
+                  </a:schemeClr>
+                </a:solidFill>
+                <a:latin typeface="Consolas" panose="020B0609020204030204" pitchFamily="49" charset="0"/>
+                <a:cs typeface="Arial" panose="020B0604020202020204" pitchFamily="34" charset="0"/>
+              </a:rPr>
+              <a:t>print(deep_copy)      # Output: [[99, 2, 3], [4, 5, 6]]  (Modified)</a:t>
+            </a:r>
+          </a:p>
+        </p:txBody>
+      </p:sp>
+    </p:spTree>
+    <p:extLst>
+      <p:ext uri="{BB962C8B-B14F-4D97-AF65-F5344CB8AC3E}">
+        <p14:creationId xmlns:p14="http://schemas.microsoft.com/office/powerpoint/2010/main" val="1739654273"/>
+      </p:ext>
+    </p:extLst>
+  </p:cSld>
+  <p:clrMapOvr>
+    <a:masterClrMapping/>
+  </p:clrMapOvr>
+</p:sld>
+</file>
+
+<file path=ppt/slides/slide13.xml><?xml version="1.0" encoding="utf-8"?>
+<p:sld xmlns:a="http://schemas.openxmlformats.org/drawingml/2006/main" xmlns:r="http://schemas.openxmlformats.org/officeDocument/2006/relationships" xmlns:p="http://schemas.openxmlformats.org/presentationml/2006/main">
+  <p:cSld>
+    <p:spTree>
+      <p:nvGrpSpPr>
+        <p:cNvPr id="1" name="">
+          <a:extLst>
+            <a:ext uri="{FF2B5EF4-FFF2-40B4-BE49-F238E27FC236}">
+              <a16:creationId xmlns:a16="http://schemas.microsoft.com/office/drawing/2014/main" id="{38A6AAEF-67B5-DA56-3F7D-D718B0002B84}"/>
+            </a:ext>
+          </a:extLst>
+        </p:cNvPr>
+        <p:cNvGrpSpPr/>
+        <p:nvPr/>
+      </p:nvGrpSpPr>
+      <p:grpSpPr>
+        <a:xfrm>
+          <a:off x="0" y="0"/>
+          <a:ext cx="0" cy="0"/>
+          <a:chOff x="0" y="0"/>
+          <a:chExt cx="0" cy="0"/>
+        </a:xfrm>
+      </p:grpSpPr>
+      <p:pic>
+        <p:nvPicPr>
+          <p:cNvPr id="3" name="Picture 2" descr="A white and blue background&#10;&#10;Description automatically generated">
+            <a:extLst>
+              <a:ext uri="{FF2B5EF4-FFF2-40B4-BE49-F238E27FC236}">
+                <a16:creationId xmlns:a16="http://schemas.microsoft.com/office/drawing/2014/main" id="{9FF758E4-E181-0F79-4E1C-1E66B093AA5B}"/>
+              </a:ext>
+            </a:extLst>
+          </p:cNvPr>
+          <p:cNvPicPr>
+            <a:picLocks noChangeAspect="1"/>
+          </p:cNvPicPr>
+          <p:nvPr/>
+        </p:nvPicPr>
+        <p:blipFill>
+          <a:blip r:embed="rId2"/>
+          <a:stretch>
+            <a:fillRect/>
+          </a:stretch>
+        </p:blipFill>
+        <p:spPr>
+          <a:xfrm>
+            <a:off x="112427" y="-269823"/>
+            <a:ext cx="12192000" cy="6891129"/>
+          </a:xfrm>
+          <a:prstGeom prst="rect">
+            <a:avLst/>
+          </a:prstGeom>
+        </p:spPr>
+      </p:pic>
+      <p:sp>
+        <p:nvSpPr>
+          <p:cNvPr id="4" name="TextBox 3">
+            <a:extLst>
+              <a:ext uri="{FF2B5EF4-FFF2-40B4-BE49-F238E27FC236}">
+                <a16:creationId xmlns:a16="http://schemas.microsoft.com/office/drawing/2014/main" id="{40F61035-2F11-D950-B3A8-A720C420C78E}"/>
+              </a:ext>
+            </a:extLst>
+          </p:cNvPr>
+          <p:cNvSpPr txBox="1"/>
+          <p:nvPr/>
+        </p:nvSpPr>
+        <p:spPr>
+          <a:xfrm>
+            <a:off x="604266" y="136955"/>
+            <a:ext cx="10391019" cy="646331"/>
+          </a:xfrm>
+          <a:prstGeom prst="rect">
+            <a:avLst/>
+          </a:prstGeom>
+          <a:noFill/>
+        </p:spPr>
+        <p:txBody>
+          <a:bodyPr wrap="square" rtlCol="0">
+            <a:spAutoFit/>
+          </a:bodyPr>
+          <a:lstStyle/>
+          <a:p>
+            <a:pPr marL="457200" indent="-457200">
+              <a:buFont typeface="+mj-lt"/>
+              <a:buAutoNum type="arabicPeriod"/>
+            </a:pPr>
+            <a:r>
+              <a:rPr lang="en-US" sz="3600">
+                <a:solidFill>
+                  <a:schemeClr val="accent1">
+                    <a:lumMod val="50000"/>
+                  </a:schemeClr>
+                </a:solidFill>
+                <a:latin typeface="Arial" panose="020B0604020202020204" pitchFamily="34" charset="0"/>
+                <a:cs typeface="Arial" panose="020B0604020202020204" pitchFamily="34" charset="0"/>
+              </a:rPr>
+              <a:t>Loops, Lists, Tuples, and Dictionaries</a:t>
+            </a:r>
+          </a:p>
+        </p:txBody>
+      </p:sp>
+      <p:sp>
+        <p:nvSpPr>
+          <p:cNvPr id="5" name="TextBox 4">
+            <a:extLst>
+              <a:ext uri="{FF2B5EF4-FFF2-40B4-BE49-F238E27FC236}">
+                <a16:creationId xmlns:a16="http://schemas.microsoft.com/office/drawing/2014/main" id="{89574967-AED0-16E6-85AB-FDEB7F994609}"/>
+              </a:ext>
+            </a:extLst>
+          </p:cNvPr>
+          <p:cNvSpPr txBox="1"/>
+          <p:nvPr/>
+        </p:nvSpPr>
+        <p:spPr>
+          <a:xfrm>
+            <a:off x="776653" y="876991"/>
+            <a:ext cx="10323564" cy="5632311"/>
+          </a:xfrm>
+          <a:prstGeom prst="rect">
+            <a:avLst/>
+          </a:prstGeom>
+          <a:noFill/>
+        </p:spPr>
+        <p:txBody>
+          <a:bodyPr wrap="square" rtlCol="0">
+            <a:spAutoFit/>
+          </a:bodyPr>
+          <a:lstStyle/>
+          <a:p>
+            <a:pPr marL="457200" indent="-457200">
+              <a:buFont typeface="Arial" panose="020B0604020202020204" pitchFamily="34" charset="0"/>
+              <a:buChar char="•"/>
+            </a:pPr>
+            <a:r>
+              <a:rPr lang="en-US" sz="2400">
+                <a:solidFill>
+                  <a:schemeClr val="accent1">
+                    <a:lumMod val="50000"/>
+                  </a:schemeClr>
+                </a:solidFill>
+                <a:latin typeface="Arial" panose="020B0604020202020204" pitchFamily="34" charset="0"/>
+                <a:cs typeface="Arial" panose="020B0604020202020204" pitchFamily="34" charset="0"/>
+              </a:rPr>
+              <a:t>Secure Iteration Practices</a:t>
             </a:r>
           </a:p>
           <a:p>
@@ -3563,25 +4729,7 @@
                 <a:latin typeface="Arial" panose="020B0604020202020204" pitchFamily="34" charset="0"/>
                 <a:cs typeface="Arial" panose="020B0604020202020204" pitchFamily="34" charset="0"/>
               </a:rPr>
-              <a:t>secure randomization</a:t>
-            </a:r>
-          </a:p>
-          <a:p>
-            <a:pPr marL="457200" indent="-457200">
-              <a:buFont typeface="+mj-lt"/>
-              <a:buAutoNum type="arabicPeriod"/>
-            </a:pPr>
-            <a:r>
-              <a:rPr lang="en-US" sz="2400">
-                <a:solidFill>
-                  <a:schemeClr val="accent1">
-                    <a:lumMod val="50000"/>
-                  </a:schemeClr>
-                </a:solidFill>
-                <a:latin typeface="Arial" panose="020B0604020202020204" pitchFamily="34" charset="0"/>
-                <a:cs typeface="Arial" panose="020B0604020202020204" pitchFamily="34" charset="0"/>
-              </a:rPr>
-              <a:t>Functions, Modules, Classes, and Exceptions</a:t>
+              <a:t>Avoid infinite loops and ensuring proper termination</a:t>
             </a:r>
           </a:p>
           <a:p>
@@ -3599,13 +4747,13 @@
                 <a:latin typeface="Arial" panose="020B0604020202020204" pitchFamily="34" charset="0"/>
                 <a:cs typeface="Arial" panose="020B0604020202020204" pitchFamily="34" charset="0"/>
               </a:rPr>
-              <a:t>Secure design principles in modular programming</a:t>
+              <a:t>Use generator expressions for memory-efficient iteration</a:t>
             </a:r>
           </a:p>
           <a:p>
             <a:pPr marL="457200" indent="-457200">
-              <a:buFont typeface="+mj-lt"/>
-              <a:buAutoNum type="arabicPeriod"/>
+              <a:buFont typeface="Arial" panose="020B0604020202020204" pitchFamily="34" charset="0"/>
+              <a:buChar char="•"/>
             </a:pPr>
             <a:r>
               <a:rPr lang="en-US" sz="2400">
@@ -3617,7 +4765,7 @@
                 <a:latin typeface="Arial" panose="020B0604020202020204" pitchFamily="34" charset="0"/>
                 <a:cs typeface="Arial" panose="020B0604020202020204" pitchFamily="34" charset="0"/>
               </a:rPr>
-              <a:t>Secure Error Handling:</a:t>
+              <a:t>Lists and Tuples: Security Considerations</a:t>
             </a:r>
           </a:p>
           <a:p>
@@ -3635,7 +4783,7 @@
                 <a:latin typeface="Arial" panose="020B0604020202020204" pitchFamily="34" charset="0"/>
                 <a:cs typeface="Arial" panose="020B0604020202020204" pitchFamily="34" charset="0"/>
               </a:rPr>
-              <a:t>Avoiding information leakage</a:t>
+              <a:t>Prevent unintended data modifications in lists</a:t>
             </a:r>
           </a:p>
           <a:p>
@@ -3653,7 +4801,169 @@
                 <a:latin typeface="Arial" panose="020B0604020202020204" pitchFamily="34" charset="0"/>
                 <a:cs typeface="Arial" panose="020B0604020202020204" pitchFamily="34" charset="0"/>
               </a:rPr>
-              <a:t>Logging errors securely</a:t>
+              <a:t>Use tuples for immutable, security-sensitive data</a:t>
+            </a:r>
+          </a:p>
+          <a:p>
+            <a:pPr marL="914400" lvl="1" indent="-457200">
+              <a:buFont typeface="Arial" panose="020B0604020202020204" pitchFamily="34" charset="0"/>
+              <a:buChar char="•"/>
+            </a:pPr>
+            <a:r>
+              <a:rPr lang="en-US" sz="2400">
+                <a:solidFill>
+                  <a:schemeClr val="accent1">
+                    <a:lumMod val="50000"/>
+                  </a:schemeClr>
+                </a:solidFill>
+                <a:latin typeface="Arial" panose="020B0604020202020204" pitchFamily="34" charset="0"/>
+                <a:cs typeface="Arial" panose="020B0604020202020204" pitchFamily="34" charset="0"/>
+              </a:rPr>
+              <a:t>Avoid index errors and boundary overflows</a:t>
+            </a:r>
+          </a:p>
+          <a:p>
+            <a:pPr marL="457200" indent="-457200">
+              <a:buFont typeface="Arial" panose="020B0604020202020204" pitchFamily="34" charset="0"/>
+              <a:buChar char="•"/>
+            </a:pPr>
+            <a:r>
+              <a:rPr lang="en-US" sz="2400">
+                <a:solidFill>
+                  <a:schemeClr val="accent1">
+                    <a:lumMod val="50000"/>
+                  </a:schemeClr>
+                </a:solidFill>
+                <a:latin typeface="Arial" panose="020B0604020202020204" pitchFamily="34" charset="0"/>
+                <a:cs typeface="Arial" panose="020B0604020202020204" pitchFamily="34" charset="0"/>
+              </a:rPr>
+              <a:t>Dictionaries and Secure Data Handling</a:t>
+            </a:r>
+          </a:p>
+          <a:p>
+            <a:pPr marL="914400" lvl="1" indent="-457200">
+              <a:buFont typeface="Arial" panose="020B0604020202020204" pitchFamily="34" charset="0"/>
+              <a:buChar char="•"/>
+            </a:pPr>
+            <a:r>
+              <a:rPr lang="en-US" sz="2400">
+                <a:solidFill>
+                  <a:schemeClr val="accent1">
+                    <a:lumMod val="50000"/>
+                  </a:schemeClr>
+                </a:solidFill>
+                <a:latin typeface="Arial" panose="020B0604020202020204" pitchFamily="34" charset="0"/>
+                <a:cs typeface="Arial" panose="020B0604020202020204" pitchFamily="34" charset="0"/>
+              </a:rPr>
+              <a:t>Prevent key collisions in sensitive data</a:t>
+            </a:r>
+          </a:p>
+          <a:p>
+            <a:pPr marL="914400" lvl="1" indent="-457200">
+              <a:buFont typeface="Arial" panose="020B0604020202020204" pitchFamily="34" charset="0"/>
+              <a:buChar char="•"/>
+            </a:pPr>
+            <a:r>
+              <a:rPr lang="en-US" sz="2400">
+                <a:solidFill>
+                  <a:schemeClr val="accent1">
+                    <a:lumMod val="50000"/>
+                  </a:schemeClr>
+                </a:solidFill>
+                <a:latin typeface="Arial" panose="020B0604020202020204" pitchFamily="34" charset="0"/>
+                <a:cs typeface="Arial" panose="020B0604020202020204" pitchFamily="34" charset="0"/>
+              </a:rPr>
+              <a:t>Handle missing keys securely to avoid runtime errors</a:t>
+            </a:r>
+          </a:p>
+          <a:p>
+            <a:pPr marL="914400" lvl="1" indent="-457200">
+              <a:buFont typeface="Arial" panose="020B0604020202020204" pitchFamily="34" charset="0"/>
+              <a:buChar char="•"/>
+            </a:pPr>
+            <a:r>
+              <a:rPr lang="en-US" sz="2400">
+                <a:solidFill>
+                  <a:schemeClr val="accent1">
+                    <a:lumMod val="50000"/>
+                  </a:schemeClr>
+                </a:solidFill>
+                <a:latin typeface="Arial" panose="020B0604020202020204" pitchFamily="34" charset="0"/>
+                <a:cs typeface="Arial" panose="020B0604020202020204" pitchFamily="34" charset="0"/>
+              </a:rPr>
+              <a:t>Use defaultdict and exception handling for safe lookups</a:t>
+            </a:r>
+          </a:p>
+          <a:p>
+            <a:pPr marL="457200" indent="-457200">
+              <a:buFont typeface="Arial" panose="020B0604020202020204" pitchFamily="34" charset="0"/>
+              <a:buChar char="•"/>
+            </a:pPr>
+            <a:r>
+              <a:rPr lang="en-US" sz="2400">
+                <a:solidFill>
+                  <a:schemeClr val="accent1">
+                    <a:lumMod val="50000"/>
+                  </a:schemeClr>
+                </a:solidFill>
+                <a:latin typeface="Arial" panose="020B0604020202020204" pitchFamily="34" charset="0"/>
+                <a:cs typeface="Arial" panose="020B0604020202020204" pitchFamily="34" charset="0"/>
+              </a:rPr>
+              <a:t>Mitigating Risks in Data Structures</a:t>
+            </a:r>
+          </a:p>
+          <a:p>
+            <a:pPr marL="914400" lvl="1" indent="-457200">
+              <a:buFont typeface="Arial" panose="020B0604020202020204" pitchFamily="34" charset="0"/>
+              <a:buChar char="•"/>
+            </a:pPr>
+            <a:r>
+              <a:rPr lang="en-US" sz="2400">
+                <a:solidFill>
+                  <a:schemeClr val="accent1">
+                    <a:lumMod val="50000"/>
+                  </a:schemeClr>
+                </a:solidFill>
+                <a:latin typeface="Arial" panose="020B0604020202020204" pitchFamily="34" charset="0"/>
+                <a:cs typeface="Arial" panose="020B0604020202020204" pitchFamily="34" charset="0"/>
+              </a:rPr>
+              <a:t>Avoid mutable default arguments in function definitions</a:t>
+            </a:r>
+          </a:p>
+          <a:p>
+            <a:pPr marL="914400" lvl="1" indent="-457200">
+              <a:buFont typeface="Arial" panose="020B0604020202020204" pitchFamily="34" charset="0"/>
+              <a:buChar char="•"/>
+            </a:pPr>
+            <a:r>
+              <a:rPr lang="en-US" sz="2400">
+                <a:solidFill>
+                  <a:schemeClr val="accent1">
+                    <a:lumMod val="50000"/>
+                  </a:schemeClr>
+                </a:solidFill>
+                <a:latin typeface="Arial" panose="020B0604020202020204" pitchFamily="34" charset="0"/>
+                <a:cs typeface="Arial" panose="020B0604020202020204" pitchFamily="34" charset="0"/>
+              </a:rPr>
+              <a:t>Prevent race conditions when modifying shared data</a:t>
+            </a:r>
+          </a:p>
+          <a:p>
+            <a:pPr marL="914400" lvl="1" indent="-457200">
+              <a:buFont typeface="Arial" panose="020B0604020202020204" pitchFamily="34" charset="0"/>
+              <a:buChar char="•"/>
+            </a:pPr>
+            <a:r>
+              <a:rPr lang="en-US" sz="2400">
+                <a:solidFill>
+                  <a:schemeClr val="accent1">
+                    <a:lumMod val="50000"/>
+                  </a:schemeClr>
+                </a:solidFill>
+                <a:latin typeface="Arial" panose="020B0604020202020204" pitchFamily="34" charset="0"/>
+                <a:cs typeface="Arial" panose="020B0604020202020204" pitchFamily="34" charset="0"/>
+              </a:rPr>
+              <a:t>Use secure hashing techniques for dictionary keys</a:t>
             </a:r>
           </a:p>
         </p:txBody>
@@ -3661,7 +4971,7 @@
     </p:spTree>
     <p:extLst>
       <p:ext uri="{BB962C8B-B14F-4D97-AF65-F5344CB8AC3E}">
-        <p14:creationId xmlns:p14="http://schemas.microsoft.com/office/powerpoint/2010/main" val="1171906858"/>
+        <p14:creationId xmlns:p14="http://schemas.microsoft.com/office/powerpoint/2010/main" val="2144214793"/>
       </p:ext>
     </p:extLst>
   </p:cSld>
@@ -3716,7 +5026,7 @@
         </p:blipFill>
         <p:spPr>
           <a:xfrm>
-            <a:off x="-179881" y="-116295"/>
+            <a:off x="0" y="-33129"/>
             <a:ext cx="12192000" cy="6891129"/>
           </a:xfrm>
           <a:prstGeom prst="rect">
@@ -3738,7 +5048,7 @@
         </p:nvSpPr>
         <p:spPr>
           <a:xfrm>
-            <a:off x="589277" y="-110431"/>
+            <a:off x="589277" y="83166"/>
             <a:ext cx="10391019" cy="646331"/>
           </a:xfrm>
           <a:prstGeom prst="rect">
@@ -3781,8 +5091,8 @@
         </p:nvSpPr>
         <p:spPr>
           <a:xfrm>
-            <a:off x="589277" y="535900"/>
-            <a:ext cx="11422842" cy="5786199"/>
+            <a:off x="589277" y="805501"/>
+            <a:ext cx="11422842" cy="5047536"/>
           </a:xfrm>
           <a:prstGeom prst="rect">
             <a:avLst/>
@@ -3817,21 +5127,6 @@
               <a:buFont typeface="Arial" panose="020B0604020202020204" pitchFamily="34" charset="0"/>
               <a:buChar char="•"/>
             </a:pPr>
-            <a:endParaRPr lang="en-US" sz="2400">
-              <a:solidFill>
-                <a:schemeClr val="accent1">
-                  <a:lumMod val="50000"/>
-                </a:schemeClr>
-              </a:solidFill>
-              <a:latin typeface="Arial" panose="020B0604020202020204" pitchFamily="34" charset="0"/>
-              <a:cs typeface="Arial" panose="020B0604020202020204" pitchFamily="34" charset="0"/>
-            </a:endParaRPr>
-          </a:p>
-          <a:p>
-            <a:pPr marL="231775" lvl="1" indent="-231775">
-              <a:buFont typeface="Arial" panose="020B0604020202020204" pitchFamily="34" charset="0"/>
-              <a:buChar char="•"/>
-            </a:pPr>
             <a:r>
               <a:rPr lang="en-US" sz="2400">
                 <a:solidFill>
@@ -3844,21 +5139,6 @@
               </a:rPr>
               <a:t>Infinite loops can cause a program to become unresponsive, consume excessive system resources, or create security vulnerabilities such as denial-of-service (DoS) risks. </a:t>
             </a:r>
-          </a:p>
-          <a:p>
-            <a:pPr marL="231775" lvl="1" indent="-231775">
-              <a:buFont typeface="Arial" panose="020B0604020202020204" pitchFamily="34" charset="0"/>
-              <a:buChar char="•"/>
-            </a:pPr>
-            <a:endParaRPr lang="en-US" sz="2400">
-              <a:solidFill>
-                <a:schemeClr val="accent1">
-                  <a:lumMod val="50000"/>
-                </a:schemeClr>
-              </a:solidFill>
-              <a:latin typeface="Arial" panose="020B0604020202020204" pitchFamily="34" charset="0"/>
-              <a:cs typeface="Arial" panose="020B0604020202020204" pitchFamily="34" charset="0"/>
-            </a:endParaRPr>
           </a:p>
           <a:p>
             <a:pPr marL="231775" lvl="1" indent="-231775">
@@ -4058,7 +5338,7 @@
         </p:blipFill>
         <p:spPr>
           <a:xfrm>
-            <a:off x="-123838" y="-352269"/>
+            <a:off x="0" y="0"/>
             <a:ext cx="12192000" cy="6867117"/>
           </a:xfrm>
           <a:prstGeom prst="rect">
@@ -4080,7 +5360,7 @@
         </p:nvSpPr>
         <p:spPr>
           <a:xfrm>
-            <a:off x="776653" y="-68494"/>
+            <a:off x="604266" y="118883"/>
             <a:ext cx="10391019" cy="646331"/>
           </a:xfrm>
           <a:prstGeom prst="rect">
@@ -4123,8 +5403,8 @@
         </p:nvSpPr>
         <p:spPr>
           <a:xfrm>
-            <a:off x="776653" y="601685"/>
-            <a:ext cx="11155517" cy="6001643"/>
+            <a:off x="776653" y="861612"/>
+            <a:ext cx="11155517" cy="3416320"/>
           </a:xfrm>
           <a:prstGeom prst="rect">
             <a:avLst/>
@@ -4193,6 +5473,36 @@
                 <a:latin typeface="Consolas" panose="020B0609020204030204" pitchFamily="49" charset="0"/>
                 <a:cs typeface="Arial" panose="020B0604020202020204" pitchFamily="34" charset="0"/>
               </a:rPr>
+              <a:t>    # processing steps ...</a:t>
+            </a:r>
+          </a:p>
+          <a:p>
+            <a:pPr lvl="1"/>
+            <a:r>
+              <a:rPr lang="en-US" sz="2400" b="1">
+                <a:solidFill>
+                  <a:schemeClr val="accent1">
+                    <a:lumMod val="50000"/>
+                  </a:schemeClr>
+                </a:solidFill>
+                <a:latin typeface="Consolas" panose="020B0609020204030204" pitchFamily="49" charset="0"/>
+                <a:cs typeface="Arial" panose="020B0604020202020204" pitchFamily="34" charset="0"/>
+              </a:rPr>
+              <a:t>    #</a:t>
+            </a:r>
+          </a:p>
+          <a:p>
+            <a:pPr lvl="1"/>
+            <a:r>
+              <a:rPr lang="en-US" sz="2400" b="1">
+                <a:solidFill>
+                  <a:schemeClr val="accent1">
+                    <a:lumMod val="50000"/>
+                  </a:schemeClr>
+                </a:solidFill>
+                <a:latin typeface="Consolas" panose="020B0609020204030204" pitchFamily="49" charset="0"/>
+                <a:cs typeface="Arial" panose="020B0604020202020204" pitchFamily="34" charset="0"/>
+              </a:rPr>
               <a:t>    user_input = input("Enter 'exit' to stop: ")</a:t>
             </a:r>
           </a:p>
@@ -4225,114 +5535,6 @@
               </a:rPr>
               <a:t>        break  # Ensure termination</a:t>
             </a:r>
-            <a:endParaRPr lang="en-US" sz="2400" b="1">
-              <a:solidFill>
-                <a:schemeClr val="accent1">
-                  <a:lumMod val="50000"/>
-                </a:schemeClr>
-              </a:solidFill>
-              <a:latin typeface="Arial" panose="020B0604020202020204" pitchFamily="34" charset="0"/>
-              <a:cs typeface="Arial" panose="020B0604020202020204" pitchFamily="34" charset="0"/>
-            </a:endParaRPr>
-          </a:p>
-          <a:p>
-            <a:pPr lvl="1"/>
-            <a:endParaRPr lang="en-US" sz="2400" b="1">
-              <a:solidFill>
-                <a:schemeClr val="accent1">
-                  <a:lumMod val="50000"/>
-                </a:schemeClr>
-              </a:solidFill>
-              <a:latin typeface="Arial" panose="020B0604020202020204" pitchFamily="34" charset="0"/>
-              <a:cs typeface="Arial" panose="020B0604020202020204" pitchFamily="34" charset="0"/>
-            </a:endParaRPr>
-          </a:p>
-          <a:p>
-            <a:pPr lvl="1"/>
-            <a:endParaRPr lang="en-US" sz="2400" b="1">
-              <a:solidFill>
-                <a:schemeClr val="accent1">
-                  <a:lumMod val="50000"/>
-                </a:schemeClr>
-              </a:solidFill>
-              <a:latin typeface="Arial" panose="020B0604020202020204" pitchFamily="34" charset="0"/>
-              <a:cs typeface="Arial" panose="020B0604020202020204" pitchFamily="34" charset="0"/>
-            </a:endParaRPr>
-          </a:p>
-          <a:p>
-            <a:pPr lvl="1"/>
-            <a:endParaRPr lang="en-US" sz="2400" b="1">
-              <a:solidFill>
-                <a:schemeClr val="accent1">
-                  <a:lumMod val="50000"/>
-                </a:schemeClr>
-              </a:solidFill>
-              <a:latin typeface="Arial" panose="020B0604020202020204" pitchFamily="34" charset="0"/>
-              <a:cs typeface="Arial" panose="020B0604020202020204" pitchFamily="34" charset="0"/>
-            </a:endParaRPr>
-          </a:p>
-          <a:p>
-            <a:pPr lvl="1"/>
-            <a:endParaRPr lang="en-US" sz="2400" b="1">
-              <a:solidFill>
-                <a:schemeClr val="accent1">
-                  <a:lumMod val="50000"/>
-                </a:schemeClr>
-              </a:solidFill>
-              <a:latin typeface="Arial" panose="020B0604020202020204" pitchFamily="34" charset="0"/>
-              <a:cs typeface="Arial" panose="020B0604020202020204" pitchFamily="34" charset="0"/>
-            </a:endParaRPr>
-          </a:p>
-          <a:p>
-            <a:pPr lvl="1"/>
-            <a:endParaRPr lang="en-US" sz="2400" b="1">
-              <a:solidFill>
-                <a:schemeClr val="accent1">
-                  <a:lumMod val="50000"/>
-                </a:schemeClr>
-              </a:solidFill>
-              <a:latin typeface="Arial" panose="020B0604020202020204" pitchFamily="34" charset="0"/>
-              <a:cs typeface="Arial" panose="020B0604020202020204" pitchFamily="34" charset="0"/>
-            </a:endParaRPr>
-          </a:p>
-          <a:p>
-            <a:pPr lvl="1"/>
-            <a:endParaRPr lang="en-US" sz="2400" b="1">
-              <a:solidFill>
-                <a:schemeClr val="accent1">
-                  <a:lumMod val="50000"/>
-                </a:schemeClr>
-              </a:solidFill>
-              <a:latin typeface="Arial" panose="020B0604020202020204" pitchFamily="34" charset="0"/>
-              <a:cs typeface="Arial" panose="020B0604020202020204" pitchFamily="34" charset="0"/>
-            </a:endParaRPr>
-          </a:p>
-          <a:p>
-            <a:pPr lvl="1"/>
-            <a:endParaRPr lang="en-US" sz="2400" b="1">
-              <a:solidFill>
-                <a:schemeClr val="accent1">
-                  <a:lumMod val="50000"/>
-                </a:schemeClr>
-              </a:solidFill>
-              <a:latin typeface="Arial" panose="020B0604020202020204" pitchFamily="34" charset="0"/>
-              <a:cs typeface="Arial" panose="020B0604020202020204" pitchFamily="34" charset="0"/>
-            </a:endParaRPr>
-          </a:p>
-          <a:p>
-            <a:pPr lvl="1"/>
-            <a:endParaRPr lang="en-US" sz="2400" b="1">
-              <a:solidFill>
-                <a:schemeClr val="accent1">
-                  <a:lumMod val="50000"/>
-                </a:schemeClr>
-              </a:solidFill>
-              <a:latin typeface="Arial" panose="020B0604020202020204" pitchFamily="34" charset="0"/>
-              <a:cs typeface="Arial" panose="020B0604020202020204" pitchFamily="34" charset="0"/>
-            </a:endParaRPr>
-          </a:p>
-          <a:p>
-            <a:pPr lvl="1"/>
             <a:endParaRPr lang="en-US" sz="2400" b="1">
               <a:solidFill>
                 <a:schemeClr val="accent1">
@@ -4437,7 +5639,7 @@
         </p:nvSpPr>
         <p:spPr>
           <a:xfrm>
-            <a:off x="776652" y="-50812"/>
+            <a:off x="776651" y="109951"/>
             <a:ext cx="10391019" cy="646331"/>
           </a:xfrm>
           <a:prstGeom prst="rect">
@@ -4480,7 +5682,7 @@
         </p:nvSpPr>
         <p:spPr>
           <a:xfrm>
-            <a:off x="810380" y="680430"/>
+            <a:off x="810379" y="882797"/>
             <a:ext cx="10323564" cy="4893647"/>
           </a:xfrm>
           <a:prstGeom prst="rect">
@@ -4743,7 +5945,7 @@
         </p:nvSpPr>
         <p:spPr>
           <a:xfrm>
-            <a:off x="776653" y="0"/>
+            <a:off x="776653" y="214893"/>
             <a:ext cx="10391019" cy="646331"/>
           </a:xfrm>
           <a:prstGeom prst="rect">
@@ -4786,7 +5988,7 @@
         </p:nvSpPr>
         <p:spPr>
           <a:xfrm>
-            <a:off x="776653" y="798798"/>
+            <a:off x="776653" y="1076116"/>
             <a:ext cx="10323564" cy="4154984"/>
           </a:xfrm>
           <a:prstGeom prst="rect">
@@ -4832,7 +6034,7 @@
                 <a:latin typeface="Arial" panose="020B0604020202020204" pitchFamily="34" charset="0"/>
                 <a:cs typeface="Arial" panose="020B0604020202020204" pitchFamily="34" charset="0"/>
               </a:rPr>
-              <a:t>secure_generator produces one value at a time instead of returning an entire list</a:t>
+              <a:t>The secure_generator function below produces one value at a time instead of returning an entire list</a:t>
             </a:r>
           </a:p>
           <a:p>
@@ -4950,6 +6152,368 @@
 </file>
 
 <file path=ppt/slides/slide6.xml><?xml version="1.0" encoding="utf-8"?>
+<p:sld xmlns:a="http://schemas.openxmlformats.org/drawingml/2006/main" xmlns:r="http://schemas.openxmlformats.org/officeDocument/2006/relationships" xmlns:p="http://schemas.openxmlformats.org/presentationml/2006/main">
+  <p:cSld>
+    <p:spTree>
+      <p:nvGrpSpPr>
+        <p:cNvPr id="1" name="">
+          <a:extLst>
+            <a:ext uri="{FF2B5EF4-FFF2-40B4-BE49-F238E27FC236}">
+              <a16:creationId xmlns:a16="http://schemas.microsoft.com/office/drawing/2014/main" id="{2B9163FA-A386-561F-EF9F-D2D579138625}"/>
+            </a:ext>
+          </a:extLst>
+        </p:cNvPr>
+        <p:cNvGrpSpPr/>
+        <p:nvPr/>
+      </p:nvGrpSpPr>
+      <p:grpSpPr>
+        <a:xfrm>
+          <a:off x="0" y="0"/>
+          <a:ext cx="0" cy="0"/>
+          <a:chOff x="0" y="0"/>
+          <a:chExt cx="0" cy="0"/>
+        </a:xfrm>
+      </p:grpSpPr>
+      <p:pic>
+        <p:nvPicPr>
+          <p:cNvPr id="3" name="Picture 2" descr="A white and blue background&#10;&#10;Description automatically generated">
+            <a:extLst>
+              <a:ext uri="{FF2B5EF4-FFF2-40B4-BE49-F238E27FC236}">
+                <a16:creationId xmlns:a16="http://schemas.microsoft.com/office/drawing/2014/main" id="{7E3DA21F-F53E-14D7-DBCD-914AC9CC3E34}"/>
+              </a:ext>
+            </a:extLst>
+          </p:cNvPr>
+          <p:cNvPicPr>
+            <a:picLocks noChangeAspect="1"/>
+          </p:cNvPicPr>
+          <p:nvPr/>
+        </p:nvPicPr>
+        <p:blipFill>
+          <a:blip r:embed="rId2"/>
+          <a:stretch>
+            <a:fillRect/>
+          </a:stretch>
+        </p:blipFill>
+        <p:spPr>
+          <a:xfrm>
+            <a:off x="0" y="-33129"/>
+            <a:ext cx="12192000" cy="6891129"/>
+          </a:xfrm>
+          <a:prstGeom prst="rect">
+            <a:avLst/>
+          </a:prstGeom>
+        </p:spPr>
+      </p:pic>
+      <p:sp>
+        <p:nvSpPr>
+          <p:cNvPr id="4" name="TextBox 3">
+            <a:extLst>
+              <a:ext uri="{FF2B5EF4-FFF2-40B4-BE49-F238E27FC236}">
+                <a16:creationId xmlns:a16="http://schemas.microsoft.com/office/drawing/2014/main" id="{B89F8A25-0C68-33E6-8C7B-D009F507567C}"/>
+              </a:ext>
+            </a:extLst>
+          </p:cNvPr>
+          <p:cNvSpPr txBox="1"/>
+          <p:nvPr/>
+        </p:nvSpPr>
+        <p:spPr>
+          <a:xfrm>
+            <a:off x="604266" y="136955"/>
+            <a:ext cx="10391019" cy="646331"/>
+          </a:xfrm>
+          <a:prstGeom prst="rect">
+            <a:avLst/>
+          </a:prstGeom>
+          <a:noFill/>
+        </p:spPr>
+        <p:txBody>
+          <a:bodyPr wrap="square" rtlCol="0">
+            <a:spAutoFit/>
+          </a:bodyPr>
+          <a:lstStyle/>
+          <a:p>
+            <a:r>
+              <a:rPr lang="en-US" sz="3600">
+                <a:solidFill>
+                  <a:schemeClr val="accent1">
+                    <a:lumMod val="50000"/>
+                  </a:schemeClr>
+                </a:solidFill>
+                <a:latin typeface="Arial" panose="020B0604020202020204" pitchFamily="34" charset="0"/>
+                <a:cs typeface="Arial" panose="020B0604020202020204" pitchFamily="34" charset="0"/>
+              </a:rPr>
+              <a:t>Lists and Tuples: Security Considerations</a:t>
+            </a:r>
+          </a:p>
+        </p:txBody>
+      </p:sp>
+      <p:graphicFrame>
+        <p:nvGraphicFramePr>
+          <p:cNvPr id="9" name="Table 8">
+            <a:extLst>
+              <a:ext uri="{FF2B5EF4-FFF2-40B4-BE49-F238E27FC236}">
+                <a16:creationId xmlns:a16="http://schemas.microsoft.com/office/drawing/2014/main" id="{161C0A04-0631-BFA6-BA31-53599D9330C2}"/>
+              </a:ext>
+            </a:extLst>
+          </p:cNvPr>
+          <p:cNvGraphicFramePr>
+            <a:graphicFrameLocks noGrp="1"/>
+          </p:cNvGraphicFramePr>
+          <p:nvPr>
+            <p:extLst>
+              <p:ext uri="{D42A27DB-BD31-4B8C-83A1-F6EECF244321}">
+                <p14:modId xmlns:p14="http://schemas.microsoft.com/office/powerpoint/2010/main" val="3090539159"/>
+              </p:ext>
+            </p:extLst>
+          </p:nvPr>
+        </p:nvGraphicFramePr>
+        <p:xfrm>
+          <a:off x="1070547" y="1416490"/>
+          <a:ext cx="9699886" cy="4085524"/>
+        </p:xfrm>
+        <a:graphic>
+          <a:graphicData uri="http://schemas.openxmlformats.org/drawingml/2006/table">
+            <a:tbl>
+              <a:tblPr firstRow="1" bandRow="1" bandCol="1">
+                <a:tableStyleId>{69012ECD-51FC-41F1-AA8D-1B2483CD663E}</a:tableStyleId>
+              </a:tblPr>
+              <a:tblGrid>
+                <a:gridCol w="4849943">
+                  <a:extLst>
+                    <a:ext uri="{9D8B030D-6E8A-4147-A177-3AD203B41FA5}">
+                      <a16:colId xmlns:a16="http://schemas.microsoft.com/office/drawing/2014/main" val="899938849"/>
+                    </a:ext>
+                  </a:extLst>
+                </a:gridCol>
+                <a:gridCol w="4849943">
+                  <a:extLst>
+                    <a:ext uri="{9D8B030D-6E8A-4147-A177-3AD203B41FA5}">
+                      <a16:colId xmlns:a16="http://schemas.microsoft.com/office/drawing/2014/main" val="2255662237"/>
+                    </a:ext>
+                  </a:extLst>
+                </a:gridCol>
+              </a:tblGrid>
+              <a:tr h="494328">
+                <a:tc>
+                  <a:txBody>
+                    <a:bodyPr/>
+                    <a:lstStyle/>
+                    <a:p>
+                      <a:r>
+                        <a:rPr lang="en-US" sz="2400" b="1"/>
+                        <a:t>List</a:t>
+                      </a:r>
+                      <a:endParaRPr lang="en-US" sz="2400"/>
+                    </a:p>
+                  </a:txBody>
+                  <a:tcPr anchor="ctr"/>
+                </a:tc>
+                <a:tc>
+                  <a:txBody>
+                    <a:bodyPr/>
+                    <a:lstStyle/>
+                    <a:p>
+                      <a:r>
+                        <a:rPr lang="en-US" sz="2400" b="1"/>
+                        <a:t>Tuple</a:t>
+                      </a:r>
+                      <a:endParaRPr lang="en-US" sz="2400"/>
+                    </a:p>
+                  </a:txBody>
+                  <a:tcPr anchor="ctr"/>
+                </a:tc>
+                <a:extLst>
+                  <a:ext uri="{0D108BD9-81ED-4DB2-BD59-A6C34878D82A}">
+                    <a16:rowId xmlns:a16="http://schemas.microsoft.com/office/drawing/2014/main" val="3137162742"/>
+                  </a:ext>
+                </a:extLst>
+              </a:tr>
+              <a:tr h="494328">
+                <a:tc>
+                  <a:txBody>
+                    <a:bodyPr/>
+                    <a:lstStyle/>
+                    <a:p>
+                      <a:r>
+                        <a:rPr lang="en-US" sz="2400"/>
+                        <a:t>Mutable</a:t>
+                      </a:r>
+                    </a:p>
+                  </a:txBody>
+                  <a:tcPr anchor="ctr"/>
+                </a:tc>
+                <a:tc>
+                  <a:txBody>
+                    <a:bodyPr/>
+                    <a:lstStyle/>
+                    <a:p>
+                      <a:r>
+                        <a:rPr lang="en-US" sz="2400"/>
+                        <a:t>Immutable</a:t>
+                      </a:r>
+                    </a:p>
+                  </a:txBody>
+                  <a:tcPr anchor="ctr"/>
+                </a:tc>
+                <a:extLst>
+                  <a:ext uri="{0D108BD9-81ED-4DB2-BD59-A6C34878D82A}">
+                    <a16:rowId xmlns:a16="http://schemas.microsoft.com/office/drawing/2014/main" val="1121049216"/>
+                  </a:ext>
+                </a:extLst>
+              </a:tr>
+              <a:tr h="494328">
+                <a:tc>
+                  <a:txBody>
+                    <a:bodyPr/>
+                    <a:lstStyle/>
+                    <a:p>
+                      <a:r>
+                        <a:rPr lang="en-US" sz="2400"/>
+                        <a:t>Suitable for dynamic collections</a:t>
+                      </a:r>
+                    </a:p>
+                  </a:txBody>
+                  <a:tcPr anchor="ctr"/>
+                </a:tc>
+                <a:tc>
+                  <a:txBody>
+                    <a:bodyPr/>
+                    <a:lstStyle/>
+                    <a:p>
+                      <a:r>
+                        <a:rPr lang="en-US" sz="2400"/>
+                        <a:t>Suitable for fixed data structures</a:t>
+                      </a:r>
+                    </a:p>
+                  </a:txBody>
+                  <a:tcPr anchor="ctr"/>
+                </a:tc>
+                <a:extLst>
+                  <a:ext uri="{0D108BD9-81ED-4DB2-BD59-A6C34878D82A}">
+                    <a16:rowId xmlns:a16="http://schemas.microsoft.com/office/drawing/2014/main" val="275018854"/>
+                  </a:ext>
+                </a:extLst>
+              </a:tr>
+              <a:tr h="494328">
+                <a:tc>
+                  <a:txBody>
+                    <a:bodyPr/>
+                    <a:lstStyle/>
+                    <a:p>
+                      <a:r>
+                        <a:rPr lang="en-US" sz="2400"/>
+                        <a:t>Uses more memory due to dynamic resizing</a:t>
+                      </a:r>
+                    </a:p>
+                  </a:txBody>
+                  <a:tcPr anchor="ctr"/>
+                </a:tc>
+                <a:tc>
+                  <a:txBody>
+                    <a:bodyPr/>
+                    <a:lstStyle/>
+                    <a:p>
+                      <a:r>
+                        <a:rPr lang="en-US" sz="2400"/>
+                        <a:t>More memory efficient</a:t>
+                      </a:r>
+                    </a:p>
+                    <a:p>
+                      <a:endParaRPr lang="en-US" sz="2400"/>
+                    </a:p>
+                  </a:txBody>
+                  <a:tcPr anchor="ctr"/>
+                </a:tc>
+                <a:extLst>
+                  <a:ext uri="{0D108BD9-81ED-4DB2-BD59-A6C34878D82A}">
+                    <a16:rowId xmlns:a16="http://schemas.microsoft.com/office/drawing/2014/main" val="732558842"/>
+                  </a:ext>
+                </a:extLst>
+              </a:tr>
+              <a:tr h="889790">
+                <a:tc>
+                  <a:txBody>
+                    <a:bodyPr/>
+                    <a:lstStyle/>
+                    <a:p>
+                      <a:r>
+                        <a:rPr lang="en-US" sz="2400"/>
+                        <a:t>More methods for modification (e.g., append, remove, insert)</a:t>
+                      </a:r>
+                    </a:p>
+                  </a:txBody>
+                  <a:tcPr anchor="ctr"/>
+                </a:tc>
+                <a:tc>
+                  <a:txBody>
+                    <a:bodyPr/>
+                    <a:lstStyle/>
+                    <a:p>
+                      <a:r>
+                        <a:rPr lang="en-US" sz="2400"/>
+                        <a:t>Fewer built-in methods</a:t>
+                      </a:r>
+                    </a:p>
+                  </a:txBody>
+                  <a:tcPr anchor="ctr"/>
+                </a:tc>
+                <a:extLst>
+                  <a:ext uri="{0D108BD9-81ED-4DB2-BD59-A6C34878D82A}">
+                    <a16:rowId xmlns:a16="http://schemas.microsoft.com/office/drawing/2014/main" val="4250838286"/>
+                  </a:ext>
+                </a:extLst>
+              </a:tr>
+              <a:tr h="889790">
+                <a:tc>
+                  <a:txBody>
+                    <a:bodyPr/>
+                    <a:lstStyle/>
+                    <a:p>
+                      <a:r>
+                        <a:rPr lang="en-US" sz="2400"/>
+                        <a:t>Slightly slower for dynamic resizing</a:t>
+                      </a:r>
+                    </a:p>
+                  </a:txBody>
+                  <a:tcPr anchor="ctr"/>
+                </a:tc>
+                <a:tc>
+                  <a:txBody>
+                    <a:bodyPr/>
+                    <a:lstStyle/>
+                    <a:p>
+                      <a:r>
+                        <a:rPr lang="en-US" sz="2400"/>
+                        <a:t>Slightly faster than lists for large datasets</a:t>
+                      </a:r>
+                    </a:p>
+                  </a:txBody>
+                  <a:tcPr anchor="ctr"/>
+                </a:tc>
+                <a:extLst>
+                  <a:ext uri="{0D108BD9-81ED-4DB2-BD59-A6C34878D82A}">
+                    <a16:rowId xmlns:a16="http://schemas.microsoft.com/office/drawing/2014/main" val="4097307520"/>
+                  </a:ext>
+                </a:extLst>
+              </a:tr>
+            </a:tbl>
+          </a:graphicData>
+        </a:graphic>
+      </p:graphicFrame>
+    </p:spTree>
+    <p:extLst>
+      <p:ext uri="{BB962C8B-B14F-4D97-AF65-F5344CB8AC3E}">
+        <p14:creationId xmlns:p14="http://schemas.microsoft.com/office/powerpoint/2010/main" val="2071495866"/>
+      </p:ext>
+    </p:extLst>
+  </p:cSld>
+  <p:clrMapOvr>
+    <a:masterClrMapping/>
+  </p:clrMapOvr>
+</p:sld>
+</file>
+
+<file path=ppt/slides/slide7.xml><?xml version="1.0" encoding="utf-8"?>
 <p:sld xmlns:a="http://schemas.openxmlformats.org/drawingml/2006/main" xmlns:r="http://schemas.openxmlformats.org/officeDocument/2006/relationships" xmlns:p="http://schemas.openxmlformats.org/presentationml/2006/main">
   <p:cSld>
     <p:spTree>
@@ -4994,7 +6558,7 @@
         </p:blipFill>
         <p:spPr>
           <a:xfrm>
-            <a:off x="112427" y="-269823"/>
+            <a:off x="0" y="-33129"/>
             <a:ext cx="12192000" cy="6891129"/>
           </a:xfrm>
           <a:prstGeom prst="rect">
@@ -5030,10 +6594,6 @@
           </a:bodyPr>
           <a:lstStyle/>
           <a:p>
-            <a:pPr marL="457200" indent="-457200">
-              <a:buFont typeface="+mj-lt"/>
-              <a:buAutoNum type="arabicPeriod"/>
-            </a:pPr>
             <a:r>
               <a:rPr lang="en-US" sz="3600">
                 <a:solidFill>
@@ -5044,7 +6604,7 @@
                 <a:latin typeface="Arial" panose="020B0604020202020204" pitchFamily="34" charset="0"/>
                 <a:cs typeface="Arial" panose="020B0604020202020204" pitchFamily="34" charset="0"/>
               </a:rPr>
-              <a:t>Loops, Lists, Tuples, and Dictionaries</a:t>
+              <a:t>Tuples for Secure Data</a:t>
             </a:r>
           </a:p>
         </p:txBody>
@@ -5064,7 +6624,7 @@
         <p:spPr>
           <a:xfrm>
             <a:off x="776653" y="876991"/>
-            <a:ext cx="10323564" cy="5632311"/>
+            <a:ext cx="10953150" cy="3631763"/>
           </a:xfrm>
           <a:prstGeom prst="rect">
             <a:avLst/>
@@ -5077,7 +6637,7 @@
           </a:bodyPr>
           <a:lstStyle/>
           <a:p>
-            <a:pPr marL="457200" indent="-457200">
+            <a:pPr marL="231775" indent="-231775">
               <a:buFont typeface="Arial" panose="020B0604020202020204" pitchFamily="34" charset="0"/>
               <a:buChar char="•"/>
             </a:pPr>
@@ -5091,16 +6651,16 @@
                 <a:latin typeface="Arial" panose="020B0604020202020204" pitchFamily="34" charset="0"/>
                 <a:cs typeface="Arial" panose="020B0604020202020204" pitchFamily="34" charset="0"/>
               </a:rPr>
-              <a:t>Secure Iteration Practices</a:t>
-            </a:r>
-          </a:p>
-          <a:p>
-            <a:pPr marL="914400" lvl="1" indent="-457200">
+              <a:t>Once a tuple is created, its elements cannot be changed. </a:t>
+            </a:r>
+          </a:p>
+          <a:p>
+            <a:pPr marL="688975" lvl="1" indent="-231775">
               <a:buFont typeface="Arial" panose="020B0604020202020204" pitchFamily="34" charset="0"/>
               <a:buChar char="•"/>
             </a:pPr>
             <a:r>
-              <a:rPr lang="en-US" sz="2400">
+              <a:rPr lang="en-US" sz="2000">
                 <a:solidFill>
                   <a:schemeClr val="accent1">
                     <a:lumMod val="50000"/>
@@ -5109,11 +6669,50 @@
                 <a:latin typeface="Arial" panose="020B0604020202020204" pitchFamily="34" charset="0"/>
                 <a:cs typeface="Arial" panose="020B0604020202020204" pitchFamily="34" charset="0"/>
               </a:rPr>
-              <a:t>Avoid infinite loops and ensuring proper termination</a:t>
-            </a:r>
-          </a:p>
-          <a:p>
-            <a:pPr marL="914400" lvl="1" indent="-457200">
+              <a:t>This ensures that security-sensitive data, such as API keys, credentials, or cryptographic parameters, cannot be modified accidentally or maliciously during runtime.</a:t>
+            </a:r>
+          </a:p>
+          <a:p>
+            <a:pPr lvl="1"/>
+            <a:endParaRPr lang="en-US" sz="2400">
+              <a:solidFill>
+                <a:schemeClr val="accent1">
+                  <a:lumMod val="50000"/>
+                </a:schemeClr>
+              </a:solidFill>
+              <a:latin typeface="Arial" panose="020B0604020202020204" pitchFamily="34" charset="0"/>
+              <a:cs typeface="Arial" panose="020B0604020202020204" pitchFamily="34" charset="0"/>
+            </a:endParaRPr>
+          </a:p>
+          <a:p>
+            <a:pPr lvl="1"/>
+            <a:r>
+              <a:rPr lang="en-US" b="1">
+                <a:solidFill>
+                  <a:schemeClr val="accent1">
+                    <a:lumMod val="50000"/>
+                  </a:schemeClr>
+                </a:solidFill>
+                <a:latin typeface="Consolas" panose="020B0609020204030204" pitchFamily="49" charset="0"/>
+                <a:cs typeface="Arial" panose="020B0604020202020204" pitchFamily="34" charset="0"/>
+              </a:rPr>
+              <a:t>credentials = ("admin", "secure_password123")  # Cannot be modified after creation</a:t>
+            </a:r>
+          </a:p>
+          <a:p>
+            <a:pPr marL="914400" lvl="1"/>
+            <a:endParaRPr lang="en-US" sz="2000" b="1">
+              <a:solidFill>
+                <a:schemeClr val="accent1">
+                  <a:lumMod val="50000"/>
+                </a:schemeClr>
+              </a:solidFill>
+              <a:latin typeface="Consolas" panose="020B0609020204030204" pitchFamily="49" charset="0"/>
+              <a:cs typeface="Arial" panose="020B0604020202020204" pitchFamily="34" charset="0"/>
+            </a:endParaRPr>
+          </a:p>
+          <a:p>
+            <a:pPr marL="231775" indent="-231775">
               <a:buFont typeface="Arial" panose="020B0604020202020204" pitchFamily="34" charset="0"/>
               <a:buChar char="•"/>
             </a:pPr>
@@ -5127,16 +6726,16 @@
                 <a:latin typeface="Arial" panose="020B0604020202020204" pitchFamily="34" charset="0"/>
                 <a:cs typeface="Arial" panose="020B0604020202020204" pitchFamily="34" charset="0"/>
               </a:rPr>
-              <a:t>Use generator expressions for memory-efficient iteration</a:t>
-            </a:r>
-          </a:p>
-          <a:p>
-            <a:pPr marL="457200" indent="-457200">
+              <a:t>Tuples provide reduced attack surfaces.</a:t>
+            </a:r>
+          </a:p>
+          <a:p>
+            <a:pPr marL="688975" lvl="1" indent="-231775">
               <a:buFont typeface="Arial" panose="020B0604020202020204" pitchFamily="34" charset="0"/>
               <a:buChar char="•"/>
             </a:pPr>
             <a:r>
-              <a:rPr lang="en-US" sz="2400">
+              <a:rPr lang="en-US" sz="2000">
                 <a:solidFill>
                   <a:schemeClr val="accent1">
                     <a:lumMod val="50000"/>
@@ -5145,16 +6744,16 @@
                 <a:latin typeface="Arial" panose="020B0604020202020204" pitchFamily="34" charset="0"/>
                 <a:cs typeface="Arial" panose="020B0604020202020204" pitchFamily="34" charset="0"/>
               </a:rPr>
-              <a:t>Lists and Tuples: Security Considerations</a:t>
-            </a:r>
-          </a:p>
-          <a:p>
-            <a:pPr marL="914400" lvl="1" indent="-457200">
+              <a:t>They cannot be altered by malicious code that may attempt to overwrite, inject, or tamper with data during execution.</a:t>
+            </a:r>
+          </a:p>
+          <a:p>
+            <a:pPr marL="688975" lvl="1" indent="-231775">
               <a:buFont typeface="Arial" panose="020B0604020202020204" pitchFamily="34" charset="0"/>
               <a:buChar char="•"/>
             </a:pPr>
             <a:r>
-              <a:rPr lang="en-US" sz="2400">
+              <a:rPr lang="en-US" sz="2000">
                 <a:solidFill>
                   <a:schemeClr val="accent1">
                     <a:lumMod val="50000"/>
@@ -5163,187 +6762,7 @@
                 <a:latin typeface="Arial" panose="020B0604020202020204" pitchFamily="34" charset="0"/>
                 <a:cs typeface="Arial" panose="020B0604020202020204" pitchFamily="34" charset="0"/>
               </a:rPr>
-              <a:t>Prevent unintended data modifications in lists</a:t>
-            </a:r>
-          </a:p>
-          <a:p>
-            <a:pPr marL="914400" lvl="1" indent="-457200">
-              <a:buFont typeface="Arial" panose="020B0604020202020204" pitchFamily="34" charset="0"/>
-              <a:buChar char="•"/>
-            </a:pPr>
-            <a:r>
-              <a:rPr lang="en-US" sz="2400">
-                <a:solidFill>
-                  <a:schemeClr val="accent1">
-                    <a:lumMod val="50000"/>
-                  </a:schemeClr>
-                </a:solidFill>
-                <a:latin typeface="Arial" panose="020B0604020202020204" pitchFamily="34" charset="0"/>
-                <a:cs typeface="Arial" panose="020B0604020202020204" pitchFamily="34" charset="0"/>
-              </a:rPr>
-              <a:t>Use tuples for immutable, security-sensitive data</a:t>
-            </a:r>
-          </a:p>
-          <a:p>
-            <a:pPr marL="914400" lvl="1" indent="-457200">
-              <a:buFont typeface="Arial" panose="020B0604020202020204" pitchFamily="34" charset="0"/>
-              <a:buChar char="•"/>
-            </a:pPr>
-            <a:r>
-              <a:rPr lang="en-US" sz="2400">
-                <a:solidFill>
-                  <a:schemeClr val="accent1">
-                    <a:lumMod val="50000"/>
-                  </a:schemeClr>
-                </a:solidFill>
-                <a:latin typeface="Arial" panose="020B0604020202020204" pitchFamily="34" charset="0"/>
-                <a:cs typeface="Arial" panose="020B0604020202020204" pitchFamily="34" charset="0"/>
-              </a:rPr>
-              <a:t>Avoid index errors and boundary overflows</a:t>
-            </a:r>
-          </a:p>
-          <a:p>
-            <a:pPr marL="457200" indent="-457200">
-              <a:buFont typeface="Arial" panose="020B0604020202020204" pitchFamily="34" charset="0"/>
-              <a:buChar char="•"/>
-            </a:pPr>
-            <a:r>
-              <a:rPr lang="en-US" sz="2400">
-                <a:solidFill>
-                  <a:schemeClr val="accent1">
-                    <a:lumMod val="50000"/>
-                  </a:schemeClr>
-                </a:solidFill>
-                <a:latin typeface="Arial" panose="020B0604020202020204" pitchFamily="34" charset="0"/>
-                <a:cs typeface="Arial" panose="020B0604020202020204" pitchFamily="34" charset="0"/>
-              </a:rPr>
-              <a:t>Dictionaries and Secure Data Handling</a:t>
-            </a:r>
-          </a:p>
-          <a:p>
-            <a:pPr marL="914400" lvl="1" indent="-457200">
-              <a:buFont typeface="Arial" panose="020B0604020202020204" pitchFamily="34" charset="0"/>
-              <a:buChar char="•"/>
-            </a:pPr>
-            <a:r>
-              <a:rPr lang="en-US" sz="2400">
-                <a:solidFill>
-                  <a:schemeClr val="accent1">
-                    <a:lumMod val="50000"/>
-                  </a:schemeClr>
-                </a:solidFill>
-                <a:latin typeface="Arial" panose="020B0604020202020204" pitchFamily="34" charset="0"/>
-                <a:cs typeface="Arial" panose="020B0604020202020204" pitchFamily="34" charset="0"/>
-              </a:rPr>
-              <a:t>Prevent key collisions in sensitive data</a:t>
-            </a:r>
-          </a:p>
-          <a:p>
-            <a:pPr marL="914400" lvl="1" indent="-457200">
-              <a:buFont typeface="Arial" panose="020B0604020202020204" pitchFamily="34" charset="0"/>
-              <a:buChar char="•"/>
-            </a:pPr>
-            <a:r>
-              <a:rPr lang="en-US" sz="2400">
-                <a:solidFill>
-                  <a:schemeClr val="accent1">
-                    <a:lumMod val="50000"/>
-                  </a:schemeClr>
-                </a:solidFill>
-                <a:latin typeface="Arial" panose="020B0604020202020204" pitchFamily="34" charset="0"/>
-                <a:cs typeface="Arial" panose="020B0604020202020204" pitchFamily="34" charset="0"/>
-              </a:rPr>
-              <a:t>Handle missing keys securely to avoid runtime errors</a:t>
-            </a:r>
-          </a:p>
-          <a:p>
-            <a:pPr marL="914400" lvl="1" indent="-457200">
-              <a:buFont typeface="Arial" panose="020B0604020202020204" pitchFamily="34" charset="0"/>
-              <a:buChar char="•"/>
-            </a:pPr>
-            <a:r>
-              <a:rPr lang="en-US" sz="2400">
-                <a:solidFill>
-                  <a:schemeClr val="accent1">
-                    <a:lumMod val="50000"/>
-                  </a:schemeClr>
-                </a:solidFill>
-                <a:latin typeface="Arial" panose="020B0604020202020204" pitchFamily="34" charset="0"/>
-                <a:cs typeface="Arial" panose="020B0604020202020204" pitchFamily="34" charset="0"/>
-              </a:rPr>
-              <a:t>Use defaultdict and exception handling for safe lookups</a:t>
-            </a:r>
-          </a:p>
-          <a:p>
-            <a:pPr marL="457200" indent="-457200">
-              <a:buFont typeface="Arial" panose="020B0604020202020204" pitchFamily="34" charset="0"/>
-              <a:buChar char="•"/>
-            </a:pPr>
-            <a:r>
-              <a:rPr lang="en-US" sz="2400">
-                <a:solidFill>
-                  <a:schemeClr val="accent1">
-                    <a:lumMod val="50000"/>
-                  </a:schemeClr>
-                </a:solidFill>
-                <a:latin typeface="Arial" panose="020B0604020202020204" pitchFamily="34" charset="0"/>
-                <a:cs typeface="Arial" panose="020B0604020202020204" pitchFamily="34" charset="0"/>
-              </a:rPr>
-              <a:t>Mitigating Risks in Data Structures</a:t>
-            </a:r>
-          </a:p>
-          <a:p>
-            <a:pPr marL="914400" lvl="1" indent="-457200">
-              <a:buFont typeface="Arial" panose="020B0604020202020204" pitchFamily="34" charset="0"/>
-              <a:buChar char="•"/>
-            </a:pPr>
-            <a:r>
-              <a:rPr lang="en-US" sz="2400">
-                <a:solidFill>
-                  <a:schemeClr val="accent1">
-                    <a:lumMod val="50000"/>
-                  </a:schemeClr>
-                </a:solidFill>
-                <a:latin typeface="Arial" panose="020B0604020202020204" pitchFamily="34" charset="0"/>
-                <a:cs typeface="Arial" panose="020B0604020202020204" pitchFamily="34" charset="0"/>
-              </a:rPr>
-              <a:t>Avoid mutable default arguments in function definitions</a:t>
-            </a:r>
-          </a:p>
-          <a:p>
-            <a:pPr marL="914400" lvl="1" indent="-457200">
-              <a:buFont typeface="Arial" panose="020B0604020202020204" pitchFamily="34" charset="0"/>
-              <a:buChar char="•"/>
-            </a:pPr>
-            <a:r>
-              <a:rPr lang="en-US" sz="2400">
-                <a:solidFill>
-                  <a:schemeClr val="accent1">
-                    <a:lumMod val="50000"/>
-                  </a:schemeClr>
-                </a:solidFill>
-                <a:latin typeface="Arial" panose="020B0604020202020204" pitchFamily="34" charset="0"/>
-                <a:cs typeface="Arial" panose="020B0604020202020204" pitchFamily="34" charset="0"/>
-              </a:rPr>
-              <a:t>Prevent race conditions when modifying shared data</a:t>
-            </a:r>
-          </a:p>
-          <a:p>
-            <a:pPr marL="914400" lvl="1" indent="-457200">
-              <a:buFont typeface="Arial" panose="020B0604020202020204" pitchFamily="34" charset="0"/>
-              <a:buChar char="•"/>
-            </a:pPr>
-            <a:r>
-              <a:rPr lang="en-US" sz="2400">
-                <a:solidFill>
-                  <a:schemeClr val="accent1">
-                    <a:lumMod val="50000"/>
-                  </a:schemeClr>
-                </a:solidFill>
-                <a:latin typeface="Arial" panose="020B0604020202020204" pitchFamily="34" charset="0"/>
-                <a:cs typeface="Arial" panose="020B0604020202020204" pitchFamily="34" charset="0"/>
-              </a:rPr>
-              <a:t>Use secure hashing techniques for dictionary keys</a:t>
+              <a:t>This is particularly useful in multi-threaded environments, where shared data should remain constant and unchangeable.</a:t>
             </a:r>
           </a:p>
         </p:txBody>
@@ -5352,6 +6771,521 @@
     <p:extLst>
       <p:ext uri="{BB962C8B-B14F-4D97-AF65-F5344CB8AC3E}">
         <p14:creationId xmlns:p14="http://schemas.microsoft.com/office/powerpoint/2010/main" val="3268408513"/>
+      </p:ext>
+    </p:extLst>
+  </p:cSld>
+  <p:clrMapOvr>
+    <a:masterClrMapping/>
+  </p:clrMapOvr>
+</p:sld>
+</file>
+
+<file path=ppt/slides/slide8.xml><?xml version="1.0" encoding="utf-8"?>
+<p:sld xmlns:a="http://schemas.openxmlformats.org/drawingml/2006/main" xmlns:r="http://schemas.openxmlformats.org/officeDocument/2006/relationships" xmlns:p="http://schemas.openxmlformats.org/presentationml/2006/main">
+  <p:cSld>
+    <p:spTree>
+      <p:nvGrpSpPr>
+        <p:cNvPr id="1" name="">
+          <a:extLst>
+            <a:ext uri="{FF2B5EF4-FFF2-40B4-BE49-F238E27FC236}">
+              <a16:creationId xmlns:a16="http://schemas.microsoft.com/office/drawing/2014/main" id="{83D4631A-86BB-C766-5B15-02F405CD1E94}"/>
+            </a:ext>
+          </a:extLst>
+        </p:cNvPr>
+        <p:cNvGrpSpPr/>
+        <p:nvPr/>
+      </p:nvGrpSpPr>
+      <p:grpSpPr>
+        <a:xfrm>
+          <a:off x="0" y="0"/>
+          <a:ext cx="0" cy="0"/>
+          <a:chOff x="0" y="0"/>
+          <a:chExt cx="0" cy="0"/>
+        </a:xfrm>
+      </p:grpSpPr>
+      <p:pic>
+        <p:nvPicPr>
+          <p:cNvPr id="3" name="Picture 2" descr="A white and blue background&#10;&#10;Description automatically generated">
+            <a:extLst>
+              <a:ext uri="{FF2B5EF4-FFF2-40B4-BE49-F238E27FC236}">
+                <a16:creationId xmlns:a16="http://schemas.microsoft.com/office/drawing/2014/main" id="{847683E9-DB97-3599-7614-FB94658822CA}"/>
+              </a:ext>
+            </a:extLst>
+          </p:cNvPr>
+          <p:cNvPicPr>
+            <a:picLocks noChangeAspect="1"/>
+          </p:cNvPicPr>
+          <p:nvPr/>
+        </p:nvPicPr>
+        <p:blipFill>
+          <a:blip r:embed="rId2"/>
+          <a:stretch>
+            <a:fillRect/>
+          </a:stretch>
+        </p:blipFill>
+        <p:spPr>
+          <a:xfrm>
+            <a:off x="0" y="-33129"/>
+            <a:ext cx="12192000" cy="6891129"/>
+          </a:xfrm>
+          <a:prstGeom prst="rect">
+            <a:avLst/>
+          </a:prstGeom>
+        </p:spPr>
+      </p:pic>
+      <p:sp>
+        <p:nvSpPr>
+          <p:cNvPr id="4" name="TextBox 3">
+            <a:extLst>
+              <a:ext uri="{FF2B5EF4-FFF2-40B4-BE49-F238E27FC236}">
+                <a16:creationId xmlns:a16="http://schemas.microsoft.com/office/drawing/2014/main" id="{A6FED420-C71C-043F-EDFC-4AD63E872DD6}"/>
+              </a:ext>
+            </a:extLst>
+          </p:cNvPr>
+          <p:cNvSpPr txBox="1"/>
+          <p:nvPr/>
+        </p:nvSpPr>
+        <p:spPr>
+          <a:xfrm>
+            <a:off x="604266" y="136955"/>
+            <a:ext cx="10391019" cy="646331"/>
+          </a:xfrm>
+          <a:prstGeom prst="rect">
+            <a:avLst/>
+          </a:prstGeom>
+          <a:noFill/>
+        </p:spPr>
+        <p:txBody>
+          <a:bodyPr wrap="square" rtlCol="0">
+            <a:spAutoFit/>
+          </a:bodyPr>
+          <a:lstStyle/>
+          <a:p>
+            <a:r>
+              <a:rPr lang="en-US" sz="3600">
+                <a:solidFill>
+                  <a:schemeClr val="accent1">
+                    <a:lumMod val="50000"/>
+                  </a:schemeClr>
+                </a:solidFill>
+                <a:latin typeface="Arial" panose="020B0604020202020204" pitchFamily="34" charset="0"/>
+                <a:cs typeface="Arial" panose="020B0604020202020204" pitchFamily="34" charset="0"/>
+              </a:rPr>
+              <a:t>Tuples for Secure Data</a:t>
+            </a:r>
+          </a:p>
+        </p:txBody>
+      </p:sp>
+      <p:sp>
+        <p:nvSpPr>
+          <p:cNvPr id="5" name="TextBox 4">
+            <a:extLst>
+              <a:ext uri="{FF2B5EF4-FFF2-40B4-BE49-F238E27FC236}">
+                <a16:creationId xmlns:a16="http://schemas.microsoft.com/office/drawing/2014/main" id="{BAA9ECEE-E54A-8A38-690B-7F1F111B0C68}"/>
+              </a:ext>
+            </a:extLst>
+          </p:cNvPr>
+          <p:cNvSpPr txBox="1"/>
+          <p:nvPr/>
+        </p:nvSpPr>
+        <p:spPr>
+          <a:xfrm>
+            <a:off x="776653" y="1049377"/>
+            <a:ext cx="10323564" cy="5201424"/>
+          </a:xfrm>
+          <a:prstGeom prst="rect">
+            <a:avLst/>
+          </a:prstGeom>
+          <a:noFill/>
+        </p:spPr>
+        <p:txBody>
+          <a:bodyPr wrap="square" rtlCol="0">
+            <a:spAutoFit/>
+          </a:bodyPr>
+          <a:lstStyle/>
+          <a:p>
+            <a:pPr marL="231775" indent="-231775">
+              <a:buFont typeface="Arial" panose="020B0604020202020204" pitchFamily="34" charset="0"/>
+              <a:buChar char="•"/>
+            </a:pPr>
+            <a:r>
+              <a:rPr lang="en-US" sz="2800">
+                <a:solidFill>
+                  <a:schemeClr val="accent1">
+                    <a:lumMod val="50000"/>
+                  </a:schemeClr>
+                </a:solidFill>
+                <a:latin typeface="Arial" panose="020B0604020202020204" pitchFamily="34" charset="0"/>
+                <a:cs typeface="Arial" panose="020B0604020202020204" pitchFamily="34" charset="0"/>
+              </a:rPr>
+              <a:t>Tuples are hashable (can be used as dictionary keys or set elements) as long as they only contain hashable elements</a:t>
+            </a:r>
+          </a:p>
+          <a:p>
+            <a:pPr marL="688975" lvl="1" indent="-231775">
+              <a:buFont typeface="Arial" panose="020B0604020202020204" pitchFamily="34" charset="0"/>
+              <a:buChar char="•"/>
+            </a:pPr>
+            <a:r>
+              <a:rPr lang="en-US" sz="2400">
+                <a:solidFill>
+                  <a:schemeClr val="accent1">
+                    <a:lumMod val="50000"/>
+                  </a:schemeClr>
+                </a:solidFill>
+                <a:latin typeface="Arial" panose="020B0604020202020204" pitchFamily="34" charset="0"/>
+                <a:cs typeface="Arial" panose="020B0604020202020204" pitchFamily="34" charset="0"/>
+              </a:rPr>
+              <a:t>This ensures that security-sensitive mappings (e.g., user permissions, access control lists) remain unchanged.</a:t>
+            </a:r>
+          </a:p>
+          <a:p>
+            <a:pPr marL="688975" lvl="1" indent="-231775">
+              <a:buFont typeface="Arial" panose="020B0604020202020204" pitchFamily="34" charset="0"/>
+              <a:buChar char="•"/>
+            </a:pPr>
+            <a:endParaRPr lang="en-US" sz="2400">
+              <a:solidFill>
+                <a:schemeClr val="accent1">
+                  <a:lumMod val="50000"/>
+                </a:schemeClr>
+              </a:solidFill>
+              <a:latin typeface="Arial" panose="020B0604020202020204" pitchFamily="34" charset="0"/>
+              <a:cs typeface="Arial" panose="020B0604020202020204" pitchFamily="34" charset="0"/>
+            </a:endParaRPr>
+          </a:p>
+          <a:p>
+            <a:pPr marL="231775" lvl="1" indent="-231775">
+              <a:buFont typeface="Arial" panose="020B0604020202020204" pitchFamily="34" charset="0"/>
+              <a:buChar char="•"/>
+            </a:pPr>
+            <a:r>
+              <a:rPr lang="en-US" sz="2800">
+                <a:solidFill>
+                  <a:schemeClr val="accent1">
+                    <a:lumMod val="50000"/>
+                  </a:schemeClr>
+                </a:solidFill>
+                <a:latin typeface="Arial" panose="020B0604020202020204" pitchFamily="34" charset="0"/>
+                <a:cs typeface="Arial" panose="020B0604020202020204" pitchFamily="34" charset="0"/>
+              </a:rPr>
+              <a:t>Is an admin with read permissions allowed to perform a write?</a:t>
+            </a:r>
+          </a:p>
+          <a:p>
+            <a:pPr marL="688975" lvl="1" indent="-231775">
+              <a:buFont typeface="Arial" panose="020B0604020202020204" pitchFamily="34" charset="0"/>
+              <a:buChar char="•"/>
+            </a:pPr>
+            <a:endParaRPr lang="en-US" sz="2400">
+              <a:solidFill>
+                <a:schemeClr val="accent1">
+                  <a:lumMod val="50000"/>
+                </a:schemeClr>
+              </a:solidFill>
+              <a:latin typeface="Arial" panose="020B0604020202020204" pitchFamily="34" charset="0"/>
+              <a:cs typeface="Arial" panose="020B0604020202020204" pitchFamily="34" charset="0"/>
+            </a:endParaRPr>
+          </a:p>
+          <a:p>
+            <a:pPr lvl="1"/>
+            <a:r>
+              <a:rPr lang="en-US" sz="2000" b="1">
+                <a:solidFill>
+                  <a:schemeClr val="accent1">
+                    <a:lumMod val="50000"/>
+                  </a:schemeClr>
+                </a:solidFill>
+                <a:latin typeface="Consolas" panose="020B0609020204030204" pitchFamily="49" charset="0"/>
+                <a:cs typeface="Arial" panose="020B0604020202020204" pitchFamily="34" charset="0"/>
+              </a:rPr>
+              <a:t>non_hashable_tuple = (["admin", "read"], "write") # contains a list access_rights = { non_hashable_tuple: True }</a:t>
+            </a:r>
+          </a:p>
+          <a:p>
+            <a:pPr marL="688975" lvl="1" indent="-231775">
+              <a:buFont typeface="Arial" panose="020B0604020202020204" pitchFamily="34" charset="0"/>
+              <a:buChar char="•"/>
+            </a:pPr>
+            <a:endParaRPr lang="en-US" sz="2400">
+              <a:solidFill>
+                <a:schemeClr val="accent1">
+                  <a:lumMod val="50000"/>
+                </a:schemeClr>
+              </a:solidFill>
+              <a:latin typeface="Arial" panose="020B0604020202020204" pitchFamily="34" charset="0"/>
+              <a:cs typeface="Arial" panose="020B0604020202020204" pitchFamily="34" charset="0"/>
+            </a:endParaRPr>
+          </a:p>
+          <a:p>
+            <a:pPr marL="688975" lvl="1" indent="-231775">
+              <a:buFont typeface="Arial" panose="020B0604020202020204" pitchFamily="34" charset="0"/>
+              <a:buChar char="•"/>
+            </a:pPr>
+            <a:r>
+              <a:rPr lang="en-US" sz="2400" b="0" i="0">
+                <a:solidFill>
+                  <a:srgbClr val="000000"/>
+                </a:solidFill>
+                <a:effectLst/>
+                <a:highlight>
+                  <a:srgbClr val="FFFF00"/>
+                </a:highlight>
+                <a:latin typeface="Menlo"/>
+              </a:rPr>
+              <a:t>TypeError: unhashable type: 'list'</a:t>
+            </a:r>
+          </a:p>
+          <a:p>
+            <a:pPr marL="688975" lvl="1" indent="-231775">
+              <a:buFont typeface="Arial" panose="020B0604020202020204" pitchFamily="34" charset="0"/>
+              <a:buChar char="•"/>
+            </a:pPr>
+            <a:endParaRPr lang="en-US" sz="2400">
+              <a:solidFill>
+                <a:srgbClr val="000000"/>
+              </a:solidFill>
+              <a:latin typeface="Menlo"/>
+              <a:cs typeface="Arial" panose="020B0604020202020204" pitchFamily="34" charset="0"/>
+            </a:endParaRPr>
+          </a:p>
+          <a:p>
+            <a:pPr lvl="1"/>
+            <a:r>
+              <a:rPr lang="en-US" sz="2000" b="1">
+                <a:solidFill>
+                  <a:schemeClr val="accent1">
+                    <a:lumMod val="50000"/>
+                  </a:schemeClr>
+                </a:solidFill>
+                <a:latin typeface="Consolas" panose="020B0609020204030204" pitchFamily="49" charset="0"/>
+                <a:cs typeface="Arial" panose="020B0604020202020204" pitchFamily="34" charset="0"/>
+              </a:rPr>
+              <a:t>hashable_tuple = (("admin", "read"), "write") # hashable</a:t>
+            </a:r>
+            <a:endParaRPr lang="en-US" sz="2000">
+              <a:solidFill>
+                <a:schemeClr val="accent1">
+                  <a:lumMod val="50000"/>
+                </a:schemeClr>
+              </a:solidFill>
+              <a:latin typeface="Arial" panose="020B0604020202020204" pitchFamily="34" charset="0"/>
+              <a:cs typeface="Arial" panose="020B0604020202020204" pitchFamily="34" charset="0"/>
+            </a:endParaRPr>
+          </a:p>
+          <a:p>
+            <a:pPr lvl="1"/>
+            <a:r>
+              <a:rPr lang="en-US" sz="2000" b="1">
+                <a:solidFill>
+                  <a:schemeClr val="accent1">
+                    <a:lumMod val="50000"/>
+                  </a:schemeClr>
+                </a:solidFill>
+                <a:latin typeface="Consolas" panose="020B0609020204030204" pitchFamily="49" charset="0"/>
+                <a:cs typeface="Arial" panose="020B0604020202020204" pitchFamily="34" charset="0"/>
+              </a:rPr>
+              <a:t>access_rights = { hashable_tuple: True }</a:t>
+            </a:r>
+          </a:p>
+        </p:txBody>
+      </p:sp>
+    </p:spTree>
+    <p:extLst>
+      <p:ext uri="{BB962C8B-B14F-4D97-AF65-F5344CB8AC3E}">
+        <p14:creationId xmlns:p14="http://schemas.microsoft.com/office/powerpoint/2010/main" val="2179349848"/>
+      </p:ext>
+    </p:extLst>
+  </p:cSld>
+  <p:clrMapOvr>
+    <a:masterClrMapping/>
+  </p:clrMapOvr>
+</p:sld>
+</file>
+
+<file path=ppt/slides/slide9.xml><?xml version="1.0" encoding="utf-8"?>
+<p:sld xmlns:a="http://schemas.openxmlformats.org/drawingml/2006/main" xmlns:r="http://schemas.openxmlformats.org/officeDocument/2006/relationships" xmlns:p="http://schemas.openxmlformats.org/presentationml/2006/main">
+  <p:cSld>
+    <p:spTree>
+      <p:nvGrpSpPr>
+        <p:cNvPr id="1" name="">
+          <a:extLst>
+            <a:ext uri="{FF2B5EF4-FFF2-40B4-BE49-F238E27FC236}">
+              <a16:creationId xmlns:a16="http://schemas.microsoft.com/office/drawing/2014/main" id="{68782DBF-1394-2517-FAF3-65676516014A}"/>
+            </a:ext>
+          </a:extLst>
+        </p:cNvPr>
+        <p:cNvGrpSpPr/>
+        <p:nvPr/>
+      </p:nvGrpSpPr>
+      <p:grpSpPr>
+        <a:xfrm>
+          <a:off x="0" y="0"/>
+          <a:ext cx="0" cy="0"/>
+          <a:chOff x="0" y="0"/>
+          <a:chExt cx="0" cy="0"/>
+        </a:xfrm>
+      </p:grpSpPr>
+      <p:pic>
+        <p:nvPicPr>
+          <p:cNvPr id="3" name="Picture 2" descr="A white and blue background&#10;&#10;Description automatically generated">
+            <a:extLst>
+              <a:ext uri="{FF2B5EF4-FFF2-40B4-BE49-F238E27FC236}">
+                <a16:creationId xmlns:a16="http://schemas.microsoft.com/office/drawing/2014/main" id="{FF46AA2C-DF0E-00B4-D392-E55812592711}"/>
+              </a:ext>
+            </a:extLst>
+          </p:cNvPr>
+          <p:cNvPicPr>
+            <a:picLocks noChangeAspect="1"/>
+          </p:cNvPicPr>
+          <p:nvPr/>
+        </p:nvPicPr>
+        <p:blipFill>
+          <a:blip r:embed="rId2"/>
+          <a:stretch>
+            <a:fillRect/>
+          </a:stretch>
+        </p:blipFill>
+        <p:spPr>
+          <a:xfrm>
+            <a:off x="0" y="-33129"/>
+            <a:ext cx="12192000" cy="6891129"/>
+          </a:xfrm>
+          <a:prstGeom prst="rect">
+            <a:avLst/>
+          </a:prstGeom>
+        </p:spPr>
+      </p:pic>
+      <p:sp>
+        <p:nvSpPr>
+          <p:cNvPr id="4" name="TextBox 3">
+            <a:extLst>
+              <a:ext uri="{FF2B5EF4-FFF2-40B4-BE49-F238E27FC236}">
+                <a16:creationId xmlns:a16="http://schemas.microsoft.com/office/drawing/2014/main" id="{3289F5D2-BD1E-A50F-6045-92C6C43651B5}"/>
+              </a:ext>
+            </a:extLst>
+          </p:cNvPr>
+          <p:cNvSpPr txBox="1"/>
+          <p:nvPr/>
+        </p:nvSpPr>
+        <p:spPr>
+          <a:xfrm>
+            <a:off x="604266" y="136955"/>
+            <a:ext cx="10391019" cy="646331"/>
+          </a:xfrm>
+          <a:prstGeom prst="rect">
+            <a:avLst/>
+          </a:prstGeom>
+          <a:noFill/>
+        </p:spPr>
+        <p:txBody>
+          <a:bodyPr wrap="square" rtlCol="0">
+            <a:spAutoFit/>
+          </a:bodyPr>
+          <a:lstStyle/>
+          <a:p>
+            <a:r>
+              <a:rPr lang="en-US" sz="3600">
+                <a:solidFill>
+                  <a:schemeClr val="accent1">
+                    <a:lumMod val="50000"/>
+                  </a:schemeClr>
+                </a:solidFill>
+                <a:latin typeface="Arial" panose="020B0604020202020204" pitchFamily="34" charset="0"/>
+                <a:cs typeface="Arial" panose="020B0604020202020204" pitchFamily="34" charset="0"/>
+              </a:rPr>
+              <a:t>Tuples for Secure Data</a:t>
+            </a:r>
+          </a:p>
+        </p:txBody>
+      </p:sp>
+      <p:sp>
+        <p:nvSpPr>
+          <p:cNvPr id="5" name="TextBox 4">
+            <a:extLst>
+              <a:ext uri="{FF2B5EF4-FFF2-40B4-BE49-F238E27FC236}">
+                <a16:creationId xmlns:a16="http://schemas.microsoft.com/office/drawing/2014/main" id="{FDA16B4B-182B-C93C-B73B-D22C0A6CBC8A}"/>
+              </a:ext>
+            </a:extLst>
+          </p:cNvPr>
+          <p:cNvSpPr txBox="1"/>
+          <p:nvPr/>
+        </p:nvSpPr>
+        <p:spPr>
+          <a:xfrm>
+            <a:off x="776653" y="1049377"/>
+            <a:ext cx="10323564" cy="1077218"/>
+          </a:xfrm>
+          <a:prstGeom prst="rect">
+            <a:avLst/>
+          </a:prstGeom>
+          <a:noFill/>
+        </p:spPr>
+        <p:txBody>
+          <a:bodyPr wrap="square" rtlCol="0">
+            <a:spAutoFit/>
+          </a:bodyPr>
+          <a:lstStyle/>
+          <a:p>
+            <a:pPr marL="231775" indent="-231775">
+              <a:buFont typeface="Arial" panose="020B0604020202020204" pitchFamily="34" charset="0"/>
+              <a:buChar char="•"/>
+            </a:pPr>
+            <a:r>
+              <a:rPr lang="en-US" sz="2400">
+                <a:solidFill>
+                  <a:schemeClr val="accent1">
+                    <a:lumMod val="50000"/>
+                  </a:schemeClr>
+                </a:solidFill>
+                <a:latin typeface="Arial" panose="020B0604020202020204" pitchFamily="34" charset="0"/>
+                <a:cs typeface="Arial" panose="020B0604020202020204" pitchFamily="34" charset="0"/>
+              </a:rPr>
+              <a:t>Tuples can prevent unintended aliasing</a:t>
+            </a:r>
+          </a:p>
+          <a:p>
+            <a:pPr marL="688975" indent="-231775">
+              <a:buFont typeface="Arial" panose="020B0604020202020204" pitchFamily="34" charset="0"/>
+              <a:buChar char="•"/>
+            </a:pPr>
+            <a:r>
+              <a:rPr lang="en-US" sz="2000">
+                <a:solidFill>
+                  <a:schemeClr val="accent1">
+                    <a:lumMod val="50000"/>
+                  </a:schemeClr>
+                </a:solidFill>
+                <a:latin typeface="Arial" panose="020B0604020202020204" pitchFamily="34" charset="0"/>
+                <a:cs typeface="Arial" panose="020B0604020202020204" pitchFamily="34" charset="0"/>
+              </a:rPr>
+              <a:t>If a list is assigned to multiple variables, changes in one reference affect all others.</a:t>
+            </a:r>
+          </a:p>
+          <a:p>
+            <a:pPr marL="688975" indent="-231775">
+              <a:buFont typeface="Arial" panose="020B0604020202020204" pitchFamily="34" charset="0"/>
+              <a:buChar char="•"/>
+            </a:pPr>
+            <a:r>
+              <a:rPr lang="en-US" sz="2000">
+                <a:solidFill>
+                  <a:schemeClr val="accent1">
+                    <a:lumMod val="50000"/>
+                  </a:schemeClr>
+                </a:solidFill>
+                <a:latin typeface="Arial" panose="020B0604020202020204" pitchFamily="34" charset="0"/>
+                <a:cs typeface="Arial" panose="020B0604020202020204" pitchFamily="34" charset="0"/>
+              </a:rPr>
+              <a:t>Using a tuple ensures that security-sensitive data is not modified indirectly.</a:t>
+            </a:r>
+          </a:p>
+        </p:txBody>
+      </p:sp>
+    </p:spTree>
+    <p:extLst>
+      <p:ext uri="{BB962C8B-B14F-4D97-AF65-F5344CB8AC3E}">
+        <p14:creationId xmlns:p14="http://schemas.microsoft.com/office/powerpoint/2010/main" val="2087834609"/>
       </p:ext>
     </p:extLst>
   </p:cSld>

--- a/Slides-Day2.pptx
+++ b/Slides-Day2.pptx
@@ -11,13 +11,19 @@
     <p:sldId id="264" r:id="rId5"/>
     <p:sldId id="265" r:id="rId6"/>
     <p:sldId id="266" r:id="rId7"/>
-    <p:sldId id="261" r:id="rId8"/>
-    <p:sldId id="271" r:id="rId9"/>
-    <p:sldId id="272" r:id="rId10"/>
+    <p:sldId id="272" r:id="rId8"/>
+    <p:sldId id="261" r:id="rId9"/>
+    <p:sldId id="271" r:id="rId10"/>
     <p:sldId id="267" r:id="rId11"/>
     <p:sldId id="268" r:id="rId12"/>
     <p:sldId id="269" r:id="rId13"/>
-    <p:sldId id="270" r:id="rId14"/>
+    <p:sldId id="273" r:id="rId14"/>
+    <p:sldId id="277" r:id="rId15"/>
+    <p:sldId id="278" r:id="rId16"/>
+    <p:sldId id="274" r:id="rId17"/>
+    <p:sldId id="276" r:id="rId18"/>
+    <p:sldId id="275" r:id="rId19"/>
+    <p:sldId id="270" r:id="rId20"/>
   </p:sldIdLst>
   <p:sldSz cx="12192000" cy="6858000"/>
   <p:notesSz cx="6858000" cy="9144000"/>
@@ -271,7 +277,7 @@
           <a:p>
             <a:fld id="{CD989C08-BA69-4AD3-98E9-D53C63F6E1B1}" type="datetimeFigureOut">
               <a:rPr lang="en-US" smtClean="0"/>
-              <a:t>3/13/2025</a:t>
+              <a:t>3/15/2025</a:t>
             </a:fld>
             <a:endParaRPr lang="en-US"/>
           </a:p>
@@ -469,7 +475,7 @@
           <a:p>
             <a:fld id="{CD989C08-BA69-4AD3-98E9-D53C63F6E1B1}" type="datetimeFigureOut">
               <a:rPr lang="en-US" smtClean="0"/>
-              <a:t>3/13/2025</a:t>
+              <a:t>3/15/2025</a:t>
             </a:fld>
             <a:endParaRPr lang="en-US"/>
           </a:p>
@@ -677,7 +683,7 @@
           <a:p>
             <a:fld id="{CD989C08-BA69-4AD3-98E9-D53C63F6E1B1}" type="datetimeFigureOut">
               <a:rPr lang="en-US" smtClean="0"/>
-              <a:t>3/13/2025</a:t>
+              <a:t>3/15/2025</a:t>
             </a:fld>
             <a:endParaRPr lang="en-US"/>
           </a:p>
@@ -875,7 +881,7 @@
           <a:p>
             <a:fld id="{CD989C08-BA69-4AD3-98E9-D53C63F6E1B1}" type="datetimeFigureOut">
               <a:rPr lang="en-US" smtClean="0"/>
-              <a:t>3/13/2025</a:t>
+              <a:t>3/15/2025</a:t>
             </a:fld>
             <a:endParaRPr lang="en-US"/>
           </a:p>
@@ -1150,7 +1156,7 @@
           <a:p>
             <a:fld id="{CD989C08-BA69-4AD3-98E9-D53C63F6E1B1}" type="datetimeFigureOut">
               <a:rPr lang="en-US" smtClean="0"/>
-              <a:t>3/13/2025</a:t>
+              <a:t>3/15/2025</a:t>
             </a:fld>
             <a:endParaRPr lang="en-US"/>
           </a:p>
@@ -1415,7 +1421,7 @@
           <a:p>
             <a:fld id="{CD989C08-BA69-4AD3-98E9-D53C63F6E1B1}" type="datetimeFigureOut">
               <a:rPr lang="en-US" smtClean="0"/>
-              <a:t>3/13/2025</a:t>
+              <a:t>3/15/2025</a:t>
             </a:fld>
             <a:endParaRPr lang="en-US"/>
           </a:p>
@@ -1827,7 +1833,7 @@
           <a:p>
             <a:fld id="{CD989C08-BA69-4AD3-98E9-D53C63F6E1B1}" type="datetimeFigureOut">
               <a:rPr lang="en-US" smtClean="0"/>
-              <a:t>3/13/2025</a:t>
+              <a:t>3/15/2025</a:t>
             </a:fld>
             <a:endParaRPr lang="en-US"/>
           </a:p>
@@ -1968,7 +1974,7 @@
           <a:p>
             <a:fld id="{CD989C08-BA69-4AD3-98E9-D53C63F6E1B1}" type="datetimeFigureOut">
               <a:rPr lang="en-US" smtClean="0"/>
-              <a:t>3/13/2025</a:t>
+              <a:t>3/15/2025</a:t>
             </a:fld>
             <a:endParaRPr lang="en-US"/>
           </a:p>
@@ -2081,7 +2087,7 @@
           <a:p>
             <a:fld id="{CD989C08-BA69-4AD3-98E9-D53C63F6E1B1}" type="datetimeFigureOut">
               <a:rPr lang="en-US" smtClean="0"/>
-              <a:t>3/13/2025</a:t>
+              <a:t>3/15/2025</a:t>
             </a:fld>
             <a:endParaRPr lang="en-US"/>
           </a:p>
@@ -2392,7 +2398,7 @@
           <a:p>
             <a:fld id="{CD989C08-BA69-4AD3-98E9-D53C63F6E1B1}" type="datetimeFigureOut">
               <a:rPr lang="en-US" smtClean="0"/>
-              <a:t>3/13/2025</a:t>
+              <a:t>3/15/2025</a:t>
             </a:fld>
             <a:endParaRPr lang="en-US"/>
           </a:p>
@@ -2680,7 +2686,7 @@
           <a:p>
             <a:fld id="{CD989C08-BA69-4AD3-98E9-D53C63F6E1B1}" type="datetimeFigureOut">
               <a:rPr lang="en-US" smtClean="0"/>
-              <a:t>3/13/2025</a:t>
+              <a:t>3/15/2025</a:t>
             </a:fld>
             <a:endParaRPr lang="en-US"/>
           </a:p>
@@ -2921,7 +2927,7 @@
           <a:p>
             <a:fld id="{CD989C08-BA69-4AD3-98E9-D53C63F6E1B1}" type="datetimeFigureOut">
               <a:rPr lang="en-US" smtClean="0"/>
-              <a:t>3/13/2025</a:t>
+              <a:t>3/15/2025</a:t>
             </a:fld>
             <a:endParaRPr lang="en-US"/>
           </a:p>
@@ -4577,6 +4583,1722 @@
         <p:cNvPr id="1" name="">
           <a:extLst>
             <a:ext uri="{FF2B5EF4-FFF2-40B4-BE49-F238E27FC236}">
+              <a16:creationId xmlns:a16="http://schemas.microsoft.com/office/drawing/2014/main" id="{548DCFD6-FAB1-A52B-F1EB-ACF777FB5E39}"/>
+            </a:ext>
+          </a:extLst>
+        </p:cNvPr>
+        <p:cNvGrpSpPr/>
+        <p:nvPr/>
+      </p:nvGrpSpPr>
+      <p:grpSpPr>
+        <a:xfrm>
+          <a:off x="0" y="0"/>
+          <a:ext cx="0" cy="0"/>
+          <a:chOff x="0" y="0"/>
+          <a:chExt cx="0" cy="0"/>
+        </a:xfrm>
+      </p:grpSpPr>
+      <p:pic>
+        <p:nvPicPr>
+          <p:cNvPr id="3" name="Picture 2" descr="A white and blue background&#10;&#10;Description automatically generated">
+            <a:extLst>
+              <a:ext uri="{FF2B5EF4-FFF2-40B4-BE49-F238E27FC236}">
+                <a16:creationId xmlns:a16="http://schemas.microsoft.com/office/drawing/2014/main" id="{BC959D0D-3F57-1D1A-6A6F-E1F0D43DA2A9}"/>
+              </a:ext>
+            </a:extLst>
+          </p:cNvPr>
+          <p:cNvPicPr>
+            <a:picLocks noChangeAspect="1"/>
+          </p:cNvPicPr>
+          <p:nvPr/>
+        </p:nvPicPr>
+        <p:blipFill>
+          <a:blip r:embed="rId2"/>
+          <a:stretch>
+            <a:fillRect/>
+          </a:stretch>
+        </p:blipFill>
+        <p:spPr>
+          <a:xfrm>
+            <a:off x="0" y="-33129"/>
+            <a:ext cx="12192000" cy="6891129"/>
+          </a:xfrm>
+          <a:prstGeom prst="rect">
+            <a:avLst/>
+          </a:prstGeom>
+        </p:spPr>
+      </p:pic>
+      <p:sp>
+        <p:nvSpPr>
+          <p:cNvPr id="4" name="TextBox 3">
+            <a:extLst>
+              <a:ext uri="{FF2B5EF4-FFF2-40B4-BE49-F238E27FC236}">
+                <a16:creationId xmlns:a16="http://schemas.microsoft.com/office/drawing/2014/main" id="{5BDC787B-E4CE-B59A-89CB-A5F7D2CAF49F}"/>
+              </a:ext>
+            </a:extLst>
+          </p:cNvPr>
+          <p:cNvSpPr txBox="1"/>
+          <p:nvPr/>
+        </p:nvSpPr>
+        <p:spPr>
+          <a:xfrm>
+            <a:off x="604266" y="136955"/>
+            <a:ext cx="10391019" cy="646331"/>
+          </a:xfrm>
+          <a:prstGeom prst="rect">
+            <a:avLst/>
+          </a:prstGeom>
+          <a:noFill/>
+        </p:spPr>
+        <p:txBody>
+          <a:bodyPr wrap="square" rtlCol="0">
+            <a:spAutoFit/>
+          </a:bodyPr>
+          <a:lstStyle/>
+          <a:p>
+            <a:r>
+              <a:rPr lang="en-US" sz="3600">
+                <a:solidFill>
+                  <a:schemeClr val="accent1">
+                    <a:lumMod val="50000"/>
+                  </a:schemeClr>
+                </a:solidFill>
+                <a:latin typeface="Arial" panose="020B0604020202020204" pitchFamily="34" charset="0"/>
+                <a:cs typeface="Arial" panose="020B0604020202020204" pitchFamily="34" charset="0"/>
+              </a:rPr>
+              <a:t>Index Errors/Boundary Overflow Best Practices</a:t>
+            </a:r>
+          </a:p>
+        </p:txBody>
+      </p:sp>
+      <p:sp>
+        <p:nvSpPr>
+          <p:cNvPr id="5" name="TextBox 4">
+            <a:extLst>
+              <a:ext uri="{FF2B5EF4-FFF2-40B4-BE49-F238E27FC236}">
+                <a16:creationId xmlns:a16="http://schemas.microsoft.com/office/drawing/2014/main" id="{A786BC94-0182-297B-0DEC-07A9DAA776F9}"/>
+              </a:ext>
+            </a:extLst>
+          </p:cNvPr>
+          <p:cNvSpPr txBox="1"/>
+          <p:nvPr/>
+        </p:nvSpPr>
+        <p:spPr>
+          <a:xfrm>
+            <a:off x="836614" y="906971"/>
+            <a:ext cx="10323564" cy="2677656"/>
+          </a:xfrm>
+          <a:prstGeom prst="rect">
+            <a:avLst/>
+          </a:prstGeom>
+          <a:noFill/>
+        </p:spPr>
+        <p:txBody>
+          <a:bodyPr wrap="square" rtlCol="0">
+            <a:spAutoFit/>
+          </a:bodyPr>
+          <a:lstStyle/>
+          <a:p>
+            <a:pPr marL="231775" indent="-230188">
+              <a:buFont typeface="Arial" panose="020B0604020202020204" pitchFamily="34" charset="0"/>
+              <a:buChar char="•"/>
+            </a:pPr>
+            <a:r>
+              <a:rPr lang="en-US" sz="2800">
+                <a:solidFill>
+                  <a:schemeClr val="accent1">
+                    <a:lumMod val="50000"/>
+                  </a:schemeClr>
+                </a:solidFill>
+                <a:latin typeface="Arial" panose="020B0604020202020204" pitchFamily="34" charset="0"/>
+                <a:cs typeface="Arial" panose="020B0604020202020204" pitchFamily="34" charset="0"/>
+              </a:rPr>
+              <a:t>Always check if an index is within range before accessing elements.</a:t>
+            </a:r>
+          </a:p>
+          <a:p>
+            <a:pPr marL="231775" indent="-230188">
+              <a:buFont typeface="Arial" panose="020B0604020202020204" pitchFamily="34" charset="0"/>
+              <a:buChar char="•"/>
+            </a:pPr>
+            <a:r>
+              <a:rPr lang="en-US" sz="2800">
+                <a:solidFill>
+                  <a:schemeClr val="accent1">
+                    <a:lumMod val="50000"/>
+                  </a:schemeClr>
+                </a:solidFill>
+                <a:latin typeface="Arial" panose="020B0604020202020204" pitchFamily="34" charset="0"/>
+                <a:cs typeface="Arial" panose="020B0604020202020204" pitchFamily="34" charset="0"/>
+              </a:rPr>
+              <a:t>Use len() to determine valid index ranges.</a:t>
+            </a:r>
+          </a:p>
+          <a:p>
+            <a:pPr marL="231775" indent="-230188">
+              <a:buFont typeface="Arial" panose="020B0604020202020204" pitchFamily="34" charset="0"/>
+              <a:buChar char="•"/>
+            </a:pPr>
+            <a:r>
+              <a:rPr lang="en-US" sz="2800">
+                <a:solidFill>
+                  <a:schemeClr val="accent1">
+                    <a:lumMod val="50000"/>
+                  </a:schemeClr>
+                </a:solidFill>
+                <a:latin typeface="Arial" panose="020B0604020202020204" pitchFamily="34" charset="0"/>
+                <a:cs typeface="Arial" panose="020B0604020202020204" pitchFamily="34" charset="0"/>
+              </a:rPr>
+              <a:t>Handle unexpected errors using try-except.</a:t>
+            </a:r>
+          </a:p>
+          <a:p>
+            <a:pPr marL="231775" indent="-230188">
+              <a:buFont typeface="Arial" panose="020B0604020202020204" pitchFamily="34" charset="0"/>
+              <a:buChar char="•"/>
+            </a:pPr>
+            <a:r>
+              <a:rPr lang="en-US" sz="2800">
+                <a:solidFill>
+                  <a:schemeClr val="accent1">
+                    <a:lumMod val="50000"/>
+                  </a:schemeClr>
+                </a:solidFill>
+                <a:latin typeface="Arial" panose="020B0604020202020204" pitchFamily="34" charset="0"/>
+                <a:cs typeface="Arial" panose="020B0604020202020204" pitchFamily="34" charset="0"/>
+              </a:rPr>
+              <a:t>Validate user input before using it as an index.</a:t>
+            </a:r>
+          </a:p>
+          <a:p>
+            <a:pPr marL="231775" indent="-230188">
+              <a:buFont typeface="Arial" panose="020B0604020202020204" pitchFamily="34" charset="0"/>
+              <a:buChar char="•"/>
+            </a:pPr>
+            <a:r>
+              <a:rPr lang="en-US" sz="2800">
+                <a:solidFill>
+                  <a:schemeClr val="accent1">
+                    <a:lumMod val="50000"/>
+                  </a:schemeClr>
+                </a:solidFill>
+                <a:latin typeface="Arial" panose="020B0604020202020204" pitchFamily="34" charset="0"/>
+                <a:cs typeface="Arial" panose="020B0604020202020204" pitchFamily="34" charset="0"/>
+              </a:rPr>
+              <a:t>Prefer iteration over direct indexing when possible.</a:t>
+            </a:r>
+          </a:p>
+        </p:txBody>
+      </p:sp>
+    </p:spTree>
+    <p:extLst>
+      <p:ext uri="{BB962C8B-B14F-4D97-AF65-F5344CB8AC3E}">
+        <p14:creationId xmlns:p14="http://schemas.microsoft.com/office/powerpoint/2010/main" val="3696631647"/>
+      </p:ext>
+    </p:extLst>
+  </p:cSld>
+  <p:clrMapOvr>
+    <a:masterClrMapping/>
+  </p:clrMapOvr>
+</p:sld>
+</file>
+
+<file path=ppt/slides/slide14.xml><?xml version="1.0" encoding="utf-8"?>
+<p:sld xmlns:a="http://schemas.openxmlformats.org/drawingml/2006/main" xmlns:r="http://schemas.openxmlformats.org/officeDocument/2006/relationships" xmlns:p="http://schemas.openxmlformats.org/presentationml/2006/main">
+  <p:cSld>
+    <p:spTree>
+      <p:nvGrpSpPr>
+        <p:cNvPr id="1" name="">
+          <a:extLst>
+            <a:ext uri="{FF2B5EF4-FFF2-40B4-BE49-F238E27FC236}">
+              <a16:creationId xmlns:a16="http://schemas.microsoft.com/office/drawing/2014/main" id="{E49A1856-8075-8F08-77C4-73C39503C5A1}"/>
+            </a:ext>
+          </a:extLst>
+        </p:cNvPr>
+        <p:cNvGrpSpPr/>
+        <p:nvPr/>
+      </p:nvGrpSpPr>
+      <p:grpSpPr>
+        <a:xfrm>
+          <a:off x="0" y="0"/>
+          <a:ext cx="0" cy="0"/>
+          <a:chOff x="0" y="0"/>
+          <a:chExt cx="0" cy="0"/>
+        </a:xfrm>
+      </p:grpSpPr>
+      <p:pic>
+        <p:nvPicPr>
+          <p:cNvPr id="3" name="Picture 2" descr="A white and blue background&#10;&#10;Description automatically generated">
+            <a:extLst>
+              <a:ext uri="{FF2B5EF4-FFF2-40B4-BE49-F238E27FC236}">
+                <a16:creationId xmlns:a16="http://schemas.microsoft.com/office/drawing/2014/main" id="{D0608FD0-99BA-AA32-CAB8-8547985C419C}"/>
+              </a:ext>
+            </a:extLst>
+          </p:cNvPr>
+          <p:cNvPicPr>
+            <a:picLocks noChangeAspect="1"/>
+          </p:cNvPicPr>
+          <p:nvPr/>
+        </p:nvPicPr>
+        <p:blipFill>
+          <a:blip r:embed="rId2"/>
+          <a:stretch>
+            <a:fillRect/>
+          </a:stretch>
+        </p:blipFill>
+        <p:spPr>
+          <a:xfrm>
+            <a:off x="0" y="-33129"/>
+            <a:ext cx="12192000" cy="6891129"/>
+          </a:xfrm>
+          <a:prstGeom prst="rect">
+            <a:avLst/>
+          </a:prstGeom>
+        </p:spPr>
+      </p:pic>
+      <p:sp>
+        <p:nvSpPr>
+          <p:cNvPr id="4" name="TextBox 3">
+            <a:extLst>
+              <a:ext uri="{FF2B5EF4-FFF2-40B4-BE49-F238E27FC236}">
+                <a16:creationId xmlns:a16="http://schemas.microsoft.com/office/drawing/2014/main" id="{82FED457-6879-E693-5503-71891DE7E4BA}"/>
+              </a:ext>
+            </a:extLst>
+          </p:cNvPr>
+          <p:cNvSpPr txBox="1"/>
+          <p:nvPr/>
+        </p:nvSpPr>
+        <p:spPr>
+          <a:xfrm>
+            <a:off x="604266" y="136955"/>
+            <a:ext cx="10391019" cy="646331"/>
+          </a:xfrm>
+          <a:prstGeom prst="rect">
+            <a:avLst/>
+          </a:prstGeom>
+          <a:noFill/>
+        </p:spPr>
+        <p:txBody>
+          <a:bodyPr wrap="square" rtlCol="0">
+            <a:spAutoFit/>
+          </a:bodyPr>
+          <a:lstStyle/>
+          <a:p>
+            <a:r>
+              <a:rPr lang="en-US" sz="3600">
+                <a:solidFill>
+                  <a:schemeClr val="accent1">
+                    <a:lumMod val="50000"/>
+                  </a:schemeClr>
+                </a:solidFill>
+                <a:latin typeface="Arial" panose="020B0604020202020204" pitchFamily="34" charset="0"/>
+                <a:cs typeface="Arial" panose="020B0604020202020204" pitchFamily="34" charset="0"/>
+              </a:rPr>
+              <a:t>Prefer Iteration Over Direct Indexing</a:t>
+            </a:r>
+          </a:p>
+        </p:txBody>
+      </p:sp>
+      <p:sp>
+        <p:nvSpPr>
+          <p:cNvPr id="5" name="TextBox 4">
+            <a:extLst>
+              <a:ext uri="{FF2B5EF4-FFF2-40B4-BE49-F238E27FC236}">
+                <a16:creationId xmlns:a16="http://schemas.microsoft.com/office/drawing/2014/main" id="{0378DBAD-6BD3-F74B-1817-85683D357BA1}"/>
+              </a:ext>
+            </a:extLst>
+          </p:cNvPr>
+          <p:cNvSpPr txBox="1"/>
+          <p:nvPr/>
+        </p:nvSpPr>
+        <p:spPr>
+          <a:xfrm>
+            <a:off x="836614" y="906971"/>
+            <a:ext cx="10323564" cy="5693866"/>
+          </a:xfrm>
+          <a:prstGeom prst="rect">
+            <a:avLst/>
+          </a:prstGeom>
+          <a:noFill/>
+        </p:spPr>
+        <p:txBody>
+          <a:bodyPr wrap="square" rtlCol="0">
+            <a:spAutoFit/>
+          </a:bodyPr>
+          <a:lstStyle/>
+          <a:p>
+            <a:pPr marL="230188" lvl="1" indent="-230188">
+              <a:buFont typeface="Arial" panose="020B0604020202020204" pitchFamily="34" charset="0"/>
+              <a:buChar char="•"/>
+            </a:pPr>
+            <a:r>
+              <a:rPr lang="en-US" sz="2400">
+                <a:solidFill>
+                  <a:schemeClr val="accent1">
+                    <a:lumMod val="50000"/>
+                  </a:schemeClr>
+                </a:solidFill>
+                <a:latin typeface="Arial" panose="020B0604020202020204" pitchFamily="34" charset="0"/>
+                <a:cs typeface="Arial" panose="020B0604020202020204" pitchFamily="34" charset="0"/>
+              </a:rPr>
+              <a:t>Use for loops instead of manually tracking indices.</a:t>
+            </a:r>
+          </a:p>
+          <a:p>
+            <a:pPr marL="230188" lvl="1" indent="-230188">
+              <a:buFont typeface="Arial" panose="020B0604020202020204" pitchFamily="34" charset="0"/>
+              <a:buChar char="•"/>
+            </a:pPr>
+            <a:r>
+              <a:rPr lang="en-US" sz="2400">
+                <a:solidFill>
+                  <a:schemeClr val="accent1">
+                    <a:lumMod val="50000"/>
+                  </a:schemeClr>
+                </a:solidFill>
+                <a:latin typeface="Arial" panose="020B0604020202020204" pitchFamily="34" charset="0"/>
+                <a:cs typeface="Arial" panose="020B0604020202020204" pitchFamily="34" charset="0"/>
+              </a:rPr>
+              <a:t>Manual index tracking is often unnecessary and can introduce errors, making code harder to read and maintain. </a:t>
+            </a:r>
+          </a:p>
+          <a:p>
+            <a:pPr marL="230188" lvl="1" indent="-230188">
+              <a:buFont typeface="Arial" panose="020B0604020202020204" pitchFamily="34" charset="0"/>
+              <a:buChar char="•"/>
+            </a:pPr>
+            <a:r>
+              <a:rPr lang="en-US" sz="2400">
+                <a:solidFill>
+                  <a:schemeClr val="accent1">
+                    <a:lumMod val="50000"/>
+                  </a:schemeClr>
+                </a:solidFill>
+                <a:latin typeface="Arial" panose="020B0604020202020204" pitchFamily="34" charset="0"/>
+                <a:cs typeface="Arial" panose="020B0604020202020204" pitchFamily="34" charset="0"/>
+              </a:rPr>
+              <a:t>Use built-in iteration methods that automatically handle indexing.</a:t>
+            </a:r>
+          </a:p>
+          <a:p>
+            <a:pPr marL="914400" lvl="1" indent="-230188">
+              <a:buFont typeface="Arial" panose="020B0604020202020204" pitchFamily="34" charset="0"/>
+              <a:buChar char="•"/>
+            </a:pPr>
+            <a:r>
+              <a:rPr lang="en-US" sz="2200">
+                <a:solidFill>
+                  <a:schemeClr val="accent1">
+                    <a:lumMod val="50000"/>
+                  </a:schemeClr>
+                </a:solidFill>
+                <a:latin typeface="Arial" panose="020B0604020202020204" pitchFamily="34" charset="0"/>
+                <a:cs typeface="Arial" panose="020B0604020202020204" pitchFamily="34" charset="0"/>
+              </a:rPr>
+              <a:t>Instead of this:</a:t>
+            </a:r>
+          </a:p>
+          <a:p>
+            <a:pPr marL="230188" lvl="1" indent="-230188">
+              <a:buFont typeface="Arial" panose="020B0604020202020204" pitchFamily="34" charset="0"/>
+              <a:buChar char="•"/>
+            </a:pPr>
+            <a:endParaRPr lang="en-US" sz="1000">
+              <a:solidFill>
+                <a:schemeClr val="accent1">
+                  <a:lumMod val="50000"/>
+                </a:schemeClr>
+              </a:solidFill>
+              <a:latin typeface="Arial" panose="020B0604020202020204" pitchFamily="34" charset="0"/>
+              <a:cs typeface="Arial" panose="020B0604020202020204" pitchFamily="34" charset="0"/>
+            </a:endParaRPr>
+          </a:p>
+          <a:p>
+            <a:pPr marL="914400" lvl="1"/>
+            <a:r>
+              <a:rPr lang="en-US" sz="2000" b="1">
+                <a:solidFill>
+                  <a:schemeClr val="accent1">
+                    <a:lumMod val="50000"/>
+                  </a:schemeClr>
+                </a:solidFill>
+                <a:latin typeface="Consolas" panose="020B0609020204030204" pitchFamily="49" charset="0"/>
+                <a:cs typeface="Arial" panose="020B0604020202020204" pitchFamily="34" charset="0"/>
+              </a:rPr>
+              <a:t>my_list = ["apple", "banana", "cherry"]</a:t>
+            </a:r>
+          </a:p>
+          <a:p>
+            <a:pPr marL="914400" lvl="1"/>
+            <a:r>
+              <a:rPr lang="en-US" sz="2000" b="1">
+                <a:solidFill>
+                  <a:schemeClr val="accent1">
+                    <a:lumMod val="50000"/>
+                  </a:schemeClr>
+                </a:solidFill>
+                <a:latin typeface="Consolas" panose="020B0609020204030204" pitchFamily="49" charset="0"/>
+                <a:cs typeface="Arial" panose="020B0604020202020204" pitchFamily="34" charset="0"/>
+              </a:rPr>
+              <a:t>index = 0  # Manually tracking index</a:t>
+            </a:r>
+          </a:p>
+          <a:p>
+            <a:pPr marL="914400" lvl="1"/>
+            <a:endParaRPr lang="en-US" sz="1000" b="1">
+              <a:solidFill>
+                <a:schemeClr val="accent1">
+                  <a:lumMod val="50000"/>
+                </a:schemeClr>
+              </a:solidFill>
+              <a:latin typeface="Consolas" panose="020B0609020204030204" pitchFamily="49" charset="0"/>
+              <a:cs typeface="Arial" panose="020B0604020202020204" pitchFamily="34" charset="0"/>
+            </a:endParaRPr>
+          </a:p>
+          <a:p>
+            <a:pPr marL="914400" lvl="1"/>
+            <a:r>
+              <a:rPr lang="en-US" sz="2000" b="1">
+                <a:solidFill>
+                  <a:schemeClr val="accent1">
+                    <a:lumMod val="50000"/>
+                  </a:schemeClr>
+                </a:solidFill>
+                <a:latin typeface="Consolas" panose="020B0609020204030204" pitchFamily="49" charset="0"/>
+                <a:cs typeface="Arial" panose="020B0604020202020204" pitchFamily="34" charset="0"/>
+              </a:rPr>
+              <a:t>while index &lt; len(my_list):</a:t>
+            </a:r>
+          </a:p>
+          <a:p>
+            <a:pPr marL="914400" lvl="1"/>
+            <a:r>
+              <a:rPr lang="en-US" sz="2000" b="1">
+                <a:solidFill>
+                  <a:schemeClr val="accent1">
+                    <a:lumMod val="50000"/>
+                  </a:schemeClr>
+                </a:solidFill>
+                <a:latin typeface="Consolas" panose="020B0609020204030204" pitchFamily="49" charset="0"/>
+                <a:cs typeface="Arial" panose="020B0604020202020204" pitchFamily="34" charset="0"/>
+              </a:rPr>
+              <a:t>    print(my_list[index])</a:t>
+            </a:r>
+          </a:p>
+          <a:p>
+            <a:pPr marL="914400" lvl="1"/>
+            <a:r>
+              <a:rPr lang="en-US" sz="2000" b="1">
+                <a:solidFill>
+                  <a:schemeClr val="accent1">
+                    <a:lumMod val="50000"/>
+                  </a:schemeClr>
+                </a:solidFill>
+                <a:latin typeface="Consolas" panose="020B0609020204030204" pitchFamily="49" charset="0"/>
+                <a:cs typeface="Arial" panose="020B0604020202020204" pitchFamily="34" charset="0"/>
+              </a:rPr>
+              <a:t>    index += 1  # Manually updating index</a:t>
+            </a:r>
+          </a:p>
+          <a:p>
+            <a:pPr marL="914400" lvl="1"/>
+            <a:endParaRPr lang="en-US" sz="1000" b="1">
+              <a:solidFill>
+                <a:schemeClr val="accent1">
+                  <a:lumMod val="50000"/>
+                </a:schemeClr>
+              </a:solidFill>
+              <a:latin typeface="Consolas" panose="020B0609020204030204" pitchFamily="49" charset="0"/>
+              <a:cs typeface="Arial" panose="020B0604020202020204" pitchFamily="34" charset="0"/>
+            </a:endParaRPr>
+          </a:p>
+          <a:p>
+            <a:pPr marL="914400" lvl="1" indent="-231775">
+              <a:buFont typeface="Arial" panose="020B0604020202020204" pitchFamily="34" charset="0"/>
+              <a:buChar char="•"/>
+            </a:pPr>
+            <a:r>
+              <a:rPr lang="en-US" sz="2200">
+                <a:solidFill>
+                  <a:schemeClr val="accent1">
+                    <a:lumMod val="50000"/>
+                  </a:schemeClr>
+                </a:solidFill>
+                <a:latin typeface="Arial" panose="020B0604020202020204" pitchFamily="34" charset="0"/>
+                <a:cs typeface="Arial" panose="020B0604020202020204" pitchFamily="34" charset="0"/>
+              </a:rPr>
+              <a:t>Do this:</a:t>
+            </a:r>
+          </a:p>
+          <a:p>
+            <a:pPr marL="914400" lvl="1" indent="-231775">
+              <a:buFont typeface="Arial" panose="020B0604020202020204" pitchFamily="34" charset="0"/>
+              <a:buChar char="•"/>
+            </a:pPr>
+            <a:endParaRPr lang="en-US" sz="1000">
+              <a:solidFill>
+                <a:schemeClr val="accent1">
+                  <a:lumMod val="50000"/>
+                </a:schemeClr>
+              </a:solidFill>
+              <a:latin typeface="Arial" panose="020B0604020202020204" pitchFamily="34" charset="0"/>
+              <a:cs typeface="Arial" panose="020B0604020202020204" pitchFamily="34" charset="0"/>
+            </a:endParaRPr>
+          </a:p>
+          <a:p>
+            <a:pPr marL="914400"/>
+            <a:r>
+              <a:rPr lang="en-US" sz="2000" b="1">
+                <a:solidFill>
+                  <a:schemeClr val="accent1">
+                    <a:lumMod val="50000"/>
+                  </a:schemeClr>
+                </a:solidFill>
+                <a:latin typeface="Consolas" panose="020B0609020204030204" pitchFamily="49" charset="0"/>
+                <a:cs typeface="Arial" panose="020B0604020202020204" pitchFamily="34" charset="0"/>
+              </a:rPr>
+              <a:t>my_list = ["apple", "banana", "cherry"]</a:t>
+            </a:r>
+          </a:p>
+          <a:p>
+            <a:pPr marL="914400"/>
+            <a:r>
+              <a:rPr lang="en-US" sz="2000" b="1">
+                <a:solidFill>
+                  <a:schemeClr val="accent1">
+                    <a:lumMod val="50000"/>
+                  </a:schemeClr>
+                </a:solidFill>
+                <a:latin typeface="Consolas" panose="020B0609020204030204" pitchFamily="49" charset="0"/>
+                <a:cs typeface="Arial" panose="020B0604020202020204" pitchFamily="34" charset="0"/>
+              </a:rPr>
+              <a:t>for item in my_list:</a:t>
+            </a:r>
+          </a:p>
+          <a:p>
+            <a:pPr marL="914400"/>
+            <a:r>
+              <a:rPr lang="en-US" sz="2000" b="1">
+                <a:solidFill>
+                  <a:schemeClr val="accent1">
+                    <a:lumMod val="50000"/>
+                  </a:schemeClr>
+                </a:solidFill>
+                <a:latin typeface="Consolas" panose="020B0609020204030204" pitchFamily="49" charset="0"/>
+                <a:cs typeface="Arial" panose="020B0604020202020204" pitchFamily="34" charset="0"/>
+              </a:rPr>
+              <a:t>    print(item)  # No need to manage an index</a:t>
+            </a:r>
+          </a:p>
+          <a:p>
+            <a:pPr marL="231775" indent="-230188">
+              <a:buFont typeface="Arial" panose="020B0604020202020204" pitchFamily="34" charset="0"/>
+              <a:buChar char="•"/>
+            </a:pPr>
+            <a:endParaRPr lang="en-US" sz="2400">
+              <a:solidFill>
+                <a:schemeClr val="accent1">
+                  <a:lumMod val="50000"/>
+                </a:schemeClr>
+              </a:solidFill>
+              <a:latin typeface="Arial" panose="020B0604020202020204" pitchFamily="34" charset="0"/>
+              <a:cs typeface="Arial" panose="020B0604020202020204" pitchFamily="34" charset="0"/>
+            </a:endParaRPr>
+          </a:p>
+        </p:txBody>
+      </p:sp>
+    </p:spTree>
+    <p:extLst>
+      <p:ext uri="{BB962C8B-B14F-4D97-AF65-F5344CB8AC3E}">
+        <p14:creationId xmlns:p14="http://schemas.microsoft.com/office/powerpoint/2010/main" val="2899590176"/>
+      </p:ext>
+    </p:extLst>
+  </p:cSld>
+  <p:clrMapOvr>
+    <a:masterClrMapping/>
+  </p:clrMapOvr>
+</p:sld>
+</file>
+
+<file path=ppt/slides/slide15.xml><?xml version="1.0" encoding="utf-8"?>
+<p:sld xmlns:a="http://schemas.openxmlformats.org/drawingml/2006/main" xmlns:r="http://schemas.openxmlformats.org/officeDocument/2006/relationships" xmlns:p="http://schemas.openxmlformats.org/presentationml/2006/main">
+  <p:cSld>
+    <p:spTree>
+      <p:nvGrpSpPr>
+        <p:cNvPr id="1" name="">
+          <a:extLst>
+            <a:ext uri="{FF2B5EF4-FFF2-40B4-BE49-F238E27FC236}">
+              <a16:creationId xmlns:a16="http://schemas.microsoft.com/office/drawing/2014/main" id="{9309D4A4-18D1-38F2-5D0A-035414E0F44E}"/>
+            </a:ext>
+          </a:extLst>
+        </p:cNvPr>
+        <p:cNvGrpSpPr/>
+        <p:nvPr/>
+      </p:nvGrpSpPr>
+      <p:grpSpPr>
+        <a:xfrm>
+          <a:off x="0" y="0"/>
+          <a:ext cx="0" cy="0"/>
+          <a:chOff x="0" y="0"/>
+          <a:chExt cx="0" cy="0"/>
+        </a:xfrm>
+      </p:grpSpPr>
+      <p:pic>
+        <p:nvPicPr>
+          <p:cNvPr id="3" name="Picture 2" descr="A white and blue background&#10;&#10;Description automatically generated">
+            <a:extLst>
+              <a:ext uri="{FF2B5EF4-FFF2-40B4-BE49-F238E27FC236}">
+                <a16:creationId xmlns:a16="http://schemas.microsoft.com/office/drawing/2014/main" id="{312D5526-FD7F-5DD4-7471-8D6605969C5E}"/>
+              </a:ext>
+            </a:extLst>
+          </p:cNvPr>
+          <p:cNvPicPr>
+            <a:picLocks noChangeAspect="1"/>
+          </p:cNvPicPr>
+          <p:nvPr/>
+        </p:nvPicPr>
+        <p:blipFill>
+          <a:blip r:embed="rId2"/>
+          <a:stretch>
+            <a:fillRect/>
+          </a:stretch>
+        </p:blipFill>
+        <p:spPr>
+          <a:xfrm>
+            <a:off x="0" y="-33129"/>
+            <a:ext cx="12192000" cy="6891129"/>
+          </a:xfrm>
+          <a:prstGeom prst="rect">
+            <a:avLst/>
+          </a:prstGeom>
+        </p:spPr>
+      </p:pic>
+      <p:sp>
+        <p:nvSpPr>
+          <p:cNvPr id="4" name="TextBox 3">
+            <a:extLst>
+              <a:ext uri="{FF2B5EF4-FFF2-40B4-BE49-F238E27FC236}">
+                <a16:creationId xmlns:a16="http://schemas.microsoft.com/office/drawing/2014/main" id="{BE793B24-F71F-1671-8A5C-D366C264DE15}"/>
+              </a:ext>
+            </a:extLst>
+          </p:cNvPr>
+          <p:cNvSpPr txBox="1"/>
+          <p:nvPr/>
+        </p:nvSpPr>
+        <p:spPr>
+          <a:xfrm>
+            <a:off x="604266" y="136955"/>
+            <a:ext cx="10391019" cy="646331"/>
+          </a:xfrm>
+          <a:prstGeom prst="rect">
+            <a:avLst/>
+          </a:prstGeom>
+          <a:noFill/>
+        </p:spPr>
+        <p:txBody>
+          <a:bodyPr wrap="square" rtlCol="0">
+            <a:spAutoFit/>
+          </a:bodyPr>
+          <a:lstStyle/>
+          <a:p>
+            <a:r>
+              <a:rPr lang="en-US" sz="3600">
+                <a:solidFill>
+                  <a:schemeClr val="accent1">
+                    <a:lumMod val="50000"/>
+                  </a:schemeClr>
+                </a:solidFill>
+                <a:latin typeface="Arial" panose="020B0604020202020204" pitchFamily="34" charset="0"/>
+                <a:cs typeface="Arial" panose="020B0604020202020204" pitchFamily="34" charset="0"/>
+              </a:rPr>
+              <a:t>Prefer Iteration Over Direct Indexing</a:t>
+            </a:r>
+          </a:p>
+        </p:txBody>
+      </p:sp>
+      <p:sp>
+        <p:nvSpPr>
+          <p:cNvPr id="5" name="TextBox 4">
+            <a:extLst>
+              <a:ext uri="{FF2B5EF4-FFF2-40B4-BE49-F238E27FC236}">
+                <a16:creationId xmlns:a16="http://schemas.microsoft.com/office/drawing/2014/main" id="{F4090505-DE8B-8D55-006F-0D8F661FC228}"/>
+              </a:ext>
+            </a:extLst>
+          </p:cNvPr>
+          <p:cNvSpPr txBox="1"/>
+          <p:nvPr/>
+        </p:nvSpPr>
+        <p:spPr>
+          <a:xfrm>
+            <a:off x="836614" y="906971"/>
+            <a:ext cx="10323564" cy="2308324"/>
+          </a:xfrm>
+          <a:prstGeom prst="rect">
+            <a:avLst/>
+          </a:prstGeom>
+          <a:noFill/>
+        </p:spPr>
+        <p:txBody>
+          <a:bodyPr wrap="square" rtlCol="0">
+            <a:spAutoFit/>
+          </a:bodyPr>
+          <a:lstStyle/>
+          <a:p>
+            <a:pPr marL="688975" lvl="1" indent="-230188">
+              <a:buFont typeface="Arial" panose="020B0604020202020204" pitchFamily="34" charset="0"/>
+              <a:buChar char="•"/>
+            </a:pPr>
+            <a:r>
+              <a:rPr lang="en-US" sz="2400">
+                <a:solidFill>
+                  <a:schemeClr val="accent1">
+                    <a:lumMod val="50000"/>
+                  </a:schemeClr>
+                </a:solidFill>
+                <a:latin typeface="Arial" panose="020B0604020202020204" pitchFamily="34" charset="0"/>
+                <a:cs typeface="Arial" panose="020B0604020202020204" pitchFamily="34" charset="0"/>
+              </a:rPr>
+              <a:t>Utilize enumerate() for index-value pairs.</a:t>
+            </a:r>
+          </a:p>
+          <a:p>
+            <a:pPr marL="688975" lvl="1" indent="-230188">
+              <a:buFont typeface="Arial" panose="020B0604020202020204" pitchFamily="34" charset="0"/>
+              <a:buChar char="•"/>
+            </a:pPr>
+            <a:r>
+              <a:rPr lang="en-US" sz="2400">
+                <a:solidFill>
+                  <a:schemeClr val="accent1">
+                    <a:lumMod val="50000"/>
+                  </a:schemeClr>
+                </a:solidFill>
+                <a:latin typeface="Arial" panose="020B0604020202020204" pitchFamily="34" charset="0"/>
+                <a:cs typeface="Arial" panose="020B0604020202020204" pitchFamily="34" charset="0"/>
+              </a:rPr>
+              <a:t>Use list comprehensions to avoid direct indexing.</a:t>
+            </a:r>
+          </a:p>
+          <a:p>
+            <a:pPr marL="688975" lvl="1" indent="-230188">
+              <a:buFont typeface="Arial" panose="020B0604020202020204" pitchFamily="34" charset="0"/>
+              <a:buChar char="•"/>
+            </a:pPr>
+            <a:r>
+              <a:rPr lang="en-US" sz="2400">
+                <a:solidFill>
+                  <a:schemeClr val="accent1">
+                    <a:lumMod val="50000"/>
+                  </a:schemeClr>
+                </a:solidFill>
+                <a:latin typeface="Arial" panose="020B0604020202020204" pitchFamily="34" charset="0"/>
+                <a:cs typeface="Arial" panose="020B0604020202020204" pitchFamily="34" charset="0"/>
+              </a:rPr>
+              <a:t>Consider zip() for iterating over multiple lists safely.</a:t>
+            </a:r>
+          </a:p>
+          <a:p>
+            <a:pPr marL="688975" lvl="1" indent="-230188">
+              <a:buFont typeface="Arial" panose="020B0604020202020204" pitchFamily="34" charset="0"/>
+              <a:buChar char="•"/>
+            </a:pPr>
+            <a:r>
+              <a:rPr lang="en-US" sz="2400">
+                <a:solidFill>
+                  <a:schemeClr val="accent1">
+                    <a:lumMod val="50000"/>
+                  </a:schemeClr>
+                </a:solidFill>
+                <a:latin typeface="Arial" panose="020B0604020202020204" pitchFamily="34" charset="0"/>
+                <a:cs typeface="Arial" panose="020B0604020202020204" pitchFamily="34" charset="0"/>
+              </a:rPr>
+              <a:t>Avoid modifying a list while iterating over it.</a:t>
+            </a:r>
+          </a:p>
+          <a:p>
+            <a:pPr marL="688975" lvl="1" indent="-230188">
+              <a:buFont typeface="Arial" panose="020B0604020202020204" pitchFamily="34" charset="0"/>
+              <a:buChar char="•"/>
+            </a:pPr>
+            <a:endParaRPr lang="en-US" sz="2400">
+              <a:solidFill>
+                <a:schemeClr val="accent1">
+                  <a:lumMod val="50000"/>
+                </a:schemeClr>
+              </a:solidFill>
+              <a:latin typeface="Arial" panose="020B0604020202020204" pitchFamily="34" charset="0"/>
+              <a:cs typeface="Arial" panose="020B0604020202020204" pitchFamily="34" charset="0"/>
+            </a:endParaRPr>
+          </a:p>
+          <a:p>
+            <a:pPr marL="231775" indent="-230188">
+              <a:buFont typeface="Arial" panose="020B0604020202020204" pitchFamily="34" charset="0"/>
+              <a:buChar char="•"/>
+            </a:pPr>
+            <a:endParaRPr lang="en-US" sz="2400">
+              <a:solidFill>
+                <a:schemeClr val="accent1">
+                  <a:lumMod val="50000"/>
+                </a:schemeClr>
+              </a:solidFill>
+              <a:latin typeface="Arial" panose="020B0604020202020204" pitchFamily="34" charset="0"/>
+              <a:cs typeface="Arial" panose="020B0604020202020204" pitchFamily="34" charset="0"/>
+            </a:endParaRPr>
+          </a:p>
+        </p:txBody>
+      </p:sp>
+    </p:spTree>
+    <p:extLst>
+      <p:ext uri="{BB962C8B-B14F-4D97-AF65-F5344CB8AC3E}">
+        <p14:creationId xmlns:p14="http://schemas.microsoft.com/office/powerpoint/2010/main" val="1968607714"/>
+      </p:ext>
+    </p:extLst>
+  </p:cSld>
+  <p:clrMapOvr>
+    <a:masterClrMapping/>
+  </p:clrMapOvr>
+</p:sld>
+</file>
+
+<file path=ppt/slides/slide16.xml><?xml version="1.0" encoding="utf-8"?>
+<p:sld xmlns:a="http://schemas.openxmlformats.org/drawingml/2006/main" xmlns:r="http://schemas.openxmlformats.org/officeDocument/2006/relationships" xmlns:p="http://schemas.openxmlformats.org/presentationml/2006/main">
+  <p:cSld>
+    <p:spTree>
+      <p:nvGrpSpPr>
+        <p:cNvPr id="1" name="">
+          <a:extLst>
+            <a:ext uri="{FF2B5EF4-FFF2-40B4-BE49-F238E27FC236}">
+              <a16:creationId xmlns:a16="http://schemas.microsoft.com/office/drawing/2014/main" id="{BC99DE24-11E3-B58C-325C-03784DC0AB42}"/>
+            </a:ext>
+          </a:extLst>
+        </p:cNvPr>
+        <p:cNvGrpSpPr/>
+        <p:nvPr/>
+      </p:nvGrpSpPr>
+      <p:grpSpPr>
+        <a:xfrm>
+          <a:off x="0" y="0"/>
+          <a:ext cx="0" cy="0"/>
+          <a:chOff x="0" y="0"/>
+          <a:chExt cx="0" cy="0"/>
+        </a:xfrm>
+      </p:grpSpPr>
+      <p:pic>
+        <p:nvPicPr>
+          <p:cNvPr id="3" name="Picture 2" descr="A white and blue background&#10;&#10;Description automatically generated">
+            <a:extLst>
+              <a:ext uri="{FF2B5EF4-FFF2-40B4-BE49-F238E27FC236}">
+                <a16:creationId xmlns:a16="http://schemas.microsoft.com/office/drawing/2014/main" id="{B7948E7C-D1F5-8DD4-3848-32B003C5F3D4}"/>
+              </a:ext>
+            </a:extLst>
+          </p:cNvPr>
+          <p:cNvPicPr>
+            <a:picLocks noChangeAspect="1"/>
+          </p:cNvPicPr>
+          <p:nvPr/>
+        </p:nvPicPr>
+        <p:blipFill>
+          <a:blip r:embed="rId2"/>
+          <a:stretch>
+            <a:fillRect/>
+          </a:stretch>
+        </p:blipFill>
+        <p:spPr>
+          <a:xfrm>
+            <a:off x="0" y="-33129"/>
+            <a:ext cx="12192000" cy="6891129"/>
+          </a:xfrm>
+          <a:prstGeom prst="rect">
+            <a:avLst/>
+          </a:prstGeom>
+        </p:spPr>
+      </p:pic>
+      <p:sp>
+        <p:nvSpPr>
+          <p:cNvPr id="4" name="TextBox 3">
+            <a:extLst>
+              <a:ext uri="{FF2B5EF4-FFF2-40B4-BE49-F238E27FC236}">
+                <a16:creationId xmlns:a16="http://schemas.microsoft.com/office/drawing/2014/main" id="{9947D70E-4EC6-9F57-4994-E8D33286F171}"/>
+              </a:ext>
+            </a:extLst>
+          </p:cNvPr>
+          <p:cNvSpPr txBox="1"/>
+          <p:nvPr/>
+        </p:nvSpPr>
+        <p:spPr>
+          <a:xfrm>
+            <a:off x="604266" y="136955"/>
+            <a:ext cx="10391019" cy="646331"/>
+          </a:xfrm>
+          <a:prstGeom prst="rect">
+            <a:avLst/>
+          </a:prstGeom>
+          <a:noFill/>
+        </p:spPr>
+        <p:txBody>
+          <a:bodyPr wrap="square" rtlCol="0">
+            <a:spAutoFit/>
+          </a:bodyPr>
+          <a:lstStyle/>
+          <a:p>
+            <a:r>
+              <a:rPr lang="en-US" sz="3600">
+                <a:solidFill>
+                  <a:schemeClr val="accent1">
+                    <a:lumMod val="50000"/>
+                  </a:schemeClr>
+                </a:solidFill>
+                <a:latin typeface="Arial" panose="020B0604020202020204" pitchFamily="34" charset="0"/>
+                <a:cs typeface="Arial" panose="020B0604020202020204" pitchFamily="34" charset="0"/>
+              </a:rPr>
+              <a:t>Handling Index Errors Gracefully (Lists)</a:t>
+            </a:r>
+          </a:p>
+        </p:txBody>
+      </p:sp>
+      <p:sp>
+        <p:nvSpPr>
+          <p:cNvPr id="5" name="TextBox 4">
+            <a:extLst>
+              <a:ext uri="{FF2B5EF4-FFF2-40B4-BE49-F238E27FC236}">
+                <a16:creationId xmlns:a16="http://schemas.microsoft.com/office/drawing/2014/main" id="{E5C77192-6489-D6CE-E4A5-B7C7069ED03D}"/>
+              </a:ext>
+            </a:extLst>
+          </p:cNvPr>
+          <p:cNvSpPr txBox="1"/>
+          <p:nvPr/>
+        </p:nvSpPr>
+        <p:spPr>
+          <a:xfrm>
+            <a:off x="836614" y="906971"/>
+            <a:ext cx="10323564" cy="3785652"/>
+          </a:xfrm>
+          <a:prstGeom prst="rect">
+            <a:avLst/>
+          </a:prstGeom>
+          <a:noFill/>
+        </p:spPr>
+        <p:txBody>
+          <a:bodyPr wrap="square" rtlCol="0">
+            <a:spAutoFit/>
+          </a:bodyPr>
+          <a:lstStyle/>
+          <a:p>
+            <a:pPr marL="231775" indent="-230188">
+              <a:buFont typeface="Arial" panose="020B0604020202020204" pitchFamily="34" charset="0"/>
+              <a:buChar char="•"/>
+            </a:pPr>
+            <a:r>
+              <a:rPr lang="en-US" sz="2400">
+                <a:solidFill>
+                  <a:schemeClr val="accent1">
+                    <a:lumMod val="50000"/>
+                  </a:schemeClr>
+                </a:solidFill>
+                <a:latin typeface="Arial" panose="020B0604020202020204" pitchFamily="34" charset="0"/>
+                <a:cs typeface="Arial" panose="020B0604020202020204" pitchFamily="34" charset="0"/>
+              </a:rPr>
+              <a:t>Use try-except to catch IndexError without crashing.</a:t>
+            </a:r>
+          </a:p>
+          <a:p>
+            <a:pPr marL="231775" indent="-230188">
+              <a:buFont typeface="Arial" panose="020B0604020202020204" pitchFamily="34" charset="0"/>
+              <a:buChar char="•"/>
+            </a:pPr>
+            <a:r>
+              <a:rPr lang="en-US" sz="2400">
+                <a:solidFill>
+                  <a:schemeClr val="accent1">
+                    <a:lumMod val="50000"/>
+                  </a:schemeClr>
+                </a:solidFill>
+                <a:latin typeface="Arial" panose="020B0604020202020204" pitchFamily="34" charset="0"/>
+                <a:cs typeface="Arial" panose="020B0604020202020204" pitchFamily="34" charset="0"/>
+              </a:rPr>
+              <a:t>Return a default value or a meaningful message on failure.</a:t>
+            </a:r>
+          </a:p>
+          <a:p>
+            <a:pPr marL="231775" indent="-230188">
+              <a:buFont typeface="Arial" panose="020B0604020202020204" pitchFamily="34" charset="0"/>
+              <a:buChar char="•"/>
+            </a:pPr>
+            <a:endParaRPr lang="en-US" sz="2400">
+              <a:solidFill>
+                <a:schemeClr val="accent1">
+                  <a:lumMod val="50000"/>
+                </a:schemeClr>
+              </a:solidFill>
+              <a:latin typeface="Arial" panose="020B0604020202020204" pitchFamily="34" charset="0"/>
+              <a:cs typeface="Arial" panose="020B0604020202020204" pitchFamily="34" charset="0"/>
+            </a:endParaRPr>
+          </a:p>
+          <a:p>
+            <a:pPr marL="914400"/>
+            <a:r>
+              <a:rPr lang="en-US" sz="2400" b="1">
+                <a:solidFill>
+                  <a:schemeClr val="accent1">
+                    <a:lumMod val="50000"/>
+                  </a:schemeClr>
+                </a:solidFill>
+                <a:latin typeface="Consolas" panose="020B0609020204030204" pitchFamily="49" charset="0"/>
+                <a:cs typeface="Arial" panose="020B0604020202020204" pitchFamily="34" charset="0"/>
+              </a:rPr>
+              <a:t>my_list = [10, 20, 30]</a:t>
+            </a:r>
+          </a:p>
+          <a:p>
+            <a:pPr marL="914400"/>
+            <a:r>
+              <a:rPr lang="en-US" sz="2400" b="1">
+                <a:solidFill>
+                  <a:schemeClr val="accent1">
+                    <a:lumMod val="50000"/>
+                  </a:schemeClr>
+                </a:solidFill>
+                <a:latin typeface="Consolas" panose="020B0609020204030204" pitchFamily="49" charset="0"/>
+                <a:cs typeface="Arial" panose="020B0604020202020204" pitchFamily="34" charset="0"/>
+              </a:rPr>
+              <a:t>try:    </a:t>
+            </a:r>
+          </a:p>
+          <a:p>
+            <a:pPr marL="914400"/>
+            <a:r>
+              <a:rPr lang="en-US" sz="2400" b="1">
+                <a:solidFill>
+                  <a:schemeClr val="accent1">
+                    <a:lumMod val="50000"/>
+                  </a:schemeClr>
+                </a:solidFill>
+                <a:latin typeface="Consolas" panose="020B0609020204030204" pitchFamily="49" charset="0"/>
+                <a:cs typeface="Arial" panose="020B0604020202020204" pitchFamily="34" charset="0"/>
+              </a:rPr>
+              <a:t>    print(my_list[3])  </a:t>
+            </a:r>
+          </a:p>
+          <a:p>
+            <a:pPr marL="914400"/>
+            <a:r>
+              <a:rPr lang="en-US" sz="2400" b="1">
+                <a:solidFill>
+                  <a:schemeClr val="accent1">
+                    <a:lumMod val="50000"/>
+                  </a:schemeClr>
+                </a:solidFill>
+                <a:latin typeface="Consolas" panose="020B0609020204030204" pitchFamily="49" charset="0"/>
+                <a:cs typeface="Arial" panose="020B0604020202020204" pitchFamily="34" charset="0"/>
+              </a:rPr>
+              <a:t>except IndexError:    </a:t>
+            </a:r>
+          </a:p>
+          <a:p>
+            <a:pPr marL="914400"/>
+            <a:r>
+              <a:rPr lang="en-US" sz="2400" b="1">
+                <a:solidFill>
+                  <a:schemeClr val="accent1">
+                    <a:lumMod val="50000"/>
+                  </a:schemeClr>
+                </a:solidFill>
+                <a:latin typeface="Consolas" panose="020B0609020204030204" pitchFamily="49" charset="0"/>
+                <a:cs typeface="Arial" panose="020B0604020202020204" pitchFamily="34" charset="0"/>
+              </a:rPr>
+              <a:t>    print("Index out of range!")</a:t>
+            </a:r>
+          </a:p>
+          <a:p>
+            <a:pPr marL="231775" indent="-230188">
+              <a:buFont typeface="Arial" panose="020B0604020202020204" pitchFamily="34" charset="0"/>
+              <a:buChar char="•"/>
+            </a:pPr>
+            <a:endParaRPr lang="en-US" sz="2400">
+              <a:solidFill>
+                <a:schemeClr val="accent1">
+                  <a:lumMod val="50000"/>
+                </a:schemeClr>
+              </a:solidFill>
+              <a:latin typeface="Arial" panose="020B0604020202020204" pitchFamily="34" charset="0"/>
+              <a:cs typeface="Arial" panose="020B0604020202020204" pitchFamily="34" charset="0"/>
+            </a:endParaRPr>
+          </a:p>
+          <a:p>
+            <a:pPr marL="231775" indent="-230188">
+              <a:buFont typeface="Arial" panose="020B0604020202020204" pitchFamily="34" charset="0"/>
+              <a:buChar char="•"/>
+            </a:pPr>
+            <a:r>
+              <a:rPr lang="en-US" sz="2400">
+                <a:solidFill>
+                  <a:schemeClr val="accent1">
+                    <a:lumMod val="50000"/>
+                  </a:schemeClr>
+                </a:solidFill>
+                <a:latin typeface="Arial" panose="020B0604020202020204" pitchFamily="34" charset="0"/>
+                <a:cs typeface="Arial" panose="020B0604020202020204" pitchFamily="34" charset="0"/>
+              </a:rPr>
+              <a:t>Log errors for debugging instead of silently failing.</a:t>
+            </a:r>
+          </a:p>
+        </p:txBody>
+      </p:sp>
+    </p:spTree>
+    <p:extLst>
+      <p:ext uri="{BB962C8B-B14F-4D97-AF65-F5344CB8AC3E}">
+        <p14:creationId xmlns:p14="http://schemas.microsoft.com/office/powerpoint/2010/main" val="1487011724"/>
+      </p:ext>
+    </p:extLst>
+  </p:cSld>
+  <p:clrMapOvr>
+    <a:masterClrMapping/>
+  </p:clrMapOvr>
+</p:sld>
+</file>
+
+<file path=ppt/slides/slide17.xml><?xml version="1.0" encoding="utf-8"?>
+<p:sld xmlns:a="http://schemas.openxmlformats.org/drawingml/2006/main" xmlns:r="http://schemas.openxmlformats.org/officeDocument/2006/relationships" xmlns:p="http://schemas.openxmlformats.org/presentationml/2006/main">
+  <p:cSld>
+    <p:spTree>
+      <p:nvGrpSpPr>
+        <p:cNvPr id="1" name="">
+          <a:extLst>
+            <a:ext uri="{FF2B5EF4-FFF2-40B4-BE49-F238E27FC236}">
+              <a16:creationId xmlns:a16="http://schemas.microsoft.com/office/drawing/2014/main" id="{AD7AD56E-A206-1EEC-3822-49F56A5DC2BA}"/>
+            </a:ext>
+          </a:extLst>
+        </p:cNvPr>
+        <p:cNvGrpSpPr/>
+        <p:nvPr/>
+      </p:nvGrpSpPr>
+      <p:grpSpPr>
+        <a:xfrm>
+          <a:off x="0" y="0"/>
+          <a:ext cx="0" cy="0"/>
+          <a:chOff x="0" y="0"/>
+          <a:chExt cx="0" cy="0"/>
+        </a:xfrm>
+      </p:grpSpPr>
+      <p:pic>
+        <p:nvPicPr>
+          <p:cNvPr id="3" name="Picture 2" descr="A white and blue background&#10;&#10;Description automatically generated">
+            <a:extLst>
+              <a:ext uri="{FF2B5EF4-FFF2-40B4-BE49-F238E27FC236}">
+                <a16:creationId xmlns:a16="http://schemas.microsoft.com/office/drawing/2014/main" id="{6067919F-18A3-0674-C8E3-811FA5936DB1}"/>
+              </a:ext>
+            </a:extLst>
+          </p:cNvPr>
+          <p:cNvPicPr>
+            <a:picLocks noChangeAspect="1"/>
+          </p:cNvPicPr>
+          <p:nvPr/>
+        </p:nvPicPr>
+        <p:blipFill>
+          <a:blip r:embed="rId2"/>
+          <a:stretch>
+            <a:fillRect/>
+          </a:stretch>
+        </p:blipFill>
+        <p:spPr>
+          <a:xfrm>
+            <a:off x="0" y="-33129"/>
+            <a:ext cx="12192000" cy="6891129"/>
+          </a:xfrm>
+          <a:prstGeom prst="rect">
+            <a:avLst/>
+          </a:prstGeom>
+        </p:spPr>
+      </p:pic>
+      <p:sp>
+        <p:nvSpPr>
+          <p:cNvPr id="4" name="TextBox 3">
+            <a:extLst>
+              <a:ext uri="{FF2B5EF4-FFF2-40B4-BE49-F238E27FC236}">
+                <a16:creationId xmlns:a16="http://schemas.microsoft.com/office/drawing/2014/main" id="{BB5B4A96-E408-CCB1-D5A3-06E315E5F059}"/>
+              </a:ext>
+            </a:extLst>
+          </p:cNvPr>
+          <p:cNvSpPr txBox="1"/>
+          <p:nvPr/>
+        </p:nvSpPr>
+        <p:spPr>
+          <a:xfrm>
+            <a:off x="604266" y="136955"/>
+            <a:ext cx="10391019" cy="646331"/>
+          </a:xfrm>
+          <a:prstGeom prst="rect">
+            <a:avLst/>
+          </a:prstGeom>
+          <a:noFill/>
+        </p:spPr>
+        <p:txBody>
+          <a:bodyPr wrap="square" rtlCol="0">
+            <a:spAutoFit/>
+          </a:bodyPr>
+          <a:lstStyle/>
+          <a:p>
+            <a:r>
+              <a:rPr lang="en-US" sz="3600">
+                <a:solidFill>
+                  <a:schemeClr val="accent1">
+                    <a:lumMod val="50000"/>
+                  </a:schemeClr>
+                </a:solidFill>
+                <a:latin typeface="Arial" panose="020B0604020202020204" pitchFamily="34" charset="0"/>
+                <a:cs typeface="Arial" panose="020B0604020202020204" pitchFamily="34" charset="0"/>
+              </a:rPr>
+              <a:t>Handling Index Errors Gracefully (Dictionaries)</a:t>
+            </a:r>
+          </a:p>
+        </p:txBody>
+      </p:sp>
+      <p:sp>
+        <p:nvSpPr>
+          <p:cNvPr id="5" name="TextBox 4">
+            <a:extLst>
+              <a:ext uri="{FF2B5EF4-FFF2-40B4-BE49-F238E27FC236}">
+                <a16:creationId xmlns:a16="http://schemas.microsoft.com/office/drawing/2014/main" id="{7DF1EA63-7C13-F91D-C2B9-43B469355014}"/>
+              </a:ext>
+            </a:extLst>
+          </p:cNvPr>
+          <p:cNvSpPr txBox="1"/>
+          <p:nvPr/>
+        </p:nvSpPr>
+        <p:spPr>
+          <a:xfrm>
+            <a:off x="836614" y="906971"/>
+            <a:ext cx="10323564" cy="1569660"/>
+          </a:xfrm>
+          <a:prstGeom prst="rect">
+            <a:avLst/>
+          </a:prstGeom>
+          <a:noFill/>
+        </p:spPr>
+        <p:txBody>
+          <a:bodyPr wrap="square" rtlCol="0">
+            <a:spAutoFit/>
+          </a:bodyPr>
+          <a:lstStyle/>
+          <a:p>
+            <a:pPr marL="231775" indent="-230188">
+              <a:buFont typeface="Arial" panose="020B0604020202020204" pitchFamily="34" charset="0"/>
+              <a:buChar char="•"/>
+            </a:pPr>
+            <a:endParaRPr lang="en-US" sz="2400">
+              <a:solidFill>
+                <a:schemeClr val="accent1">
+                  <a:lumMod val="50000"/>
+                </a:schemeClr>
+              </a:solidFill>
+              <a:latin typeface="Arial" panose="020B0604020202020204" pitchFamily="34" charset="0"/>
+              <a:cs typeface="Arial" panose="020B0604020202020204" pitchFamily="34" charset="0"/>
+            </a:endParaRPr>
+          </a:p>
+          <a:p>
+            <a:pPr marL="231775" indent="-230188">
+              <a:buFont typeface="Arial" panose="020B0604020202020204" pitchFamily="34" charset="0"/>
+              <a:buChar char="•"/>
+            </a:pPr>
+            <a:r>
+              <a:rPr lang="en-US" sz="2400">
+                <a:solidFill>
+                  <a:schemeClr val="accent1">
+                    <a:lumMod val="50000"/>
+                  </a:schemeClr>
+                </a:solidFill>
+                <a:latin typeface="Arial" panose="020B0604020202020204" pitchFamily="34" charset="0"/>
+                <a:cs typeface="Arial" panose="020B0604020202020204" pitchFamily="34" charset="0"/>
+              </a:rPr>
+              <a:t>Prefer dict.get() for dictionaries instead of direct key access.</a:t>
+            </a:r>
+          </a:p>
+          <a:p>
+            <a:pPr marL="231775" indent="-230188">
+              <a:buFont typeface="Arial" panose="020B0604020202020204" pitchFamily="34" charset="0"/>
+              <a:buChar char="•"/>
+            </a:pPr>
+            <a:r>
+              <a:rPr lang="en-US" sz="2400">
+                <a:solidFill>
+                  <a:schemeClr val="accent1">
+                    <a:lumMod val="50000"/>
+                  </a:schemeClr>
+                </a:solidFill>
+                <a:latin typeface="Arial" panose="020B0604020202020204" pitchFamily="34" charset="0"/>
+                <a:cs typeface="Arial" panose="020B0604020202020204" pitchFamily="34" charset="0"/>
+              </a:rPr>
+              <a:t>Use defaultdict for missing dictionary keys.</a:t>
+            </a:r>
+          </a:p>
+          <a:p>
+            <a:pPr marL="231775" indent="-230188">
+              <a:buFont typeface="Arial" panose="020B0604020202020204" pitchFamily="34" charset="0"/>
+              <a:buChar char="•"/>
+            </a:pPr>
+            <a:r>
+              <a:rPr lang="en-US" sz="2400">
+                <a:solidFill>
+                  <a:schemeClr val="accent1">
+                    <a:lumMod val="50000"/>
+                  </a:schemeClr>
+                </a:solidFill>
+                <a:latin typeface="Arial" panose="020B0604020202020204" pitchFamily="34" charset="0"/>
+                <a:cs typeface="Arial" panose="020B0604020202020204" pitchFamily="34" charset="0"/>
+              </a:rPr>
+              <a:t>Prefer get() for optional dictionary lookups.</a:t>
+            </a:r>
+          </a:p>
+        </p:txBody>
+      </p:sp>
+    </p:spTree>
+    <p:extLst>
+      <p:ext uri="{BB962C8B-B14F-4D97-AF65-F5344CB8AC3E}">
+        <p14:creationId xmlns:p14="http://schemas.microsoft.com/office/powerpoint/2010/main" val="3885808635"/>
+      </p:ext>
+    </p:extLst>
+  </p:cSld>
+  <p:clrMapOvr>
+    <a:masterClrMapping/>
+  </p:clrMapOvr>
+</p:sld>
+</file>
+
+<file path=ppt/slides/slide18.xml><?xml version="1.0" encoding="utf-8"?>
+<p:sld xmlns:a="http://schemas.openxmlformats.org/drawingml/2006/main" xmlns:r="http://schemas.openxmlformats.org/officeDocument/2006/relationships" xmlns:p="http://schemas.openxmlformats.org/presentationml/2006/main">
+  <p:cSld>
+    <p:spTree>
+      <p:nvGrpSpPr>
+        <p:cNvPr id="1" name="">
+          <a:extLst>
+            <a:ext uri="{FF2B5EF4-FFF2-40B4-BE49-F238E27FC236}">
+              <a16:creationId xmlns:a16="http://schemas.microsoft.com/office/drawing/2014/main" id="{986D872C-E703-1333-8961-D37AB2337B58}"/>
+            </a:ext>
+          </a:extLst>
+        </p:cNvPr>
+        <p:cNvGrpSpPr/>
+        <p:nvPr/>
+      </p:nvGrpSpPr>
+      <p:grpSpPr>
+        <a:xfrm>
+          <a:off x="0" y="0"/>
+          <a:ext cx="0" cy="0"/>
+          <a:chOff x="0" y="0"/>
+          <a:chExt cx="0" cy="0"/>
+        </a:xfrm>
+      </p:grpSpPr>
+      <p:pic>
+        <p:nvPicPr>
+          <p:cNvPr id="3" name="Picture 2" descr="A white and blue background&#10;&#10;Description automatically generated">
+            <a:extLst>
+              <a:ext uri="{FF2B5EF4-FFF2-40B4-BE49-F238E27FC236}">
+                <a16:creationId xmlns:a16="http://schemas.microsoft.com/office/drawing/2014/main" id="{64AD6237-F4AC-A21A-D86F-42B6B102BD47}"/>
+              </a:ext>
+            </a:extLst>
+          </p:cNvPr>
+          <p:cNvPicPr>
+            <a:picLocks noChangeAspect="1"/>
+          </p:cNvPicPr>
+          <p:nvPr/>
+        </p:nvPicPr>
+        <p:blipFill>
+          <a:blip r:embed="rId2"/>
+          <a:stretch>
+            <a:fillRect/>
+          </a:stretch>
+        </p:blipFill>
+        <p:spPr>
+          <a:xfrm>
+            <a:off x="0" y="-33129"/>
+            <a:ext cx="12192000" cy="6891129"/>
+          </a:xfrm>
+          <a:prstGeom prst="rect">
+            <a:avLst/>
+          </a:prstGeom>
+        </p:spPr>
+      </p:pic>
+      <p:sp>
+        <p:nvSpPr>
+          <p:cNvPr id="4" name="TextBox 3">
+            <a:extLst>
+              <a:ext uri="{FF2B5EF4-FFF2-40B4-BE49-F238E27FC236}">
+                <a16:creationId xmlns:a16="http://schemas.microsoft.com/office/drawing/2014/main" id="{1A4B7406-491F-B083-FC26-26BD7458B9A8}"/>
+              </a:ext>
+            </a:extLst>
+          </p:cNvPr>
+          <p:cNvSpPr txBox="1"/>
+          <p:nvPr/>
+        </p:nvSpPr>
+        <p:spPr>
+          <a:xfrm>
+            <a:off x="604266" y="136955"/>
+            <a:ext cx="10391019" cy="646331"/>
+          </a:xfrm>
+          <a:prstGeom prst="rect">
+            <a:avLst/>
+          </a:prstGeom>
+          <a:noFill/>
+        </p:spPr>
+        <p:txBody>
+          <a:bodyPr wrap="square" rtlCol="0">
+            <a:spAutoFit/>
+          </a:bodyPr>
+          <a:lstStyle/>
+          <a:p>
+            <a:r>
+              <a:rPr lang="en-US" sz="3600">
+                <a:solidFill>
+                  <a:schemeClr val="accent1">
+                    <a:lumMod val="50000"/>
+                  </a:schemeClr>
+                </a:solidFill>
+                <a:latin typeface="Arial" panose="020B0604020202020204" pitchFamily="34" charset="0"/>
+                <a:cs typeface="Arial" panose="020B0604020202020204" pitchFamily="34" charset="0"/>
+              </a:rPr>
+              <a:t>Using Safer Data Structures</a:t>
+            </a:r>
+          </a:p>
+        </p:txBody>
+      </p:sp>
+      <p:sp>
+        <p:nvSpPr>
+          <p:cNvPr id="5" name="TextBox 4">
+            <a:extLst>
+              <a:ext uri="{FF2B5EF4-FFF2-40B4-BE49-F238E27FC236}">
+                <a16:creationId xmlns:a16="http://schemas.microsoft.com/office/drawing/2014/main" id="{B81C8176-5C01-4C22-D6C4-0DFE4E41F9F8}"/>
+              </a:ext>
+            </a:extLst>
+          </p:cNvPr>
+          <p:cNvSpPr txBox="1"/>
+          <p:nvPr/>
+        </p:nvSpPr>
+        <p:spPr>
+          <a:xfrm>
+            <a:off x="836614" y="906971"/>
+            <a:ext cx="10323564" cy="4770537"/>
+          </a:xfrm>
+          <a:prstGeom prst="rect">
+            <a:avLst/>
+          </a:prstGeom>
+          <a:noFill/>
+        </p:spPr>
+        <p:txBody>
+          <a:bodyPr wrap="square" rtlCol="0">
+            <a:spAutoFit/>
+          </a:bodyPr>
+          <a:lstStyle/>
+          <a:p>
+            <a:pPr marL="231775" indent="-230188">
+              <a:buFont typeface="Arial" panose="020B0604020202020204" pitchFamily="34" charset="0"/>
+              <a:buChar char="•"/>
+            </a:pPr>
+            <a:r>
+              <a:rPr lang="en-US" sz="2400">
+                <a:solidFill>
+                  <a:schemeClr val="accent1">
+                    <a:lumMod val="50000"/>
+                  </a:schemeClr>
+                </a:solidFill>
+                <a:latin typeface="Arial" panose="020B0604020202020204" pitchFamily="34" charset="0"/>
+                <a:cs typeface="Arial" panose="020B0604020202020204" pitchFamily="34" charset="0"/>
+              </a:rPr>
+              <a:t>Use collections.deque for fixed-size buffers.</a:t>
+            </a:r>
+          </a:p>
+          <a:p>
+            <a:pPr marL="231775" indent="-230188">
+              <a:buFont typeface="Arial" panose="020B0604020202020204" pitchFamily="34" charset="0"/>
+              <a:buChar char="•"/>
+            </a:pPr>
+            <a:endParaRPr lang="en-US" sz="2400">
+              <a:solidFill>
+                <a:schemeClr val="accent1">
+                  <a:lumMod val="50000"/>
+                </a:schemeClr>
+              </a:solidFill>
+              <a:latin typeface="Arial" panose="020B0604020202020204" pitchFamily="34" charset="0"/>
+              <a:cs typeface="Arial" panose="020B0604020202020204" pitchFamily="34" charset="0"/>
+            </a:endParaRPr>
+          </a:p>
+          <a:p>
+            <a:pPr marL="231775" indent="-230188">
+              <a:buFont typeface="Arial" panose="020B0604020202020204" pitchFamily="34" charset="0"/>
+              <a:buChar char="•"/>
+            </a:pPr>
+            <a:r>
+              <a:rPr lang="en-US" sz="2400">
+                <a:solidFill>
+                  <a:schemeClr val="accent1">
+                    <a:lumMod val="50000"/>
+                  </a:schemeClr>
+                </a:solidFill>
+                <a:latin typeface="Arial" panose="020B0604020202020204" pitchFamily="34" charset="0"/>
+                <a:cs typeface="Arial" panose="020B0604020202020204" pitchFamily="34" charset="0"/>
+              </a:rPr>
+              <a:t>Consider slicing to limit index access.</a:t>
+            </a:r>
+          </a:p>
+          <a:p>
+            <a:pPr marL="688975" lvl="1" indent="-230188">
+              <a:buFont typeface="Arial" panose="020B0604020202020204" pitchFamily="34" charset="0"/>
+              <a:buChar char="•"/>
+            </a:pPr>
+            <a:r>
+              <a:rPr lang="en-US" sz="2000">
+                <a:solidFill>
+                  <a:schemeClr val="accent1">
+                    <a:lumMod val="50000"/>
+                  </a:schemeClr>
+                </a:solidFill>
+                <a:latin typeface="Arial" panose="020B0604020202020204" pitchFamily="34" charset="0"/>
+                <a:cs typeface="Arial" panose="020B0604020202020204" pitchFamily="34" charset="0"/>
+              </a:rPr>
+              <a:t>Unlike direct indexing (my_list[3]), which would raise an IndexError if the index is out of bounds, slicing gracefully handles it.</a:t>
+            </a:r>
+          </a:p>
+          <a:p>
+            <a:pPr marL="231775" indent="-230188">
+              <a:buFont typeface="Arial" panose="020B0604020202020204" pitchFamily="34" charset="0"/>
+              <a:buChar char="•"/>
+            </a:pPr>
+            <a:endParaRPr lang="en-US" sz="2400">
+              <a:solidFill>
+                <a:schemeClr val="accent1">
+                  <a:lumMod val="50000"/>
+                </a:schemeClr>
+              </a:solidFill>
+              <a:latin typeface="Arial" panose="020B0604020202020204" pitchFamily="34" charset="0"/>
+              <a:cs typeface="Arial" panose="020B0604020202020204" pitchFamily="34" charset="0"/>
+            </a:endParaRPr>
+          </a:p>
+          <a:p>
+            <a:pPr marL="914400"/>
+            <a:r>
+              <a:rPr lang="en-US" sz="2400" b="1">
+                <a:solidFill>
+                  <a:schemeClr val="accent1">
+                    <a:lumMod val="50000"/>
+                  </a:schemeClr>
+                </a:solidFill>
+                <a:latin typeface="Consolas" panose="020B0609020204030204" pitchFamily="49" charset="0"/>
+                <a:cs typeface="Arial" panose="020B0604020202020204" pitchFamily="34" charset="0"/>
+              </a:rPr>
+              <a:t>my_list = [10, 20, 30]</a:t>
+            </a:r>
+          </a:p>
+          <a:p>
+            <a:pPr marL="914400"/>
+            <a:r>
+              <a:rPr lang="en-US" sz="2400" b="1">
+                <a:solidFill>
+                  <a:schemeClr val="accent1">
+                    <a:lumMod val="50000"/>
+                  </a:schemeClr>
+                </a:solidFill>
+                <a:latin typeface="Consolas" panose="020B0609020204030204" pitchFamily="49" charset="0"/>
+                <a:cs typeface="Arial" panose="020B0604020202020204" pitchFamily="34" charset="0"/>
+              </a:rPr>
+              <a:t>print(my_list[5])  # IndexError: index out of range</a:t>
+            </a:r>
+          </a:p>
+          <a:p>
+            <a:pPr marL="914400"/>
+            <a:endParaRPr lang="en-US" sz="2400" b="1">
+              <a:solidFill>
+                <a:schemeClr val="accent1">
+                  <a:lumMod val="50000"/>
+                </a:schemeClr>
+              </a:solidFill>
+              <a:latin typeface="Consolas" panose="020B0609020204030204" pitchFamily="49" charset="0"/>
+              <a:cs typeface="Arial" panose="020B0604020202020204" pitchFamily="34" charset="0"/>
+            </a:endParaRPr>
+          </a:p>
+          <a:p>
+            <a:pPr marL="914400"/>
+            <a:r>
+              <a:rPr lang="en-US" sz="2400" b="1">
+                <a:solidFill>
+                  <a:schemeClr val="accent1">
+                    <a:lumMod val="50000"/>
+                  </a:schemeClr>
+                </a:solidFill>
+                <a:latin typeface="Consolas" panose="020B0609020204030204" pitchFamily="49" charset="0"/>
+                <a:cs typeface="Arial" panose="020B0604020202020204" pitchFamily="34" charset="0"/>
+              </a:rPr>
+              <a:t>my_list = [10, 20, 30]</a:t>
+            </a:r>
+          </a:p>
+          <a:p>
+            <a:pPr marL="914400"/>
+            <a:r>
+              <a:rPr lang="en-US" sz="2400" b="1">
+                <a:solidFill>
+                  <a:schemeClr val="accent1">
+                    <a:lumMod val="50000"/>
+                  </a:schemeClr>
+                </a:solidFill>
+                <a:latin typeface="Consolas" panose="020B0609020204030204" pitchFamily="49" charset="0"/>
+                <a:cs typeface="Arial" panose="020B0604020202020204" pitchFamily="34" charset="0"/>
+              </a:rPr>
+              <a:t>print(my_list[:5])  # Prevents out-of-range errors</a:t>
+            </a:r>
+          </a:p>
+          <a:p>
+            <a:pPr marL="231775" indent="-230188">
+              <a:buFont typeface="Arial" panose="020B0604020202020204" pitchFamily="34" charset="0"/>
+              <a:buChar char="•"/>
+            </a:pPr>
+            <a:endParaRPr lang="en-US" sz="2400">
+              <a:solidFill>
+                <a:schemeClr val="accent1">
+                  <a:lumMod val="50000"/>
+                </a:schemeClr>
+              </a:solidFill>
+              <a:latin typeface="Arial" panose="020B0604020202020204" pitchFamily="34" charset="0"/>
+              <a:cs typeface="Arial" panose="020B0604020202020204" pitchFamily="34" charset="0"/>
+            </a:endParaRPr>
+          </a:p>
+          <a:p>
+            <a:pPr marL="231775" indent="-230188">
+              <a:buFont typeface="Arial" panose="020B0604020202020204" pitchFamily="34" charset="0"/>
+              <a:buChar char="•"/>
+            </a:pPr>
+            <a:r>
+              <a:rPr lang="en-US" sz="2400">
+                <a:solidFill>
+                  <a:schemeClr val="accent1">
+                    <a:lumMod val="50000"/>
+                  </a:schemeClr>
+                </a:solidFill>
+                <a:latin typeface="Arial" panose="020B0604020202020204" pitchFamily="34" charset="0"/>
+                <a:cs typeface="Arial" panose="020B0604020202020204" pitchFamily="34" charset="0"/>
+              </a:rPr>
+              <a:t>Avoid unnecessary manual index tracking when using loops.</a:t>
+            </a:r>
+          </a:p>
+        </p:txBody>
+      </p:sp>
+    </p:spTree>
+    <p:extLst>
+      <p:ext uri="{BB962C8B-B14F-4D97-AF65-F5344CB8AC3E}">
+        <p14:creationId xmlns:p14="http://schemas.microsoft.com/office/powerpoint/2010/main" val="725852954"/>
+      </p:ext>
+    </p:extLst>
+  </p:cSld>
+  <p:clrMapOvr>
+    <a:masterClrMapping/>
+  </p:clrMapOvr>
+</p:sld>
+</file>
+
+<file path=ppt/slides/slide19.xml><?xml version="1.0" encoding="utf-8"?>
+<p:sld xmlns:a="http://schemas.openxmlformats.org/drawingml/2006/main" xmlns:r="http://schemas.openxmlformats.org/officeDocument/2006/relationships" xmlns:p="http://schemas.openxmlformats.org/presentationml/2006/main">
+  <p:cSld>
+    <p:spTree>
+      <p:nvGrpSpPr>
+        <p:cNvPr id="1" name="">
+          <a:extLst>
+            <a:ext uri="{FF2B5EF4-FFF2-40B4-BE49-F238E27FC236}">
               <a16:creationId xmlns:a16="http://schemas.microsoft.com/office/drawing/2014/main" id="{38A6AAEF-67B5-DA56-3F7D-D718B0002B84}"/>
             </a:ext>
           </a:extLst>
@@ -6521,7 +8243,7 @@
         <p:cNvPr id="1" name="">
           <a:extLst>
             <a:ext uri="{FF2B5EF4-FFF2-40B4-BE49-F238E27FC236}">
-              <a16:creationId xmlns:a16="http://schemas.microsoft.com/office/drawing/2014/main" id="{6EC88150-13A5-8006-D83E-4EA146DC254F}"/>
+              <a16:creationId xmlns:a16="http://schemas.microsoft.com/office/drawing/2014/main" id="{68782DBF-1394-2517-FAF3-65676516014A}"/>
             </a:ext>
           </a:extLst>
         </p:cNvPr>
@@ -6541,7 +8263,7 @@
           <p:cNvPr id="3" name="Picture 2" descr="A white and blue background&#10;&#10;Description automatically generated">
             <a:extLst>
               <a:ext uri="{FF2B5EF4-FFF2-40B4-BE49-F238E27FC236}">
-                <a16:creationId xmlns:a16="http://schemas.microsoft.com/office/drawing/2014/main" id="{4CDF7F6D-1FBE-DCF5-5F95-D0C632B892F6}"/>
+                <a16:creationId xmlns:a16="http://schemas.microsoft.com/office/drawing/2014/main" id="{FF46AA2C-DF0E-00B4-D392-E55812592711}"/>
               </a:ext>
             </a:extLst>
           </p:cNvPr>
@@ -6571,6 +8293,381 @@
           <p:cNvPr id="4" name="TextBox 3">
             <a:extLst>
               <a:ext uri="{FF2B5EF4-FFF2-40B4-BE49-F238E27FC236}">
+                <a16:creationId xmlns:a16="http://schemas.microsoft.com/office/drawing/2014/main" id="{3289F5D2-BD1E-A50F-6045-92C6C43651B5}"/>
+              </a:ext>
+            </a:extLst>
+          </p:cNvPr>
+          <p:cNvSpPr txBox="1"/>
+          <p:nvPr/>
+        </p:nvSpPr>
+        <p:spPr>
+          <a:xfrm>
+            <a:off x="604266" y="136955"/>
+            <a:ext cx="10391019" cy="646331"/>
+          </a:xfrm>
+          <a:prstGeom prst="rect">
+            <a:avLst/>
+          </a:prstGeom>
+          <a:noFill/>
+        </p:spPr>
+        <p:txBody>
+          <a:bodyPr wrap="square" rtlCol="0">
+            <a:spAutoFit/>
+          </a:bodyPr>
+          <a:lstStyle/>
+          <a:p>
+            <a:r>
+              <a:rPr lang="en-US" sz="3600">
+                <a:solidFill>
+                  <a:schemeClr val="accent1">
+                    <a:lumMod val="50000"/>
+                  </a:schemeClr>
+                </a:solidFill>
+                <a:latin typeface="Arial" panose="020B0604020202020204" pitchFamily="34" charset="0"/>
+                <a:cs typeface="Arial" panose="020B0604020202020204" pitchFamily="34" charset="0"/>
+              </a:rPr>
+              <a:t>Tuples for Secure Data</a:t>
+            </a:r>
+          </a:p>
+        </p:txBody>
+      </p:sp>
+      <p:sp>
+        <p:nvSpPr>
+          <p:cNvPr id="5" name="TextBox 4">
+            <a:extLst>
+              <a:ext uri="{FF2B5EF4-FFF2-40B4-BE49-F238E27FC236}">
+                <a16:creationId xmlns:a16="http://schemas.microsoft.com/office/drawing/2014/main" id="{FDA16B4B-182B-C93C-B73B-D22C0A6CBC8A}"/>
+              </a:ext>
+            </a:extLst>
+          </p:cNvPr>
+          <p:cNvSpPr txBox="1"/>
+          <p:nvPr/>
+        </p:nvSpPr>
+        <p:spPr>
+          <a:xfrm>
+            <a:off x="776653" y="1049377"/>
+            <a:ext cx="10323564" cy="5078313"/>
+          </a:xfrm>
+          <a:prstGeom prst="rect">
+            <a:avLst/>
+          </a:prstGeom>
+          <a:noFill/>
+        </p:spPr>
+        <p:txBody>
+          <a:bodyPr wrap="square" rtlCol="0">
+            <a:spAutoFit/>
+          </a:bodyPr>
+          <a:lstStyle/>
+          <a:p>
+            <a:pPr marL="231775" indent="-231775">
+              <a:buFont typeface="Arial" panose="020B0604020202020204" pitchFamily="34" charset="0"/>
+              <a:buChar char="•"/>
+            </a:pPr>
+            <a:r>
+              <a:rPr lang="en-US" sz="2400">
+                <a:solidFill>
+                  <a:schemeClr val="accent1">
+                    <a:lumMod val="50000"/>
+                  </a:schemeClr>
+                </a:solidFill>
+                <a:latin typeface="Arial" panose="020B0604020202020204" pitchFamily="34" charset="0"/>
+                <a:cs typeface="Arial" panose="020B0604020202020204" pitchFamily="34" charset="0"/>
+              </a:rPr>
+              <a:t>Tuples can prevent unintended aliasing</a:t>
+            </a:r>
+          </a:p>
+          <a:p>
+            <a:pPr marL="688975" indent="-231775">
+              <a:buFont typeface="Arial" panose="020B0604020202020204" pitchFamily="34" charset="0"/>
+              <a:buChar char="•"/>
+            </a:pPr>
+            <a:r>
+              <a:rPr lang="en-US" sz="2000">
+                <a:solidFill>
+                  <a:schemeClr val="accent1">
+                    <a:lumMod val="50000"/>
+                  </a:schemeClr>
+                </a:solidFill>
+                <a:latin typeface="Arial" panose="020B0604020202020204" pitchFamily="34" charset="0"/>
+                <a:cs typeface="Arial" panose="020B0604020202020204" pitchFamily="34" charset="0"/>
+              </a:rPr>
+              <a:t>If a list is assigned to multiple variables, changes in one reference affect all others.</a:t>
+            </a:r>
+          </a:p>
+          <a:p>
+            <a:pPr marL="688975" indent="-231775">
+              <a:buFont typeface="Arial" panose="020B0604020202020204" pitchFamily="34" charset="0"/>
+              <a:buChar char="•"/>
+            </a:pPr>
+            <a:r>
+              <a:rPr lang="en-US" sz="2000">
+                <a:solidFill>
+                  <a:schemeClr val="accent1">
+                    <a:lumMod val="50000"/>
+                  </a:schemeClr>
+                </a:solidFill>
+                <a:latin typeface="Arial" panose="020B0604020202020204" pitchFamily="34" charset="0"/>
+                <a:cs typeface="Arial" panose="020B0604020202020204" pitchFamily="34" charset="0"/>
+              </a:rPr>
+              <a:t>Using a tuple ensures that security-sensitive data is not modified indirectly.</a:t>
+            </a:r>
+          </a:p>
+          <a:p>
+            <a:pPr marL="457200"/>
+            <a:endParaRPr lang="en-US" sz="2000">
+              <a:solidFill>
+                <a:schemeClr val="accent1">
+                  <a:lumMod val="50000"/>
+                </a:schemeClr>
+              </a:solidFill>
+              <a:latin typeface="Arial" panose="020B0604020202020204" pitchFamily="34" charset="0"/>
+              <a:cs typeface="Arial" panose="020B0604020202020204" pitchFamily="34" charset="0"/>
+            </a:endParaRPr>
+          </a:p>
+          <a:p>
+            <a:pPr marL="914400"/>
+            <a:r>
+              <a:rPr lang="en-US" sz="2000" b="1">
+                <a:solidFill>
+                  <a:schemeClr val="accent1">
+                    <a:lumMod val="50000"/>
+                  </a:schemeClr>
+                </a:solidFill>
+                <a:latin typeface="Consolas" panose="020B0609020204030204" pitchFamily="49" charset="0"/>
+                <a:cs typeface="Arial" panose="020B0604020202020204" pitchFamily="34" charset="0"/>
+              </a:rPr>
+              <a:t># Create a list</a:t>
+            </a:r>
+          </a:p>
+          <a:p>
+            <a:pPr marL="914400"/>
+            <a:r>
+              <a:rPr lang="en-US" sz="2000" b="1">
+                <a:solidFill>
+                  <a:schemeClr val="accent1">
+                    <a:lumMod val="50000"/>
+                  </a:schemeClr>
+                </a:solidFill>
+                <a:latin typeface="Consolas" panose="020B0609020204030204" pitchFamily="49" charset="0"/>
+                <a:cs typeface="Arial" panose="020B0604020202020204" pitchFamily="34" charset="0"/>
+              </a:rPr>
+              <a:t>my_list = [1, 2, 3]</a:t>
+            </a:r>
+          </a:p>
+          <a:p>
+            <a:pPr marL="914400"/>
+            <a:endParaRPr lang="en-US" sz="2000" b="1">
+              <a:solidFill>
+                <a:schemeClr val="accent1">
+                  <a:lumMod val="50000"/>
+                </a:schemeClr>
+              </a:solidFill>
+              <a:latin typeface="Consolas" panose="020B0609020204030204" pitchFamily="49" charset="0"/>
+              <a:cs typeface="Arial" panose="020B0604020202020204" pitchFamily="34" charset="0"/>
+            </a:endParaRPr>
+          </a:p>
+          <a:p>
+            <a:pPr marL="914400"/>
+            <a:r>
+              <a:rPr lang="en-US" sz="2000" b="1">
+                <a:solidFill>
+                  <a:schemeClr val="accent1">
+                    <a:lumMod val="50000"/>
+                  </a:schemeClr>
+                </a:solidFill>
+                <a:latin typeface="Consolas" panose="020B0609020204030204" pitchFamily="49" charset="0"/>
+                <a:cs typeface="Arial" panose="020B0604020202020204" pitchFamily="34" charset="0"/>
+              </a:rPr>
+              <a:t># Assign the same list reference to another variable</a:t>
+            </a:r>
+          </a:p>
+          <a:p>
+            <a:pPr marL="914400"/>
+            <a:r>
+              <a:rPr lang="en-US" sz="2000" b="1">
+                <a:solidFill>
+                  <a:schemeClr val="accent1">
+                    <a:lumMod val="50000"/>
+                  </a:schemeClr>
+                </a:solidFill>
+                <a:latin typeface="Consolas" panose="020B0609020204030204" pitchFamily="49" charset="0"/>
+                <a:cs typeface="Arial" panose="020B0604020202020204" pitchFamily="34" charset="0"/>
+              </a:rPr>
+              <a:t>alias_list = my_list</a:t>
+            </a:r>
+          </a:p>
+          <a:p>
+            <a:pPr marL="914400"/>
+            <a:endParaRPr lang="en-US" sz="2000" b="1">
+              <a:solidFill>
+                <a:schemeClr val="accent1">
+                  <a:lumMod val="50000"/>
+                </a:schemeClr>
+              </a:solidFill>
+              <a:latin typeface="Consolas" panose="020B0609020204030204" pitchFamily="49" charset="0"/>
+              <a:cs typeface="Arial" panose="020B0604020202020204" pitchFamily="34" charset="0"/>
+            </a:endParaRPr>
+          </a:p>
+          <a:p>
+            <a:pPr marL="914400"/>
+            <a:r>
+              <a:rPr lang="en-US" sz="2000" b="1">
+                <a:solidFill>
+                  <a:schemeClr val="accent1">
+                    <a:lumMod val="50000"/>
+                  </a:schemeClr>
+                </a:solidFill>
+                <a:latin typeface="Consolas" panose="020B0609020204030204" pitchFamily="49" charset="0"/>
+                <a:cs typeface="Arial" panose="020B0604020202020204" pitchFamily="34" charset="0"/>
+              </a:rPr>
+              <a:t># Modifying one reference</a:t>
+            </a:r>
+          </a:p>
+          <a:p>
+            <a:pPr marL="914400"/>
+            <a:r>
+              <a:rPr lang="en-US" sz="2000" b="1">
+                <a:solidFill>
+                  <a:schemeClr val="accent1">
+                    <a:lumMod val="50000"/>
+                  </a:schemeClr>
+                </a:solidFill>
+                <a:latin typeface="Consolas" panose="020B0609020204030204" pitchFamily="49" charset="0"/>
+                <a:cs typeface="Arial" panose="020B0604020202020204" pitchFamily="34" charset="0"/>
+              </a:rPr>
+              <a:t>alias_list[0] = 99</a:t>
+            </a:r>
+          </a:p>
+          <a:p>
+            <a:pPr marL="914400"/>
+            <a:endParaRPr lang="en-US" sz="2000" b="1">
+              <a:solidFill>
+                <a:schemeClr val="accent1">
+                  <a:lumMod val="50000"/>
+                </a:schemeClr>
+              </a:solidFill>
+              <a:latin typeface="Consolas" panose="020B0609020204030204" pitchFamily="49" charset="0"/>
+              <a:cs typeface="Arial" panose="020B0604020202020204" pitchFamily="34" charset="0"/>
+            </a:endParaRPr>
+          </a:p>
+          <a:p>
+            <a:pPr marL="914400"/>
+            <a:r>
+              <a:rPr lang="en-US" sz="2000" b="1">
+                <a:solidFill>
+                  <a:schemeClr val="accent1">
+                    <a:lumMod val="50000"/>
+                  </a:schemeClr>
+                </a:solidFill>
+                <a:latin typeface="Consolas" panose="020B0609020204030204" pitchFamily="49" charset="0"/>
+                <a:cs typeface="Arial" panose="020B0604020202020204" pitchFamily="34" charset="0"/>
+              </a:rPr>
+              <a:t># Both lists are affected</a:t>
+            </a:r>
+          </a:p>
+          <a:p>
+            <a:pPr marL="914400"/>
+            <a:r>
+              <a:rPr lang="en-US" sz="2000" b="1">
+                <a:solidFill>
+                  <a:schemeClr val="accent1">
+                    <a:lumMod val="50000"/>
+                  </a:schemeClr>
+                </a:solidFill>
+                <a:latin typeface="Consolas" panose="020B0609020204030204" pitchFamily="49" charset="0"/>
+                <a:cs typeface="Arial" panose="020B0604020202020204" pitchFamily="34" charset="0"/>
+              </a:rPr>
+              <a:t>print("my_list:", my_list)       # Output: [99, 2, 3]</a:t>
+            </a:r>
+          </a:p>
+          <a:p>
+            <a:pPr marL="914400"/>
+            <a:r>
+              <a:rPr lang="en-US" sz="2000" b="1">
+                <a:solidFill>
+                  <a:schemeClr val="accent1">
+                    <a:lumMod val="50000"/>
+                  </a:schemeClr>
+                </a:solidFill>
+                <a:latin typeface="Consolas" panose="020B0609020204030204" pitchFamily="49" charset="0"/>
+                <a:cs typeface="Arial" panose="020B0604020202020204" pitchFamily="34" charset="0"/>
+              </a:rPr>
+              <a:t>print("alias_list:", alias_list) # Output: [99, 2, 3]</a:t>
+            </a:r>
+          </a:p>
+        </p:txBody>
+      </p:sp>
+    </p:spTree>
+    <p:extLst>
+      <p:ext uri="{BB962C8B-B14F-4D97-AF65-F5344CB8AC3E}">
+        <p14:creationId xmlns:p14="http://schemas.microsoft.com/office/powerpoint/2010/main" val="2087834609"/>
+      </p:ext>
+    </p:extLst>
+  </p:cSld>
+  <p:clrMapOvr>
+    <a:masterClrMapping/>
+  </p:clrMapOvr>
+</p:sld>
+</file>
+
+<file path=ppt/slides/slide8.xml><?xml version="1.0" encoding="utf-8"?>
+<p:sld xmlns:a="http://schemas.openxmlformats.org/drawingml/2006/main" xmlns:r="http://schemas.openxmlformats.org/officeDocument/2006/relationships" xmlns:p="http://schemas.openxmlformats.org/presentationml/2006/main">
+  <p:cSld>
+    <p:spTree>
+      <p:nvGrpSpPr>
+        <p:cNvPr id="1" name="">
+          <a:extLst>
+            <a:ext uri="{FF2B5EF4-FFF2-40B4-BE49-F238E27FC236}">
+              <a16:creationId xmlns:a16="http://schemas.microsoft.com/office/drawing/2014/main" id="{6EC88150-13A5-8006-D83E-4EA146DC254F}"/>
+            </a:ext>
+          </a:extLst>
+        </p:cNvPr>
+        <p:cNvGrpSpPr/>
+        <p:nvPr/>
+      </p:nvGrpSpPr>
+      <p:grpSpPr>
+        <a:xfrm>
+          <a:off x="0" y="0"/>
+          <a:ext cx="0" cy="0"/>
+          <a:chOff x="0" y="0"/>
+          <a:chExt cx="0" cy="0"/>
+        </a:xfrm>
+      </p:grpSpPr>
+      <p:pic>
+        <p:nvPicPr>
+          <p:cNvPr id="3" name="Picture 2" descr="A white and blue background&#10;&#10;Description automatically generated">
+            <a:extLst>
+              <a:ext uri="{FF2B5EF4-FFF2-40B4-BE49-F238E27FC236}">
+                <a16:creationId xmlns:a16="http://schemas.microsoft.com/office/drawing/2014/main" id="{4CDF7F6D-1FBE-DCF5-5F95-D0C632B892F6}"/>
+              </a:ext>
+            </a:extLst>
+          </p:cNvPr>
+          <p:cNvPicPr>
+            <a:picLocks noChangeAspect="1"/>
+          </p:cNvPicPr>
+          <p:nvPr/>
+        </p:nvPicPr>
+        <p:blipFill>
+          <a:blip r:embed="rId2"/>
+          <a:stretch>
+            <a:fillRect/>
+          </a:stretch>
+        </p:blipFill>
+        <p:spPr>
+          <a:xfrm>
+            <a:off x="0" y="-33129"/>
+            <a:ext cx="12192000" cy="6891129"/>
+          </a:xfrm>
+          <a:prstGeom prst="rect">
+            <a:avLst/>
+          </a:prstGeom>
+        </p:spPr>
+      </p:pic>
+      <p:sp>
+        <p:nvSpPr>
+          <p:cNvPr id="4" name="TextBox 3">
+            <a:extLst>
+              <a:ext uri="{FF2B5EF4-FFF2-40B4-BE49-F238E27FC236}">
                 <a16:creationId xmlns:a16="http://schemas.microsoft.com/office/drawing/2014/main" id="{73A1F57E-483E-7C53-CA64-0AA5EEE584EF}"/>
               </a:ext>
             </a:extLst>
@@ -6780,7 +8877,7 @@
 </p:sld>
 </file>
 
-<file path=ppt/slides/slide8.xml><?xml version="1.0" encoding="utf-8"?>
+<file path=ppt/slides/slide9.xml><?xml version="1.0" encoding="utf-8"?>
 <p:sld xmlns:a="http://schemas.openxmlformats.org/drawingml/2006/main" xmlns:r="http://schemas.openxmlformats.org/officeDocument/2006/relationships" xmlns:p="http://schemas.openxmlformats.org/presentationml/2006/main">
   <p:cSld>
     <p:spTree>
@@ -7094,198 +9191,6 @@
     <p:extLst>
       <p:ext uri="{BB962C8B-B14F-4D97-AF65-F5344CB8AC3E}">
         <p14:creationId xmlns:p14="http://schemas.microsoft.com/office/powerpoint/2010/main" val="2179349848"/>
-      </p:ext>
-    </p:extLst>
-  </p:cSld>
-  <p:clrMapOvr>
-    <a:masterClrMapping/>
-  </p:clrMapOvr>
-</p:sld>
-</file>
-
-<file path=ppt/slides/slide9.xml><?xml version="1.0" encoding="utf-8"?>
-<p:sld xmlns:a="http://schemas.openxmlformats.org/drawingml/2006/main" xmlns:r="http://schemas.openxmlformats.org/officeDocument/2006/relationships" xmlns:p="http://schemas.openxmlformats.org/presentationml/2006/main">
-  <p:cSld>
-    <p:spTree>
-      <p:nvGrpSpPr>
-        <p:cNvPr id="1" name="">
-          <a:extLst>
-            <a:ext uri="{FF2B5EF4-FFF2-40B4-BE49-F238E27FC236}">
-              <a16:creationId xmlns:a16="http://schemas.microsoft.com/office/drawing/2014/main" id="{68782DBF-1394-2517-FAF3-65676516014A}"/>
-            </a:ext>
-          </a:extLst>
-        </p:cNvPr>
-        <p:cNvGrpSpPr/>
-        <p:nvPr/>
-      </p:nvGrpSpPr>
-      <p:grpSpPr>
-        <a:xfrm>
-          <a:off x="0" y="0"/>
-          <a:ext cx="0" cy="0"/>
-          <a:chOff x="0" y="0"/>
-          <a:chExt cx="0" cy="0"/>
-        </a:xfrm>
-      </p:grpSpPr>
-      <p:pic>
-        <p:nvPicPr>
-          <p:cNvPr id="3" name="Picture 2" descr="A white and blue background&#10;&#10;Description automatically generated">
-            <a:extLst>
-              <a:ext uri="{FF2B5EF4-FFF2-40B4-BE49-F238E27FC236}">
-                <a16:creationId xmlns:a16="http://schemas.microsoft.com/office/drawing/2014/main" id="{FF46AA2C-DF0E-00B4-D392-E55812592711}"/>
-              </a:ext>
-            </a:extLst>
-          </p:cNvPr>
-          <p:cNvPicPr>
-            <a:picLocks noChangeAspect="1"/>
-          </p:cNvPicPr>
-          <p:nvPr/>
-        </p:nvPicPr>
-        <p:blipFill>
-          <a:blip r:embed="rId2"/>
-          <a:stretch>
-            <a:fillRect/>
-          </a:stretch>
-        </p:blipFill>
-        <p:spPr>
-          <a:xfrm>
-            <a:off x="0" y="-33129"/>
-            <a:ext cx="12192000" cy="6891129"/>
-          </a:xfrm>
-          <a:prstGeom prst="rect">
-            <a:avLst/>
-          </a:prstGeom>
-        </p:spPr>
-      </p:pic>
-      <p:sp>
-        <p:nvSpPr>
-          <p:cNvPr id="4" name="TextBox 3">
-            <a:extLst>
-              <a:ext uri="{FF2B5EF4-FFF2-40B4-BE49-F238E27FC236}">
-                <a16:creationId xmlns:a16="http://schemas.microsoft.com/office/drawing/2014/main" id="{3289F5D2-BD1E-A50F-6045-92C6C43651B5}"/>
-              </a:ext>
-            </a:extLst>
-          </p:cNvPr>
-          <p:cNvSpPr txBox="1"/>
-          <p:nvPr/>
-        </p:nvSpPr>
-        <p:spPr>
-          <a:xfrm>
-            <a:off x="604266" y="136955"/>
-            <a:ext cx="10391019" cy="646331"/>
-          </a:xfrm>
-          <a:prstGeom prst="rect">
-            <a:avLst/>
-          </a:prstGeom>
-          <a:noFill/>
-        </p:spPr>
-        <p:txBody>
-          <a:bodyPr wrap="square" rtlCol="0">
-            <a:spAutoFit/>
-          </a:bodyPr>
-          <a:lstStyle/>
-          <a:p>
-            <a:r>
-              <a:rPr lang="en-US" sz="3600">
-                <a:solidFill>
-                  <a:schemeClr val="accent1">
-                    <a:lumMod val="50000"/>
-                  </a:schemeClr>
-                </a:solidFill>
-                <a:latin typeface="Arial" panose="020B0604020202020204" pitchFamily="34" charset="0"/>
-                <a:cs typeface="Arial" panose="020B0604020202020204" pitchFamily="34" charset="0"/>
-              </a:rPr>
-              <a:t>Tuples for Secure Data</a:t>
-            </a:r>
-          </a:p>
-        </p:txBody>
-      </p:sp>
-      <p:sp>
-        <p:nvSpPr>
-          <p:cNvPr id="5" name="TextBox 4">
-            <a:extLst>
-              <a:ext uri="{FF2B5EF4-FFF2-40B4-BE49-F238E27FC236}">
-                <a16:creationId xmlns:a16="http://schemas.microsoft.com/office/drawing/2014/main" id="{FDA16B4B-182B-C93C-B73B-D22C0A6CBC8A}"/>
-              </a:ext>
-            </a:extLst>
-          </p:cNvPr>
-          <p:cNvSpPr txBox="1"/>
-          <p:nvPr/>
-        </p:nvSpPr>
-        <p:spPr>
-          <a:xfrm>
-            <a:off x="776653" y="1049377"/>
-            <a:ext cx="10323564" cy="1077218"/>
-          </a:xfrm>
-          <a:prstGeom prst="rect">
-            <a:avLst/>
-          </a:prstGeom>
-          <a:noFill/>
-        </p:spPr>
-        <p:txBody>
-          <a:bodyPr wrap="square" rtlCol="0">
-            <a:spAutoFit/>
-          </a:bodyPr>
-          <a:lstStyle/>
-          <a:p>
-            <a:pPr marL="231775" indent="-231775">
-              <a:buFont typeface="Arial" panose="020B0604020202020204" pitchFamily="34" charset="0"/>
-              <a:buChar char="•"/>
-            </a:pPr>
-            <a:r>
-              <a:rPr lang="en-US" sz="2400">
-                <a:solidFill>
-                  <a:schemeClr val="accent1">
-                    <a:lumMod val="50000"/>
-                  </a:schemeClr>
-                </a:solidFill>
-                <a:latin typeface="Arial" panose="020B0604020202020204" pitchFamily="34" charset="0"/>
-                <a:cs typeface="Arial" panose="020B0604020202020204" pitchFamily="34" charset="0"/>
-              </a:rPr>
-              <a:t>Tuples can prevent unintended aliasing</a:t>
-            </a:r>
-          </a:p>
-          <a:p>
-            <a:pPr marL="688975" indent="-231775">
-              <a:buFont typeface="Arial" panose="020B0604020202020204" pitchFamily="34" charset="0"/>
-              <a:buChar char="•"/>
-            </a:pPr>
-            <a:r>
-              <a:rPr lang="en-US" sz="2000">
-                <a:solidFill>
-                  <a:schemeClr val="accent1">
-                    <a:lumMod val="50000"/>
-                  </a:schemeClr>
-                </a:solidFill>
-                <a:latin typeface="Arial" panose="020B0604020202020204" pitchFamily="34" charset="0"/>
-                <a:cs typeface="Arial" panose="020B0604020202020204" pitchFamily="34" charset="0"/>
-              </a:rPr>
-              <a:t>If a list is assigned to multiple variables, changes in one reference affect all others.</a:t>
-            </a:r>
-          </a:p>
-          <a:p>
-            <a:pPr marL="688975" indent="-231775">
-              <a:buFont typeface="Arial" panose="020B0604020202020204" pitchFamily="34" charset="0"/>
-              <a:buChar char="•"/>
-            </a:pPr>
-            <a:r>
-              <a:rPr lang="en-US" sz="2000">
-                <a:solidFill>
-                  <a:schemeClr val="accent1">
-                    <a:lumMod val="50000"/>
-                  </a:schemeClr>
-                </a:solidFill>
-                <a:latin typeface="Arial" panose="020B0604020202020204" pitchFamily="34" charset="0"/>
-                <a:cs typeface="Arial" panose="020B0604020202020204" pitchFamily="34" charset="0"/>
-              </a:rPr>
-              <a:t>Using a tuple ensures that security-sensitive data is not modified indirectly.</a:t>
-            </a:r>
-          </a:p>
-        </p:txBody>
-      </p:sp>
-    </p:spTree>
-    <p:extLst>
-      <p:ext uri="{BB962C8B-B14F-4D97-AF65-F5344CB8AC3E}">
-        <p14:creationId xmlns:p14="http://schemas.microsoft.com/office/powerpoint/2010/main" val="2087834609"/>
       </p:ext>
     </p:extLst>
   </p:cSld>

--- a/Slides-Day2.pptx
+++ b/Slides-Day2.pptx
@@ -18,12 +18,14 @@
     <p:sldId id="268" r:id="rId12"/>
     <p:sldId id="269" r:id="rId13"/>
     <p:sldId id="273" r:id="rId14"/>
-    <p:sldId id="277" r:id="rId15"/>
-    <p:sldId id="278" r:id="rId16"/>
-    <p:sldId id="274" r:id="rId17"/>
-    <p:sldId id="276" r:id="rId18"/>
-    <p:sldId id="275" r:id="rId19"/>
-    <p:sldId id="270" r:id="rId20"/>
+    <p:sldId id="279" r:id="rId15"/>
+    <p:sldId id="274" r:id="rId16"/>
+    <p:sldId id="277" r:id="rId17"/>
+    <p:sldId id="278" r:id="rId18"/>
+    <p:sldId id="280" r:id="rId19"/>
+    <p:sldId id="276" r:id="rId20"/>
+    <p:sldId id="275" r:id="rId21"/>
+    <p:sldId id="270" r:id="rId22"/>
   </p:sldIdLst>
   <p:sldSz cx="12192000" cy="6858000"/>
   <p:notesSz cx="6858000" cy="9144000"/>
@@ -277,7 +279,7 @@
           <a:p>
             <a:fld id="{CD989C08-BA69-4AD3-98E9-D53C63F6E1B1}" type="datetimeFigureOut">
               <a:rPr lang="en-US" smtClean="0"/>
-              <a:t>3/15/2025</a:t>
+              <a:t>3/17/2025</a:t>
             </a:fld>
             <a:endParaRPr lang="en-US"/>
           </a:p>
@@ -475,7 +477,7 @@
           <a:p>
             <a:fld id="{CD989C08-BA69-4AD3-98E9-D53C63F6E1B1}" type="datetimeFigureOut">
               <a:rPr lang="en-US" smtClean="0"/>
-              <a:t>3/15/2025</a:t>
+              <a:t>3/17/2025</a:t>
             </a:fld>
             <a:endParaRPr lang="en-US"/>
           </a:p>
@@ -683,7 +685,7 @@
           <a:p>
             <a:fld id="{CD989C08-BA69-4AD3-98E9-D53C63F6E1B1}" type="datetimeFigureOut">
               <a:rPr lang="en-US" smtClean="0"/>
-              <a:t>3/15/2025</a:t>
+              <a:t>3/17/2025</a:t>
             </a:fld>
             <a:endParaRPr lang="en-US"/>
           </a:p>
@@ -881,7 +883,7 @@
           <a:p>
             <a:fld id="{CD989C08-BA69-4AD3-98E9-D53C63F6E1B1}" type="datetimeFigureOut">
               <a:rPr lang="en-US" smtClean="0"/>
-              <a:t>3/15/2025</a:t>
+              <a:t>3/17/2025</a:t>
             </a:fld>
             <a:endParaRPr lang="en-US"/>
           </a:p>
@@ -1156,7 +1158,7 @@
           <a:p>
             <a:fld id="{CD989C08-BA69-4AD3-98E9-D53C63F6E1B1}" type="datetimeFigureOut">
               <a:rPr lang="en-US" smtClean="0"/>
-              <a:t>3/15/2025</a:t>
+              <a:t>3/17/2025</a:t>
             </a:fld>
             <a:endParaRPr lang="en-US"/>
           </a:p>
@@ -1421,7 +1423,7 @@
           <a:p>
             <a:fld id="{CD989C08-BA69-4AD3-98E9-D53C63F6E1B1}" type="datetimeFigureOut">
               <a:rPr lang="en-US" smtClean="0"/>
-              <a:t>3/15/2025</a:t>
+              <a:t>3/17/2025</a:t>
             </a:fld>
             <a:endParaRPr lang="en-US"/>
           </a:p>
@@ -1833,7 +1835,7 @@
           <a:p>
             <a:fld id="{CD989C08-BA69-4AD3-98E9-D53C63F6E1B1}" type="datetimeFigureOut">
               <a:rPr lang="en-US" smtClean="0"/>
-              <a:t>3/15/2025</a:t>
+              <a:t>3/17/2025</a:t>
             </a:fld>
             <a:endParaRPr lang="en-US"/>
           </a:p>
@@ -1974,7 +1976,7 @@
           <a:p>
             <a:fld id="{CD989C08-BA69-4AD3-98E9-D53C63F6E1B1}" type="datetimeFigureOut">
               <a:rPr lang="en-US" smtClean="0"/>
-              <a:t>3/15/2025</a:t>
+              <a:t>3/17/2025</a:t>
             </a:fld>
             <a:endParaRPr lang="en-US"/>
           </a:p>
@@ -2087,7 +2089,7 @@
           <a:p>
             <a:fld id="{CD989C08-BA69-4AD3-98E9-D53C63F6E1B1}" type="datetimeFigureOut">
               <a:rPr lang="en-US" smtClean="0"/>
-              <a:t>3/15/2025</a:t>
+              <a:t>3/17/2025</a:t>
             </a:fld>
             <a:endParaRPr lang="en-US"/>
           </a:p>
@@ -2398,7 +2400,7 @@
           <a:p>
             <a:fld id="{CD989C08-BA69-4AD3-98E9-D53C63F6E1B1}" type="datetimeFigureOut">
               <a:rPr lang="en-US" smtClean="0"/>
-              <a:t>3/15/2025</a:t>
+              <a:t>3/17/2025</a:t>
             </a:fld>
             <a:endParaRPr lang="en-US"/>
           </a:p>
@@ -2686,7 +2688,7 @@
           <a:p>
             <a:fld id="{CD989C08-BA69-4AD3-98E9-D53C63F6E1B1}" type="datetimeFigureOut">
               <a:rPr lang="en-US" smtClean="0"/>
-              <a:t>3/15/2025</a:t>
+              <a:t>3/17/2025</a:t>
             </a:fld>
             <a:endParaRPr lang="en-US"/>
           </a:p>
@@ -2927,7 +2929,7 @@
           <a:p>
             <a:fld id="{CD989C08-BA69-4AD3-98E9-D53C63F6E1B1}" type="datetimeFigureOut">
               <a:rPr lang="en-US" smtClean="0"/>
-              <a:t>3/15/2025</a:t>
+              <a:t>3/17/2025</a:t>
             </a:fld>
             <a:endParaRPr lang="en-US"/>
           </a:p>
@@ -4686,7 +4688,7 @@
         <p:spPr>
           <a:xfrm>
             <a:off x="836614" y="906971"/>
-            <a:ext cx="10323564" cy="2677656"/>
+            <a:ext cx="10323564" cy="2923877"/>
           </a:xfrm>
           <a:prstGeom prst="rect">
             <a:avLst/>
@@ -4713,7 +4715,61 @@
                 <a:latin typeface="Arial" panose="020B0604020202020204" pitchFamily="34" charset="0"/>
                 <a:cs typeface="Arial" panose="020B0604020202020204" pitchFamily="34" charset="0"/>
               </a:rPr>
+              <a:t>Validate &amp; Check Index Values Before Accessing</a:t>
+            </a:r>
+          </a:p>
+          <a:p>
+            <a:pPr marL="1146175" lvl="2" indent="-230188">
+              <a:buFont typeface="Arial" panose="020B0604020202020204" pitchFamily="34" charset="0"/>
+              <a:buChar char="•"/>
+            </a:pPr>
+            <a:r>
+              <a:rPr lang="en-US" sz="2400">
+                <a:solidFill>
+                  <a:schemeClr val="accent1">
+                    <a:lumMod val="50000"/>
+                  </a:schemeClr>
+                </a:solidFill>
+                <a:latin typeface="Arial" panose="020B0604020202020204" pitchFamily="34" charset="0"/>
+                <a:cs typeface="Arial" panose="020B0604020202020204" pitchFamily="34" charset="0"/>
+              </a:rPr>
               <a:t>Always check if an index is within range before accessing elements.</a:t>
+            </a:r>
+          </a:p>
+          <a:p>
+            <a:pPr marL="1146175" lvl="2" indent="-230188">
+              <a:buFont typeface="Arial" panose="020B0604020202020204" pitchFamily="34" charset="0"/>
+              <a:buChar char="•"/>
+            </a:pPr>
+            <a:r>
+              <a:rPr lang="en-US" sz="2400">
+                <a:solidFill>
+                  <a:schemeClr val="accent1">
+                    <a:lumMod val="50000"/>
+                  </a:schemeClr>
+                </a:solidFill>
+                <a:latin typeface="Arial" panose="020B0604020202020204" pitchFamily="34" charset="0"/>
+                <a:cs typeface="Arial" panose="020B0604020202020204" pitchFamily="34" charset="0"/>
+              </a:rPr>
+              <a:t>Use len() to determine valid index ranges.</a:t>
+            </a:r>
+          </a:p>
+          <a:p>
+            <a:pPr marL="1146175" lvl="2" indent="-230188">
+              <a:buFont typeface="Arial" panose="020B0604020202020204" pitchFamily="34" charset="0"/>
+              <a:buChar char="•"/>
+            </a:pPr>
+            <a:r>
+              <a:rPr lang="en-US" sz="2400">
+                <a:solidFill>
+                  <a:schemeClr val="accent1">
+                    <a:lumMod val="50000"/>
+                  </a:schemeClr>
+                </a:solidFill>
+                <a:latin typeface="Arial" panose="020B0604020202020204" pitchFamily="34" charset="0"/>
+                <a:cs typeface="Arial" panose="020B0604020202020204" pitchFamily="34" charset="0"/>
+              </a:rPr>
+              <a:t>Validate user input before using it as an index.</a:t>
             </a:r>
           </a:p>
           <a:p>
@@ -4731,43 +4787,7 @@
                 <a:latin typeface="Arial" panose="020B0604020202020204" pitchFamily="34" charset="0"/>
                 <a:cs typeface="Arial" panose="020B0604020202020204" pitchFamily="34" charset="0"/>
               </a:rPr>
-              <a:t>Use len() to determine valid index ranges.</a:t>
-            </a:r>
-          </a:p>
-          <a:p>
-            <a:pPr marL="231775" indent="-230188">
-              <a:buFont typeface="Arial" panose="020B0604020202020204" pitchFamily="34" charset="0"/>
-              <a:buChar char="•"/>
-            </a:pPr>
-            <a:r>
-              <a:rPr lang="en-US" sz="2800">
-                <a:solidFill>
-                  <a:schemeClr val="accent1">
-                    <a:lumMod val="50000"/>
-                  </a:schemeClr>
-                </a:solidFill>
-                <a:latin typeface="Arial" panose="020B0604020202020204" pitchFamily="34" charset="0"/>
-                <a:cs typeface="Arial" panose="020B0604020202020204" pitchFamily="34" charset="0"/>
-              </a:rPr>
               <a:t>Handle unexpected errors using try-except.</a:t>
-            </a:r>
-          </a:p>
-          <a:p>
-            <a:pPr marL="231775" indent="-230188">
-              <a:buFont typeface="Arial" panose="020B0604020202020204" pitchFamily="34" charset="0"/>
-              <a:buChar char="•"/>
-            </a:pPr>
-            <a:r>
-              <a:rPr lang="en-US" sz="2800">
-                <a:solidFill>
-                  <a:schemeClr val="accent1">
-                    <a:lumMod val="50000"/>
-                  </a:schemeClr>
-                </a:solidFill>
-                <a:latin typeface="Arial" panose="020B0604020202020204" pitchFamily="34" charset="0"/>
-                <a:cs typeface="Arial" panose="020B0604020202020204" pitchFamily="34" charset="0"/>
-              </a:rPr>
-              <a:t>Validate user input before using it as an index.</a:t>
             </a:r>
           </a:p>
           <a:p>
@@ -4804,6 +4824,714 @@
 </file>
 
 <file path=ppt/slides/slide14.xml><?xml version="1.0" encoding="utf-8"?>
+<p:sld xmlns:a="http://schemas.openxmlformats.org/drawingml/2006/main" xmlns:r="http://schemas.openxmlformats.org/officeDocument/2006/relationships" xmlns:p="http://schemas.openxmlformats.org/presentationml/2006/main">
+  <p:cSld>
+    <p:spTree>
+      <p:nvGrpSpPr>
+        <p:cNvPr id="1" name="">
+          <a:extLst>
+            <a:ext uri="{FF2B5EF4-FFF2-40B4-BE49-F238E27FC236}">
+              <a16:creationId xmlns:a16="http://schemas.microsoft.com/office/drawing/2014/main" id="{6E2C5249-FBD9-E03B-A186-0FEB956A8AF9}"/>
+            </a:ext>
+          </a:extLst>
+        </p:cNvPr>
+        <p:cNvGrpSpPr/>
+        <p:nvPr/>
+      </p:nvGrpSpPr>
+      <p:grpSpPr>
+        <a:xfrm>
+          <a:off x="0" y="0"/>
+          <a:ext cx="0" cy="0"/>
+          <a:chOff x="0" y="0"/>
+          <a:chExt cx="0" cy="0"/>
+        </a:xfrm>
+      </p:grpSpPr>
+      <p:pic>
+        <p:nvPicPr>
+          <p:cNvPr id="3" name="Picture 2" descr="A white and blue background&#10;&#10;Description automatically generated">
+            <a:extLst>
+              <a:ext uri="{FF2B5EF4-FFF2-40B4-BE49-F238E27FC236}">
+                <a16:creationId xmlns:a16="http://schemas.microsoft.com/office/drawing/2014/main" id="{E1901461-8ABE-FC63-A05E-56484A4CDA57}"/>
+              </a:ext>
+            </a:extLst>
+          </p:cNvPr>
+          <p:cNvPicPr>
+            <a:picLocks noChangeAspect="1"/>
+          </p:cNvPicPr>
+          <p:nvPr/>
+        </p:nvPicPr>
+        <p:blipFill>
+          <a:blip r:embed="rId2"/>
+          <a:stretch>
+            <a:fillRect/>
+          </a:stretch>
+        </p:blipFill>
+        <p:spPr>
+          <a:xfrm>
+            <a:off x="0" y="-33129"/>
+            <a:ext cx="12192000" cy="6891129"/>
+          </a:xfrm>
+          <a:prstGeom prst="rect">
+            <a:avLst/>
+          </a:prstGeom>
+        </p:spPr>
+      </p:pic>
+      <p:sp>
+        <p:nvSpPr>
+          <p:cNvPr id="4" name="TextBox 3">
+            <a:extLst>
+              <a:ext uri="{FF2B5EF4-FFF2-40B4-BE49-F238E27FC236}">
+                <a16:creationId xmlns:a16="http://schemas.microsoft.com/office/drawing/2014/main" id="{E45CD718-069A-CF9C-C21E-7A0EA083589A}"/>
+              </a:ext>
+            </a:extLst>
+          </p:cNvPr>
+          <p:cNvSpPr txBox="1"/>
+          <p:nvPr/>
+        </p:nvSpPr>
+        <p:spPr>
+          <a:xfrm>
+            <a:off x="604266" y="136955"/>
+            <a:ext cx="10391019" cy="646331"/>
+          </a:xfrm>
+          <a:prstGeom prst="rect">
+            <a:avLst/>
+          </a:prstGeom>
+          <a:noFill/>
+        </p:spPr>
+        <p:txBody>
+          <a:bodyPr wrap="square" rtlCol="0">
+            <a:spAutoFit/>
+          </a:bodyPr>
+          <a:lstStyle/>
+          <a:p>
+            <a:r>
+              <a:rPr lang="en-US" sz="3600">
+                <a:solidFill>
+                  <a:schemeClr val="accent1">
+                    <a:lumMod val="50000"/>
+                  </a:schemeClr>
+                </a:solidFill>
+                <a:latin typeface="Arial" panose="020B0604020202020204" pitchFamily="34" charset="0"/>
+                <a:cs typeface="Arial" panose="020B0604020202020204" pitchFamily="34" charset="0"/>
+              </a:rPr>
+              <a:t>Validate &amp; Check Index Values Before Accessing</a:t>
+            </a:r>
+          </a:p>
+        </p:txBody>
+      </p:sp>
+      <p:sp>
+        <p:nvSpPr>
+          <p:cNvPr id="5" name="TextBox 4">
+            <a:extLst>
+              <a:ext uri="{FF2B5EF4-FFF2-40B4-BE49-F238E27FC236}">
+                <a16:creationId xmlns:a16="http://schemas.microsoft.com/office/drawing/2014/main" id="{B31513E4-8F00-94E6-7BFA-F910B3616EAC}"/>
+              </a:ext>
+            </a:extLst>
+          </p:cNvPr>
+          <p:cNvSpPr txBox="1"/>
+          <p:nvPr/>
+        </p:nvSpPr>
+        <p:spPr>
+          <a:xfrm>
+            <a:off x="604266" y="1161804"/>
+            <a:ext cx="4237556" cy="3847207"/>
+          </a:xfrm>
+          <a:prstGeom prst="rect">
+            <a:avLst/>
+          </a:prstGeom>
+          <a:noFill/>
+        </p:spPr>
+        <p:txBody>
+          <a:bodyPr wrap="square" rtlCol="0">
+            <a:spAutoFit/>
+          </a:bodyPr>
+          <a:lstStyle/>
+          <a:p>
+            <a:pPr marL="231775" indent="-230188">
+              <a:buFont typeface="Arial" panose="020B0604020202020204" pitchFamily="34" charset="0"/>
+              <a:buChar char="•"/>
+            </a:pPr>
+            <a:r>
+              <a:rPr lang="en-US" sz="2800">
+                <a:solidFill>
+                  <a:schemeClr val="accent1">
+                    <a:lumMod val="50000"/>
+                  </a:schemeClr>
+                </a:solidFill>
+                <a:latin typeface="Arial" panose="020B0604020202020204" pitchFamily="34" charset="0"/>
+                <a:cs typeface="Arial" panose="020B0604020202020204" pitchFamily="34" charset="0"/>
+              </a:rPr>
+              <a:t>Always check if an index is within range before accessing elements.</a:t>
+            </a:r>
+          </a:p>
+          <a:p>
+            <a:pPr marL="688975" lvl="1" indent="-230188">
+              <a:buFont typeface="Arial" panose="020B0604020202020204" pitchFamily="34" charset="0"/>
+              <a:buChar char="•"/>
+            </a:pPr>
+            <a:r>
+              <a:rPr lang="en-US" sz="2400">
+                <a:solidFill>
+                  <a:schemeClr val="accent1">
+                    <a:lumMod val="50000"/>
+                  </a:schemeClr>
+                </a:solidFill>
+                <a:latin typeface="Arial" panose="020B0604020202020204" pitchFamily="34" charset="0"/>
+                <a:cs typeface="Arial" panose="020B0604020202020204" pitchFamily="34" charset="0"/>
+              </a:rPr>
+              <a:t>Use len() to determine </a:t>
+            </a:r>
+            <a:br>
+              <a:rPr lang="en-US" sz="2400">
+                <a:solidFill>
+                  <a:schemeClr val="accent1">
+                    <a:lumMod val="50000"/>
+                  </a:schemeClr>
+                </a:solidFill>
+                <a:latin typeface="Arial" panose="020B0604020202020204" pitchFamily="34" charset="0"/>
+                <a:cs typeface="Arial" panose="020B0604020202020204" pitchFamily="34" charset="0"/>
+              </a:rPr>
+            </a:br>
+            <a:r>
+              <a:rPr lang="en-US" sz="2400">
+                <a:solidFill>
+                  <a:schemeClr val="accent1">
+                    <a:lumMod val="50000"/>
+                  </a:schemeClr>
+                </a:solidFill>
+                <a:latin typeface="Arial" panose="020B0604020202020204" pitchFamily="34" charset="0"/>
+                <a:cs typeface="Arial" panose="020B0604020202020204" pitchFamily="34" charset="0"/>
+              </a:rPr>
+              <a:t>valid index ranges.</a:t>
+            </a:r>
+          </a:p>
+          <a:p>
+            <a:pPr marL="231775" indent="-230188">
+              <a:buFont typeface="Arial" panose="020B0604020202020204" pitchFamily="34" charset="0"/>
+              <a:buChar char="•"/>
+            </a:pPr>
+            <a:r>
+              <a:rPr lang="en-US" sz="2800">
+                <a:solidFill>
+                  <a:schemeClr val="accent1">
+                    <a:lumMod val="50000"/>
+                  </a:schemeClr>
+                </a:solidFill>
+                <a:latin typeface="Arial" panose="020B0604020202020204" pitchFamily="34" charset="0"/>
+                <a:cs typeface="Arial" panose="020B0604020202020204" pitchFamily="34" charset="0"/>
+              </a:rPr>
+              <a:t>Validate user input before using it as an index.</a:t>
+            </a:r>
+          </a:p>
+        </p:txBody>
+      </p:sp>
+      <p:sp>
+        <p:nvSpPr>
+          <p:cNvPr id="6" name="TextBox 5">
+            <a:extLst>
+              <a:ext uri="{FF2B5EF4-FFF2-40B4-BE49-F238E27FC236}">
+                <a16:creationId xmlns:a16="http://schemas.microsoft.com/office/drawing/2014/main" id="{7F262E7B-C7F3-CFE6-458F-E453529C1D1A}"/>
+              </a:ext>
+            </a:extLst>
+          </p:cNvPr>
+          <p:cNvSpPr txBox="1"/>
+          <p:nvPr/>
+        </p:nvSpPr>
+        <p:spPr>
+          <a:xfrm>
+            <a:off x="5082576" y="1161804"/>
+            <a:ext cx="6782137" cy="4770537"/>
+          </a:xfrm>
+          <a:prstGeom prst="rect">
+            <a:avLst/>
+          </a:prstGeom>
+          <a:noFill/>
+        </p:spPr>
+        <p:txBody>
+          <a:bodyPr wrap="square">
+            <a:spAutoFit/>
+          </a:bodyPr>
+          <a:lstStyle/>
+          <a:p>
+            <a:r>
+              <a:rPr lang="en-US" sz="1600" b="1">
+                <a:latin typeface="Consolas" panose="020B0609020204030204" pitchFamily="49" charset="0"/>
+              </a:rPr>
+              <a:t> # Safely retrieve an element from a list</a:t>
+            </a:r>
+            <a:br>
+              <a:rPr lang="en-US" sz="1600" b="1">
+                <a:latin typeface="Consolas" panose="020B0609020204030204" pitchFamily="49" charset="0"/>
+              </a:rPr>
+            </a:br>
+            <a:r>
+              <a:rPr lang="en-US" sz="1600" b="1">
+                <a:latin typeface="Consolas" panose="020B0609020204030204" pitchFamily="49" charset="0"/>
+              </a:rPr>
+              <a:t>def get_element(lst, index):</a:t>
+            </a:r>
+          </a:p>
+          <a:p>
+            <a:r>
+              <a:rPr lang="en-US" sz="1600" b="1">
+                <a:latin typeface="Consolas" panose="020B0609020204030204" pitchFamily="49" charset="0"/>
+              </a:rPr>
+              <a:t>    if not isinstance(index, int): # Validate user input</a:t>
+            </a:r>
+          </a:p>
+          <a:p>
+            <a:r>
+              <a:rPr lang="en-US" sz="1600" b="1">
+                <a:latin typeface="Consolas" panose="020B0609020204030204" pitchFamily="49" charset="0"/>
+              </a:rPr>
+              <a:t>        print("Error: Index must be an integer.")</a:t>
+            </a:r>
+          </a:p>
+          <a:p>
+            <a:r>
+              <a:rPr lang="en-US" sz="1600" b="1">
+                <a:latin typeface="Consolas" panose="020B0609020204030204" pitchFamily="49" charset="0"/>
+              </a:rPr>
+              <a:t>        return None</a:t>
+            </a:r>
+          </a:p>
+          <a:p>
+            <a:r>
+              <a:rPr lang="en-US" sz="1600" b="1">
+                <a:latin typeface="Consolas" panose="020B0609020204030204" pitchFamily="49" charset="0"/>
+              </a:rPr>
+              <a:t>    if 0 &lt;= index &lt; len(lst):  # Check if index is in range</a:t>
+            </a:r>
+          </a:p>
+          <a:p>
+            <a:r>
+              <a:rPr lang="en-US" sz="1600" b="1">
+                <a:latin typeface="Consolas" panose="020B0609020204030204" pitchFamily="49" charset="0"/>
+              </a:rPr>
+              <a:t>        return lst[index]</a:t>
+            </a:r>
+          </a:p>
+          <a:p>
+            <a:r>
+              <a:rPr lang="en-US" sz="1600" b="1">
+                <a:latin typeface="Consolas" panose="020B0609020204030204" pitchFamily="49" charset="0"/>
+              </a:rPr>
+              <a:t>    else:</a:t>
+            </a:r>
+          </a:p>
+          <a:p>
+            <a:r>
+              <a:rPr lang="en-US" sz="1600" b="1">
+                <a:latin typeface="Consolas" panose="020B0609020204030204" pitchFamily="49" charset="0"/>
+              </a:rPr>
+              <a:t>        print("Error: Index out of range.")</a:t>
+            </a:r>
+          </a:p>
+          <a:p>
+            <a:r>
+              <a:rPr lang="en-US" sz="1600" b="1">
+                <a:latin typeface="Consolas" panose="020B0609020204030204" pitchFamily="49" charset="0"/>
+              </a:rPr>
+              <a:t>        return None</a:t>
+            </a:r>
+          </a:p>
+          <a:p>
+            <a:endParaRPr lang="en-US" sz="1600" b="1">
+              <a:latin typeface="Consolas" panose="020B0609020204030204" pitchFamily="49" charset="0"/>
+            </a:endParaRPr>
+          </a:p>
+          <a:p>
+            <a:r>
+              <a:rPr lang="en-US" sz="1600" b="1">
+                <a:latin typeface="Consolas" panose="020B0609020204030204" pitchFamily="49" charset="0"/>
+              </a:rPr>
+              <a:t># Example usage</a:t>
+            </a:r>
+          </a:p>
+          <a:p>
+            <a:r>
+              <a:rPr lang="en-US" sz="1600" b="1">
+                <a:latin typeface="Consolas" panose="020B0609020204030204" pitchFamily="49" charset="0"/>
+              </a:rPr>
+              <a:t>my_list = ["apple", "banana", "cherry"]</a:t>
+            </a:r>
+          </a:p>
+          <a:p>
+            <a:r>
+              <a:rPr lang="en-US" sz="1600" b="1">
+                <a:latin typeface="Consolas" panose="020B0609020204030204" pitchFamily="49" charset="0"/>
+              </a:rPr>
+              <a:t># Valid index</a:t>
+            </a:r>
+          </a:p>
+          <a:p>
+            <a:r>
+              <a:rPr lang="en-US" sz="1600" b="1">
+                <a:latin typeface="Consolas" panose="020B0609020204030204" pitchFamily="49" charset="0"/>
+              </a:rPr>
+              <a:t>print(get_element(my_list, 1)) </a:t>
+            </a:r>
+          </a:p>
+          <a:p>
+            <a:r>
+              <a:rPr lang="en-US" sz="1600" b="1">
+                <a:latin typeface="Consolas" panose="020B0609020204030204" pitchFamily="49" charset="0"/>
+              </a:rPr>
+              <a:t># Out-of-range index</a:t>
+            </a:r>
+          </a:p>
+          <a:p>
+            <a:r>
+              <a:rPr lang="en-US" sz="1600" b="1">
+                <a:latin typeface="Consolas" panose="020B0609020204030204" pitchFamily="49" charset="0"/>
+              </a:rPr>
+              <a:t>print(get_element(my_list, 5))</a:t>
+            </a:r>
+          </a:p>
+          <a:p>
+            <a:r>
+              <a:rPr lang="en-US" sz="1600" b="1">
+                <a:latin typeface="Consolas" panose="020B0609020204030204" pitchFamily="49" charset="0"/>
+              </a:rPr>
+              <a:t># Invalid input (not an integer)</a:t>
+            </a:r>
+          </a:p>
+          <a:p>
+            <a:r>
+              <a:rPr lang="en-US" sz="1600" b="1">
+                <a:latin typeface="Consolas" panose="020B0609020204030204" pitchFamily="49" charset="0"/>
+              </a:rPr>
+              <a:t>print(get_element(my_list, "two"))</a:t>
+            </a:r>
+          </a:p>
+        </p:txBody>
+      </p:sp>
+    </p:spTree>
+    <p:extLst>
+      <p:ext uri="{BB962C8B-B14F-4D97-AF65-F5344CB8AC3E}">
+        <p14:creationId xmlns:p14="http://schemas.microsoft.com/office/powerpoint/2010/main" val="3650869496"/>
+      </p:ext>
+    </p:extLst>
+  </p:cSld>
+  <p:clrMapOvr>
+    <a:masterClrMapping/>
+  </p:clrMapOvr>
+</p:sld>
+</file>
+
+<file path=ppt/slides/slide15.xml><?xml version="1.0" encoding="utf-8"?>
+<p:sld xmlns:a="http://schemas.openxmlformats.org/drawingml/2006/main" xmlns:r="http://schemas.openxmlformats.org/officeDocument/2006/relationships" xmlns:p="http://schemas.openxmlformats.org/presentationml/2006/main">
+  <p:cSld>
+    <p:spTree>
+      <p:nvGrpSpPr>
+        <p:cNvPr id="1" name="">
+          <a:extLst>
+            <a:ext uri="{FF2B5EF4-FFF2-40B4-BE49-F238E27FC236}">
+              <a16:creationId xmlns:a16="http://schemas.microsoft.com/office/drawing/2014/main" id="{BC99DE24-11E3-B58C-325C-03784DC0AB42}"/>
+            </a:ext>
+          </a:extLst>
+        </p:cNvPr>
+        <p:cNvGrpSpPr/>
+        <p:nvPr/>
+      </p:nvGrpSpPr>
+      <p:grpSpPr>
+        <a:xfrm>
+          <a:off x="0" y="0"/>
+          <a:ext cx="0" cy="0"/>
+          <a:chOff x="0" y="0"/>
+          <a:chExt cx="0" cy="0"/>
+        </a:xfrm>
+      </p:grpSpPr>
+      <p:pic>
+        <p:nvPicPr>
+          <p:cNvPr id="3" name="Picture 2" descr="A white and blue background&#10;&#10;Description automatically generated">
+            <a:extLst>
+              <a:ext uri="{FF2B5EF4-FFF2-40B4-BE49-F238E27FC236}">
+                <a16:creationId xmlns:a16="http://schemas.microsoft.com/office/drawing/2014/main" id="{B7948E7C-D1F5-8DD4-3848-32B003C5F3D4}"/>
+              </a:ext>
+            </a:extLst>
+          </p:cNvPr>
+          <p:cNvPicPr>
+            <a:picLocks noChangeAspect="1"/>
+          </p:cNvPicPr>
+          <p:nvPr/>
+        </p:nvPicPr>
+        <p:blipFill>
+          <a:blip r:embed="rId2"/>
+          <a:stretch>
+            <a:fillRect/>
+          </a:stretch>
+        </p:blipFill>
+        <p:spPr>
+          <a:xfrm>
+            <a:off x="0" y="-33129"/>
+            <a:ext cx="12192000" cy="6891129"/>
+          </a:xfrm>
+          <a:prstGeom prst="rect">
+            <a:avLst/>
+          </a:prstGeom>
+        </p:spPr>
+      </p:pic>
+      <p:sp>
+        <p:nvSpPr>
+          <p:cNvPr id="4" name="TextBox 3">
+            <a:extLst>
+              <a:ext uri="{FF2B5EF4-FFF2-40B4-BE49-F238E27FC236}">
+                <a16:creationId xmlns:a16="http://schemas.microsoft.com/office/drawing/2014/main" id="{9947D70E-4EC6-9F57-4994-E8D33286F171}"/>
+              </a:ext>
+            </a:extLst>
+          </p:cNvPr>
+          <p:cNvSpPr txBox="1"/>
+          <p:nvPr/>
+        </p:nvSpPr>
+        <p:spPr>
+          <a:xfrm>
+            <a:off x="604266" y="136955"/>
+            <a:ext cx="10391019" cy="646331"/>
+          </a:xfrm>
+          <a:prstGeom prst="rect">
+            <a:avLst/>
+          </a:prstGeom>
+          <a:noFill/>
+        </p:spPr>
+        <p:txBody>
+          <a:bodyPr wrap="square" rtlCol="0">
+            <a:spAutoFit/>
+          </a:bodyPr>
+          <a:lstStyle/>
+          <a:p>
+            <a:r>
+              <a:rPr lang="en-US" sz="3600">
+                <a:solidFill>
+                  <a:schemeClr val="accent1">
+                    <a:lumMod val="50000"/>
+                  </a:schemeClr>
+                </a:solidFill>
+                <a:latin typeface="Arial" panose="020B0604020202020204" pitchFamily="34" charset="0"/>
+                <a:cs typeface="Arial" panose="020B0604020202020204" pitchFamily="34" charset="0"/>
+              </a:rPr>
+              <a:t>Handle Unexpected Errors Using try-except</a:t>
+            </a:r>
+          </a:p>
+        </p:txBody>
+      </p:sp>
+      <p:sp>
+        <p:nvSpPr>
+          <p:cNvPr id="5" name="TextBox 4">
+            <a:extLst>
+              <a:ext uri="{FF2B5EF4-FFF2-40B4-BE49-F238E27FC236}">
+                <a16:creationId xmlns:a16="http://schemas.microsoft.com/office/drawing/2014/main" id="{E5C77192-6489-D6CE-E4A5-B7C7069ED03D}"/>
+              </a:ext>
+            </a:extLst>
+          </p:cNvPr>
+          <p:cNvSpPr txBox="1"/>
+          <p:nvPr/>
+        </p:nvSpPr>
+        <p:spPr>
+          <a:xfrm>
+            <a:off x="836614" y="906971"/>
+            <a:ext cx="10323564" cy="4154984"/>
+          </a:xfrm>
+          <a:prstGeom prst="rect">
+            <a:avLst/>
+          </a:prstGeom>
+          <a:noFill/>
+        </p:spPr>
+        <p:txBody>
+          <a:bodyPr wrap="square" rtlCol="0">
+            <a:spAutoFit/>
+          </a:bodyPr>
+          <a:lstStyle/>
+          <a:p>
+            <a:pPr marL="231775" indent="-230188">
+              <a:buFont typeface="Arial" panose="020B0604020202020204" pitchFamily="34" charset="0"/>
+              <a:buChar char="•"/>
+            </a:pPr>
+            <a:r>
+              <a:rPr lang="en-US" sz="2400">
+                <a:solidFill>
+                  <a:schemeClr val="accent1">
+                    <a:lumMod val="50000"/>
+                  </a:schemeClr>
+                </a:solidFill>
+                <a:latin typeface="Arial" panose="020B0604020202020204" pitchFamily="34" charset="0"/>
+                <a:cs typeface="Arial" panose="020B0604020202020204" pitchFamily="34" charset="0"/>
+              </a:rPr>
+              <a:t>Use try-except to catch IndexError without crashing.</a:t>
+            </a:r>
+          </a:p>
+          <a:p>
+            <a:pPr marL="231775" indent="-230188">
+              <a:buFont typeface="Arial" panose="020B0604020202020204" pitchFamily="34" charset="0"/>
+              <a:buChar char="•"/>
+            </a:pPr>
+            <a:r>
+              <a:rPr lang="en-US" sz="2400">
+                <a:solidFill>
+                  <a:schemeClr val="accent1">
+                    <a:lumMod val="50000"/>
+                  </a:schemeClr>
+                </a:solidFill>
+                <a:latin typeface="Arial" panose="020B0604020202020204" pitchFamily="34" charset="0"/>
+                <a:cs typeface="Arial" panose="020B0604020202020204" pitchFamily="34" charset="0"/>
+              </a:rPr>
+              <a:t>Return a default value or a meaningful message on failure.</a:t>
+            </a:r>
+          </a:p>
+          <a:p>
+            <a:pPr marL="231775" indent="-230188">
+              <a:buFont typeface="Arial" panose="020B0604020202020204" pitchFamily="34" charset="0"/>
+              <a:buChar char="•"/>
+            </a:pPr>
+            <a:r>
+              <a:rPr lang="en-US" sz="2400">
+                <a:solidFill>
+                  <a:schemeClr val="accent1">
+                    <a:lumMod val="50000"/>
+                  </a:schemeClr>
+                </a:solidFill>
+                <a:latin typeface="Arial" panose="020B0604020202020204" pitchFamily="34" charset="0"/>
+                <a:cs typeface="Arial" panose="020B0604020202020204" pitchFamily="34" charset="0"/>
+              </a:rPr>
+              <a:t>Log errors for debugging instead of silently failing.</a:t>
+            </a:r>
+          </a:p>
+          <a:p>
+            <a:pPr marL="231775" indent="-230188">
+              <a:buFont typeface="Arial" panose="020B0604020202020204" pitchFamily="34" charset="0"/>
+              <a:buChar char="•"/>
+            </a:pPr>
+            <a:endParaRPr lang="en-US" sz="2400">
+              <a:solidFill>
+                <a:schemeClr val="accent1">
+                  <a:lumMod val="50000"/>
+                </a:schemeClr>
+              </a:solidFill>
+              <a:latin typeface="Arial" panose="020B0604020202020204" pitchFamily="34" charset="0"/>
+              <a:cs typeface="Arial" panose="020B0604020202020204" pitchFamily="34" charset="0"/>
+            </a:endParaRPr>
+          </a:p>
+          <a:p>
+            <a:pPr marL="231775" indent="-230188">
+              <a:buFont typeface="Arial" panose="020B0604020202020204" pitchFamily="34" charset="0"/>
+              <a:buChar char="•"/>
+            </a:pPr>
+            <a:endParaRPr lang="en-US" sz="2400">
+              <a:solidFill>
+                <a:schemeClr val="accent1">
+                  <a:lumMod val="50000"/>
+                </a:schemeClr>
+              </a:solidFill>
+              <a:latin typeface="Arial" panose="020B0604020202020204" pitchFamily="34" charset="0"/>
+              <a:cs typeface="Arial" panose="020B0604020202020204" pitchFamily="34" charset="0"/>
+            </a:endParaRPr>
+          </a:p>
+          <a:p>
+            <a:pPr marL="914400"/>
+            <a:r>
+              <a:rPr lang="en-US" sz="2400" b="1">
+                <a:solidFill>
+                  <a:schemeClr val="accent1">
+                    <a:lumMod val="50000"/>
+                  </a:schemeClr>
+                </a:solidFill>
+                <a:latin typeface="Consolas" panose="020B0609020204030204" pitchFamily="49" charset="0"/>
+                <a:cs typeface="Arial" panose="020B0604020202020204" pitchFamily="34" charset="0"/>
+              </a:rPr>
+              <a:t>my_list = [10, 20, 30]</a:t>
+            </a:r>
+          </a:p>
+          <a:p>
+            <a:pPr marL="914400"/>
+            <a:r>
+              <a:rPr lang="en-US" sz="2400" b="1">
+                <a:solidFill>
+                  <a:schemeClr val="accent1">
+                    <a:lumMod val="50000"/>
+                  </a:schemeClr>
+                </a:solidFill>
+                <a:latin typeface="Consolas" panose="020B0609020204030204" pitchFamily="49" charset="0"/>
+                <a:cs typeface="Arial" panose="020B0604020202020204" pitchFamily="34" charset="0"/>
+              </a:rPr>
+              <a:t>try:    </a:t>
+            </a:r>
+          </a:p>
+          <a:p>
+            <a:pPr marL="914400"/>
+            <a:r>
+              <a:rPr lang="en-US" sz="2400" b="1">
+                <a:solidFill>
+                  <a:schemeClr val="accent1">
+                    <a:lumMod val="50000"/>
+                  </a:schemeClr>
+                </a:solidFill>
+                <a:latin typeface="Consolas" panose="020B0609020204030204" pitchFamily="49" charset="0"/>
+                <a:cs typeface="Arial" panose="020B0604020202020204" pitchFamily="34" charset="0"/>
+              </a:rPr>
+              <a:t>    print(my_list[3])  </a:t>
+            </a:r>
+          </a:p>
+          <a:p>
+            <a:pPr marL="914400"/>
+            <a:r>
+              <a:rPr lang="en-US" sz="2400" b="1">
+                <a:solidFill>
+                  <a:schemeClr val="accent1">
+                    <a:lumMod val="50000"/>
+                  </a:schemeClr>
+                </a:solidFill>
+                <a:latin typeface="Consolas" panose="020B0609020204030204" pitchFamily="49" charset="0"/>
+                <a:cs typeface="Arial" panose="020B0604020202020204" pitchFamily="34" charset="0"/>
+              </a:rPr>
+              <a:t>except IndexError:    </a:t>
+            </a:r>
+          </a:p>
+          <a:p>
+            <a:pPr marL="914400"/>
+            <a:r>
+              <a:rPr lang="en-US" sz="2400" b="1">
+                <a:solidFill>
+                  <a:schemeClr val="accent1">
+                    <a:lumMod val="50000"/>
+                  </a:schemeClr>
+                </a:solidFill>
+                <a:latin typeface="Consolas" panose="020B0609020204030204" pitchFamily="49" charset="0"/>
+                <a:cs typeface="Arial" panose="020B0604020202020204" pitchFamily="34" charset="0"/>
+              </a:rPr>
+              <a:t>    print("Index out of range!")</a:t>
+            </a:r>
+          </a:p>
+          <a:p>
+            <a:pPr marL="231775" indent="-230188">
+              <a:buFont typeface="Arial" panose="020B0604020202020204" pitchFamily="34" charset="0"/>
+              <a:buChar char="•"/>
+            </a:pPr>
+            <a:endParaRPr lang="en-US" sz="2400">
+              <a:solidFill>
+                <a:schemeClr val="accent1">
+                  <a:lumMod val="50000"/>
+                </a:schemeClr>
+              </a:solidFill>
+              <a:latin typeface="Arial" panose="020B0604020202020204" pitchFamily="34" charset="0"/>
+              <a:cs typeface="Arial" panose="020B0604020202020204" pitchFamily="34" charset="0"/>
+            </a:endParaRPr>
+          </a:p>
+        </p:txBody>
+      </p:sp>
+    </p:spTree>
+    <p:extLst>
+      <p:ext uri="{BB962C8B-B14F-4D97-AF65-F5344CB8AC3E}">
+        <p14:creationId xmlns:p14="http://schemas.microsoft.com/office/powerpoint/2010/main" val="1487011724"/>
+      </p:ext>
+    </p:extLst>
+  </p:cSld>
+  <p:clrMapOvr>
+    <a:masterClrMapping/>
+  </p:clrMapOvr>
+</p:sld>
+</file>
+
+<file path=ppt/slides/slide16.xml><?xml version="1.0" encoding="utf-8"?>
 <p:sld xmlns:a="http://schemas.openxmlformats.org/drawingml/2006/main" xmlns:r="http://schemas.openxmlformats.org/officeDocument/2006/relationships" xmlns:p="http://schemas.openxmlformats.org/presentationml/2006/main">
   <p:cSld>
     <p:spTree>
@@ -4894,7 +5622,7 @@
                 <a:latin typeface="Arial" panose="020B0604020202020204" pitchFamily="34" charset="0"/>
                 <a:cs typeface="Arial" panose="020B0604020202020204" pitchFamily="34" charset="0"/>
               </a:rPr>
-              <a:t>Prefer Iteration Over Direct Indexing</a:t>
+              <a:t>Prefer Iteration Over Direct Indexing (Lists)</a:t>
             </a:r>
           </a:p>
         </p:txBody>
@@ -4941,16 +5669,16 @@
                 <a:latin typeface="Arial" panose="020B0604020202020204" pitchFamily="34" charset="0"/>
                 <a:cs typeface="Arial" panose="020B0604020202020204" pitchFamily="34" charset="0"/>
               </a:rPr>
-              <a:t>Use for loops instead of manually tracking indices.</a:t>
-            </a:r>
-          </a:p>
-          <a:p>
-            <a:pPr marL="230188" lvl="1" indent="-230188">
+              <a:t>Use for loops instead of manually tracking indices</a:t>
+            </a:r>
+          </a:p>
+          <a:p>
+            <a:pPr marL="687388" lvl="2" indent="-230188">
               <a:buFont typeface="Arial" panose="020B0604020202020204" pitchFamily="34" charset="0"/>
               <a:buChar char="•"/>
             </a:pPr>
             <a:r>
-              <a:rPr lang="en-US" sz="2400">
+              <a:rPr lang="en-US" sz="2000">
                 <a:solidFill>
                   <a:schemeClr val="accent1">
                     <a:lumMod val="50000"/>
@@ -5014,7 +5742,7 @@
             </a:endParaRPr>
           </a:p>
           <a:p>
-            <a:pPr marL="914400" lvl="1"/>
+            <a:pPr marL="1371600" lvl="1"/>
             <a:r>
               <a:rPr lang="en-US" sz="2000" b="1">
                 <a:solidFill>
@@ -5029,7 +5757,7 @@
             </a:r>
           </a:p>
           <a:p>
-            <a:pPr marL="914400" lvl="1"/>
+            <a:pPr marL="1371600" lvl="1"/>
             <a:r>
               <a:rPr lang="en-US" sz="2000" b="1">
                 <a:solidFill>
@@ -5041,6 +5769,63 @@
                 <a:cs typeface="Arial" panose="020B0604020202020204" pitchFamily="34" charset="0"/>
               </a:rPr>
               <a:t>index = 0  # Manually tracking index</a:t>
+            </a:r>
+          </a:p>
+          <a:p>
+            <a:pPr marL="1371600" lvl="1"/>
+            <a:endParaRPr lang="en-US" sz="1000" b="1">
+              <a:solidFill>
+                <a:schemeClr val="accent1">
+                  <a:lumMod val="50000"/>
+                </a:schemeClr>
+              </a:solidFill>
+              <a:latin typeface="Consolas" panose="020B0609020204030204" pitchFamily="49" charset="0"/>
+              <a:cs typeface="Arial" panose="020B0604020202020204" pitchFamily="34" charset="0"/>
+            </a:endParaRPr>
+          </a:p>
+          <a:p>
+            <a:pPr marL="1371600" lvl="1"/>
+            <a:r>
+              <a:rPr lang="en-US" sz="2000" b="1">
+                <a:solidFill>
+                  <a:schemeClr val="accent1">
+                    <a:lumMod val="50000"/>
+                  </a:schemeClr>
+                </a:solidFill>
+                <a:latin typeface="Consolas" panose="020B0609020204030204" pitchFamily="49" charset="0"/>
+                <a:cs typeface="Arial" panose="020B0604020202020204" pitchFamily="34" charset="0"/>
+              </a:rPr>
+              <a:t>while index &lt; len(my_list):</a:t>
+            </a:r>
+          </a:p>
+          <a:p>
+            <a:pPr marL="1371600" lvl="1"/>
+            <a:r>
+              <a:rPr lang="en-US" sz="2000" b="1">
+                <a:solidFill>
+                  <a:schemeClr val="accent1">
+                    <a:lumMod val="50000"/>
+                  </a:schemeClr>
+                </a:solidFill>
+                <a:latin typeface="Consolas" panose="020B0609020204030204" pitchFamily="49" charset="0"/>
+                <a:cs typeface="Arial" panose="020B0604020202020204" pitchFamily="34" charset="0"/>
+              </a:rPr>
+              <a:t>    print(my_list[index])</a:t>
+            </a:r>
+          </a:p>
+          <a:p>
+            <a:pPr marL="1371600" lvl="1"/>
+            <a:r>
+              <a:rPr lang="en-US" sz="2000" b="1">
+                <a:solidFill>
+                  <a:schemeClr val="accent1">
+                    <a:lumMod val="50000"/>
+                  </a:schemeClr>
+                </a:solidFill>
+                <a:latin typeface="Consolas" panose="020B0609020204030204" pitchFamily="49" charset="0"/>
+                <a:cs typeface="Arial" panose="020B0604020202020204" pitchFamily="34" charset="0"/>
+              </a:rPr>
+              <a:t>    index += 1  # Manually updating index</a:t>
             </a:r>
           </a:p>
           <a:p>
@@ -5056,63 +5841,6 @@
             </a:endParaRPr>
           </a:p>
           <a:p>
-            <a:pPr marL="914400" lvl="1"/>
-            <a:r>
-              <a:rPr lang="en-US" sz="2000" b="1">
-                <a:solidFill>
-                  <a:schemeClr val="accent1">
-                    <a:lumMod val="50000"/>
-                  </a:schemeClr>
-                </a:solidFill>
-                <a:latin typeface="Consolas" panose="020B0609020204030204" pitchFamily="49" charset="0"/>
-                <a:cs typeface="Arial" panose="020B0604020202020204" pitchFamily="34" charset="0"/>
-              </a:rPr>
-              <a:t>while index &lt; len(my_list):</a:t>
-            </a:r>
-          </a:p>
-          <a:p>
-            <a:pPr marL="914400" lvl="1"/>
-            <a:r>
-              <a:rPr lang="en-US" sz="2000" b="1">
-                <a:solidFill>
-                  <a:schemeClr val="accent1">
-                    <a:lumMod val="50000"/>
-                  </a:schemeClr>
-                </a:solidFill>
-                <a:latin typeface="Consolas" panose="020B0609020204030204" pitchFamily="49" charset="0"/>
-                <a:cs typeface="Arial" panose="020B0604020202020204" pitchFamily="34" charset="0"/>
-              </a:rPr>
-              <a:t>    print(my_list[index])</a:t>
-            </a:r>
-          </a:p>
-          <a:p>
-            <a:pPr marL="914400" lvl="1"/>
-            <a:r>
-              <a:rPr lang="en-US" sz="2000" b="1">
-                <a:solidFill>
-                  <a:schemeClr val="accent1">
-                    <a:lumMod val="50000"/>
-                  </a:schemeClr>
-                </a:solidFill>
-                <a:latin typeface="Consolas" panose="020B0609020204030204" pitchFamily="49" charset="0"/>
-                <a:cs typeface="Arial" panose="020B0604020202020204" pitchFamily="34" charset="0"/>
-              </a:rPr>
-              <a:t>    index += 1  # Manually updating index</a:t>
-            </a:r>
-          </a:p>
-          <a:p>
-            <a:pPr marL="914400" lvl="1"/>
-            <a:endParaRPr lang="en-US" sz="1000" b="1">
-              <a:solidFill>
-                <a:schemeClr val="accent1">
-                  <a:lumMod val="50000"/>
-                </a:schemeClr>
-              </a:solidFill>
-              <a:latin typeface="Consolas" panose="020B0609020204030204" pitchFamily="49" charset="0"/>
-              <a:cs typeface="Arial" panose="020B0604020202020204" pitchFamily="34" charset="0"/>
-            </a:endParaRPr>
-          </a:p>
-          <a:p>
             <a:pPr marL="914400" lvl="1" indent="-231775">
               <a:buFont typeface="Arial" panose="020B0604020202020204" pitchFamily="34" charset="0"/>
               <a:buChar char="•"/>
@@ -5146,7 +5874,7 @@
             </a:endParaRPr>
           </a:p>
           <a:p>
-            <a:pPr marL="914400"/>
+            <a:pPr marL="1371600"/>
             <a:r>
               <a:rPr lang="en-US" sz="2000" b="1">
                 <a:solidFill>
@@ -5161,7 +5889,7 @@
             </a:r>
           </a:p>
           <a:p>
-            <a:pPr marL="914400"/>
+            <a:pPr marL="1371600"/>
             <a:r>
               <a:rPr lang="en-US" sz="2000" b="1">
                 <a:solidFill>
@@ -5176,7 +5904,7 @@
             </a:r>
           </a:p>
           <a:p>
-            <a:pPr marL="914400"/>
+            <a:pPr marL="1371600"/>
             <a:r>
               <a:rPr lang="en-US" sz="2000" b="1">
                 <a:solidFill>
@@ -5220,7 +5948,7 @@
 </p:sld>
 </file>
 
-<file path=ppt/slides/slide15.xml><?xml version="1.0" encoding="utf-8"?>
+<file path=ppt/slides/slide17.xml><?xml version="1.0" encoding="utf-8"?>
 <p:sld xmlns:a="http://schemas.openxmlformats.org/drawingml/2006/main" xmlns:r="http://schemas.openxmlformats.org/officeDocument/2006/relationships" xmlns:p="http://schemas.openxmlformats.org/presentationml/2006/main">
   <p:cSld>
     <p:spTree>
@@ -5311,7 +6039,7 @@
                 <a:latin typeface="Arial" panose="020B0604020202020204" pitchFamily="34" charset="0"/>
                 <a:cs typeface="Arial" panose="020B0604020202020204" pitchFamily="34" charset="0"/>
               </a:rPr>
-              <a:t>Prefer Iteration Over Direct Indexing</a:t>
+              <a:t>Use enumerate() For Index-Value Pairs</a:t>
             </a:r>
           </a:p>
         </p:txBody>
@@ -5330,8 +6058,8 @@
         </p:nvSpPr>
         <p:spPr>
           <a:xfrm>
-            <a:off x="836614" y="906971"/>
-            <a:ext cx="10323564" cy="2308324"/>
+            <a:off x="836613" y="906971"/>
+            <a:ext cx="11207983" cy="4216539"/>
           </a:xfrm>
           <a:prstGeom prst="rect">
             <a:avLst/>
@@ -5344,6 +6072,24 @@
           </a:bodyPr>
           <a:lstStyle/>
           <a:p>
+            <a:pPr marL="231775" indent="-230188">
+              <a:buFont typeface="Arial" panose="020B0604020202020204" pitchFamily="34" charset="0"/>
+              <a:buChar char="•"/>
+            </a:pPr>
+            <a:r>
+              <a:rPr lang="en-US" sz="2800">
+                <a:solidFill>
+                  <a:schemeClr val="accent1">
+                    <a:lumMod val="50000"/>
+                  </a:schemeClr>
+                </a:solidFill>
+                <a:latin typeface="Arial" panose="020B0604020202020204" pitchFamily="34" charset="0"/>
+                <a:cs typeface="Arial" panose="020B0604020202020204" pitchFamily="34" charset="0"/>
+              </a:rPr>
+              <a:t>Need to track an index? Use enumerate()</a:t>
+            </a:r>
+          </a:p>
+          <a:p>
             <a:pPr marL="688975" lvl="1" indent="-230188">
               <a:buFont typeface="Arial" panose="020B0604020202020204" pitchFamily="34" charset="0"/>
               <a:buChar char="•"/>
@@ -5358,61 +6104,7 @@
                 <a:latin typeface="Arial" panose="020B0604020202020204" pitchFamily="34" charset="0"/>
                 <a:cs typeface="Arial" panose="020B0604020202020204" pitchFamily="34" charset="0"/>
               </a:rPr>
-              <a:t>Utilize enumerate() for index-value pairs.</a:t>
-            </a:r>
-          </a:p>
-          <a:p>
-            <a:pPr marL="688975" lvl="1" indent="-230188">
-              <a:buFont typeface="Arial" panose="020B0604020202020204" pitchFamily="34" charset="0"/>
-              <a:buChar char="•"/>
-            </a:pPr>
-            <a:r>
-              <a:rPr lang="en-US" sz="2400">
-                <a:solidFill>
-                  <a:schemeClr val="accent1">
-                    <a:lumMod val="50000"/>
-                  </a:schemeClr>
-                </a:solidFill>
-                <a:latin typeface="Arial" panose="020B0604020202020204" pitchFamily="34" charset="0"/>
-                <a:cs typeface="Arial" panose="020B0604020202020204" pitchFamily="34" charset="0"/>
-              </a:rPr>
-              <a:t>Use list comprehensions to avoid direct indexing.</a:t>
-            </a:r>
-          </a:p>
-          <a:p>
-            <a:pPr marL="688975" lvl="1" indent="-230188">
-              <a:buFont typeface="Arial" panose="020B0604020202020204" pitchFamily="34" charset="0"/>
-              <a:buChar char="•"/>
-            </a:pPr>
-            <a:r>
-              <a:rPr lang="en-US" sz="2400">
-                <a:solidFill>
-                  <a:schemeClr val="accent1">
-                    <a:lumMod val="50000"/>
-                  </a:schemeClr>
-                </a:solidFill>
-                <a:latin typeface="Arial" panose="020B0604020202020204" pitchFamily="34" charset="0"/>
-                <a:cs typeface="Arial" panose="020B0604020202020204" pitchFamily="34" charset="0"/>
-              </a:rPr>
-              <a:t>Consider zip() for iterating over multiple lists safely.</a:t>
-            </a:r>
-          </a:p>
-          <a:p>
-            <a:pPr marL="688975" lvl="1" indent="-230188">
-              <a:buFont typeface="Arial" panose="020B0604020202020204" pitchFamily="34" charset="0"/>
-              <a:buChar char="•"/>
-            </a:pPr>
-            <a:r>
-              <a:rPr lang="en-US" sz="2400">
-                <a:solidFill>
-                  <a:schemeClr val="accent1">
-                    <a:lumMod val="50000"/>
-                  </a:schemeClr>
-                </a:solidFill>
-                <a:latin typeface="Arial" panose="020B0604020202020204" pitchFamily="34" charset="0"/>
-                <a:cs typeface="Arial" panose="020B0604020202020204" pitchFamily="34" charset="0"/>
-              </a:rPr>
-              <a:t>Avoid modifying a list while iterating over it.</a:t>
+              <a:t>e.g., when reading a file line by line, to keep track of the line numbers for logging, debugging, or reporting errors. </a:t>
             </a:r>
           </a:p>
           <a:p>
@@ -5431,6 +6123,78 @@
             </a:endParaRPr>
           </a:p>
           <a:p>
+            <a:pPr marL="914400"/>
+            <a:r>
+              <a:rPr lang="en-US" sz="2400" b="1">
+                <a:solidFill>
+                  <a:schemeClr val="accent1">
+                    <a:lumMod val="50000"/>
+                  </a:schemeClr>
+                </a:solidFill>
+                <a:latin typeface="Consolas" panose="020B0609020204030204" pitchFamily="49" charset="0"/>
+                <a:cs typeface="Arial" panose="020B0604020202020204" pitchFamily="34" charset="0"/>
+              </a:rPr>
+              <a:t>fruits = ["apple", "banana", "cherry"]</a:t>
+            </a:r>
+          </a:p>
+          <a:p>
+            <a:pPr marL="914400"/>
+            <a:endParaRPr lang="en-US" sz="2400" b="1">
+              <a:solidFill>
+                <a:schemeClr val="accent1">
+                  <a:lumMod val="50000"/>
+                </a:schemeClr>
+              </a:solidFill>
+              <a:latin typeface="Consolas" panose="020B0609020204030204" pitchFamily="49" charset="0"/>
+              <a:cs typeface="Arial" panose="020B0604020202020204" pitchFamily="34" charset="0"/>
+            </a:endParaRPr>
+          </a:p>
+          <a:p>
+            <a:pPr marL="914400"/>
+            <a:r>
+              <a:rPr lang="en-US" sz="2400" b="1">
+                <a:solidFill>
+                  <a:schemeClr val="accent1">
+                    <a:lumMod val="50000"/>
+                  </a:schemeClr>
+                </a:solidFill>
+                <a:latin typeface="Consolas" panose="020B0609020204030204" pitchFamily="49" charset="0"/>
+                <a:cs typeface="Arial" panose="020B0604020202020204" pitchFamily="34" charset="0"/>
+              </a:rPr>
+              <a:t># Using enumerate to iterate with index-value pairs</a:t>
+            </a:r>
+          </a:p>
+          <a:p>
+            <a:pPr marL="914400"/>
+            <a:r>
+              <a:rPr lang="en-US" sz="2400" b="1">
+                <a:solidFill>
+                  <a:schemeClr val="accent1">
+                    <a:lumMod val="50000"/>
+                  </a:schemeClr>
+                </a:solidFill>
+                <a:latin typeface="Consolas" panose="020B0609020204030204" pitchFamily="49" charset="0"/>
+                <a:cs typeface="Arial" panose="020B0604020202020204" pitchFamily="34" charset="0"/>
+              </a:rPr>
+              <a:t>for index, fruit in enumerate(fruits):</a:t>
+            </a:r>
+          </a:p>
+          <a:p>
+            <a:pPr marL="914400"/>
+            <a:r>
+              <a:rPr lang="en-US" sz="2400" b="1">
+                <a:solidFill>
+                  <a:schemeClr val="accent1">
+                    <a:lumMod val="50000"/>
+                  </a:schemeClr>
+                </a:solidFill>
+                <a:latin typeface="Consolas" panose="020B0609020204030204" pitchFamily="49" charset="0"/>
+                <a:cs typeface="Arial" panose="020B0604020202020204" pitchFamily="34" charset="0"/>
+              </a:rPr>
+              <a:t>    print(f"Index {index}: {fruit}")</a:t>
+            </a:r>
+          </a:p>
+          <a:p>
             <a:pPr marL="231775" indent="-230188">
               <a:buFont typeface="Arial" panose="020B0604020202020204" pitchFamily="34" charset="0"/>
               <a:buChar char="•"/>
@@ -5444,6 +6208,70 @@
               <a:latin typeface="Arial" panose="020B0604020202020204" pitchFamily="34" charset="0"/>
               <a:cs typeface="Arial" panose="020B0604020202020204" pitchFamily="34" charset="0"/>
             </a:endParaRPr>
+          </a:p>
+          <a:p>
+            <a:pPr marL="231775" indent="-230188">
+              <a:buFont typeface="Arial" panose="020B0604020202020204" pitchFamily="34" charset="0"/>
+              <a:buChar char="•"/>
+            </a:pPr>
+            <a:endParaRPr lang="en-US" sz="2400">
+              <a:solidFill>
+                <a:schemeClr val="accent1">
+                  <a:lumMod val="50000"/>
+                </a:schemeClr>
+              </a:solidFill>
+              <a:latin typeface="Arial" panose="020B0604020202020204" pitchFamily="34" charset="0"/>
+              <a:cs typeface="Arial" panose="020B0604020202020204" pitchFamily="34" charset="0"/>
+            </a:endParaRPr>
+          </a:p>
+        </p:txBody>
+      </p:sp>
+      <p:sp>
+        <p:nvSpPr>
+          <p:cNvPr id="6" name="TextBox 5">
+            <a:extLst>
+              <a:ext uri="{FF2B5EF4-FFF2-40B4-BE49-F238E27FC236}">
+                <a16:creationId xmlns:a16="http://schemas.microsoft.com/office/drawing/2014/main" id="{6AF25C39-F4CE-6283-A7E9-B520E4E20F6D}"/>
+              </a:ext>
+            </a:extLst>
+          </p:cNvPr>
+          <p:cNvSpPr txBox="1"/>
+          <p:nvPr/>
+        </p:nvSpPr>
+        <p:spPr>
+          <a:xfrm>
+            <a:off x="8968803" y="4107847"/>
+            <a:ext cx="2197933" cy="1015663"/>
+          </a:xfrm>
+          <a:prstGeom prst="rect">
+            <a:avLst/>
+          </a:prstGeom>
+          <a:solidFill>
+            <a:srgbClr val="FFFF00"/>
+          </a:solidFill>
+        </p:spPr>
+        <p:txBody>
+          <a:bodyPr wrap="square">
+            <a:spAutoFit/>
+          </a:bodyPr>
+          <a:lstStyle/>
+          <a:p>
+            <a:r>
+              <a:rPr lang="en-US" sz="2000" b="1"/>
+              <a:t>Index 0: apple</a:t>
+            </a:r>
+          </a:p>
+          <a:p>
+            <a:r>
+              <a:rPr lang="en-US" sz="2000" b="1"/>
+              <a:t>Index 1: banana</a:t>
+            </a:r>
+          </a:p>
+          <a:p>
+            <a:r>
+              <a:rPr lang="en-US" sz="2000" b="1"/>
+              <a:t>Index 2: cherry</a:t>
+            </a:r>
           </a:p>
         </p:txBody>
       </p:sp>
@@ -5460,7 +6288,7 @@
 </p:sld>
 </file>
 
-<file path=ppt/slides/slide16.xml><?xml version="1.0" encoding="utf-8"?>
+<file path=ppt/slides/slide18.xml><?xml version="1.0" encoding="utf-8"?>
 <p:sld xmlns:a="http://schemas.openxmlformats.org/drawingml/2006/main" xmlns:r="http://schemas.openxmlformats.org/officeDocument/2006/relationships" xmlns:p="http://schemas.openxmlformats.org/presentationml/2006/main">
   <p:cSld>
     <p:spTree>
@@ -5468,7 +6296,7 @@
         <p:cNvPr id="1" name="">
           <a:extLst>
             <a:ext uri="{FF2B5EF4-FFF2-40B4-BE49-F238E27FC236}">
-              <a16:creationId xmlns:a16="http://schemas.microsoft.com/office/drawing/2014/main" id="{BC99DE24-11E3-B58C-325C-03784DC0AB42}"/>
+              <a16:creationId xmlns:a16="http://schemas.microsoft.com/office/drawing/2014/main" id="{8CCF333D-EF11-C6D2-9B95-4827CC3F87FB}"/>
             </a:ext>
           </a:extLst>
         </p:cNvPr>
@@ -5488,7 +6316,7 @@
           <p:cNvPr id="3" name="Picture 2" descr="A white and blue background&#10;&#10;Description automatically generated">
             <a:extLst>
               <a:ext uri="{FF2B5EF4-FFF2-40B4-BE49-F238E27FC236}">
-                <a16:creationId xmlns:a16="http://schemas.microsoft.com/office/drawing/2014/main" id="{B7948E7C-D1F5-8DD4-3848-32B003C5F3D4}"/>
+                <a16:creationId xmlns:a16="http://schemas.microsoft.com/office/drawing/2014/main" id="{7A2191C4-8420-26FA-96CF-78F530A37EBD}"/>
               </a:ext>
             </a:extLst>
           </p:cNvPr>
@@ -5518,7 +6346,7 @@
           <p:cNvPr id="4" name="TextBox 3">
             <a:extLst>
               <a:ext uri="{FF2B5EF4-FFF2-40B4-BE49-F238E27FC236}">
-                <a16:creationId xmlns:a16="http://schemas.microsoft.com/office/drawing/2014/main" id="{9947D70E-4EC6-9F57-4994-E8D33286F171}"/>
+                <a16:creationId xmlns:a16="http://schemas.microsoft.com/office/drawing/2014/main" id="{CE33DA99-B37E-AC95-445E-24F61CAB2293}"/>
               </a:ext>
             </a:extLst>
           </p:cNvPr>
@@ -5551,7 +6379,7 @@
                 <a:latin typeface="Arial" panose="020B0604020202020204" pitchFamily="34" charset="0"/>
                 <a:cs typeface="Arial" panose="020B0604020202020204" pitchFamily="34" charset="0"/>
               </a:rPr>
-              <a:t>Handling Index Errors Gracefully (Lists)</a:t>
+              <a:t>Prefer Iteration Over Direct Indexing</a:t>
             </a:r>
           </a:p>
         </p:txBody>
@@ -5561,7 +6389,7 @@
           <p:cNvPr id="5" name="TextBox 4">
             <a:extLst>
               <a:ext uri="{FF2B5EF4-FFF2-40B4-BE49-F238E27FC236}">
-                <a16:creationId xmlns:a16="http://schemas.microsoft.com/office/drawing/2014/main" id="{E5C77192-6489-D6CE-E4A5-B7C7069ED03D}"/>
+                <a16:creationId xmlns:a16="http://schemas.microsoft.com/office/drawing/2014/main" id="{D05A6D99-F3B2-09F3-45AA-0E6D40E01320}"/>
               </a:ext>
             </a:extLst>
           </p:cNvPr>
@@ -5571,7 +6399,7 @@
         <p:spPr>
           <a:xfrm>
             <a:off x="836614" y="906971"/>
-            <a:ext cx="10323564" cy="3785652"/>
+            <a:ext cx="10323564" cy="1938992"/>
           </a:xfrm>
           <a:prstGeom prst="rect">
             <a:avLst/>
@@ -5584,7 +6412,7 @@
           </a:bodyPr>
           <a:lstStyle/>
           <a:p>
-            <a:pPr marL="231775" indent="-230188">
+            <a:pPr marL="688975" lvl="1" indent="-230188">
               <a:buFont typeface="Arial" panose="020B0604020202020204" pitchFamily="34" charset="0"/>
               <a:buChar char="•"/>
             </a:pPr>
@@ -5598,11 +6426,11 @@
                 <a:latin typeface="Arial" panose="020B0604020202020204" pitchFamily="34" charset="0"/>
                 <a:cs typeface="Arial" panose="020B0604020202020204" pitchFamily="34" charset="0"/>
               </a:rPr>
-              <a:t>Use try-except to catch IndexError without crashing.</a:t>
-            </a:r>
-          </a:p>
-          <a:p>
-            <a:pPr marL="231775" indent="-230188">
+              <a:t>Use list comprehensions to avoid direct indexing.</a:t>
+            </a:r>
+          </a:p>
+          <a:p>
+            <a:pPr marL="688975" lvl="1" indent="-230188">
               <a:buFont typeface="Arial" panose="020B0604020202020204" pitchFamily="34" charset="0"/>
               <a:buChar char="•"/>
             </a:pPr>
@@ -5616,11 +6444,29 @@
                 <a:latin typeface="Arial" panose="020B0604020202020204" pitchFamily="34" charset="0"/>
                 <a:cs typeface="Arial" panose="020B0604020202020204" pitchFamily="34" charset="0"/>
               </a:rPr>
-              <a:t>Return a default value or a meaningful message on failure.</a:t>
-            </a:r>
-          </a:p>
-          <a:p>
-            <a:pPr marL="231775" indent="-230188">
+              <a:t>Consider zip() for iterating over multiple lists safely.</a:t>
+            </a:r>
+          </a:p>
+          <a:p>
+            <a:pPr marL="688975" lvl="1" indent="-230188">
+              <a:buFont typeface="Arial" panose="020B0604020202020204" pitchFamily="34" charset="0"/>
+              <a:buChar char="•"/>
+            </a:pPr>
+            <a:r>
+              <a:rPr lang="en-US" sz="2400">
+                <a:solidFill>
+                  <a:schemeClr val="accent1">
+                    <a:lumMod val="50000"/>
+                  </a:schemeClr>
+                </a:solidFill>
+                <a:latin typeface="Arial" panose="020B0604020202020204" pitchFamily="34" charset="0"/>
+                <a:cs typeface="Arial" panose="020B0604020202020204" pitchFamily="34" charset="0"/>
+              </a:rPr>
+              <a:t>Avoid modifying a list while iterating over it.</a:t>
+            </a:r>
+          </a:p>
+          <a:p>
+            <a:pPr marL="688975" lvl="1" indent="-230188">
               <a:buFont typeface="Arial" panose="020B0604020202020204" pitchFamily="34" charset="0"/>
               <a:buChar char="•"/>
             </a:pPr>
@@ -5635,81 +6481,6 @@
             </a:endParaRPr>
           </a:p>
           <a:p>
-            <a:pPr marL="914400"/>
-            <a:r>
-              <a:rPr lang="en-US" sz="2400" b="1">
-                <a:solidFill>
-                  <a:schemeClr val="accent1">
-                    <a:lumMod val="50000"/>
-                  </a:schemeClr>
-                </a:solidFill>
-                <a:latin typeface="Consolas" panose="020B0609020204030204" pitchFamily="49" charset="0"/>
-                <a:cs typeface="Arial" panose="020B0604020202020204" pitchFamily="34" charset="0"/>
-              </a:rPr>
-              <a:t>my_list = [10, 20, 30]</a:t>
-            </a:r>
-          </a:p>
-          <a:p>
-            <a:pPr marL="914400"/>
-            <a:r>
-              <a:rPr lang="en-US" sz="2400" b="1">
-                <a:solidFill>
-                  <a:schemeClr val="accent1">
-                    <a:lumMod val="50000"/>
-                  </a:schemeClr>
-                </a:solidFill>
-                <a:latin typeface="Consolas" panose="020B0609020204030204" pitchFamily="49" charset="0"/>
-                <a:cs typeface="Arial" panose="020B0604020202020204" pitchFamily="34" charset="0"/>
-              </a:rPr>
-              <a:t>try:    </a:t>
-            </a:r>
-          </a:p>
-          <a:p>
-            <a:pPr marL="914400"/>
-            <a:r>
-              <a:rPr lang="en-US" sz="2400" b="1">
-                <a:solidFill>
-                  <a:schemeClr val="accent1">
-                    <a:lumMod val="50000"/>
-                  </a:schemeClr>
-                </a:solidFill>
-                <a:latin typeface="Consolas" panose="020B0609020204030204" pitchFamily="49" charset="0"/>
-                <a:cs typeface="Arial" panose="020B0604020202020204" pitchFamily="34" charset="0"/>
-              </a:rPr>
-              <a:t>    print(my_list[3])  </a:t>
-            </a:r>
-          </a:p>
-          <a:p>
-            <a:pPr marL="914400"/>
-            <a:r>
-              <a:rPr lang="en-US" sz="2400" b="1">
-                <a:solidFill>
-                  <a:schemeClr val="accent1">
-                    <a:lumMod val="50000"/>
-                  </a:schemeClr>
-                </a:solidFill>
-                <a:latin typeface="Consolas" panose="020B0609020204030204" pitchFamily="49" charset="0"/>
-                <a:cs typeface="Arial" panose="020B0604020202020204" pitchFamily="34" charset="0"/>
-              </a:rPr>
-              <a:t>except IndexError:    </a:t>
-            </a:r>
-          </a:p>
-          <a:p>
-            <a:pPr marL="914400"/>
-            <a:r>
-              <a:rPr lang="en-US" sz="2400" b="1">
-                <a:solidFill>
-                  <a:schemeClr val="accent1">
-                    <a:lumMod val="50000"/>
-                  </a:schemeClr>
-                </a:solidFill>
-                <a:latin typeface="Consolas" panose="020B0609020204030204" pitchFamily="49" charset="0"/>
-                <a:cs typeface="Arial" panose="020B0604020202020204" pitchFamily="34" charset="0"/>
-              </a:rPr>
-              <a:t>    print("Index out of range!")</a:t>
-            </a:r>
-          </a:p>
-          <a:p>
             <a:pPr marL="231775" indent="-230188">
               <a:buFont typeface="Arial" panose="020B0604020202020204" pitchFamily="34" charset="0"/>
               <a:buChar char="•"/>
@@ -5724,30 +6495,12 @@
               <a:cs typeface="Arial" panose="020B0604020202020204" pitchFamily="34" charset="0"/>
             </a:endParaRPr>
           </a:p>
-          <a:p>
-            <a:pPr marL="231775" indent="-230188">
-              <a:buFont typeface="Arial" panose="020B0604020202020204" pitchFamily="34" charset="0"/>
-              <a:buChar char="•"/>
-            </a:pPr>
-            <a:r>
-              <a:rPr lang="en-US" sz="2400">
-                <a:solidFill>
-                  <a:schemeClr val="accent1">
-                    <a:lumMod val="50000"/>
-                  </a:schemeClr>
-                </a:solidFill>
-                <a:latin typeface="Arial" panose="020B0604020202020204" pitchFamily="34" charset="0"/>
-                <a:cs typeface="Arial" panose="020B0604020202020204" pitchFamily="34" charset="0"/>
-              </a:rPr>
-              <a:t>Log errors for debugging instead of silently failing.</a:t>
-            </a:r>
-          </a:p>
         </p:txBody>
       </p:sp>
     </p:spTree>
     <p:extLst>
       <p:ext uri="{BB962C8B-B14F-4D97-AF65-F5344CB8AC3E}">
-        <p14:creationId xmlns:p14="http://schemas.microsoft.com/office/powerpoint/2010/main" val="1487011724"/>
+        <p14:creationId xmlns:p14="http://schemas.microsoft.com/office/powerpoint/2010/main" val="883172861"/>
       </p:ext>
     </p:extLst>
   </p:cSld>
@@ -5757,7 +6510,7 @@
 </p:sld>
 </file>
 
-<file path=ppt/slides/slide17.xml><?xml version="1.0" encoding="utf-8"?>
+<file path=ppt/slides/slide19.xml><?xml version="1.0" encoding="utf-8"?>
 <p:sld xmlns:a="http://schemas.openxmlformats.org/drawingml/2006/main" xmlns:r="http://schemas.openxmlformats.org/officeDocument/2006/relationships" xmlns:p="http://schemas.openxmlformats.org/presentationml/2006/main">
   <p:cSld>
     <p:spTree>
@@ -5955,745 +6708,6 @@
     <p:extLst>
       <p:ext uri="{BB962C8B-B14F-4D97-AF65-F5344CB8AC3E}">
         <p14:creationId xmlns:p14="http://schemas.microsoft.com/office/powerpoint/2010/main" val="3885808635"/>
-      </p:ext>
-    </p:extLst>
-  </p:cSld>
-  <p:clrMapOvr>
-    <a:masterClrMapping/>
-  </p:clrMapOvr>
-</p:sld>
-</file>
-
-<file path=ppt/slides/slide18.xml><?xml version="1.0" encoding="utf-8"?>
-<p:sld xmlns:a="http://schemas.openxmlformats.org/drawingml/2006/main" xmlns:r="http://schemas.openxmlformats.org/officeDocument/2006/relationships" xmlns:p="http://schemas.openxmlformats.org/presentationml/2006/main">
-  <p:cSld>
-    <p:spTree>
-      <p:nvGrpSpPr>
-        <p:cNvPr id="1" name="">
-          <a:extLst>
-            <a:ext uri="{FF2B5EF4-FFF2-40B4-BE49-F238E27FC236}">
-              <a16:creationId xmlns:a16="http://schemas.microsoft.com/office/drawing/2014/main" id="{986D872C-E703-1333-8961-D37AB2337B58}"/>
-            </a:ext>
-          </a:extLst>
-        </p:cNvPr>
-        <p:cNvGrpSpPr/>
-        <p:nvPr/>
-      </p:nvGrpSpPr>
-      <p:grpSpPr>
-        <a:xfrm>
-          <a:off x="0" y="0"/>
-          <a:ext cx="0" cy="0"/>
-          <a:chOff x="0" y="0"/>
-          <a:chExt cx="0" cy="0"/>
-        </a:xfrm>
-      </p:grpSpPr>
-      <p:pic>
-        <p:nvPicPr>
-          <p:cNvPr id="3" name="Picture 2" descr="A white and blue background&#10;&#10;Description automatically generated">
-            <a:extLst>
-              <a:ext uri="{FF2B5EF4-FFF2-40B4-BE49-F238E27FC236}">
-                <a16:creationId xmlns:a16="http://schemas.microsoft.com/office/drawing/2014/main" id="{64AD6237-F4AC-A21A-D86F-42B6B102BD47}"/>
-              </a:ext>
-            </a:extLst>
-          </p:cNvPr>
-          <p:cNvPicPr>
-            <a:picLocks noChangeAspect="1"/>
-          </p:cNvPicPr>
-          <p:nvPr/>
-        </p:nvPicPr>
-        <p:blipFill>
-          <a:blip r:embed="rId2"/>
-          <a:stretch>
-            <a:fillRect/>
-          </a:stretch>
-        </p:blipFill>
-        <p:spPr>
-          <a:xfrm>
-            <a:off x="0" y="-33129"/>
-            <a:ext cx="12192000" cy="6891129"/>
-          </a:xfrm>
-          <a:prstGeom prst="rect">
-            <a:avLst/>
-          </a:prstGeom>
-        </p:spPr>
-      </p:pic>
-      <p:sp>
-        <p:nvSpPr>
-          <p:cNvPr id="4" name="TextBox 3">
-            <a:extLst>
-              <a:ext uri="{FF2B5EF4-FFF2-40B4-BE49-F238E27FC236}">
-                <a16:creationId xmlns:a16="http://schemas.microsoft.com/office/drawing/2014/main" id="{1A4B7406-491F-B083-FC26-26BD7458B9A8}"/>
-              </a:ext>
-            </a:extLst>
-          </p:cNvPr>
-          <p:cNvSpPr txBox="1"/>
-          <p:nvPr/>
-        </p:nvSpPr>
-        <p:spPr>
-          <a:xfrm>
-            <a:off x="604266" y="136955"/>
-            <a:ext cx="10391019" cy="646331"/>
-          </a:xfrm>
-          <a:prstGeom prst="rect">
-            <a:avLst/>
-          </a:prstGeom>
-          <a:noFill/>
-        </p:spPr>
-        <p:txBody>
-          <a:bodyPr wrap="square" rtlCol="0">
-            <a:spAutoFit/>
-          </a:bodyPr>
-          <a:lstStyle/>
-          <a:p>
-            <a:r>
-              <a:rPr lang="en-US" sz="3600">
-                <a:solidFill>
-                  <a:schemeClr val="accent1">
-                    <a:lumMod val="50000"/>
-                  </a:schemeClr>
-                </a:solidFill>
-                <a:latin typeface="Arial" panose="020B0604020202020204" pitchFamily="34" charset="0"/>
-                <a:cs typeface="Arial" panose="020B0604020202020204" pitchFamily="34" charset="0"/>
-              </a:rPr>
-              <a:t>Using Safer Data Structures</a:t>
-            </a:r>
-          </a:p>
-        </p:txBody>
-      </p:sp>
-      <p:sp>
-        <p:nvSpPr>
-          <p:cNvPr id="5" name="TextBox 4">
-            <a:extLst>
-              <a:ext uri="{FF2B5EF4-FFF2-40B4-BE49-F238E27FC236}">
-                <a16:creationId xmlns:a16="http://schemas.microsoft.com/office/drawing/2014/main" id="{B81C8176-5C01-4C22-D6C4-0DFE4E41F9F8}"/>
-              </a:ext>
-            </a:extLst>
-          </p:cNvPr>
-          <p:cNvSpPr txBox="1"/>
-          <p:nvPr/>
-        </p:nvSpPr>
-        <p:spPr>
-          <a:xfrm>
-            <a:off x="836614" y="906971"/>
-            <a:ext cx="10323564" cy="4770537"/>
-          </a:xfrm>
-          <a:prstGeom prst="rect">
-            <a:avLst/>
-          </a:prstGeom>
-          <a:noFill/>
-        </p:spPr>
-        <p:txBody>
-          <a:bodyPr wrap="square" rtlCol="0">
-            <a:spAutoFit/>
-          </a:bodyPr>
-          <a:lstStyle/>
-          <a:p>
-            <a:pPr marL="231775" indent="-230188">
-              <a:buFont typeface="Arial" panose="020B0604020202020204" pitchFamily="34" charset="0"/>
-              <a:buChar char="•"/>
-            </a:pPr>
-            <a:r>
-              <a:rPr lang="en-US" sz="2400">
-                <a:solidFill>
-                  <a:schemeClr val="accent1">
-                    <a:lumMod val="50000"/>
-                  </a:schemeClr>
-                </a:solidFill>
-                <a:latin typeface="Arial" panose="020B0604020202020204" pitchFamily="34" charset="0"/>
-                <a:cs typeface="Arial" panose="020B0604020202020204" pitchFamily="34" charset="0"/>
-              </a:rPr>
-              <a:t>Use collections.deque for fixed-size buffers.</a:t>
-            </a:r>
-          </a:p>
-          <a:p>
-            <a:pPr marL="231775" indent="-230188">
-              <a:buFont typeface="Arial" panose="020B0604020202020204" pitchFamily="34" charset="0"/>
-              <a:buChar char="•"/>
-            </a:pPr>
-            <a:endParaRPr lang="en-US" sz="2400">
-              <a:solidFill>
-                <a:schemeClr val="accent1">
-                  <a:lumMod val="50000"/>
-                </a:schemeClr>
-              </a:solidFill>
-              <a:latin typeface="Arial" panose="020B0604020202020204" pitchFamily="34" charset="0"/>
-              <a:cs typeface="Arial" panose="020B0604020202020204" pitchFamily="34" charset="0"/>
-            </a:endParaRPr>
-          </a:p>
-          <a:p>
-            <a:pPr marL="231775" indent="-230188">
-              <a:buFont typeface="Arial" panose="020B0604020202020204" pitchFamily="34" charset="0"/>
-              <a:buChar char="•"/>
-            </a:pPr>
-            <a:r>
-              <a:rPr lang="en-US" sz="2400">
-                <a:solidFill>
-                  <a:schemeClr val="accent1">
-                    <a:lumMod val="50000"/>
-                  </a:schemeClr>
-                </a:solidFill>
-                <a:latin typeface="Arial" panose="020B0604020202020204" pitchFamily="34" charset="0"/>
-                <a:cs typeface="Arial" panose="020B0604020202020204" pitchFamily="34" charset="0"/>
-              </a:rPr>
-              <a:t>Consider slicing to limit index access.</a:t>
-            </a:r>
-          </a:p>
-          <a:p>
-            <a:pPr marL="688975" lvl="1" indent="-230188">
-              <a:buFont typeface="Arial" panose="020B0604020202020204" pitchFamily="34" charset="0"/>
-              <a:buChar char="•"/>
-            </a:pPr>
-            <a:r>
-              <a:rPr lang="en-US" sz="2000">
-                <a:solidFill>
-                  <a:schemeClr val="accent1">
-                    <a:lumMod val="50000"/>
-                  </a:schemeClr>
-                </a:solidFill>
-                <a:latin typeface="Arial" panose="020B0604020202020204" pitchFamily="34" charset="0"/>
-                <a:cs typeface="Arial" panose="020B0604020202020204" pitchFamily="34" charset="0"/>
-              </a:rPr>
-              <a:t>Unlike direct indexing (my_list[3]), which would raise an IndexError if the index is out of bounds, slicing gracefully handles it.</a:t>
-            </a:r>
-          </a:p>
-          <a:p>
-            <a:pPr marL="231775" indent="-230188">
-              <a:buFont typeface="Arial" panose="020B0604020202020204" pitchFamily="34" charset="0"/>
-              <a:buChar char="•"/>
-            </a:pPr>
-            <a:endParaRPr lang="en-US" sz="2400">
-              <a:solidFill>
-                <a:schemeClr val="accent1">
-                  <a:lumMod val="50000"/>
-                </a:schemeClr>
-              </a:solidFill>
-              <a:latin typeface="Arial" panose="020B0604020202020204" pitchFamily="34" charset="0"/>
-              <a:cs typeface="Arial" panose="020B0604020202020204" pitchFamily="34" charset="0"/>
-            </a:endParaRPr>
-          </a:p>
-          <a:p>
-            <a:pPr marL="914400"/>
-            <a:r>
-              <a:rPr lang="en-US" sz="2400" b="1">
-                <a:solidFill>
-                  <a:schemeClr val="accent1">
-                    <a:lumMod val="50000"/>
-                  </a:schemeClr>
-                </a:solidFill>
-                <a:latin typeface="Consolas" panose="020B0609020204030204" pitchFamily="49" charset="0"/>
-                <a:cs typeface="Arial" panose="020B0604020202020204" pitchFamily="34" charset="0"/>
-              </a:rPr>
-              <a:t>my_list = [10, 20, 30]</a:t>
-            </a:r>
-          </a:p>
-          <a:p>
-            <a:pPr marL="914400"/>
-            <a:r>
-              <a:rPr lang="en-US" sz="2400" b="1">
-                <a:solidFill>
-                  <a:schemeClr val="accent1">
-                    <a:lumMod val="50000"/>
-                  </a:schemeClr>
-                </a:solidFill>
-                <a:latin typeface="Consolas" panose="020B0609020204030204" pitchFamily="49" charset="0"/>
-                <a:cs typeface="Arial" panose="020B0604020202020204" pitchFamily="34" charset="0"/>
-              </a:rPr>
-              <a:t>print(my_list[5])  # IndexError: index out of range</a:t>
-            </a:r>
-          </a:p>
-          <a:p>
-            <a:pPr marL="914400"/>
-            <a:endParaRPr lang="en-US" sz="2400" b="1">
-              <a:solidFill>
-                <a:schemeClr val="accent1">
-                  <a:lumMod val="50000"/>
-                </a:schemeClr>
-              </a:solidFill>
-              <a:latin typeface="Consolas" panose="020B0609020204030204" pitchFamily="49" charset="0"/>
-              <a:cs typeface="Arial" panose="020B0604020202020204" pitchFamily="34" charset="0"/>
-            </a:endParaRPr>
-          </a:p>
-          <a:p>
-            <a:pPr marL="914400"/>
-            <a:r>
-              <a:rPr lang="en-US" sz="2400" b="1">
-                <a:solidFill>
-                  <a:schemeClr val="accent1">
-                    <a:lumMod val="50000"/>
-                  </a:schemeClr>
-                </a:solidFill>
-                <a:latin typeface="Consolas" panose="020B0609020204030204" pitchFamily="49" charset="0"/>
-                <a:cs typeface="Arial" panose="020B0604020202020204" pitchFamily="34" charset="0"/>
-              </a:rPr>
-              <a:t>my_list = [10, 20, 30]</a:t>
-            </a:r>
-          </a:p>
-          <a:p>
-            <a:pPr marL="914400"/>
-            <a:r>
-              <a:rPr lang="en-US" sz="2400" b="1">
-                <a:solidFill>
-                  <a:schemeClr val="accent1">
-                    <a:lumMod val="50000"/>
-                  </a:schemeClr>
-                </a:solidFill>
-                <a:latin typeface="Consolas" panose="020B0609020204030204" pitchFamily="49" charset="0"/>
-                <a:cs typeface="Arial" panose="020B0604020202020204" pitchFamily="34" charset="0"/>
-              </a:rPr>
-              <a:t>print(my_list[:5])  # Prevents out-of-range errors</a:t>
-            </a:r>
-          </a:p>
-          <a:p>
-            <a:pPr marL="231775" indent="-230188">
-              <a:buFont typeface="Arial" panose="020B0604020202020204" pitchFamily="34" charset="0"/>
-              <a:buChar char="•"/>
-            </a:pPr>
-            <a:endParaRPr lang="en-US" sz="2400">
-              <a:solidFill>
-                <a:schemeClr val="accent1">
-                  <a:lumMod val="50000"/>
-                </a:schemeClr>
-              </a:solidFill>
-              <a:latin typeface="Arial" panose="020B0604020202020204" pitchFamily="34" charset="0"/>
-              <a:cs typeface="Arial" panose="020B0604020202020204" pitchFamily="34" charset="0"/>
-            </a:endParaRPr>
-          </a:p>
-          <a:p>
-            <a:pPr marL="231775" indent="-230188">
-              <a:buFont typeface="Arial" panose="020B0604020202020204" pitchFamily="34" charset="0"/>
-              <a:buChar char="•"/>
-            </a:pPr>
-            <a:r>
-              <a:rPr lang="en-US" sz="2400">
-                <a:solidFill>
-                  <a:schemeClr val="accent1">
-                    <a:lumMod val="50000"/>
-                  </a:schemeClr>
-                </a:solidFill>
-                <a:latin typeface="Arial" panose="020B0604020202020204" pitchFamily="34" charset="0"/>
-                <a:cs typeface="Arial" panose="020B0604020202020204" pitchFamily="34" charset="0"/>
-              </a:rPr>
-              <a:t>Avoid unnecessary manual index tracking when using loops.</a:t>
-            </a:r>
-          </a:p>
-        </p:txBody>
-      </p:sp>
-    </p:spTree>
-    <p:extLst>
-      <p:ext uri="{BB962C8B-B14F-4D97-AF65-F5344CB8AC3E}">
-        <p14:creationId xmlns:p14="http://schemas.microsoft.com/office/powerpoint/2010/main" val="725852954"/>
-      </p:ext>
-    </p:extLst>
-  </p:cSld>
-  <p:clrMapOvr>
-    <a:masterClrMapping/>
-  </p:clrMapOvr>
-</p:sld>
-</file>
-
-<file path=ppt/slides/slide19.xml><?xml version="1.0" encoding="utf-8"?>
-<p:sld xmlns:a="http://schemas.openxmlformats.org/drawingml/2006/main" xmlns:r="http://schemas.openxmlformats.org/officeDocument/2006/relationships" xmlns:p="http://schemas.openxmlformats.org/presentationml/2006/main">
-  <p:cSld>
-    <p:spTree>
-      <p:nvGrpSpPr>
-        <p:cNvPr id="1" name="">
-          <a:extLst>
-            <a:ext uri="{FF2B5EF4-FFF2-40B4-BE49-F238E27FC236}">
-              <a16:creationId xmlns:a16="http://schemas.microsoft.com/office/drawing/2014/main" id="{38A6AAEF-67B5-DA56-3F7D-D718B0002B84}"/>
-            </a:ext>
-          </a:extLst>
-        </p:cNvPr>
-        <p:cNvGrpSpPr/>
-        <p:nvPr/>
-      </p:nvGrpSpPr>
-      <p:grpSpPr>
-        <a:xfrm>
-          <a:off x="0" y="0"/>
-          <a:ext cx="0" cy="0"/>
-          <a:chOff x="0" y="0"/>
-          <a:chExt cx="0" cy="0"/>
-        </a:xfrm>
-      </p:grpSpPr>
-      <p:pic>
-        <p:nvPicPr>
-          <p:cNvPr id="3" name="Picture 2" descr="A white and blue background&#10;&#10;Description automatically generated">
-            <a:extLst>
-              <a:ext uri="{FF2B5EF4-FFF2-40B4-BE49-F238E27FC236}">
-                <a16:creationId xmlns:a16="http://schemas.microsoft.com/office/drawing/2014/main" id="{9FF758E4-E181-0F79-4E1C-1E66B093AA5B}"/>
-              </a:ext>
-            </a:extLst>
-          </p:cNvPr>
-          <p:cNvPicPr>
-            <a:picLocks noChangeAspect="1"/>
-          </p:cNvPicPr>
-          <p:nvPr/>
-        </p:nvPicPr>
-        <p:blipFill>
-          <a:blip r:embed="rId2"/>
-          <a:stretch>
-            <a:fillRect/>
-          </a:stretch>
-        </p:blipFill>
-        <p:spPr>
-          <a:xfrm>
-            <a:off x="112427" y="-269823"/>
-            <a:ext cx="12192000" cy="6891129"/>
-          </a:xfrm>
-          <a:prstGeom prst="rect">
-            <a:avLst/>
-          </a:prstGeom>
-        </p:spPr>
-      </p:pic>
-      <p:sp>
-        <p:nvSpPr>
-          <p:cNvPr id="4" name="TextBox 3">
-            <a:extLst>
-              <a:ext uri="{FF2B5EF4-FFF2-40B4-BE49-F238E27FC236}">
-                <a16:creationId xmlns:a16="http://schemas.microsoft.com/office/drawing/2014/main" id="{40F61035-2F11-D950-B3A8-A720C420C78E}"/>
-              </a:ext>
-            </a:extLst>
-          </p:cNvPr>
-          <p:cNvSpPr txBox="1"/>
-          <p:nvPr/>
-        </p:nvSpPr>
-        <p:spPr>
-          <a:xfrm>
-            <a:off x="604266" y="136955"/>
-            <a:ext cx="10391019" cy="646331"/>
-          </a:xfrm>
-          <a:prstGeom prst="rect">
-            <a:avLst/>
-          </a:prstGeom>
-          <a:noFill/>
-        </p:spPr>
-        <p:txBody>
-          <a:bodyPr wrap="square" rtlCol="0">
-            <a:spAutoFit/>
-          </a:bodyPr>
-          <a:lstStyle/>
-          <a:p>
-            <a:pPr marL="457200" indent="-457200">
-              <a:buFont typeface="+mj-lt"/>
-              <a:buAutoNum type="arabicPeriod"/>
-            </a:pPr>
-            <a:r>
-              <a:rPr lang="en-US" sz="3600">
-                <a:solidFill>
-                  <a:schemeClr val="accent1">
-                    <a:lumMod val="50000"/>
-                  </a:schemeClr>
-                </a:solidFill>
-                <a:latin typeface="Arial" panose="020B0604020202020204" pitchFamily="34" charset="0"/>
-                <a:cs typeface="Arial" panose="020B0604020202020204" pitchFamily="34" charset="0"/>
-              </a:rPr>
-              <a:t>Loops, Lists, Tuples, and Dictionaries</a:t>
-            </a:r>
-          </a:p>
-        </p:txBody>
-      </p:sp>
-      <p:sp>
-        <p:nvSpPr>
-          <p:cNvPr id="5" name="TextBox 4">
-            <a:extLst>
-              <a:ext uri="{FF2B5EF4-FFF2-40B4-BE49-F238E27FC236}">
-                <a16:creationId xmlns:a16="http://schemas.microsoft.com/office/drawing/2014/main" id="{89574967-AED0-16E6-85AB-FDEB7F994609}"/>
-              </a:ext>
-            </a:extLst>
-          </p:cNvPr>
-          <p:cNvSpPr txBox="1"/>
-          <p:nvPr/>
-        </p:nvSpPr>
-        <p:spPr>
-          <a:xfrm>
-            <a:off x="776653" y="876991"/>
-            <a:ext cx="10323564" cy="5632311"/>
-          </a:xfrm>
-          <a:prstGeom prst="rect">
-            <a:avLst/>
-          </a:prstGeom>
-          <a:noFill/>
-        </p:spPr>
-        <p:txBody>
-          <a:bodyPr wrap="square" rtlCol="0">
-            <a:spAutoFit/>
-          </a:bodyPr>
-          <a:lstStyle/>
-          <a:p>
-            <a:pPr marL="457200" indent="-457200">
-              <a:buFont typeface="Arial" panose="020B0604020202020204" pitchFamily="34" charset="0"/>
-              <a:buChar char="•"/>
-            </a:pPr>
-            <a:r>
-              <a:rPr lang="en-US" sz="2400">
-                <a:solidFill>
-                  <a:schemeClr val="accent1">
-                    <a:lumMod val="50000"/>
-                  </a:schemeClr>
-                </a:solidFill>
-                <a:latin typeface="Arial" panose="020B0604020202020204" pitchFamily="34" charset="0"/>
-                <a:cs typeface="Arial" panose="020B0604020202020204" pitchFamily="34" charset="0"/>
-              </a:rPr>
-              <a:t>Secure Iteration Practices</a:t>
-            </a:r>
-          </a:p>
-          <a:p>
-            <a:pPr marL="914400" lvl="1" indent="-457200">
-              <a:buFont typeface="Arial" panose="020B0604020202020204" pitchFamily="34" charset="0"/>
-              <a:buChar char="•"/>
-            </a:pPr>
-            <a:r>
-              <a:rPr lang="en-US" sz="2400">
-                <a:solidFill>
-                  <a:schemeClr val="accent1">
-                    <a:lumMod val="50000"/>
-                  </a:schemeClr>
-                </a:solidFill>
-                <a:latin typeface="Arial" panose="020B0604020202020204" pitchFamily="34" charset="0"/>
-                <a:cs typeface="Arial" panose="020B0604020202020204" pitchFamily="34" charset="0"/>
-              </a:rPr>
-              <a:t>Avoid infinite loops and ensuring proper termination</a:t>
-            </a:r>
-          </a:p>
-          <a:p>
-            <a:pPr marL="914400" lvl="1" indent="-457200">
-              <a:buFont typeface="Arial" panose="020B0604020202020204" pitchFamily="34" charset="0"/>
-              <a:buChar char="•"/>
-            </a:pPr>
-            <a:r>
-              <a:rPr lang="en-US" sz="2400">
-                <a:solidFill>
-                  <a:schemeClr val="accent1">
-                    <a:lumMod val="50000"/>
-                  </a:schemeClr>
-                </a:solidFill>
-                <a:latin typeface="Arial" panose="020B0604020202020204" pitchFamily="34" charset="0"/>
-                <a:cs typeface="Arial" panose="020B0604020202020204" pitchFamily="34" charset="0"/>
-              </a:rPr>
-              <a:t>Use generator expressions for memory-efficient iteration</a:t>
-            </a:r>
-          </a:p>
-          <a:p>
-            <a:pPr marL="457200" indent="-457200">
-              <a:buFont typeface="Arial" panose="020B0604020202020204" pitchFamily="34" charset="0"/>
-              <a:buChar char="•"/>
-            </a:pPr>
-            <a:r>
-              <a:rPr lang="en-US" sz="2400">
-                <a:solidFill>
-                  <a:schemeClr val="accent1">
-                    <a:lumMod val="50000"/>
-                  </a:schemeClr>
-                </a:solidFill>
-                <a:latin typeface="Arial" panose="020B0604020202020204" pitchFamily="34" charset="0"/>
-                <a:cs typeface="Arial" panose="020B0604020202020204" pitchFamily="34" charset="0"/>
-              </a:rPr>
-              <a:t>Lists and Tuples: Security Considerations</a:t>
-            </a:r>
-          </a:p>
-          <a:p>
-            <a:pPr marL="914400" lvl="1" indent="-457200">
-              <a:buFont typeface="Arial" panose="020B0604020202020204" pitchFamily="34" charset="0"/>
-              <a:buChar char="•"/>
-            </a:pPr>
-            <a:r>
-              <a:rPr lang="en-US" sz="2400">
-                <a:solidFill>
-                  <a:schemeClr val="accent1">
-                    <a:lumMod val="50000"/>
-                  </a:schemeClr>
-                </a:solidFill>
-                <a:latin typeface="Arial" panose="020B0604020202020204" pitchFamily="34" charset="0"/>
-                <a:cs typeface="Arial" panose="020B0604020202020204" pitchFamily="34" charset="0"/>
-              </a:rPr>
-              <a:t>Prevent unintended data modifications in lists</a:t>
-            </a:r>
-          </a:p>
-          <a:p>
-            <a:pPr marL="914400" lvl="1" indent="-457200">
-              <a:buFont typeface="Arial" panose="020B0604020202020204" pitchFamily="34" charset="0"/>
-              <a:buChar char="•"/>
-            </a:pPr>
-            <a:r>
-              <a:rPr lang="en-US" sz="2400">
-                <a:solidFill>
-                  <a:schemeClr val="accent1">
-                    <a:lumMod val="50000"/>
-                  </a:schemeClr>
-                </a:solidFill>
-                <a:latin typeface="Arial" panose="020B0604020202020204" pitchFamily="34" charset="0"/>
-                <a:cs typeface="Arial" panose="020B0604020202020204" pitchFamily="34" charset="0"/>
-              </a:rPr>
-              <a:t>Use tuples for immutable, security-sensitive data</a:t>
-            </a:r>
-          </a:p>
-          <a:p>
-            <a:pPr marL="914400" lvl="1" indent="-457200">
-              <a:buFont typeface="Arial" panose="020B0604020202020204" pitchFamily="34" charset="0"/>
-              <a:buChar char="•"/>
-            </a:pPr>
-            <a:r>
-              <a:rPr lang="en-US" sz="2400">
-                <a:solidFill>
-                  <a:schemeClr val="accent1">
-                    <a:lumMod val="50000"/>
-                  </a:schemeClr>
-                </a:solidFill>
-                <a:latin typeface="Arial" panose="020B0604020202020204" pitchFamily="34" charset="0"/>
-                <a:cs typeface="Arial" panose="020B0604020202020204" pitchFamily="34" charset="0"/>
-              </a:rPr>
-              <a:t>Avoid index errors and boundary overflows</a:t>
-            </a:r>
-          </a:p>
-          <a:p>
-            <a:pPr marL="457200" indent="-457200">
-              <a:buFont typeface="Arial" panose="020B0604020202020204" pitchFamily="34" charset="0"/>
-              <a:buChar char="•"/>
-            </a:pPr>
-            <a:r>
-              <a:rPr lang="en-US" sz="2400">
-                <a:solidFill>
-                  <a:schemeClr val="accent1">
-                    <a:lumMod val="50000"/>
-                  </a:schemeClr>
-                </a:solidFill>
-                <a:latin typeface="Arial" panose="020B0604020202020204" pitchFamily="34" charset="0"/>
-                <a:cs typeface="Arial" panose="020B0604020202020204" pitchFamily="34" charset="0"/>
-              </a:rPr>
-              <a:t>Dictionaries and Secure Data Handling</a:t>
-            </a:r>
-          </a:p>
-          <a:p>
-            <a:pPr marL="914400" lvl="1" indent="-457200">
-              <a:buFont typeface="Arial" panose="020B0604020202020204" pitchFamily="34" charset="0"/>
-              <a:buChar char="•"/>
-            </a:pPr>
-            <a:r>
-              <a:rPr lang="en-US" sz="2400">
-                <a:solidFill>
-                  <a:schemeClr val="accent1">
-                    <a:lumMod val="50000"/>
-                  </a:schemeClr>
-                </a:solidFill>
-                <a:latin typeface="Arial" panose="020B0604020202020204" pitchFamily="34" charset="0"/>
-                <a:cs typeface="Arial" panose="020B0604020202020204" pitchFamily="34" charset="0"/>
-              </a:rPr>
-              <a:t>Prevent key collisions in sensitive data</a:t>
-            </a:r>
-          </a:p>
-          <a:p>
-            <a:pPr marL="914400" lvl="1" indent="-457200">
-              <a:buFont typeface="Arial" panose="020B0604020202020204" pitchFamily="34" charset="0"/>
-              <a:buChar char="•"/>
-            </a:pPr>
-            <a:r>
-              <a:rPr lang="en-US" sz="2400">
-                <a:solidFill>
-                  <a:schemeClr val="accent1">
-                    <a:lumMod val="50000"/>
-                  </a:schemeClr>
-                </a:solidFill>
-                <a:latin typeface="Arial" panose="020B0604020202020204" pitchFamily="34" charset="0"/>
-                <a:cs typeface="Arial" panose="020B0604020202020204" pitchFamily="34" charset="0"/>
-              </a:rPr>
-              <a:t>Handle missing keys securely to avoid runtime errors</a:t>
-            </a:r>
-          </a:p>
-          <a:p>
-            <a:pPr marL="914400" lvl="1" indent="-457200">
-              <a:buFont typeface="Arial" panose="020B0604020202020204" pitchFamily="34" charset="0"/>
-              <a:buChar char="•"/>
-            </a:pPr>
-            <a:r>
-              <a:rPr lang="en-US" sz="2400">
-                <a:solidFill>
-                  <a:schemeClr val="accent1">
-                    <a:lumMod val="50000"/>
-                  </a:schemeClr>
-                </a:solidFill>
-                <a:latin typeface="Arial" panose="020B0604020202020204" pitchFamily="34" charset="0"/>
-                <a:cs typeface="Arial" panose="020B0604020202020204" pitchFamily="34" charset="0"/>
-              </a:rPr>
-              <a:t>Use defaultdict and exception handling for safe lookups</a:t>
-            </a:r>
-          </a:p>
-          <a:p>
-            <a:pPr marL="457200" indent="-457200">
-              <a:buFont typeface="Arial" panose="020B0604020202020204" pitchFamily="34" charset="0"/>
-              <a:buChar char="•"/>
-            </a:pPr>
-            <a:r>
-              <a:rPr lang="en-US" sz="2400">
-                <a:solidFill>
-                  <a:schemeClr val="accent1">
-                    <a:lumMod val="50000"/>
-                  </a:schemeClr>
-                </a:solidFill>
-                <a:latin typeface="Arial" panose="020B0604020202020204" pitchFamily="34" charset="0"/>
-                <a:cs typeface="Arial" panose="020B0604020202020204" pitchFamily="34" charset="0"/>
-              </a:rPr>
-              <a:t>Mitigating Risks in Data Structures</a:t>
-            </a:r>
-          </a:p>
-          <a:p>
-            <a:pPr marL="914400" lvl="1" indent="-457200">
-              <a:buFont typeface="Arial" panose="020B0604020202020204" pitchFamily="34" charset="0"/>
-              <a:buChar char="•"/>
-            </a:pPr>
-            <a:r>
-              <a:rPr lang="en-US" sz="2400">
-                <a:solidFill>
-                  <a:schemeClr val="accent1">
-                    <a:lumMod val="50000"/>
-                  </a:schemeClr>
-                </a:solidFill>
-                <a:latin typeface="Arial" panose="020B0604020202020204" pitchFamily="34" charset="0"/>
-                <a:cs typeface="Arial" panose="020B0604020202020204" pitchFamily="34" charset="0"/>
-              </a:rPr>
-              <a:t>Avoid mutable default arguments in function definitions</a:t>
-            </a:r>
-          </a:p>
-          <a:p>
-            <a:pPr marL="914400" lvl="1" indent="-457200">
-              <a:buFont typeface="Arial" panose="020B0604020202020204" pitchFamily="34" charset="0"/>
-              <a:buChar char="•"/>
-            </a:pPr>
-            <a:r>
-              <a:rPr lang="en-US" sz="2400">
-                <a:solidFill>
-                  <a:schemeClr val="accent1">
-                    <a:lumMod val="50000"/>
-                  </a:schemeClr>
-                </a:solidFill>
-                <a:latin typeface="Arial" panose="020B0604020202020204" pitchFamily="34" charset="0"/>
-                <a:cs typeface="Arial" panose="020B0604020202020204" pitchFamily="34" charset="0"/>
-              </a:rPr>
-              <a:t>Prevent race conditions when modifying shared data</a:t>
-            </a:r>
-          </a:p>
-          <a:p>
-            <a:pPr marL="914400" lvl="1" indent="-457200">
-              <a:buFont typeface="Arial" panose="020B0604020202020204" pitchFamily="34" charset="0"/>
-              <a:buChar char="•"/>
-            </a:pPr>
-            <a:r>
-              <a:rPr lang="en-US" sz="2400">
-                <a:solidFill>
-                  <a:schemeClr val="accent1">
-                    <a:lumMod val="50000"/>
-                  </a:schemeClr>
-                </a:solidFill>
-                <a:latin typeface="Arial" panose="020B0604020202020204" pitchFamily="34" charset="0"/>
-                <a:cs typeface="Arial" panose="020B0604020202020204" pitchFamily="34" charset="0"/>
-              </a:rPr>
-              <a:t>Use secure hashing techniques for dictionary keys</a:t>
-            </a:r>
-          </a:p>
-        </p:txBody>
-      </p:sp>
-    </p:spTree>
-    <p:extLst>
-      <p:ext uri="{BB962C8B-B14F-4D97-AF65-F5344CB8AC3E}">
-        <p14:creationId xmlns:p14="http://schemas.microsoft.com/office/powerpoint/2010/main" val="2144214793"/>
       </p:ext>
     </p:extLst>
   </p:cSld>
@@ -7006,6 +7020,745 @@
     <p:extLst>
       <p:ext uri="{BB962C8B-B14F-4D97-AF65-F5344CB8AC3E}">
         <p14:creationId xmlns:p14="http://schemas.microsoft.com/office/powerpoint/2010/main" val="2724772504"/>
+      </p:ext>
+    </p:extLst>
+  </p:cSld>
+  <p:clrMapOvr>
+    <a:masterClrMapping/>
+  </p:clrMapOvr>
+</p:sld>
+</file>
+
+<file path=ppt/slides/slide20.xml><?xml version="1.0" encoding="utf-8"?>
+<p:sld xmlns:a="http://schemas.openxmlformats.org/drawingml/2006/main" xmlns:r="http://schemas.openxmlformats.org/officeDocument/2006/relationships" xmlns:p="http://schemas.openxmlformats.org/presentationml/2006/main">
+  <p:cSld>
+    <p:spTree>
+      <p:nvGrpSpPr>
+        <p:cNvPr id="1" name="">
+          <a:extLst>
+            <a:ext uri="{FF2B5EF4-FFF2-40B4-BE49-F238E27FC236}">
+              <a16:creationId xmlns:a16="http://schemas.microsoft.com/office/drawing/2014/main" id="{986D872C-E703-1333-8961-D37AB2337B58}"/>
+            </a:ext>
+          </a:extLst>
+        </p:cNvPr>
+        <p:cNvGrpSpPr/>
+        <p:nvPr/>
+      </p:nvGrpSpPr>
+      <p:grpSpPr>
+        <a:xfrm>
+          <a:off x="0" y="0"/>
+          <a:ext cx="0" cy="0"/>
+          <a:chOff x="0" y="0"/>
+          <a:chExt cx="0" cy="0"/>
+        </a:xfrm>
+      </p:grpSpPr>
+      <p:pic>
+        <p:nvPicPr>
+          <p:cNvPr id="3" name="Picture 2" descr="A white and blue background&#10;&#10;Description automatically generated">
+            <a:extLst>
+              <a:ext uri="{FF2B5EF4-FFF2-40B4-BE49-F238E27FC236}">
+                <a16:creationId xmlns:a16="http://schemas.microsoft.com/office/drawing/2014/main" id="{64AD6237-F4AC-A21A-D86F-42B6B102BD47}"/>
+              </a:ext>
+            </a:extLst>
+          </p:cNvPr>
+          <p:cNvPicPr>
+            <a:picLocks noChangeAspect="1"/>
+          </p:cNvPicPr>
+          <p:nvPr/>
+        </p:nvPicPr>
+        <p:blipFill>
+          <a:blip r:embed="rId2"/>
+          <a:stretch>
+            <a:fillRect/>
+          </a:stretch>
+        </p:blipFill>
+        <p:spPr>
+          <a:xfrm>
+            <a:off x="0" y="-33129"/>
+            <a:ext cx="12192000" cy="6891129"/>
+          </a:xfrm>
+          <a:prstGeom prst="rect">
+            <a:avLst/>
+          </a:prstGeom>
+        </p:spPr>
+      </p:pic>
+      <p:sp>
+        <p:nvSpPr>
+          <p:cNvPr id="4" name="TextBox 3">
+            <a:extLst>
+              <a:ext uri="{FF2B5EF4-FFF2-40B4-BE49-F238E27FC236}">
+                <a16:creationId xmlns:a16="http://schemas.microsoft.com/office/drawing/2014/main" id="{1A4B7406-491F-B083-FC26-26BD7458B9A8}"/>
+              </a:ext>
+            </a:extLst>
+          </p:cNvPr>
+          <p:cNvSpPr txBox="1"/>
+          <p:nvPr/>
+        </p:nvSpPr>
+        <p:spPr>
+          <a:xfrm>
+            <a:off x="604266" y="136955"/>
+            <a:ext cx="10391019" cy="646331"/>
+          </a:xfrm>
+          <a:prstGeom prst="rect">
+            <a:avLst/>
+          </a:prstGeom>
+          <a:noFill/>
+        </p:spPr>
+        <p:txBody>
+          <a:bodyPr wrap="square" rtlCol="0">
+            <a:spAutoFit/>
+          </a:bodyPr>
+          <a:lstStyle/>
+          <a:p>
+            <a:r>
+              <a:rPr lang="en-US" sz="3600">
+                <a:solidFill>
+                  <a:schemeClr val="accent1">
+                    <a:lumMod val="50000"/>
+                  </a:schemeClr>
+                </a:solidFill>
+                <a:latin typeface="Arial" panose="020B0604020202020204" pitchFamily="34" charset="0"/>
+                <a:cs typeface="Arial" panose="020B0604020202020204" pitchFamily="34" charset="0"/>
+              </a:rPr>
+              <a:t>Using Safer Data Structures</a:t>
+            </a:r>
+          </a:p>
+        </p:txBody>
+      </p:sp>
+      <p:sp>
+        <p:nvSpPr>
+          <p:cNvPr id="5" name="TextBox 4">
+            <a:extLst>
+              <a:ext uri="{FF2B5EF4-FFF2-40B4-BE49-F238E27FC236}">
+                <a16:creationId xmlns:a16="http://schemas.microsoft.com/office/drawing/2014/main" id="{B81C8176-5C01-4C22-D6C4-0DFE4E41F9F8}"/>
+              </a:ext>
+            </a:extLst>
+          </p:cNvPr>
+          <p:cNvSpPr txBox="1"/>
+          <p:nvPr/>
+        </p:nvSpPr>
+        <p:spPr>
+          <a:xfrm>
+            <a:off x="836614" y="906971"/>
+            <a:ext cx="10323564" cy="4770537"/>
+          </a:xfrm>
+          <a:prstGeom prst="rect">
+            <a:avLst/>
+          </a:prstGeom>
+          <a:noFill/>
+        </p:spPr>
+        <p:txBody>
+          <a:bodyPr wrap="square" rtlCol="0">
+            <a:spAutoFit/>
+          </a:bodyPr>
+          <a:lstStyle/>
+          <a:p>
+            <a:pPr marL="231775" indent="-230188">
+              <a:buFont typeface="Arial" panose="020B0604020202020204" pitchFamily="34" charset="0"/>
+              <a:buChar char="•"/>
+            </a:pPr>
+            <a:r>
+              <a:rPr lang="en-US" sz="2400">
+                <a:solidFill>
+                  <a:schemeClr val="accent1">
+                    <a:lumMod val="50000"/>
+                  </a:schemeClr>
+                </a:solidFill>
+                <a:latin typeface="Arial" panose="020B0604020202020204" pitchFamily="34" charset="0"/>
+                <a:cs typeface="Arial" panose="020B0604020202020204" pitchFamily="34" charset="0"/>
+              </a:rPr>
+              <a:t>Use collections.deque for fixed-size buffers.</a:t>
+            </a:r>
+          </a:p>
+          <a:p>
+            <a:pPr marL="231775" indent="-230188">
+              <a:buFont typeface="Arial" panose="020B0604020202020204" pitchFamily="34" charset="0"/>
+              <a:buChar char="•"/>
+            </a:pPr>
+            <a:endParaRPr lang="en-US" sz="2400">
+              <a:solidFill>
+                <a:schemeClr val="accent1">
+                  <a:lumMod val="50000"/>
+                </a:schemeClr>
+              </a:solidFill>
+              <a:latin typeface="Arial" panose="020B0604020202020204" pitchFamily="34" charset="0"/>
+              <a:cs typeface="Arial" panose="020B0604020202020204" pitchFamily="34" charset="0"/>
+            </a:endParaRPr>
+          </a:p>
+          <a:p>
+            <a:pPr marL="231775" indent="-230188">
+              <a:buFont typeface="Arial" panose="020B0604020202020204" pitchFamily="34" charset="0"/>
+              <a:buChar char="•"/>
+            </a:pPr>
+            <a:r>
+              <a:rPr lang="en-US" sz="2400">
+                <a:solidFill>
+                  <a:schemeClr val="accent1">
+                    <a:lumMod val="50000"/>
+                  </a:schemeClr>
+                </a:solidFill>
+                <a:latin typeface="Arial" panose="020B0604020202020204" pitchFamily="34" charset="0"/>
+                <a:cs typeface="Arial" panose="020B0604020202020204" pitchFamily="34" charset="0"/>
+              </a:rPr>
+              <a:t>Consider slicing to limit index access.</a:t>
+            </a:r>
+          </a:p>
+          <a:p>
+            <a:pPr marL="688975" lvl="1" indent="-230188">
+              <a:buFont typeface="Arial" panose="020B0604020202020204" pitchFamily="34" charset="0"/>
+              <a:buChar char="•"/>
+            </a:pPr>
+            <a:r>
+              <a:rPr lang="en-US" sz="2000">
+                <a:solidFill>
+                  <a:schemeClr val="accent1">
+                    <a:lumMod val="50000"/>
+                  </a:schemeClr>
+                </a:solidFill>
+                <a:latin typeface="Arial" panose="020B0604020202020204" pitchFamily="34" charset="0"/>
+                <a:cs typeface="Arial" panose="020B0604020202020204" pitchFamily="34" charset="0"/>
+              </a:rPr>
+              <a:t>Unlike direct indexing (my_list[3]), which would raise an IndexError if the index is out of bounds, slicing gracefully handles it.</a:t>
+            </a:r>
+          </a:p>
+          <a:p>
+            <a:pPr marL="231775" indent="-230188">
+              <a:buFont typeface="Arial" panose="020B0604020202020204" pitchFamily="34" charset="0"/>
+              <a:buChar char="•"/>
+            </a:pPr>
+            <a:endParaRPr lang="en-US" sz="2400">
+              <a:solidFill>
+                <a:schemeClr val="accent1">
+                  <a:lumMod val="50000"/>
+                </a:schemeClr>
+              </a:solidFill>
+              <a:latin typeface="Arial" panose="020B0604020202020204" pitchFamily="34" charset="0"/>
+              <a:cs typeface="Arial" panose="020B0604020202020204" pitchFamily="34" charset="0"/>
+            </a:endParaRPr>
+          </a:p>
+          <a:p>
+            <a:pPr marL="914400"/>
+            <a:r>
+              <a:rPr lang="en-US" sz="2400" b="1">
+                <a:solidFill>
+                  <a:schemeClr val="accent1">
+                    <a:lumMod val="50000"/>
+                  </a:schemeClr>
+                </a:solidFill>
+                <a:latin typeface="Consolas" panose="020B0609020204030204" pitchFamily="49" charset="0"/>
+                <a:cs typeface="Arial" panose="020B0604020202020204" pitchFamily="34" charset="0"/>
+              </a:rPr>
+              <a:t>my_list = [10, 20, 30]</a:t>
+            </a:r>
+          </a:p>
+          <a:p>
+            <a:pPr marL="914400"/>
+            <a:r>
+              <a:rPr lang="en-US" sz="2400" b="1">
+                <a:solidFill>
+                  <a:schemeClr val="accent1">
+                    <a:lumMod val="50000"/>
+                  </a:schemeClr>
+                </a:solidFill>
+                <a:latin typeface="Consolas" panose="020B0609020204030204" pitchFamily="49" charset="0"/>
+                <a:cs typeface="Arial" panose="020B0604020202020204" pitchFamily="34" charset="0"/>
+              </a:rPr>
+              <a:t>print(my_list[5])  # IndexError: index out of range</a:t>
+            </a:r>
+          </a:p>
+          <a:p>
+            <a:pPr marL="914400"/>
+            <a:endParaRPr lang="en-US" sz="2400" b="1">
+              <a:solidFill>
+                <a:schemeClr val="accent1">
+                  <a:lumMod val="50000"/>
+                </a:schemeClr>
+              </a:solidFill>
+              <a:latin typeface="Consolas" panose="020B0609020204030204" pitchFamily="49" charset="0"/>
+              <a:cs typeface="Arial" panose="020B0604020202020204" pitchFamily="34" charset="0"/>
+            </a:endParaRPr>
+          </a:p>
+          <a:p>
+            <a:pPr marL="914400"/>
+            <a:r>
+              <a:rPr lang="en-US" sz="2400" b="1">
+                <a:solidFill>
+                  <a:schemeClr val="accent1">
+                    <a:lumMod val="50000"/>
+                  </a:schemeClr>
+                </a:solidFill>
+                <a:latin typeface="Consolas" panose="020B0609020204030204" pitchFamily="49" charset="0"/>
+                <a:cs typeface="Arial" panose="020B0604020202020204" pitchFamily="34" charset="0"/>
+              </a:rPr>
+              <a:t>my_list = [10, 20, 30]</a:t>
+            </a:r>
+          </a:p>
+          <a:p>
+            <a:pPr marL="914400"/>
+            <a:r>
+              <a:rPr lang="en-US" sz="2400" b="1">
+                <a:solidFill>
+                  <a:schemeClr val="accent1">
+                    <a:lumMod val="50000"/>
+                  </a:schemeClr>
+                </a:solidFill>
+                <a:latin typeface="Consolas" panose="020B0609020204030204" pitchFamily="49" charset="0"/>
+                <a:cs typeface="Arial" panose="020B0604020202020204" pitchFamily="34" charset="0"/>
+              </a:rPr>
+              <a:t>print(my_list[:5])  # Prevents out-of-range errors</a:t>
+            </a:r>
+          </a:p>
+          <a:p>
+            <a:pPr marL="231775" indent="-230188">
+              <a:buFont typeface="Arial" panose="020B0604020202020204" pitchFamily="34" charset="0"/>
+              <a:buChar char="•"/>
+            </a:pPr>
+            <a:endParaRPr lang="en-US" sz="2400">
+              <a:solidFill>
+                <a:schemeClr val="accent1">
+                  <a:lumMod val="50000"/>
+                </a:schemeClr>
+              </a:solidFill>
+              <a:latin typeface="Arial" panose="020B0604020202020204" pitchFamily="34" charset="0"/>
+              <a:cs typeface="Arial" panose="020B0604020202020204" pitchFamily="34" charset="0"/>
+            </a:endParaRPr>
+          </a:p>
+          <a:p>
+            <a:pPr marL="231775" indent="-230188">
+              <a:buFont typeface="Arial" panose="020B0604020202020204" pitchFamily="34" charset="0"/>
+              <a:buChar char="•"/>
+            </a:pPr>
+            <a:r>
+              <a:rPr lang="en-US" sz="2400">
+                <a:solidFill>
+                  <a:schemeClr val="accent1">
+                    <a:lumMod val="50000"/>
+                  </a:schemeClr>
+                </a:solidFill>
+                <a:latin typeface="Arial" panose="020B0604020202020204" pitchFamily="34" charset="0"/>
+                <a:cs typeface="Arial" panose="020B0604020202020204" pitchFamily="34" charset="0"/>
+              </a:rPr>
+              <a:t>Avoid unnecessary manual index tracking when using loops.</a:t>
+            </a:r>
+          </a:p>
+        </p:txBody>
+      </p:sp>
+    </p:spTree>
+    <p:extLst>
+      <p:ext uri="{BB962C8B-B14F-4D97-AF65-F5344CB8AC3E}">
+        <p14:creationId xmlns:p14="http://schemas.microsoft.com/office/powerpoint/2010/main" val="725852954"/>
+      </p:ext>
+    </p:extLst>
+  </p:cSld>
+  <p:clrMapOvr>
+    <a:masterClrMapping/>
+  </p:clrMapOvr>
+</p:sld>
+</file>
+
+<file path=ppt/slides/slide21.xml><?xml version="1.0" encoding="utf-8"?>
+<p:sld xmlns:a="http://schemas.openxmlformats.org/drawingml/2006/main" xmlns:r="http://schemas.openxmlformats.org/officeDocument/2006/relationships" xmlns:p="http://schemas.openxmlformats.org/presentationml/2006/main">
+  <p:cSld>
+    <p:spTree>
+      <p:nvGrpSpPr>
+        <p:cNvPr id="1" name="">
+          <a:extLst>
+            <a:ext uri="{FF2B5EF4-FFF2-40B4-BE49-F238E27FC236}">
+              <a16:creationId xmlns:a16="http://schemas.microsoft.com/office/drawing/2014/main" id="{38A6AAEF-67B5-DA56-3F7D-D718B0002B84}"/>
+            </a:ext>
+          </a:extLst>
+        </p:cNvPr>
+        <p:cNvGrpSpPr/>
+        <p:nvPr/>
+      </p:nvGrpSpPr>
+      <p:grpSpPr>
+        <a:xfrm>
+          <a:off x="0" y="0"/>
+          <a:ext cx="0" cy="0"/>
+          <a:chOff x="0" y="0"/>
+          <a:chExt cx="0" cy="0"/>
+        </a:xfrm>
+      </p:grpSpPr>
+      <p:pic>
+        <p:nvPicPr>
+          <p:cNvPr id="3" name="Picture 2" descr="A white and blue background&#10;&#10;Description automatically generated">
+            <a:extLst>
+              <a:ext uri="{FF2B5EF4-FFF2-40B4-BE49-F238E27FC236}">
+                <a16:creationId xmlns:a16="http://schemas.microsoft.com/office/drawing/2014/main" id="{9FF758E4-E181-0F79-4E1C-1E66B093AA5B}"/>
+              </a:ext>
+            </a:extLst>
+          </p:cNvPr>
+          <p:cNvPicPr>
+            <a:picLocks noChangeAspect="1"/>
+          </p:cNvPicPr>
+          <p:nvPr/>
+        </p:nvPicPr>
+        <p:blipFill>
+          <a:blip r:embed="rId2"/>
+          <a:stretch>
+            <a:fillRect/>
+          </a:stretch>
+        </p:blipFill>
+        <p:spPr>
+          <a:xfrm>
+            <a:off x="112427" y="-269823"/>
+            <a:ext cx="12192000" cy="6891129"/>
+          </a:xfrm>
+          <a:prstGeom prst="rect">
+            <a:avLst/>
+          </a:prstGeom>
+        </p:spPr>
+      </p:pic>
+      <p:sp>
+        <p:nvSpPr>
+          <p:cNvPr id="4" name="TextBox 3">
+            <a:extLst>
+              <a:ext uri="{FF2B5EF4-FFF2-40B4-BE49-F238E27FC236}">
+                <a16:creationId xmlns:a16="http://schemas.microsoft.com/office/drawing/2014/main" id="{40F61035-2F11-D950-B3A8-A720C420C78E}"/>
+              </a:ext>
+            </a:extLst>
+          </p:cNvPr>
+          <p:cNvSpPr txBox="1"/>
+          <p:nvPr/>
+        </p:nvSpPr>
+        <p:spPr>
+          <a:xfrm>
+            <a:off x="604266" y="136955"/>
+            <a:ext cx="10391019" cy="646331"/>
+          </a:xfrm>
+          <a:prstGeom prst="rect">
+            <a:avLst/>
+          </a:prstGeom>
+          <a:noFill/>
+        </p:spPr>
+        <p:txBody>
+          <a:bodyPr wrap="square" rtlCol="0">
+            <a:spAutoFit/>
+          </a:bodyPr>
+          <a:lstStyle/>
+          <a:p>
+            <a:pPr marL="457200" indent="-457200">
+              <a:buFont typeface="+mj-lt"/>
+              <a:buAutoNum type="arabicPeriod"/>
+            </a:pPr>
+            <a:r>
+              <a:rPr lang="en-US" sz="3600">
+                <a:solidFill>
+                  <a:schemeClr val="accent1">
+                    <a:lumMod val="50000"/>
+                  </a:schemeClr>
+                </a:solidFill>
+                <a:latin typeface="Arial" panose="020B0604020202020204" pitchFamily="34" charset="0"/>
+                <a:cs typeface="Arial" panose="020B0604020202020204" pitchFamily="34" charset="0"/>
+              </a:rPr>
+              <a:t>Loops, Lists, Tuples, and Dictionaries</a:t>
+            </a:r>
+          </a:p>
+        </p:txBody>
+      </p:sp>
+      <p:sp>
+        <p:nvSpPr>
+          <p:cNvPr id="5" name="TextBox 4">
+            <a:extLst>
+              <a:ext uri="{FF2B5EF4-FFF2-40B4-BE49-F238E27FC236}">
+                <a16:creationId xmlns:a16="http://schemas.microsoft.com/office/drawing/2014/main" id="{89574967-AED0-16E6-85AB-FDEB7F994609}"/>
+              </a:ext>
+            </a:extLst>
+          </p:cNvPr>
+          <p:cNvSpPr txBox="1"/>
+          <p:nvPr/>
+        </p:nvSpPr>
+        <p:spPr>
+          <a:xfrm>
+            <a:off x="776653" y="876991"/>
+            <a:ext cx="10323564" cy="5632311"/>
+          </a:xfrm>
+          <a:prstGeom prst="rect">
+            <a:avLst/>
+          </a:prstGeom>
+          <a:noFill/>
+        </p:spPr>
+        <p:txBody>
+          <a:bodyPr wrap="square" rtlCol="0">
+            <a:spAutoFit/>
+          </a:bodyPr>
+          <a:lstStyle/>
+          <a:p>
+            <a:pPr marL="457200" indent="-457200">
+              <a:buFont typeface="Arial" panose="020B0604020202020204" pitchFamily="34" charset="0"/>
+              <a:buChar char="•"/>
+            </a:pPr>
+            <a:r>
+              <a:rPr lang="en-US" sz="2400">
+                <a:solidFill>
+                  <a:schemeClr val="accent1">
+                    <a:lumMod val="50000"/>
+                  </a:schemeClr>
+                </a:solidFill>
+                <a:latin typeface="Arial" panose="020B0604020202020204" pitchFamily="34" charset="0"/>
+                <a:cs typeface="Arial" panose="020B0604020202020204" pitchFamily="34" charset="0"/>
+              </a:rPr>
+              <a:t>Secure Iteration Practices</a:t>
+            </a:r>
+          </a:p>
+          <a:p>
+            <a:pPr marL="914400" lvl="1" indent="-457200">
+              <a:buFont typeface="Arial" panose="020B0604020202020204" pitchFamily="34" charset="0"/>
+              <a:buChar char="•"/>
+            </a:pPr>
+            <a:r>
+              <a:rPr lang="en-US" sz="2400">
+                <a:solidFill>
+                  <a:schemeClr val="accent1">
+                    <a:lumMod val="50000"/>
+                  </a:schemeClr>
+                </a:solidFill>
+                <a:latin typeface="Arial" panose="020B0604020202020204" pitchFamily="34" charset="0"/>
+                <a:cs typeface="Arial" panose="020B0604020202020204" pitchFamily="34" charset="0"/>
+              </a:rPr>
+              <a:t>Avoid infinite loops and ensuring proper termination</a:t>
+            </a:r>
+          </a:p>
+          <a:p>
+            <a:pPr marL="914400" lvl="1" indent="-457200">
+              <a:buFont typeface="Arial" panose="020B0604020202020204" pitchFamily="34" charset="0"/>
+              <a:buChar char="•"/>
+            </a:pPr>
+            <a:r>
+              <a:rPr lang="en-US" sz="2400">
+                <a:solidFill>
+                  <a:schemeClr val="accent1">
+                    <a:lumMod val="50000"/>
+                  </a:schemeClr>
+                </a:solidFill>
+                <a:latin typeface="Arial" panose="020B0604020202020204" pitchFamily="34" charset="0"/>
+                <a:cs typeface="Arial" panose="020B0604020202020204" pitchFamily="34" charset="0"/>
+              </a:rPr>
+              <a:t>Use generator expressions for memory-efficient iteration</a:t>
+            </a:r>
+          </a:p>
+          <a:p>
+            <a:pPr marL="457200" indent="-457200">
+              <a:buFont typeface="Arial" panose="020B0604020202020204" pitchFamily="34" charset="0"/>
+              <a:buChar char="•"/>
+            </a:pPr>
+            <a:r>
+              <a:rPr lang="en-US" sz="2400">
+                <a:solidFill>
+                  <a:schemeClr val="accent1">
+                    <a:lumMod val="50000"/>
+                  </a:schemeClr>
+                </a:solidFill>
+                <a:latin typeface="Arial" panose="020B0604020202020204" pitchFamily="34" charset="0"/>
+                <a:cs typeface="Arial" panose="020B0604020202020204" pitchFamily="34" charset="0"/>
+              </a:rPr>
+              <a:t>Lists and Tuples: Security Considerations</a:t>
+            </a:r>
+          </a:p>
+          <a:p>
+            <a:pPr marL="914400" lvl="1" indent="-457200">
+              <a:buFont typeface="Arial" panose="020B0604020202020204" pitchFamily="34" charset="0"/>
+              <a:buChar char="•"/>
+            </a:pPr>
+            <a:r>
+              <a:rPr lang="en-US" sz="2400">
+                <a:solidFill>
+                  <a:schemeClr val="accent1">
+                    <a:lumMod val="50000"/>
+                  </a:schemeClr>
+                </a:solidFill>
+                <a:latin typeface="Arial" panose="020B0604020202020204" pitchFamily="34" charset="0"/>
+                <a:cs typeface="Arial" panose="020B0604020202020204" pitchFamily="34" charset="0"/>
+              </a:rPr>
+              <a:t>Prevent unintended data modifications in lists</a:t>
+            </a:r>
+          </a:p>
+          <a:p>
+            <a:pPr marL="914400" lvl="1" indent="-457200">
+              <a:buFont typeface="Arial" panose="020B0604020202020204" pitchFamily="34" charset="0"/>
+              <a:buChar char="•"/>
+            </a:pPr>
+            <a:r>
+              <a:rPr lang="en-US" sz="2400">
+                <a:solidFill>
+                  <a:schemeClr val="accent1">
+                    <a:lumMod val="50000"/>
+                  </a:schemeClr>
+                </a:solidFill>
+                <a:latin typeface="Arial" panose="020B0604020202020204" pitchFamily="34" charset="0"/>
+                <a:cs typeface="Arial" panose="020B0604020202020204" pitchFamily="34" charset="0"/>
+              </a:rPr>
+              <a:t>Use tuples for immutable, security-sensitive data</a:t>
+            </a:r>
+          </a:p>
+          <a:p>
+            <a:pPr marL="914400" lvl="1" indent="-457200">
+              <a:buFont typeface="Arial" panose="020B0604020202020204" pitchFamily="34" charset="0"/>
+              <a:buChar char="•"/>
+            </a:pPr>
+            <a:r>
+              <a:rPr lang="en-US" sz="2400">
+                <a:solidFill>
+                  <a:schemeClr val="accent1">
+                    <a:lumMod val="50000"/>
+                  </a:schemeClr>
+                </a:solidFill>
+                <a:latin typeface="Arial" panose="020B0604020202020204" pitchFamily="34" charset="0"/>
+                <a:cs typeface="Arial" panose="020B0604020202020204" pitchFamily="34" charset="0"/>
+              </a:rPr>
+              <a:t>Avoid index errors and boundary overflows</a:t>
+            </a:r>
+          </a:p>
+          <a:p>
+            <a:pPr marL="457200" indent="-457200">
+              <a:buFont typeface="Arial" panose="020B0604020202020204" pitchFamily="34" charset="0"/>
+              <a:buChar char="•"/>
+            </a:pPr>
+            <a:r>
+              <a:rPr lang="en-US" sz="2400">
+                <a:solidFill>
+                  <a:schemeClr val="accent1">
+                    <a:lumMod val="50000"/>
+                  </a:schemeClr>
+                </a:solidFill>
+                <a:latin typeface="Arial" panose="020B0604020202020204" pitchFamily="34" charset="0"/>
+                <a:cs typeface="Arial" panose="020B0604020202020204" pitchFamily="34" charset="0"/>
+              </a:rPr>
+              <a:t>Dictionaries and Secure Data Handling</a:t>
+            </a:r>
+          </a:p>
+          <a:p>
+            <a:pPr marL="914400" lvl="1" indent="-457200">
+              <a:buFont typeface="Arial" panose="020B0604020202020204" pitchFamily="34" charset="0"/>
+              <a:buChar char="•"/>
+            </a:pPr>
+            <a:r>
+              <a:rPr lang="en-US" sz="2400">
+                <a:solidFill>
+                  <a:schemeClr val="accent1">
+                    <a:lumMod val="50000"/>
+                  </a:schemeClr>
+                </a:solidFill>
+                <a:latin typeface="Arial" panose="020B0604020202020204" pitchFamily="34" charset="0"/>
+                <a:cs typeface="Arial" panose="020B0604020202020204" pitchFamily="34" charset="0"/>
+              </a:rPr>
+              <a:t>Prevent key collisions in sensitive data</a:t>
+            </a:r>
+          </a:p>
+          <a:p>
+            <a:pPr marL="914400" lvl="1" indent="-457200">
+              <a:buFont typeface="Arial" panose="020B0604020202020204" pitchFamily="34" charset="0"/>
+              <a:buChar char="•"/>
+            </a:pPr>
+            <a:r>
+              <a:rPr lang="en-US" sz="2400">
+                <a:solidFill>
+                  <a:schemeClr val="accent1">
+                    <a:lumMod val="50000"/>
+                  </a:schemeClr>
+                </a:solidFill>
+                <a:latin typeface="Arial" panose="020B0604020202020204" pitchFamily="34" charset="0"/>
+                <a:cs typeface="Arial" panose="020B0604020202020204" pitchFamily="34" charset="0"/>
+              </a:rPr>
+              <a:t>Handle missing keys securely to avoid runtime errors</a:t>
+            </a:r>
+          </a:p>
+          <a:p>
+            <a:pPr marL="914400" lvl="1" indent="-457200">
+              <a:buFont typeface="Arial" panose="020B0604020202020204" pitchFamily="34" charset="0"/>
+              <a:buChar char="•"/>
+            </a:pPr>
+            <a:r>
+              <a:rPr lang="en-US" sz="2400">
+                <a:solidFill>
+                  <a:schemeClr val="accent1">
+                    <a:lumMod val="50000"/>
+                  </a:schemeClr>
+                </a:solidFill>
+                <a:latin typeface="Arial" panose="020B0604020202020204" pitchFamily="34" charset="0"/>
+                <a:cs typeface="Arial" panose="020B0604020202020204" pitchFamily="34" charset="0"/>
+              </a:rPr>
+              <a:t>Use defaultdict and exception handling for safe lookups</a:t>
+            </a:r>
+          </a:p>
+          <a:p>
+            <a:pPr marL="457200" indent="-457200">
+              <a:buFont typeface="Arial" panose="020B0604020202020204" pitchFamily="34" charset="0"/>
+              <a:buChar char="•"/>
+            </a:pPr>
+            <a:r>
+              <a:rPr lang="en-US" sz="2400">
+                <a:solidFill>
+                  <a:schemeClr val="accent1">
+                    <a:lumMod val="50000"/>
+                  </a:schemeClr>
+                </a:solidFill>
+                <a:latin typeface="Arial" panose="020B0604020202020204" pitchFamily="34" charset="0"/>
+                <a:cs typeface="Arial" panose="020B0604020202020204" pitchFamily="34" charset="0"/>
+              </a:rPr>
+              <a:t>Mitigating Risks in Data Structures</a:t>
+            </a:r>
+          </a:p>
+          <a:p>
+            <a:pPr marL="914400" lvl="1" indent="-457200">
+              <a:buFont typeface="Arial" panose="020B0604020202020204" pitchFamily="34" charset="0"/>
+              <a:buChar char="•"/>
+            </a:pPr>
+            <a:r>
+              <a:rPr lang="en-US" sz="2400">
+                <a:solidFill>
+                  <a:schemeClr val="accent1">
+                    <a:lumMod val="50000"/>
+                  </a:schemeClr>
+                </a:solidFill>
+                <a:latin typeface="Arial" panose="020B0604020202020204" pitchFamily="34" charset="0"/>
+                <a:cs typeface="Arial" panose="020B0604020202020204" pitchFamily="34" charset="0"/>
+              </a:rPr>
+              <a:t>Avoid mutable default arguments in function definitions</a:t>
+            </a:r>
+          </a:p>
+          <a:p>
+            <a:pPr marL="914400" lvl="1" indent="-457200">
+              <a:buFont typeface="Arial" panose="020B0604020202020204" pitchFamily="34" charset="0"/>
+              <a:buChar char="•"/>
+            </a:pPr>
+            <a:r>
+              <a:rPr lang="en-US" sz="2400">
+                <a:solidFill>
+                  <a:schemeClr val="accent1">
+                    <a:lumMod val="50000"/>
+                  </a:schemeClr>
+                </a:solidFill>
+                <a:latin typeface="Arial" panose="020B0604020202020204" pitchFamily="34" charset="0"/>
+                <a:cs typeface="Arial" panose="020B0604020202020204" pitchFamily="34" charset="0"/>
+              </a:rPr>
+              <a:t>Prevent race conditions when modifying shared data</a:t>
+            </a:r>
+          </a:p>
+          <a:p>
+            <a:pPr marL="914400" lvl="1" indent="-457200">
+              <a:buFont typeface="Arial" panose="020B0604020202020204" pitchFamily="34" charset="0"/>
+              <a:buChar char="•"/>
+            </a:pPr>
+            <a:r>
+              <a:rPr lang="en-US" sz="2400">
+                <a:solidFill>
+                  <a:schemeClr val="accent1">
+                    <a:lumMod val="50000"/>
+                  </a:schemeClr>
+                </a:solidFill>
+                <a:latin typeface="Arial" panose="020B0604020202020204" pitchFamily="34" charset="0"/>
+                <a:cs typeface="Arial" panose="020B0604020202020204" pitchFamily="34" charset="0"/>
+              </a:rPr>
+              <a:t>Use secure hashing techniques for dictionary keys</a:t>
+            </a:r>
+          </a:p>
+        </p:txBody>
+      </p:sp>
+    </p:spTree>
+    <p:extLst>
+      <p:ext uri="{BB962C8B-B14F-4D97-AF65-F5344CB8AC3E}">
+        <p14:creationId xmlns:p14="http://schemas.microsoft.com/office/powerpoint/2010/main" val="2144214793"/>
       </p:ext>
     </p:extLst>
   </p:cSld>
@@ -8766,7 +9519,7 @@
                 <a:latin typeface="Arial" panose="020B0604020202020204" pitchFamily="34" charset="0"/>
                 <a:cs typeface="Arial" panose="020B0604020202020204" pitchFamily="34" charset="0"/>
               </a:rPr>
-              <a:t>This ensures that security-sensitive data, such as API keys, credentials, or cryptographic parameters, cannot be modified accidentally or maliciously during runtime.</a:t>
+              <a:t>Security-sensitive data, such as API keys, credentials, or cryptographic parameters, cannot be modified accidentally or maliciously during runtime.</a:t>
             </a:r>
           </a:p>
           <a:p>
@@ -8841,7 +9594,7 @@
                 <a:latin typeface="Arial" panose="020B0604020202020204" pitchFamily="34" charset="0"/>
                 <a:cs typeface="Arial" panose="020B0604020202020204" pitchFamily="34" charset="0"/>
               </a:rPr>
-              <a:t>They cannot be altered by malicious code that may attempt to overwrite, inject, or tamper with data during execution.</a:t>
+              <a:t>Cannot be altered by malicious code that may attempt to overwrite, inject, or tamper with data during execution.</a:t>
             </a:r>
           </a:p>
           <a:p>
@@ -8859,7 +9612,7 @@
                 <a:latin typeface="Arial" panose="020B0604020202020204" pitchFamily="34" charset="0"/>
                 <a:cs typeface="Arial" panose="020B0604020202020204" pitchFamily="34" charset="0"/>
               </a:rPr>
-              <a:t>This is particularly useful in multi-threaded environments, where shared data should remain constant and unchangeable.</a:t>
+              <a:t>Particularly useful in multi-threaded environments, where shared data should remain constant and unchangeable.</a:t>
             </a:r>
           </a:p>
         </p:txBody>

--- a/Slides-Day2.pptx
+++ b/Slides-Day2.pptx
@@ -23,9 +23,18 @@
     <p:sldId id="277" r:id="rId17"/>
     <p:sldId id="278" r:id="rId18"/>
     <p:sldId id="280" r:id="rId19"/>
-    <p:sldId id="276" r:id="rId20"/>
-    <p:sldId id="275" r:id="rId21"/>
-    <p:sldId id="270" r:id="rId22"/>
+    <p:sldId id="282" r:id="rId20"/>
+    <p:sldId id="281" r:id="rId21"/>
+    <p:sldId id="284" r:id="rId22"/>
+    <p:sldId id="285" r:id="rId23"/>
+    <p:sldId id="283" r:id="rId24"/>
+    <p:sldId id="286" r:id="rId25"/>
+    <p:sldId id="287" r:id="rId26"/>
+    <p:sldId id="288" r:id="rId27"/>
+    <p:sldId id="289" r:id="rId28"/>
+    <p:sldId id="276" r:id="rId29"/>
+    <p:sldId id="275" r:id="rId30"/>
+    <p:sldId id="270" r:id="rId31"/>
   </p:sldIdLst>
   <p:sldSz cx="12192000" cy="6858000"/>
   <p:notesSz cx="6858000" cy="9144000"/>
@@ -279,7 +288,7 @@
           <a:p>
             <a:fld id="{CD989C08-BA69-4AD3-98E9-D53C63F6E1B1}" type="datetimeFigureOut">
               <a:rPr lang="en-US" smtClean="0"/>
-              <a:t>3/17/2025</a:t>
+              <a:t>3/19/2025</a:t>
             </a:fld>
             <a:endParaRPr lang="en-US"/>
           </a:p>
@@ -477,7 +486,7 @@
           <a:p>
             <a:fld id="{CD989C08-BA69-4AD3-98E9-D53C63F6E1B1}" type="datetimeFigureOut">
               <a:rPr lang="en-US" smtClean="0"/>
-              <a:t>3/17/2025</a:t>
+              <a:t>3/19/2025</a:t>
             </a:fld>
             <a:endParaRPr lang="en-US"/>
           </a:p>
@@ -685,7 +694,7 @@
           <a:p>
             <a:fld id="{CD989C08-BA69-4AD3-98E9-D53C63F6E1B1}" type="datetimeFigureOut">
               <a:rPr lang="en-US" smtClean="0"/>
-              <a:t>3/17/2025</a:t>
+              <a:t>3/19/2025</a:t>
             </a:fld>
             <a:endParaRPr lang="en-US"/>
           </a:p>
@@ -883,7 +892,7 @@
           <a:p>
             <a:fld id="{CD989C08-BA69-4AD3-98E9-D53C63F6E1B1}" type="datetimeFigureOut">
               <a:rPr lang="en-US" smtClean="0"/>
-              <a:t>3/17/2025</a:t>
+              <a:t>3/19/2025</a:t>
             </a:fld>
             <a:endParaRPr lang="en-US"/>
           </a:p>
@@ -1158,7 +1167,7 @@
           <a:p>
             <a:fld id="{CD989C08-BA69-4AD3-98E9-D53C63F6E1B1}" type="datetimeFigureOut">
               <a:rPr lang="en-US" smtClean="0"/>
-              <a:t>3/17/2025</a:t>
+              <a:t>3/19/2025</a:t>
             </a:fld>
             <a:endParaRPr lang="en-US"/>
           </a:p>
@@ -1423,7 +1432,7 @@
           <a:p>
             <a:fld id="{CD989C08-BA69-4AD3-98E9-D53C63F6E1B1}" type="datetimeFigureOut">
               <a:rPr lang="en-US" smtClean="0"/>
-              <a:t>3/17/2025</a:t>
+              <a:t>3/19/2025</a:t>
             </a:fld>
             <a:endParaRPr lang="en-US"/>
           </a:p>
@@ -1835,7 +1844,7 @@
           <a:p>
             <a:fld id="{CD989C08-BA69-4AD3-98E9-D53C63F6E1B1}" type="datetimeFigureOut">
               <a:rPr lang="en-US" smtClean="0"/>
-              <a:t>3/17/2025</a:t>
+              <a:t>3/19/2025</a:t>
             </a:fld>
             <a:endParaRPr lang="en-US"/>
           </a:p>
@@ -1976,7 +1985,7 @@
           <a:p>
             <a:fld id="{CD989C08-BA69-4AD3-98E9-D53C63F6E1B1}" type="datetimeFigureOut">
               <a:rPr lang="en-US" smtClean="0"/>
-              <a:t>3/17/2025</a:t>
+              <a:t>3/19/2025</a:t>
             </a:fld>
             <a:endParaRPr lang="en-US"/>
           </a:p>
@@ -2089,7 +2098,7 @@
           <a:p>
             <a:fld id="{CD989C08-BA69-4AD3-98E9-D53C63F6E1B1}" type="datetimeFigureOut">
               <a:rPr lang="en-US" smtClean="0"/>
-              <a:t>3/17/2025</a:t>
+              <a:t>3/19/2025</a:t>
             </a:fld>
             <a:endParaRPr lang="en-US"/>
           </a:p>
@@ -2400,7 +2409,7 @@
           <a:p>
             <a:fld id="{CD989C08-BA69-4AD3-98E9-D53C63F6E1B1}" type="datetimeFigureOut">
               <a:rPr lang="en-US" smtClean="0"/>
-              <a:t>3/17/2025</a:t>
+              <a:t>3/19/2025</a:t>
             </a:fld>
             <a:endParaRPr lang="en-US"/>
           </a:p>
@@ -2688,7 +2697,7 @@
           <a:p>
             <a:fld id="{CD989C08-BA69-4AD3-98E9-D53C63F6E1B1}" type="datetimeFigureOut">
               <a:rPr lang="en-US" smtClean="0"/>
-              <a:t>3/17/2025</a:t>
+              <a:t>3/19/2025</a:t>
             </a:fld>
             <a:endParaRPr lang="en-US"/>
           </a:p>
@@ -2929,7 +2938,7 @@
           <a:p>
             <a:fld id="{CD989C08-BA69-4AD3-98E9-D53C63F6E1B1}" type="datetimeFigureOut">
               <a:rPr lang="en-US" smtClean="0"/>
-              <a:t>3/17/2025</a:t>
+              <a:t>3/19/2025</a:t>
             </a:fld>
             <a:endParaRPr lang="en-US"/>
           </a:p>
@@ -5330,7 +5339,7 @@
         <p:spPr>
           <a:xfrm>
             <a:off x="836614" y="906971"/>
-            <a:ext cx="10323564" cy="4154984"/>
+            <a:ext cx="10323564" cy="4339650"/>
           </a:xfrm>
           <a:prstGeom prst="rect">
             <a:avLst/>
@@ -5348,7 +5357,7 @@
               <a:buChar char="•"/>
             </a:pPr>
             <a:r>
-              <a:rPr lang="en-US" sz="2400">
+              <a:rPr lang="en-US" sz="2800">
                 <a:solidFill>
                   <a:schemeClr val="accent1">
                     <a:lumMod val="50000"/>
@@ -5366,7 +5375,7 @@
               <a:buChar char="•"/>
             </a:pPr>
             <a:r>
-              <a:rPr lang="en-US" sz="2400">
+              <a:rPr lang="en-US" sz="2800">
                 <a:solidFill>
                   <a:schemeClr val="accent1">
                     <a:lumMod val="50000"/>
@@ -5384,7 +5393,7 @@
               <a:buChar char="•"/>
             </a:pPr>
             <a:r>
-              <a:rPr lang="en-US" sz="2400">
+              <a:rPr lang="en-US" sz="2800">
                 <a:solidFill>
                   <a:schemeClr val="accent1">
                     <a:lumMod val="50000"/>
@@ -5599,7 +5608,7 @@
         <p:spPr>
           <a:xfrm>
             <a:off x="604266" y="136955"/>
-            <a:ext cx="10391019" cy="646331"/>
+            <a:ext cx="10555912" cy="646331"/>
           </a:xfrm>
           <a:prstGeom prst="rect">
             <a:avLst/>
@@ -5622,7 +5631,7 @@
                 <a:latin typeface="Arial" panose="020B0604020202020204" pitchFamily="34" charset="0"/>
                 <a:cs typeface="Arial" panose="020B0604020202020204" pitchFamily="34" charset="0"/>
               </a:rPr>
-              <a:t>Prefer Iteration Over Direct Indexing (Lists)</a:t>
+              <a:t>Prefer Built-In Iteration Over Direct Indexing (Lists)</a:t>
             </a:r>
           </a:p>
         </p:txBody>
@@ -6240,7 +6249,7 @@
         </p:nvSpPr>
         <p:spPr>
           <a:xfrm>
-            <a:off x="8968803" y="4107847"/>
+            <a:off x="7140003" y="4739363"/>
             <a:ext cx="2197933" cy="1015663"/>
           </a:xfrm>
           <a:prstGeom prst="rect">
@@ -6333,7 +6342,7 @@
         </p:blipFill>
         <p:spPr>
           <a:xfrm>
-            <a:off x="0" y="-33129"/>
+            <a:off x="0" y="0"/>
             <a:ext cx="12192000" cy="6891129"/>
           </a:xfrm>
           <a:prstGeom prst="rect">
@@ -6379,7 +6388,7 @@
                 <a:latin typeface="Arial" panose="020B0604020202020204" pitchFamily="34" charset="0"/>
                 <a:cs typeface="Arial" panose="020B0604020202020204" pitchFamily="34" charset="0"/>
               </a:rPr>
-              <a:t>Prefer Iteration Over Direct Indexing</a:t>
+              <a:t>List Comprehensions</a:t>
             </a:r>
           </a:p>
         </p:txBody>
@@ -6399,7 +6408,7 @@
         <p:spPr>
           <a:xfrm>
             <a:off x="836614" y="906971"/>
-            <a:ext cx="10323564" cy="1938992"/>
+            <a:ext cx="10323564" cy="4401205"/>
           </a:xfrm>
           <a:prstGeom prst="rect">
             <a:avLst/>
@@ -6412,12 +6421,12 @@
           </a:bodyPr>
           <a:lstStyle/>
           <a:p>
-            <a:pPr marL="688975" lvl="1" indent="-230188">
+            <a:pPr marL="231775" lvl="1" indent="-230188">
               <a:buFont typeface="Arial" panose="020B0604020202020204" pitchFamily="34" charset="0"/>
               <a:buChar char="•"/>
             </a:pPr>
             <a:r>
-              <a:rPr lang="en-US" sz="2400">
+              <a:rPr lang="en-US" sz="2800">
                 <a:solidFill>
                   <a:schemeClr val="accent1">
                     <a:lumMod val="50000"/>
@@ -6426,16 +6435,16 @@
                 <a:latin typeface="Arial" panose="020B0604020202020204" pitchFamily="34" charset="0"/>
                 <a:cs typeface="Arial" panose="020B0604020202020204" pitchFamily="34" charset="0"/>
               </a:rPr>
-              <a:t>Use list comprehensions to avoid direct indexing.</a:t>
-            </a:r>
-          </a:p>
-          <a:p>
-            <a:pPr marL="688975" lvl="1" indent="-230188">
+              <a:t>While built-in iteration methods provide both provide security and efficiency benefits over direct indexing, list comprehensions can offer advantages</a:t>
+            </a:r>
+          </a:p>
+          <a:p>
+            <a:pPr marL="231775" lvl="1" indent="-230188">
               <a:buFont typeface="Arial" panose="020B0604020202020204" pitchFamily="34" charset="0"/>
               <a:buChar char="•"/>
             </a:pPr>
             <a:r>
-              <a:rPr lang="en-US" sz="2400">
+              <a:rPr lang="en-US" sz="2800">
                 <a:solidFill>
                   <a:schemeClr val="accent1">
                     <a:lumMod val="50000"/>
@@ -6444,11 +6453,11 @@
                 <a:latin typeface="Arial" panose="020B0604020202020204" pitchFamily="34" charset="0"/>
                 <a:cs typeface="Arial" panose="020B0604020202020204" pitchFamily="34" charset="0"/>
               </a:rPr>
-              <a:t>Consider zip() for iterating over multiple lists safely.</a:t>
-            </a:r>
-          </a:p>
-          <a:p>
-            <a:pPr marL="688975" lvl="1" indent="-230188">
+              <a:t>List comprehensions:</a:t>
+            </a:r>
+          </a:p>
+          <a:p>
+            <a:pPr marL="688975" lvl="2" indent="-230188">
               <a:buFont typeface="Arial" panose="020B0604020202020204" pitchFamily="34" charset="0"/>
               <a:buChar char="•"/>
             </a:pPr>
@@ -6462,23 +6471,62 @@
                 <a:latin typeface="Arial" panose="020B0604020202020204" pitchFamily="34" charset="0"/>
                 <a:cs typeface="Arial" panose="020B0604020202020204" pitchFamily="34" charset="0"/>
               </a:rPr>
-              <a:t>Avoid modifying a list while iterating over it.</a:t>
-            </a:r>
-          </a:p>
-          <a:p>
-            <a:pPr marL="688975" lvl="1" indent="-230188">
+              <a:t>are more readable than built-in iteration functions, making code easier to understand.</a:t>
+            </a:r>
+          </a:p>
+          <a:p>
+            <a:pPr marL="688975" lvl="2" indent="-230188">
               <a:buFont typeface="Arial" panose="020B0604020202020204" pitchFamily="34" charset="0"/>
               <a:buChar char="•"/>
             </a:pPr>
-            <a:endParaRPr lang="en-US" sz="2400">
-              <a:solidFill>
-                <a:schemeClr val="accent1">
-                  <a:lumMod val="50000"/>
-                </a:schemeClr>
-              </a:solidFill>
-              <a:latin typeface="Arial" panose="020B0604020202020204" pitchFamily="34" charset="0"/>
-              <a:cs typeface="Arial" panose="020B0604020202020204" pitchFamily="34" charset="0"/>
-            </a:endParaRPr>
+            <a:r>
+              <a:rPr lang="en-US" sz="2400">
+                <a:solidFill>
+                  <a:schemeClr val="accent1">
+                    <a:lumMod val="50000"/>
+                  </a:schemeClr>
+                </a:solidFill>
+                <a:latin typeface="Arial" panose="020B0604020202020204" pitchFamily="34" charset="0"/>
+                <a:cs typeface="Arial" panose="020B0604020202020204" pitchFamily="34" charset="0"/>
+              </a:rPr>
+              <a:t>allow inline conditions (if-else) without needing additional filter() calls or complex lambda functions.</a:t>
+            </a:r>
+          </a:p>
+          <a:p>
+            <a:pPr marL="688975" lvl="2" indent="-230188">
+              <a:buFont typeface="Arial" panose="020B0604020202020204" pitchFamily="34" charset="0"/>
+              <a:buChar char="•"/>
+            </a:pPr>
+            <a:r>
+              <a:rPr lang="en-US" sz="2400">
+                <a:solidFill>
+                  <a:schemeClr val="accent1">
+                    <a:lumMod val="50000"/>
+                  </a:schemeClr>
+                </a:solidFill>
+                <a:latin typeface="Arial" panose="020B0604020202020204" pitchFamily="34" charset="0"/>
+                <a:cs typeface="Arial" panose="020B0604020202020204" pitchFamily="34" charset="0"/>
+              </a:rPr>
+              <a:t>are optimized at the C-level, often making them faster.</a:t>
+            </a:r>
+          </a:p>
+          <a:p>
+            <a:pPr marL="688975" lvl="2" indent="-230188">
+              <a:buFont typeface="Arial" panose="020B0604020202020204" pitchFamily="34" charset="0"/>
+              <a:buChar char="•"/>
+            </a:pPr>
+            <a:r>
+              <a:rPr lang="en-US" sz="2400">
+                <a:solidFill>
+                  <a:schemeClr val="accent1">
+                    <a:lumMod val="50000"/>
+                  </a:schemeClr>
+                </a:solidFill>
+                <a:latin typeface="Arial" panose="020B0604020202020204" pitchFamily="34" charset="0"/>
+                <a:cs typeface="Arial" panose="020B0604020202020204" pitchFamily="34" charset="0"/>
+              </a:rPr>
+              <a:t>can be simpler to debug when dealing with complex transformations.</a:t>
+            </a:r>
           </a:p>
           <a:p>
             <a:pPr marL="231775" indent="-230188">
@@ -6518,7 +6566,7 @@
         <p:cNvPr id="1" name="">
           <a:extLst>
             <a:ext uri="{FF2B5EF4-FFF2-40B4-BE49-F238E27FC236}">
-              <a16:creationId xmlns:a16="http://schemas.microsoft.com/office/drawing/2014/main" id="{AD7AD56E-A206-1EEC-3822-49F56A5DC2BA}"/>
+              <a16:creationId xmlns:a16="http://schemas.microsoft.com/office/drawing/2014/main" id="{B61CAB27-B9C3-B935-6F8C-5FD25840F572}"/>
             </a:ext>
           </a:extLst>
         </p:cNvPr>
@@ -6538,7 +6586,7 @@
           <p:cNvPr id="3" name="Picture 2" descr="A white and blue background&#10;&#10;Description automatically generated">
             <a:extLst>
               <a:ext uri="{FF2B5EF4-FFF2-40B4-BE49-F238E27FC236}">
-                <a16:creationId xmlns:a16="http://schemas.microsoft.com/office/drawing/2014/main" id="{6067919F-18A3-0674-C8E3-811FA5936DB1}"/>
+                <a16:creationId xmlns:a16="http://schemas.microsoft.com/office/drawing/2014/main" id="{8B89F517-1C77-81C4-CF76-ACE6293E45E2}"/>
               </a:ext>
             </a:extLst>
           </p:cNvPr>
@@ -6555,7 +6603,7 @@
         </p:blipFill>
         <p:spPr>
           <a:xfrm>
-            <a:off x="0" y="-33129"/>
+            <a:off x="0" y="0"/>
             <a:ext cx="12192000" cy="6891129"/>
           </a:xfrm>
           <a:prstGeom prst="rect">
@@ -6568,7 +6616,7 @@
           <p:cNvPr id="4" name="TextBox 3">
             <a:extLst>
               <a:ext uri="{FF2B5EF4-FFF2-40B4-BE49-F238E27FC236}">
-                <a16:creationId xmlns:a16="http://schemas.microsoft.com/office/drawing/2014/main" id="{BB5B4A96-E408-CCB1-D5A3-06E315E5F059}"/>
+                <a16:creationId xmlns:a16="http://schemas.microsoft.com/office/drawing/2014/main" id="{B3DC462E-1390-0DBB-1052-5EA4EF595F9C}"/>
               </a:ext>
             </a:extLst>
           </p:cNvPr>
@@ -6601,7 +6649,7 @@
                 <a:latin typeface="Arial" panose="020B0604020202020204" pitchFamily="34" charset="0"/>
                 <a:cs typeface="Arial" panose="020B0604020202020204" pitchFamily="34" charset="0"/>
               </a:rPr>
-              <a:t>Handling Index Errors Gracefully (Dictionaries)</a:t>
+              <a:t>List Comprehensions</a:t>
             </a:r>
           </a:p>
         </p:txBody>
@@ -6611,7 +6659,7 @@
           <p:cNvPr id="5" name="TextBox 4">
             <a:extLst>
               <a:ext uri="{FF2B5EF4-FFF2-40B4-BE49-F238E27FC236}">
-                <a16:creationId xmlns:a16="http://schemas.microsoft.com/office/drawing/2014/main" id="{7DF1EA63-7C13-F91D-C2B9-43B469355014}"/>
+                <a16:creationId xmlns:a16="http://schemas.microsoft.com/office/drawing/2014/main" id="{F2846A13-0C2B-A4B1-0169-9A864560901B}"/>
               </a:ext>
             </a:extLst>
           </p:cNvPr>
@@ -6621,7 +6669,7 @@
         <p:spPr>
           <a:xfrm>
             <a:off x="836614" y="906971"/>
-            <a:ext cx="10323564" cy="1569660"/>
+            <a:ext cx="10323564" cy="5016758"/>
           </a:xfrm>
           <a:prstGeom prst="rect">
             <a:avLst/>
@@ -6634,72 +6682,355 @@
           </a:bodyPr>
           <a:lstStyle/>
           <a:p>
-            <a:pPr marL="231775" indent="-230188">
-              <a:buFont typeface="Arial" panose="020B0604020202020204" pitchFamily="34" charset="0"/>
-              <a:buChar char="•"/>
-            </a:pPr>
-            <a:endParaRPr lang="en-US" sz="2400">
+            <a:pPr marL="1587" lvl="1"/>
+            <a:r>
+              <a:rPr lang="en-US" sz="1600" b="1">
+                <a:solidFill>
+                  <a:schemeClr val="accent1">
+                    <a:lumMod val="50000"/>
+                  </a:schemeClr>
+                </a:solidFill>
+                <a:latin typeface="Consolas" panose="020B0609020204030204" pitchFamily="49" charset="0"/>
+                <a:cs typeface="Arial" panose="020B0604020202020204" pitchFamily="34" charset="0"/>
+              </a:rPr>
+              <a:t>numbers = [1, 2, 3, 4, 5, 6]</a:t>
+            </a:r>
+          </a:p>
+          <a:p>
+            <a:pPr marL="1587" lvl="1"/>
+            <a:endParaRPr lang="en-US" sz="1600" b="1">
               <a:solidFill>
                 <a:schemeClr val="accent1">
                   <a:lumMod val="50000"/>
                 </a:schemeClr>
               </a:solidFill>
-              <a:latin typeface="Arial" panose="020B0604020202020204" pitchFamily="34" charset="0"/>
+              <a:latin typeface="Consolas" panose="020B0609020204030204" pitchFamily="49" charset="0"/>
               <a:cs typeface="Arial" panose="020B0604020202020204" pitchFamily="34" charset="0"/>
             </a:endParaRPr>
           </a:p>
           <a:p>
-            <a:pPr marL="231775" indent="-230188">
-              <a:buFont typeface="Arial" panose="020B0604020202020204" pitchFamily="34" charset="0"/>
-              <a:buChar char="•"/>
-            </a:pPr>
-            <a:r>
-              <a:rPr lang="en-US" sz="2400">
-                <a:solidFill>
-                  <a:schemeClr val="accent1">
-                    <a:lumMod val="50000"/>
-                  </a:schemeClr>
-                </a:solidFill>
-                <a:latin typeface="Arial" panose="020B0604020202020204" pitchFamily="34" charset="0"/>
-                <a:cs typeface="Arial" panose="020B0604020202020204" pitchFamily="34" charset="0"/>
-              </a:rPr>
-              <a:t>Prefer dict.get() for dictionaries instead of direct key access.</a:t>
-            </a:r>
-          </a:p>
-          <a:p>
-            <a:pPr marL="231775" indent="-230188">
-              <a:buFont typeface="Arial" panose="020B0604020202020204" pitchFamily="34" charset="0"/>
-              <a:buChar char="•"/>
-            </a:pPr>
-            <a:r>
-              <a:rPr lang="en-US" sz="2400">
-                <a:solidFill>
-                  <a:schemeClr val="accent1">
-                    <a:lumMod val="50000"/>
-                  </a:schemeClr>
-                </a:solidFill>
-                <a:latin typeface="Arial" panose="020B0604020202020204" pitchFamily="34" charset="0"/>
-                <a:cs typeface="Arial" panose="020B0604020202020204" pitchFamily="34" charset="0"/>
-              </a:rPr>
-              <a:t>Use defaultdict for missing dictionary keys.</a:t>
-            </a:r>
-          </a:p>
-          <a:p>
-            <a:pPr marL="231775" indent="-230188">
-              <a:buFont typeface="Arial" panose="020B0604020202020204" pitchFamily="34" charset="0"/>
-              <a:buChar char="•"/>
-            </a:pPr>
-            <a:r>
-              <a:rPr lang="en-US" sz="2400">
-                <a:solidFill>
-                  <a:schemeClr val="accent1">
-                    <a:lumMod val="50000"/>
-                  </a:schemeClr>
-                </a:solidFill>
-                <a:latin typeface="Arial" panose="020B0604020202020204" pitchFamily="34" charset="0"/>
-                <a:cs typeface="Arial" panose="020B0604020202020204" pitchFamily="34" charset="0"/>
-              </a:rPr>
-              <a:t>Prefer get() for optional dictionary lookups.</a:t>
+            <a:pPr marL="1587" lvl="1"/>
+            <a:r>
+              <a:rPr lang="en-US" sz="1600" b="1">
+                <a:solidFill>
+                  <a:schemeClr val="accent1">
+                    <a:lumMod val="50000"/>
+                  </a:schemeClr>
+                </a:solidFill>
+                <a:latin typeface="Consolas" panose="020B0609020204030204" pitchFamily="49" charset="0"/>
+                <a:cs typeface="Arial" panose="020B0604020202020204" pitchFamily="34" charset="0"/>
+              </a:rPr>
+              <a:t># Compare list comprehension to map/filter for readability</a:t>
+            </a:r>
+          </a:p>
+          <a:p>
+            <a:pPr marL="1587" lvl="1"/>
+            <a:r>
+              <a:rPr lang="en-US" sz="1600" b="1">
+                <a:solidFill>
+                  <a:schemeClr val="accent1">
+                    <a:lumMod val="50000"/>
+                  </a:schemeClr>
+                </a:solidFill>
+                <a:latin typeface="Consolas" panose="020B0609020204030204" pitchFamily="49" charset="0"/>
+                <a:cs typeface="Arial" panose="020B0604020202020204" pitchFamily="34" charset="0"/>
+              </a:rPr>
+              <a:t>squared_evens = [x**2 for x in numbers if x % 2 == 0]</a:t>
+            </a:r>
+          </a:p>
+          <a:p>
+            <a:pPr marL="1587" lvl="1"/>
+            <a:r>
+              <a:rPr lang="en-US" sz="1600" b="1">
+                <a:solidFill>
+                  <a:schemeClr val="accent1">
+                    <a:lumMod val="50000"/>
+                  </a:schemeClr>
+                </a:solidFill>
+                <a:latin typeface="Consolas" panose="020B0609020204030204" pitchFamily="49" charset="0"/>
+                <a:cs typeface="Arial" panose="020B0604020202020204" pitchFamily="34" charset="0"/>
+              </a:rPr>
+              <a:t>squared_evens_map = list(map(lambda x: x**2, filter(lambda x: x % 2 == 0, numbers)))</a:t>
+            </a:r>
+          </a:p>
+          <a:p>
+            <a:pPr marL="1587" lvl="1"/>
+            <a:r>
+              <a:rPr lang="en-US" sz="1600" b="1">
+                <a:solidFill>
+                  <a:schemeClr val="accent1">
+                    <a:lumMod val="50000"/>
+                  </a:schemeClr>
+                </a:solidFill>
+                <a:latin typeface="Consolas" panose="020B0609020204030204" pitchFamily="49" charset="0"/>
+                <a:cs typeface="Arial" panose="020B0604020202020204" pitchFamily="34" charset="0"/>
+              </a:rPr>
+              <a:t>print("List Comprehension:", squared_evens)</a:t>
+            </a:r>
+          </a:p>
+          <a:p>
+            <a:pPr marL="1587" lvl="1"/>
+            <a:r>
+              <a:rPr lang="en-US" sz="1600" b="1">
+                <a:solidFill>
+                  <a:schemeClr val="accent1">
+                    <a:lumMod val="50000"/>
+                  </a:schemeClr>
+                </a:solidFill>
+                <a:latin typeface="Consolas" panose="020B0609020204030204" pitchFamily="49" charset="0"/>
+                <a:cs typeface="Arial" panose="020B0604020202020204" pitchFamily="34" charset="0"/>
+              </a:rPr>
+              <a:t>print("Map + Filter:", squared_evens_map)</a:t>
+            </a:r>
+          </a:p>
+          <a:p>
+            <a:pPr marL="1587" lvl="1"/>
+            <a:endParaRPr lang="en-US" sz="1600" b="1">
+              <a:solidFill>
+                <a:schemeClr val="accent1">
+                  <a:lumMod val="50000"/>
+                </a:schemeClr>
+              </a:solidFill>
+              <a:latin typeface="Consolas" panose="020B0609020204030204" pitchFamily="49" charset="0"/>
+              <a:cs typeface="Arial" panose="020B0604020202020204" pitchFamily="34" charset="0"/>
+            </a:endParaRPr>
+          </a:p>
+          <a:p>
+            <a:pPr marL="1587" lvl="1"/>
+            <a:r>
+              <a:rPr lang="en-US" sz="1600" b="1">
+                <a:solidFill>
+                  <a:schemeClr val="accent1">
+                    <a:lumMod val="50000"/>
+                  </a:schemeClr>
+                </a:solidFill>
+                <a:latin typeface="Consolas" panose="020B0609020204030204" pitchFamily="49" charset="0"/>
+                <a:cs typeface="Arial" panose="020B0604020202020204" pitchFamily="34" charset="0"/>
+              </a:rPr>
+              <a:t># Inline conditions</a:t>
+            </a:r>
+          </a:p>
+          <a:p>
+            <a:pPr marL="1587" lvl="1"/>
+            <a:r>
+              <a:rPr lang="en-US" sz="1600" b="1">
+                <a:solidFill>
+                  <a:schemeClr val="accent1">
+                    <a:lumMod val="50000"/>
+                  </a:schemeClr>
+                </a:solidFill>
+                <a:latin typeface="Consolas" panose="020B0609020204030204" pitchFamily="49" charset="0"/>
+                <a:cs typeface="Arial" panose="020B0604020202020204" pitchFamily="34" charset="0"/>
+              </a:rPr>
+              <a:t>words = ["apple", "banana", "cherry", "date"]</a:t>
+            </a:r>
+          </a:p>
+          <a:p>
+            <a:pPr marL="1587" lvl="1"/>
+            <a:r>
+              <a:rPr lang="en-US" sz="1600" b="1">
+                <a:solidFill>
+                  <a:schemeClr val="accent1">
+                    <a:lumMod val="50000"/>
+                  </a:schemeClr>
+                </a:solidFill>
+                <a:latin typeface="Consolas" panose="020B0609020204030204" pitchFamily="49" charset="0"/>
+                <a:cs typeface="Arial" panose="020B0604020202020204" pitchFamily="34" charset="0"/>
+              </a:rPr>
+              <a:t>word_lengths = [len(word) if "a" in word else 0 for word in words]</a:t>
+            </a:r>
+          </a:p>
+          <a:p>
+            <a:pPr marL="1587" lvl="1"/>
+            <a:r>
+              <a:rPr lang="en-US" sz="1600" b="1">
+                <a:solidFill>
+                  <a:schemeClr val="accent1">
+                    <a:lumMod val="50000"/>
+                  </a:schemeClr>
+                </a:solidFill>
+                <a:latin typeface="Consolas" panose="020B0609020204030204" pitchFamily="49" charset="0"/>
+                <a:cs typeface="Arial" panose="020B0604020202020204" pitchFamily="34" charset="0"/>
+              </a:rPr>
+              <a:t>print("Word Lengths:", word_lengths)</a:t>
+            </a:r>
+          </a:p>
+          <a:p>
+            <a:pPr marL="1587" lvl="1"/>
+            <a:endParaRPr lang="en-US" sz="1600" b="1">
+              <a:solidFill>
+                <a:schemeClr val="accent1">
+                  <a:lumMod val="50000"/>
+                </a:schemeClr>
+              </a:solidFill>
+              <a:latin typeface="Consolas" panose="020B0609020204030204" pitchFamily="49" charset="0"/>
+              <a:cs typeface="Arial" panose="020B0604020202020204" pitchFamily="34" charset="0"/>
+            </a:endParaRPr>
+          </a:p>
+          <a:p>
+            <a:pPr marL="1587" lvl="1"/>
+            <a:r>
+              <a:rPr lang="en-US" sz="1600" b="1">
+                <a:solidFill>
+                  <a:schemeClr val="accent1">
+                    <a:lumMod val="50000"/>
+                  </a:schemeClr>
+                </a:solidFill>
+                <a:latin typeface="Consolas" panose="020B0609020204030204" pitchFamily="49" charset="0"/>
+                <a:cs typeface="Arial" panose="020B0604020202020204" pitchFamily="34" charset="0"/>
+              </a:rPr>
+              <a:t># Optimized execution</a:t>
+            </a:r>
+          </a:p>
+          <a:p>
+            <a:pPr marL="1587" lvl="1"/>
+            <a:r>
+              <a:rPr lang="en-US" sz="1600" b="1">
+                <a:solidFill>
+                  <a:schemeClr val="accent1">
+                    <a:lumMod val="50000"/>
+                  </a:schemeClr>
+                </a:solidFill>
+                <a:latin typeface="Consolas" panose="020B0609020204030204" pitchFamily="49" charset="0"/>
+                <a:cs typeface="Arial" panose="020B0604020202020204" pitchFamily="34" charset="0"/>
+              </a:rPr>
+              <a:t>large_numbers = list(range(1000000))</a:t>
+            </a:r>
+          </a:p>
+          <a:p>
+            <a:pPr marL="1587" lvl="1"/>
+            <a:r>
+              <a:rPr lang="en-US" sz="1600" b="1">
+                <a:solidFill>
+                  <a:schemeClr val="accent1">
+                    <a:lumMod val="50000"/>
+                  </a:schemeClr>
+                </a:solidFill>
+                <a:latin typeface="Consolas" panose="020B0609020204030204" pitchFamily="49" charset="0"/>
+                <a:cs typeface="Arial" panose="020B0604020202020204" pitchFamily="34" charset="0"/>
+              </a:rPr>
+              <a:t>double_numbers = [x * 2 for x in large_numbers]  # Faster than map()</a:t>
+            </a:r>
+          </a:p>
+          <a:p>
+            <a:pPr marL="1587" lvl="1"/>
+            <a:endParaRPr lang="en-US" sz="1600" b="1">
+              <a:solidFill>
+                <a:schemeClr val="accent1">
+                  <a:lumMod val="50000"/>
+                </a:schemeClr>
+              </a:solidFill>
+              <a:latin typeface="Consolas" panose="020B0609020204030204" pitchFamily="49" charset="0"/>
+              <a:cs typeface="Arial" panose="020B0604020202020204" pitchFamily="34" charset="0"/>
+            </a:endParaRPr>
+          </a:p>
+          <a:p>
+            <a:pPr marL="1587" lvl="1"/>
+            <a:r>
+              <a:rPr lang="en-US" sz="1600" b="1">
+                <a:solidFill>
+                  <a:schemeClr val="accent1">
+                    <a:lumMod val="50000"/>
+                  </a:schemeClr>
+                </a:solidFill>
+                <a:latin typeface="Consolas" panose="020B0609020204030204" pitchFamily="49" charset="0"/>
+                <a:cs typeface="Arial" panose="020B0604020202020204" pitchFamily="34" charset="0"/>
+              </a:rPr>
+              <a:t># Simple debugging</a:t>
+            </a:r>
+          </a:p>
+          <a:p>
+            <a:pPr marL="1587" lvl="1"/>
+            <a:r>
+              <a:rPr lang="en-US" sz="1600" b="1">
+                <a:solidFill>
+                  <a:schemeClr val="accent1">
+                    <a:lumMod val="50000"/>
+                  </a:schemeClr>
+                </a:solidFill>
+                <a:latin typeface="Consolas" panose="020B0609020204030204" pitchFamily="49" charset="0"/>
+                <a:cs typeface="Arial" panose="020B0604020202020204" pitchFamily="34" charset="0"/>
+              </a:rPr>
+              <a:t>debug_list = [x * 2 for x in numbers if x % 2 == 0]</a:t>
+            </a:r>
+          </a:p>
+          <a:p>
+            <a:pPr marL="1587" lvl="1"/>
+            <a:r>
+              <a:rPr lang="en-US" sz="1600" b="1">
+                <a:solidFill>
+                  <a:schemeClr val="accent1">
+                    <a:lumMod val="50000"/>
+                  </a:schemeClr>
+                </a:solidFill>
+                <a:latin typeface="Consolas" panose="020B0609020204030204" pitchFamily="49" charset="0"/>
+                <a:cs typeface="Arial" panose="020B0604020202020204" pitchFamily="34" charset="0"/>
+              </a:rPr>
+              <a:t>print("Debug List:", debug_list)</a:t>
+            </a:r>
+            <a:endParaRPr lang="en-US" sz="1400" b="1">
+              <a:solidFill>
+                <a:schemeClr val="accent1">
+                  <a:lumMod val="50000"/>
+                </a:schemeClr>
+              </a:solidFill>
+              <a:latin typeface="Consolas" panose="020B0609020204030204" pitchFamily="49" charset="0"/>
+              <a:cs typeface="Arial" panose="020B0604020202020204" pitchFamily="34" charset="0"/>
+            </a:endParaRPr>
+          </a:p>
+        </p:txBody>
+      </p:sp>
+      <p:sp>
+        <p:nvSpPr>
+          <p:cNvPr id="6" name="TextBox 5">
+            <a:extLst>
+              <a:ext uri="{FF2B5EF4-FFF2-40B4-BE49-F238E27FC236}">
+                <a16:creationId xmlns:a16="http://schemas.microsoft.com/office/drawing/2014/main" id="{4FDDCAB4-2A4E-C9DA-0BB4-59EE9E1F50C5}"/>
+              </a:ext>
+            </a:extLst>
+          </p:cNvPr>
+          <p:cNvSpPr txBox="1"/>
+          <p:nvPr/>
+        </p:nvSpPr>
+        <p:spPr>
+          <a:xfrm>
+            <a:off x="6848924" y="5067682"/>
+            <a:ext cx="3468237" cy="1077218"/>
+          </a:xfrm>
+          <a:prstGeom prst="rect">
+            <a:avLst/>
+          </a:prstGeom>
+          <a:solidFill>
+            <a:srgbClr val="FFFF00"/>
+          </a:solidFill>
+        </p:spPr>
+        <p:txBody>
+          <a:bodyPr wrap="square">
+            <a:spAutoFit/>
+          </a:bodyPr>
+          <a:lstStyle/>
+          <a:p>
+            <a:r>
+              <a:rPr lang="en-US" sz="1600" b="1"/>
+              <a:t>List Comprehension: [4, 16, 36]</a:t>
+            </a:r>
+          </a:p>
+          <a:p>
+            <a:r>
+              <a:rPr lang="en-US" sz="1600" b="1"/>
+              <a:t>Map + Filter: [4, 16, 36]</a:t>
+            </a:r>
+          </a:p>
+          <a:p>
+            <a:r>
+              <a:rPr lang="en-US" sz="1600" b="1"/>
+              <a:t>Word Lengths: [5, 6, 0, 4]</a:t>
+            </a:r>
+          </a:p>
+          <a:p>
+            <a:r>
+              <a:rPr lang="en-US" sz="1600" b="1"/>
+              <a:t>Debug List: [4, 8, 12]</a:t>
             </a:r>
           </a:p>
         </p:txBody>
@@ -6707,7 +7038,7 @@
     </p:spTree>
     <p:extLst>
       <p:ext uri="{BB962C8B-B14F-4D97-AF65-F5344CB8AC3E}">
-        <p14:creationId xmlns:p14="http://schemas.microsoft.com/office/powerpoint/2010/main" val="3885808635"/>
+        <p14:creationId xmlns:p14="http://schemas.microsoft.com/office/powerpoint/2010/main" val="2047788253"/>
       </p:ext>
     </p:extLst>
   </p:cSld>
@@ -7037,7 +7368,7 @@
         <p:cNvPr id="1" name="">
           <a:extLst>
             <a:ext uri="{FF2B5EF4-FFF2-40B4-BE49-F238E27FC236}">
-              <a16:creationId xmlns:a16="http://schemas.microsoft.com/office/drawing/2014/main" id="{986D872C-E703-1333-8961-D37AB2337B58}"/>
+              <a16:creationId xmlns:a16="http://schemas.microsoft.com/office/drawing/2014/main" id="{9B936D10-1CCD-2D6F-0867-569DF2FB333C}"/>
             </a:ext>
           </a:extLst>
         </p:cNvPr>
@@ -7057,7 +7388,7 @@
           <p:cNvPr id="3" name="Picture 2" descr="A white and blue background&#10;&#10;Description automatically generated">
             <a:extLst>
               <a:ext uri="{FF2B5EF4-FFF2-40B4-BE49-F238E27FC236}">
-                <a16:creationId xmlns:a16="http://schemas.microsoft.com/office/drawing/2014/main" id="{64AD6237-F4AC-A21A-D86F-42B6B102BD47}"/>
+                <a16:creationId xmlns:a16="http://schemas.microsoft.com/office/drawing/2014/main" id="{8909D774-FE35-CD19-6DA3-5CED5638B8C6}"/>
               </a:ext>
             </a:extLst>
           </p:cNvPr>
@@ -7087,7 +7418,7 @@
           <p:cNvPr id="4" name="TextBox 3">
             <a:extLst>
               <a:ext uri="{FF2B5EF4-FFF2-40B4-BE49-F238E27FC236}">
-                <a16:creationId xmlns:a16="http://schemas.microsoft.com/office/drawing/2014/main" id="{1A4B7406-491F-B083-FC26-26BD7458B9A8}"/>
+                <a16:creationId xmlns:a16="http://schemas.microsoft.com/office/drawing/2014/main" id="{F0843EEA-BBC1-4096-1B11-DEC007FF3E4B}"/>
               </a:ext>
             </a:extLst>
           </p:cNvPr>
@@ -7120,6 +7451,2477 @@
                 <a:latin typeface="Arial" panose="020B0604020202020204" pitchFamily="34" charset="0"/>
                 <a:cs typeface="Arial" panose="020B0604020202020204" pitchFamily="34" charset="0"/>
               </a:rPr>
+              <a:t>Use zip() to Iterate Over Multiple Lists Safely</a:t>
+            </a:r>
+          </a:p>
+        </p:txBody>
+      </p:sp>
+      <p:sp>
+        <p:nvSpPr>
+          <p:cNvPr id="5" name="TextBox 4">
+            <a:extLst>
+              <a:ext uri="{FF2B5EF4-FFF2-40B4-BE49-F238E27FC236}">
+                <a16:creationId xmlns:a16="http://schemas.microsoft.com/office/drawing/2014/main" id="{9AA23600-5227-B995-25A9-926AF1A85E90}"/>
+              </a:ext>
+            </a:extLst>
+          </p:cNvPr>
+          <p:cNvSpPr txBox="1"/>
+          <p:nvPr/>
+        </p:nvSpPr>
+        <p:spPr>
+          <a:xfrm>
+            <a:off x="836614" y="906971"/>
+            <a:ext cx="10323564" cy="2677656"/>
+          </a:xfrm>
+          <a:prstGeom prst="rect">
+            <a:avLst/>
+          </a:prstGeom>
+          <a:noFill/>
+        </p:spPr>
+        <p:txBody>
+          <a:bodyPr wrap="square" rtlCol="0">
+            <a:spAutoFit/>
+          </a:bodyPr>
+          <a:lstStyle/>
+          <a:p>
+            <a:pPr marL="231775" lvl="1" indent="-230188">
+              <a:buFont typeface="Arial" panose="020B0604020202020204" pitchFamily="34" charset="0"/>
+              <a:buChar char="•"/>
+            </a:pPr>
+            <a:r>
+              <a:rPr lang="en-US" sz="2800">
+                <a:solidFill>
+                  <a:schemeClr val="accent1">
+                    <a:lumMod val="50000"/>
+                  </a:schemeClr>
+                </a:solidFill>
+                <a:latin typeface="Arial" panose="020B0604020202020204" pitchFamily="34" charset="0"/>
+                <a:cs typeface="Arial" panose="020B0604020202020204" pitchFamily="34" charset="0"/>
+              </a:rPr>
+              <a:t>zip() allows you to iterate over multiple lists by pairing corresponding elements together. </a:t>
+            </a:r>
+          </a:p>
+          <a:p>
+            <a:pPr marL="231775" lvl="1" indent="-230188">
+              <a:buFont typeface="Arial" panose="020B0604020202020204" pitchFamily="34" charset="0"/>
+              <a:buChar char="•"/>
+            </a:pPr>
+            <a:r>
+              <a:rPr lang="en-US" sz="2800">
+                <a:solidFill>
+                  <a:schemeClr val="accent1">
+                    <a:lumMod val="50000"/>
+                  </a:schemeClr>
+                </a:solidFill>
+                <a:latin typeface="Arial" panose="020B0604020202020204" pitchFamily="34" charset="0"/>
+                <a:cs typeface="Arial" panose="020B0604020202020204" pitchFamily="34" charset="0"/>
+              </a:rPr>
+              <a:t>This prevents IndexErrors, which can occur when iterating manually with indices if lists have different lengths. </a:t>
+            </a:r>
+          </a:p>
+          <a:p>
+            <a:pPr marL="231775" lvl="1" indent="-230188">
+              <a:buFont typeface="Arial" panose="020B0604020202020204" pitchFamily="34" charset="0"/>
+              <a:buChar char="•"/>
+            </a:pPr>
+            <a:r>
+              <a:rPr lang="en-US" sz="2800">
+                <a:solidFill>
+                  <a:schemeClr val="accent1">
+                    <a:lumMod val="50000"/>
+                  </a:schemeClr>
+                </a:solidFill>
+                <a:latin typeface="Arial" panose="020B0604020202020204" pitchFamily="34" charset="0"/>
+                <a:cs typeface="Arial" panose="020B0604020202020204" pitchFamily="34" charset="0"/>
+              </a:rPr>
+              <a:t>By default, zip() stops at the shortest list, ensuring safe iteration.</a:t>
+            </a:r>
+          </a:p>
+        </p:txBody>
+      </p:sp>
+    </p:spTree>
+    <p:extLst>
+      <p:ext uri="{BB962C8B-B14F-4D97-AF65-F5344CB8AC3E}">
+        <p14:creationId xmlns:p14="http://schemas.microsoft.com/office/powerpoint/2010/main" val="3632007798"/>
+      </p:ext>
+    </p:extLst>
+  </p:cSld>
+  <p:clrMapOvr>
+    <a:masterClrMapping/>
+  </p:clrMapOvr>
+</p:sld>
+</file>
+
+<file path=ppt/slides/slide21.xml><?xml version="1.0" encoding="utf-8"?>
+<p:sld xmlns:a="http://schemas.openxmlformats.org/drawingml/2006/main" xmlns:r="http://schemas.openxmlformats.org/officeDocument/2006/relationships" xmlns:p="http://schemas.openxmlformats.org/presentationml/2006/main">
+  <p:cSld>
+    <p:spTree>
+      <p:nvGrpSpPr>
+        <p:cNvPr id="1" name="">
+          <a:extLst>
+            <a:ext uri="{FF2B5EF4-FFF2-40B4-BE49-F238E27FC236}">
+              <a16:creationId xmlns:a16="http://schemas.microsoft.com/office/drawing/2014/main" id="{23BD053E-B469-30B1-3C38-3ECBA8E6704B}"/>
+            </a:ext>
+          </a:extLst>
+        </p:cNvPr>
+        <p:cNvGrpSpPr/>
+        <p:nvPr/>
+      </p:nvGrpSpPr>
+      <p:grpSpPr>
+        <a:xfrm>
+          <a:off x="0" y="0"/>
+          <a:ext cx="0" cy="0"/>
+          <a:chOff x="0" y="0"/>
+          <a:chExt cx="0" cy="0"/>
+        </a:xfrm>
+      </p:grpSpPr>
+      <p:pic>
+        <p:nvPicPr>
+          <p:cNvPr id="3" name="Picture 2" descr="A white and blue background&#10;&#10;Description automatically generated">
+            <a:extLst>
+              <a:ext uri="{FF2B5EF4-FFF2-40B4-BE49-F238E27FC236}">
+                <a16:creationId xmlns:a16="http://schemas.microsoft.com/office/drawing/2014/main" id="{17EE9B8B-B747-A1F1-B324-266762529D08}"/>
+              </a:ext>
+            </a:extLst>
+          </p:cNvPr>
+          <p:cNvPicPr>
+            <a:picLocks noChangeAspect="1"/>
+          </p:cNvPicPr>
+          <p:nvPr/>
+        </p:nvPicPr>
+        <p:blipFill>
+          <a:blip r:embed="rId2"/>
+          <a:stretch>
+            <a:fillRect/>
+          </a:stretch>
+        </p:blipFill>
+        <p:spPr>
+          <a:xfrm>
+            <a:off x="0" y="-33129"/>
+            <a:ext cx="12192000" cy="6891129"/>
+          </a:xfrm>
+          <a:prstGeom prst="rect">
+            <a:avLst/>
+          </a:prstGeom>
+        </p:spPr>
+      </p:pic>
+      <p:sp>
+        <p:nvSpPr>
+          <p:cNvPr id="4" name="TextBox 3">
+            <a:extLst>
+              <a:ext uri="{FF2B5EF4-FFF2-40B4-BE49-F238E27FC236}">
+                <a16:creationId xmlns:a16="http://schemas.microsoft.com/office/drawing/2014/main" id="{D879C1A4-0DF2-4E9F-FDF6-AEED19BFC0B6}"/>
+              </a:ext>
+            </a:extLst>
+          </p:cNvPr>
+          <p:cNvSpPr txBox="1"/>
+          <p:nvPr/>
+        </p:nvSpPr>
+        <p:spPr>
+          <a:xfrm>
+            <a:off x="604266" y="136955"/>
+            <a:ext cx="10391019" cy="646331"/>
+          </a:xfrm>
+          <a:prstGeom prst="rect">
+            <a:avLst/>
+          </a:prstGeom>
+          <a:noFill/>
+        </p:spPr>
+        <p:txBody>
+          <a:bodyPr wrap="square" rtlCol="0">
+            <a:spAutoFit/>
+          </a:bodyPr>
+          <a:lstStyle/>
+          <a:p>
+            <a:r>
+              <a:rPr lang="en-US" sz="3600">
+                <a:solidFill>
+                  <a:schemeClr val="accent1">
+                    <a:lumMod val="50000"/>
+                  </a:schemeClr>
+                </a:solidFill>
+                <a:latin typeface="Arial" panose="020B0604020202020204" pitchFamily="34" charset="0"/>
+                <a:cs typeface="Arial" panose="020B0604020202020204" pitchFamily="34" charset="0"/>
+              </a:rPr>
+              <a:t>Use zip() to Iterate Over Multiple Lists Safely</a:t>
+            </a:r>
+          </a:p>
+        </p:txBody>
+      </p:sp>
+      <p:sp>
+        <p:nvSpPr>
+          <p:cNvPr id="5" name="TextBox 4">
+            <a:extLst>
+              <a:ext uri="{FF2B5EF4-FFF2-40B4-BE49-F238E27FC236}">
+                <a16:creationId xmlns:a16="http://schemas.microsoft.com/office/drawing/2014/main" id="{C05367E0-9DA3-C048-4639-F79A2EBC32D8}"/>
+              </a:ext>
+            </a:extLst>
+          </p:cNvPr>
+          <p:cNvSpPr txBox="1"/>
+          <p:nvPr/>
+        </p:nvSpPr>
+        <p:spPr>
+          <a:xfrm>
+            <a:off x="836614" y="906971"/>
+            <a:ext cx="10323564" cy="4154984"/>
+          </a:xfrm>
+          <a:prstGeom prst="rect">
+            <a:avLst/>
+          </a:prstGeom>
+          <a:noFill/>
+        </p:spPr>
+        <p:txBody>
+          <a:bodyPr wrap="square" rtlCol="0">
+            <a:spAutoFit/>
+          </a:bodyPr>
+          <a:lstStyle/>
+          <a:p>
+            <a:pPr marL="1587" lvl="1"/>
+            <a:r>
+              <a:rPr lang="en-US" sz="2400" b="1">
+                <a:solidFill>
+                  <a:schemeClr val="accent1">
+                    <a:lumMod val="50000"/>
+                  </a:schemeClr>
+                </a:solidFill>
+                <a:latin typeface="Consolas" panose="020B0609020204030204" pitchFamily="49" charset="0"/>
+                <a:cs typeface="Arial" panose="020B0604020202020204" pitchFamily="34" charset="0"/>
+              </a:rPr>
+              <a:t>names = ["Alice", "Bob", "Charlie"]</a:t>
+            </a:r>
+          </a:p>
+          <a:p>
+            <a:pPr marL="1587" lvl="1"/>
+            <a:r>
+              <a:rPr lang="en-US" sz="2400" b="1">
+                <a:solidFill>
+                  <a:schemeClr val="accent1">
+                    <a:lumMod val="50000"/>
+                  </a:schemeClr>
+                </a:solidFill>
+                <a:latin typeface="Consolas" panose="020B0609020204030204" pitchFamily="49" charset="0"/>
+                <a:cs typeface="Arial" panose="020B0604020202020204" pitchFamily="34" charset="0"/>
+              </a:rPr>
+              <a:t>ages = [25, 30, 35]</a:t>
+            </a:r>
+          </a:p>
+          <a:p>
+            <a:pPr marL="1587" lvl="1"/>
+            <a:r>
+              <a:rPr lang="en-US" sz="2400" b="1">
+                <a:solidFill>
+                  <a:schemeClr val="accent1">
+                    <a:lumMod val="50000"/>
+                  </a:schemeClr>
+                </a:solidFill>
+                <a:latin typeface="Consolas" panose="020B0609020204030204" pitchFamily="49" charset="0"/>
+                <a:cs typeface="Arial" panose="020B0604020202020204" pitchFamily="34" charset="0"/>
+              </a:rPr>
+              <a:t>cities = ["New York", "Los Angeles"]</a:t>
+            </a:r>
+          </a:p>
+          <a:p>
+            <a:pPr marL="1587" lvl="1"/>
+            <a:endParaRPr lang="en-US" sz="2400" b="1">
+              <a:solidFill>
+                <a:schemeClr val="accent1">
+                  <a:lumMod val="50000"/>
+                </a:schemeClr>
+              </a:solidFill>
+              <a:latin typeface="Consolas" panose="020B0609020204030204" pitchFamily="49" charset="0"/>
+              <a:cs typeface="Arial" panose="020B0604020202020204" pitchFamily="34" charset="0"/>
+            </a:endParaRPr>
+          </a:p>
+          <a:p>
+            <a:pPr marL="1587" lvl="1"/>
+            <a:r>
+              <a:rPr lang="en-US" sz="2400" b="1">
+                <a:solidFill>
+                  <a:schemeClr val="accent1">
+                    <a:lumMod val="50000"/>
+                  </a:schemeClr>
+                </a:solidFill>
+                <a:latin typeface="Consolas" panose="020B0609020204030204" pitchFamily="49" charset="0"/>
+                <a:cs typeface="Arial" panose="020B0604020202020204" pitchFamily="34" charset="0"/>
+              </a:rPr>
+              <a:t># Safe iteration using zip()</a:t>
+            </a:r>
+          </a:p>
+          <a:p>
+            <a:pPr marL="1587" lvl="1"/>
+            <a:r>
+              <a:rPr lang="en-US" sz="2400" b="1">
+                <a:solidFill>
+                  <a:schemeClr val="accent1">
+                    <a:lumMod val="50000"/>
+                  </a:schemeClr>
+                </a:solidFill>
+                <a:latin typeface="Consolas" panose="020B0609020204030204" pitchFamily="49" charset="0"/>
+                <a:cs typeface="Arial" panose="020B0604020202020204" pitchFamily="34" charset="0"/>
+              </a:rPr>
+              <a:t>for name, age, city in zip(names, ages, cities):</a:t>
+            </a:r>
+          </a:p>
+          <a:p>
+            <a:pPr marL="1587" lvl="1"/>
+            <a:r>
+              <a:rPr lang="en-US" sz="2400" b="1">
+                <a:solidFill>
+                  <a:schemeClr val="accent1">
+                    <a:lumMod val="50000"/>
+                  </a:schemeClr>
+                </a:solidFill>
+                <a:latin typeface="Consolas" panose="020B0609020204030204" pitchFamily="49" charset="0"/>
+                <a:cs typeface="Arial" panose="020B0604020202020204" pitchFamily="34" charset="0"/>
+              </a:rPr>
+              <a:t>    print(f"{name}, {age} years old, lives in {city}")</a:t>
+            </a:r>
+          </a:p>
+          <a:p>
+            <a:pPr marL="1587" lvl="1"/>
+            <a:endParaRPr lang="en-US" sz="2400" b="1">
+              <a:solidFill>
+                <a:schemeClr val="accent1">
+                  <a:lumMod val="50000"/>
+                </a:schemeClr>
+              </a:solidFill>
+              <a:latin typeface="Consolas" panose="020B0609020204030204" pitchFamily="49" charset="0"/>
+              <a:cs typeface="Arial" panose="020B0604020202020204" pitchFamily="34" charset="0"/>
+            </a:endParaRPr>
+          </a:p>
+          <a:p>
+            <a:pPr marL="1587" lvl="1"/>
+            <a:r>
+              <a:rPr lang="en-US" sz="2400" b="1">
+                <a:solidFill>
+                  <a:schemeClr val="accent1">
+                    <a:lumMod val="50000"/>
+                  </a:schemeClr>
+                </a:solidFill>
+                <a:latin typeface="Consolas" panose="020B0609020204030204" pitchFamily="49" charset="0"/>
+                <a:cs typeface="Arial" panose="020B0604020202020204" pitchFamily="34" charset="0"/>
+              </a:rPr>
+              <a:t># zip() stops at "Los Angeles" because cities has </a:t>
+            </a:r>
+          </a:p>
+          <a:p>
+            <a:pPr marL="1587" lvl="1"/>
+            <a:r>
+              <a:rPr lang="en-US" sz="2400" b="1">
+                <a:solidFill>
+                  <a:schemeClr val="accent1">
+                    <a:lumMod val="50000"/>
+                  </a:schemeClr>
+                </a:solidFill>
+                <a:latin typeface="Consolas" panose="020B0609020204030204" pitchFamily="49" charset="0"/>
+                <a:cs typeface="Arial" panose="020B0604020202020204" pitchFamily="34" charset="0"/>
+              </a:rPr>
+              <a:t># fewer elements than names and ages, preventing </a:t>
+            </a:r>
+          </a:p>
+          <a:p>
+            <a:pPr marL="1587" lvl="1"/>
+            <a:r>
+              <a:rPr lang="en-US" sz="2400" b="1">
+                <a:solidFill>
+                  <a:schemeClr val="accent1">
+                    <a:lumMod val="50000"/>
+                  </a:schemeClr>
+                </a:solidFill>
+                <a:latin typeface="Consolas" panose="020B0609020204030204" pitchFamily="49" charset="0"/>
+                <a:cs typeface="Arial" panose="020B0604020202020204" pitchFamily="34" charset="0"/>
+              </a:rPr>
+              <a:t># out-of-bounds errors</a:t>
+            </a:r>
+          </a:p>
+        </p:txBody>
+      </p:sp>
+      <p:sp>
+        <p:nvSpPr>
+          <p:cNvPr id="6" name="TextBox 5">
+            <a:extLst>
+              <a:ext uri="{FF2B5EF4-FFF2-40B4-BE49-F238E27FC236}">
+                <a16:creationId xmlns:a16="http://schemas.microsoft.com/office/drawing/2014/main" id="{0AEA1245-C3C3-BC8B-8AB9-869386D16D94}"/>
+              </a:ext>
+            </a:extLst>
+          </p:cNvPr>
+          <p:cNvSpPr txBox="1"/>
+          <p:nvPr/>
+        </p:nvSpPr>
+        <p:spPr>
+          <a:xfrm>
+            <a:off x="5133975" y="5185640"/>
+            <a:ext cx="4562475" cy="707886"/>
+          </a:xfrm>
+          <a:prstGeom prst="rect">
+            <a:avLst/>
+          </a:prstGeom>
+          <a:solidFill>
+            <a:srgbClr val="FFFF00"/>
+          </a:solidFill>
+        </p:spPr>
+        <p:txBody>
+          <a:bodyPr wrap="square">
+            <a:spAutoFit/>
+          </a:bodyPr>
+          <a:lstStyle/>
+          <a:p>
+            <a:r>
+              <a:rPr lang="en-US" sz="2000" b="1"/>
+              <a:t>Alice, 25 years old, lives in New York</a:t>
+            </a:r>
+          </a:p>
+          <a:p>
+            <a:r>
+              <a:rPr lang="en-US" sz="2000" b="1"/>
+              <a:t>Bob, 30 years old, lives in Los Angeles</a:t>
+            </a:r>
+          </a:p>
+        </p:txBody>
+      </p:sp>
+    </p:spTree>
+    <p:extLst>
+      <p:ext uri="{BB962C8B-B14F-4D97-AF65-F5344CB8AC3E}">
+        <p14:creationId xmlns:p14="http://schemas.microsoft.com/office/powerpoint/2010/main" val="1760129280"/>
+      </p:ext>
+    </p:extLst>
+  </p:cSld>
+  <p:clrMapOvr>
+    <a:masterClrMapping/>
+  </p:clrMapOvr>
+</p:sld>
+</file>
+
+<file path=ppt/slides/slide22.xml><?xml version="1.0" encoding="utf-8"?>
+<p:sld xmlns:a="http://schemas.openxmlformats.org/drawingml/2006/main" xmlns:r="http://schemas.openxmlformats.org/officeDocument/2006/relationships" xmlns:p="http://schemas.openxmlformats.org/presentationml/2006/main">
+  <p:cSld>
+    <p:spTree>
+      <p:nvGrpSpPr>
+        <p:cNvPr id="1" name="">
+          <a:extLst>
+            <a:ext uri="{FF2B5EF4-FFF2-40B4-BE49-F238E27FC236}">
+              <a16:creationId xmlns:a16="http://schemas.microsoft.com/office/drawing/2014/main" id="{2EEE6CC1-A969-9076-060B-B42BEDA29CCF}"/>
+            </a:ext>
+          </a:extLst>
+        </p:cNvPr>
+        <p:cNvGrpSpPr/>
+        <p:nvPr/>
+      </p:nvGrpSpPr>
+      <p:grpSpPr>
+        <a:xfrm>
+          <a:off x="0" y="0"/>
+          <a:ext cx="0" cy="0"/>
+          <a:chOff x="0" y="0"/>
+          <a:chExt cx="0" cy="0"/>
+        </a:xfrm>
+      </p:grpSpPr>
+      <p:pic>
+        <p:nvPicPr>
+          <p:cNvPr id="3" name="Picture 2" descr="A white and blue background&#10;&#10;Description automatically generated">
+            <a:extLst>
+              <a:ext uri="{FF2B5EF4-FFF2-40B4-BE49-F238E27FC236}">
+                <a16:creationId xmlns:a16="http://schemas.microsoft.com/office/drawing/2014/main" id="{B6760D90-32DA-3DD4-38EC-7204A7E1D6E3}"/>
+              </a:ext>
+            </a:extLst>
+          </p:cNvPr>
+          <p:cNvPicPr>
+            <a:picLocks noChangeAspect="1"/>
+          </p:cNvPicPr>
+          <p:nvPr/>
+        </p:nvPicPr>
+        <p:blipFill>
+          <a:blip r:embed="rId2"/>
+          <a:stretch>
+            <a:fillRect/>
+          </a:stretch>
+        </p:blipFill>
+        <p:spPr>
+          <a:xfrm>
+            <a:off x="0" y="0"/>
+            <a:ext cx="12192000" cy="6891129"/>
+          </a:xfrm>
+          <a:prstGeom prst="rect">
+            <a:avLst/>
+          </a:prstGeom>
+        </p:spPr>
+      </p:pic>
+      <p:sp>
+        <p:nvSpPr>
+          <p:cNvPr id="4" name="TextBox 3">
+            <a:extLst>
+              <a:ext uri="{FF2B5EF4-FFF2-40B4-BE49-F238E27FC236}">
+                <a16:creationId xmlns:a16="http://schemas.microsoft.com/office/drawing/2014/main" id="{7FFCDD59-827D-67A1-2724-6BB535F9CD2D}"/>
+              </a:ext>
+            </a:extLst>
+          </p:cNvPr>
+          <p:cNvSpPr txBox="1"/>
+          <p:nvPr/>
+        </p:nvSpPr>
+        <p:spPr>
+          <a:xfrm>
+            <a:off x="295275" y="230333"/>
+            <a:ext cx="10728585" cy="646331"/>
+          </a:xfrm>
+          <a:prstGeom prst="rect">
+            <a:avLst/>
+          </a:prstGeom>
+          <a:noFill/>
+        </p:spPr>
+        <p:txBody>
+          <a:bodyPr wrap="square" rtlCol="0">
+            <a:spAutoFit/>
+          </a:bodyPr>
+          <a:lstStyle/>
+          <a:p>
+            <a:r>
+              <a:rPr lang="en-US" sz="3600">
+                <a:solidFill>
+                  <a:schemeClr val="accent1">
+                    <a:lumMod val="50000"/>
+                  </a:schemeClr>
+                </a:solidFill>
+                <a:latin typeface="Arial" panose="020B0604020202020204" pitchFamily="34" charset="0"/>
+                <a:cs typeface="Arial" panose="020B0604020202020204" pitchFamily="34" charset="0"/>
+              </a:rPr>
+              <a:t>Use zip() to Iterate Over Multiple Lists Safely</a:t>
+            </a:r>
+          </a:p>
+        </p:txBody>
+      </p:sp>
+      <p:sp>
+        <p:nvSpPr>
+          <p:cNvPr id="5" name="TextBox 4">
+            <a:extLst>
+              <a:ext uri="{FF2B5EF4-FFF2-40B4-BE49-F238E27FC236}">
+                <a16:creationId xmlns:a16="http://schemas.microsoft.com/office/drawing/2014/main" id="{1C95E63F-D77B-7774-B5AF-FB73EFA2FC9C}"/>
+              </a:ext>
+            </a:extLst>
+          </p:cNvPr>
+          <p:cNvSpPr txBox="1"/>
+          <p:nvPr/>
+        </p:nvSpPr>
+        <p:spPr>
+          <a:xfrm>
+            <a:off x="390526" y="1106996"/>
+            <a:ext cx="11712002" cy="5016758"/>
+          </a:xfrm>
+          <a:prstGeom prst="rect">
+            <a:avLst/>
+          </a:prstGeom>
+          <a:noFill/>
+        </p:spPr>
+        <p:txBody>
+          <a:bodyPr wrap="square" rtlCol="0">
+            <a:spAutoFit/>
+          </a:bodyPr>
+          <a:lstStyle/>
+          <a:p>
+            <a:pPr marL="231775" lvl="1" indent="-230188">
+              <a:buFont typeface="Arial" panose="020B0604020202020204" pitchFamily="34" charset="0"/>
+              <a:buChar char="•"/>
+            </a:pPr>
+            <a:r>
+              <a:rPr lang="en-US" sz="2800">
+                <a:solidFill>
+                  <a:schemeClr val="accent1">
+                    <a:lumMod val="50000"/>
+                  </a:schemeClr>
+                </a:solidFill>
+                <a:latin typeface="Arial" panose="020B0604020202020204" pitchFamily="34" charset="0"/>
+                <a:cs typeface="Arial" panose="020B0604020202020204" pitchFamily="34" charset="0"/>
+              </a:rPr>
+              <a:t>To handle mismatched lengths differently, itertools.zip_longest() can be used.</a:t>
+            </a:r>
+          </a:p>
+          <a:p>
+            <a:pPr marL="231775" lvl="1" indent="-230188">
+              <a:buFont typeface="Arial" panose="020B0604020202020204" pitchFamily="34" charset="0"/>
+              <a:buChar char="•"/>
+            </a:pPr>
+            <a:r>
+              <a:rPr lang="en-US" sz="2800">
+                <a:solidFill>
+                  <a:schemeClr val="accent1">
+                    <a:lumMod val="50000"/>
+                  </a:schemeClr>
+                </a:solidFill>
+                <a:latin typeface="Arial" panose="020B0604020202020204" pitchFamily="34" charset="0"/>
+                <a:cs typeface="Arial" panose="020B0604020202020204" pitchFamily="34" charset="0"/>
+              </a:rPr>
+              <a:t>Here, zip_longest() ensures that Charlie is included even though cities has fewer elements, using "Unknown" as the default value.</a:t>
+            </a:r>
+          </a:p>
+          <a:p>
+            <a:pPr marL="1587" lvl="1"/>
+            <a:endParaRPr lang="en-US" sz="2800">
+              <a:solidFill>
+                <a:schemeClr val="accent1">
+                  <a:lumMod val="50000"/>
+                </a:schemeClr>
+              </a:solidFill>
+              <a:latin typeface="Arial" panose="020B0604020202020204" pitchFamily="34" charset="0"/>
+              <a:cs typeface="Arial" panose="020B0604020202020204" pitchFamily="34" charset="0"/>
+            </a:endParaRPr>
+          </a:p>
+          <a:p>
+            <a:pPr lvl="1"/>
+            <a:r>
+              <a:rPr lang="en-US" sz="2000" b="1">
+                <a:solidFill>
+                  <a:schemeClr val="accent1">
+                    <a:lumMod val="50000"/>
+                  </a:schemeClr>
+                </a:solidFill>
+                <a:latin typeface="Consolas" panose="020B0609020204030204" pitchFamily="49" charset="0"/>
+                <a:cs typeface="Arial" panose="020B0604020202020204" pitchFamily="34" charset="0"/>
+              </a:rPr>
+              <a:t>from itertools import zip_longest</a:t>
+            </a:r>
+          </a:p>
+          <a:p>
+            <a:pPr lvl="1"/>
+            <a:endParaRPr lang="en-US" sz="2000" b="1">
+              <a:solidFill>
+                <a:schemeClr val="accent1">
+                  <a:lumMod val="50000"/>
+                </a:schemeClr>
+              </a:solidFill>
+              <a:latin typeface="Consolas" panose="020B0609020204030204" pitchFamily="49" charset="0"/>
+              <a:cs typeface="Arial" panose="020B0604020202020204" pitchFamily="34" charset="0"/>
+            </a:endParaRPr>
+          </a:p>
+          <a:p>
+            <a:pPr lvl="1"/>
+            <a:r>
+              <a:rPr lang="en-US" sz="2000" b="1">
+                <a:solidFill>
+                  <a:schemeClr val="accent1">
+                    <a:lumMod val="50000"/>
+                  </a:schemeClr>
+                </a:solidFill>
+                <a:latin typeface="Consolas" panose="020B0609020204030204" pitchFamily="49" charset="0"/>
+                <a:cs typeface="Arial" panose="020B0604020202020204" pitchFamily="34" charset="0"/>
+              </a:rPr>
+              <a:t>names = ["Alice", "Bob", "Charlie"]</a:t>
+            </a:r>
+          </a:p>
+          <a:p>
+            <a:pPr lvl="1"/>
+            <a:r>
+              <a:rPr lang="en-US" sz="2000" b="1">
+                <a:solidFill>
+                  <a:schemeClr val="accent1">
+                    <a:lumMod val="50000"/>
+                  </a:schemeClr>
+                </a:solidFill>
+                <a:latin typeface="Consolas" panose="020B0609020204030204" pitchFamily="49" charset="0"/>
+                <a:cs typeface="Arial" panose="020B0604020202020204" pitchFamily="34" charset="0"/>
+              </a:rPr>
+              <a:t>ages = [25, 30, 35]</a:t>
+            </a:r>
+          </a:p>
+          <a:p>
+            <a:pPr lvl="1"/>
+            <a:r>
+              <a:rPr lang="en-US" sz="2000" b="1">
+                <a:solidFill>
+                  <a:schemeClr val="accent1">
+                    <a:lumMod val="50000"/>
+                  </a:schemeClr>
+                </a:solidFill>
+                <a:latin typeface="Consolas" panose="020B0609020204030204" pitchFamily="49" charset="0"/>
+                <a:cs typeface="Arial" panose="020B0604020202020204" pitchFamily="34" charset="0"/>
+              </a:rPr>
+              <a:t>cities = ["New York", "Los Angeles"]</a:t>
+            </a:r>
+          </a:p>
+          <a:p>
+            <a:pPr lvl="1"/>
+            <a:endParaRPr lang="en-US" sz="2000" b="1">
+              <a:solidFill>
+                <a:schemeClr val="accent1">
+                  <a:lumMod val="50000"/>
+                </a:schemeClr>
+              </a:solidFill>
+              <a:latin typeface="Consolas" panose="020B0609020204030204" pitchFamily="49" charset="0"/>
+              <a:cs typeface="Arial" panose="020B0604020202020204" pitchFamily="34" charset="0"/>
+            </a:endParaRPr>
+          </a:p>
+          <a:p>
+            <a:pPr lvl="1"/>
+            <a:r>
+              <a:rPr lang="en-US" sz="2000" b="1">
+                <a:solidFill>
+                  <a:schemeClr val="accent1">
+                    <a:lumMod val="50000"/>
+                  </a:schemeClr>
+                </a:solidFill>
+                <a:latin typeface="Consolas" panose="020B0609020204030204" pitchFamily="49" charset="0"/>
+                <a:cs typeface="Arial" panose="020B0604020202020204" pitchFamily="34" charset="0"/>
+              </a:rPr>
+              <a:t># Safe iteration using zip_longest() with a default value of "Unknown"</a:t>
+            </a:r>
+          </a:p>
+          <a:p>
+            <a:pPr lvl="1"/>
+            <a:r>
+              <a:rPr lang="en-US" sz="2000" b="1">
+                <a:solidFill>
+                  <a:schemeClr val="accent1">
+                    <a:lumMod val="50000"/>
+                  </a:schemeClr>
+                </a:solidFill>
+                <a:latin typeface="Consolas" panose="020B0609020204030204" pitchFamily="49" charset="0"/>
+                <a:cs typeface="Arial" panose="020B0604020202020204" pitchFamily="34" charset="0"/>
+              </a:rPr>
+              <a:t>for name, age, city in zip_longest(names, ages, cities, fillvalue="Unknown"):</a:t>
+            </a:r>
+          </a:p>
+          <a:p>
+            <a:pPr lvl="1"/>
+            <a:r>
+              <a:rPr lang="en-US" sz="2000" b="1">
+                <a:solidFill>
+                  <a:schemeClr val="accent1">
+                    <a:lumMod val="50000"/>
+                  </a:schemeClr>
+                </a:solidFill>
+                <a:latin typeface="Consolas" panose="020B0609020204030204" pitchFamily="49" charset="0"/>
+                <a:cs typeface="Arial" panose="020B0604020202020204" pitchFamily="34" charset="0"/>
+              </a:rPr>
+              <a:t>    print(f"{name}, {age} years old, lives in {city}")</a:t>
+            </a:r>
+            <a:endParaRPr lang="en-US" sz="2800" b="1">
+              <a:solidFill>
+                <a:schemeClr val="accent1">
+                  <a:lumMod val="50000"/>
+                </a:schemeClr>
+              </a:solidFill>
+              <a:latin typeface="Consolas" panose="020B0609020204030204" pitchFamily="49" charset="0"/>
+              <a:cs typeface="Arial" panose="020B0604020202020204" pitchFamily="34" charset="0"/>
+            </a:endParaRPr>
+          </a:p>
+        </p:txBody>
+      </p:sp>
+      <p:sp>
+        <p:nvSpPr>
+          <p:cNvPr id="6" name="TextBox 5">
+            <a:extLst>
+              <a:ext uri="{FF2B5EF4-FFF2-40B4-BE49-F238E27FC236}">
+                <a16:creationId xmlns:a16="http://schemas.microsoft.com/office/drawing/2014/main" id="{0ACC1177-31C5-0085-EC2A-F66C90DE926B}"/>
+              </a:ext>
+            </a:extLst>
+          </p:cNvPr>
+          <p:cNvSpPr txBox="1"/>
+          <p:nvPr/>
+        </p:nvSpPr>
+        <p:spPr>
+          <a:xfrm>
+            <a:off x="7224714" y="3759889"/>
+            <a:ext cx="4214812" cy="923330"/>
+          </a:xfrm>
+          <a:prstGeom prst="rect">
+            <a:avLst/>
+          </a:prstGeom>
+          <a:solidFill>
+            <a:srgbClr val="FFFF00"/>
+          </a:solidFill>
+        </p:spPr>
+        <p:txBody>
+          <a:bodyPr wrap="square">
+            <a:spAutoFit/>
+          </a:bodyPr>
+          <a:lstStyle/>
+          <a:p>
+            <a:r>
+              <a:rPr lang="en-US" b="1"/>
+              <a:t>Alice, 25 years old, lives in New York</a:t>
+            </a:r>
+          </a:p>
+          <a:p>
+            <a:r>
+              <a:rPr lang="en-US" b="1"/>
+              <a:t>Bob, 30 years old, lives in Los Angeles</a:t>
+            </a:r>
+          </a:p>
+          <a:p>
+            <a:r>
+              <a:rPr lang="en-US" b="1"/>
+              <a:t>Charlie, 35 years old, lives in Unknown</a:t>
+            </a:r>
+          </a:p>
+        </p:txBody>
+      </p:sp>
+    </p:spTree>
+    <p:extLst>
+      <p:ext uri="{BB962C8B-B14F-4D97-AF65-F5344CB8AC3E}">
+        <p14:creationId xmlns:p14="http://schemas.microsoft.com/office/powerpoint/2010/main" val="893959918"/>
+      </p:ext>
+    </p:extLst>
+  </p:cSld>
+  <p:clrMapOvr>
+    <a:masterClrMapping/>
+  </p:clrMapOvr>
+</p:sld>
+</file>
+
+<file path=ppt/slides/slide23.xml><?xml version="1.0" encoding="utf-8"?>
+<p:sld xmlns:a="http://schemas.openxmlformats.org/drawingml/2006/main" xmlns:r="http://schemas.openxmlformats.org/officeDocument/2006/relationships" xmlns:p="http://schemas.openxmlformats.org/presentationml/2006/main">
+  <p:cSld>
+    <p:spTree>
+      <p:nvGrpSpPr>
+        <p:cNvPr id="1" name="">
+          <a:extLst>
+            <a:ext uri="{FF2B5EF4-FFF2-40B4-BE49-F238E27FC236}">
+              <a16:creationId xmlns:a16="http://schemas.microsoft.com/office/drawing/2014/main" id="{7705AAE6-6B16-99A4-E992-98E7B78CDB2D}"/>
+            </a:ext>
+          </a:extLst>
+        </p:cNvPr>
+        <p:cNvGrpSpPr/>
+        <p:nvPr/>
+      </p:nvGrpSpPr>
+      <p:grpSpPr>
+        <a:xfrm>
+          <a:off x="0" y="0"/>
+          <a:ext cx="0" cy="0"/>
+          <a:chOff x="0" y="0"/>
+          <a:chExt cx="0" cy="0"/>
+        </a:xfrm>
+      </p:grpSpPr>
+      <p:pic>
+        <p:nvPicPr>
+          <p:cNvPr id="3" name="Picture 2" descr="A white and blue background&#10;&#10;Description automatically generated">
+            <a:extLst>
+              <a:ext uri="{FF2B5EF4-FFF2-40B4-BE49-F238E27FC236}">
+                <a16:creationId xmlns:a16="http://schemas.microsoft.com/office/drawing/2014/main" id="{BC553C86-2FD2-2222-913F-1CDE76AB2355}"/>
+              </a:ext>
+            </a:extLst>
+          </p:cNvPr>
+          <p:cNvPicPr>
+            <a:picLocks noChangeAspect="1"/>
+          </p:cNvPicPr>
+          <p:nvPr/>
+        </p:nvPicPr>
+        <p:blipFill>
+          <a:blip r:embed="rId2"/>
+          <a:stretch>
+            <a:fillRect/>
+          </a:stretch>
+        </p:blipFill>
+        <p:spPr>
+          <a:xfrm>
+            <a:off x="0" y="-33129"/>
+            <a:ext cx="12192000" cy="6891129"/>
+          </a:xfrm>
+          <a:prstGeom prst="rect">
+            <a:avLst/>
+          </a:prstGeom>
+        </p:spPr>
+      </p:pic>
+      <p:sp>
+        <p:nvSpPr>
+          <p:cNvPr id="4" name="TextBox 3">
+            <a:extLst>
+              <a:ext uri="{FF2B5EF4-FFF2-40B4-BE49-F238E27FC236}">
+                <a16:creationId xmlns:a16="http://schemas.microsoft.com/office/drawing/2014/main" id="{DA13D07D-96A4-DD20-3CC3-7120495EF882}"/>
+              </a:ext>
+            </a:extLst>
+          </p:cNvPr>
+          <p:cNvSpPr txBox="1"/>
+          <p:nvPr/>
+        </p:nvSpPr>
+        <p:spPr>
+          <a:xfrm>
+            <a:off x="476250" y="136955"/>
+            <a:ext cx="10519035" cy="646331"/>
+          </a:xfrm>
+          <a:prstGeom prst="rect">
+            <a:avLst/>
+          </a:prstGeom>
+          <a:noFill/>
+        </p:spPr>
+        <p:txBody>
+          <a:bodyPr wrap="square" rtlCol="0">
+            <a:spAutoFit/>
+          </a:bodyPr>
+          <a:lstStyle/>
+          <a:p>
+            <a:r>
+              <a:rPr lang="en-US" sz="3600">
+                <a:solidFill>
+                  <a:schemeClr val="accent1">
+                    <a:lumMod val="50000"/>
+                  </a:schemeClr>
+                </a:solidFill>
+                <a:latin typeface="Arial" panose="020B0604020202020204" pitchFamily="34" charset="0"/>
+                <a:cs typeface="Arial" panose="020B0604020202020204" pitchFamily="34" charset="0"/>
+              </a:rPr>
+              <a:t>Avoid Modifying a List While Iterating Over It</a:t>
+            </a:r>
+          </a:p>
+        </p:txBody>
+      </p:sp>
+      <p:sp>
+        <p:nvSpPr>
+          <p:cNvPr id="5" name="TextBox 4">
+            <a:extLst>
+              <a:ext uri="{FF2B5EF4-FFF2-40B4-BE49-F238E27FC236}">
+                <a16:creationId xmlns:a16="http://schemas.microsoft.com/office/drawing/2014/main" id="{89E52092-2436-55CB-E0C7-1E02192352C9}"/>
+              </a:ext>
+            </a:extLst>
+          </p:cNvPr>
+          <p:cNvSpPr txBox="1"/>
+          <p:nvPr/>
+        </p:nvSpPr>
+        <p:spPr>
+          <a:xfrm>
+            <a:off x="604267" y="906971"/>
+            <a:ext cx="11101958" cy="5016758"/>
+          </a:xfrm>
+          <a:prstGeom prst="rect">
+            <a:avLst/>
+          </a:prstGeom>
+          <a:noFill/>
+        </p:spPr>
+        <p:txBody>
+          <a:bodyPr wrap="square" rtlCol="0">
+            <a:spAutoFit/>
+          </a:bodyPr>
+          <a:lstStyle/>
+          <a:p>
+            <a:pPr marL="231775" lvl="1" indent="-230188">
+              <a:buFont typeface="Arial" panose="020B0604020202020204" pitchFamily="34" charset="0"/>
+              <a:buChar char="•"/>
+            </a:pPr>
+            <a:r>
+              <a:rPr lang="en-US" sz="2800">
+                <a:solidFill>
+                  <a:schemeClr val="accent1">
+                    <a:lumMod val="50000"/>
+                  </a:schemeClr>
+                </a:solidFill>
+                <a:latin typeface="Arial" panose="020B0604020202020204" pitchFamily="34" charset="0"/>
+                <a:cs typeface="Arial" panose="020B0604020202020204" pitchFamily="34" charset="0"/>
+              </a:rPr>
+              <a:t>Modifying a list while iterating over it can lead to unpredictable behavior, including skipped elements, infinite loops, or IndexError exceptions. </a:t>
+            </a:r>
+          </a:p>
+          <a:p>
+            <a:pPr marL="231775" lvl="1" indent="-230188">
+              <a:buFont typeface="Arial" panose="020B0604020202020204" pitchFamily="34" charset="0"/>
+              <a:buChar char="•"/>
+            </a:pPr>
+            <a:r>
+              <a:rPr lang="en-US" sz="2800">
+                <a:solidFill>
+                  <a:schemeClr val="accent1">
+                    <a:lumMod val="50000"/>
+                  </a:schemeClr>
+                </a:solidFill>
+                <a:latin typeface="Arial" panose="020B0604020202020204" pitchFamily="34" charset="0"/>
+                <a:cs typeface="Arial" panose="020B0604020202020204" pitchFamily="34" charset="0"/>
+              </a:rPr>
+              <a:t>A best practice for more secure coding is to create a copy of the list before iterating or use list comprehensions and filtering to generate a new list instead of modifying the original. </a:t>
+            </a:r>
+          </a:p>
+          <a:p>
+            <a:pPr marL="688975" lvl="2" indent="-230188">
+              <a:buFont typeface="Arial" panose="020B0604020202020204" pitchFamily="34" charset="0"/>
+              <a:buChar char="•"/>
+            </a:pPr>
+            <a:r>
+              <a:rPr lang="en-US" sz="2400">
+                <a:solidFill>
+                  <a:schemeClr val="accent1">
+                    <a:lumMod val="50000"/>
+                  </a:schemeClr>
+                </a:solidFill>
+                <a:latin typeface="Arial" panose="020B0604020202020204" pitchFamily="34" charset="0"/>
+                <a:cs typeface="Arial" panose="020B0604020202020204" pitchFamily="34" charset="0"/>
+              </a:rPr>
+              <a:t>Using list.copy(), list[:], or list() ensures that changes do not affect the iteration process. </a:t>
+            </a:r>
+          </a:p>
+          <a:p>
+            <a:pPr marL="231775" lvl="1" indent="-230188">
+              <a:buFont typeface="Arial" panose="020B0604020202020204" pitchFamily="34" charset="0"/>
+              <a:buChar char="•"/>
+            </a:pPr>
+            <a:r>
+              <a:rPr lang="en-US" sz="2800">
+                <a:solidFill>
+                  <a:schemeClr val="accent1">
+                    <a:lumMod val="50000"/>
+                  </a:schemeClr>
+                </a:solidFill>
+                <a:latin typeface="Arial" panose="020B0604020202020204" pitchFamily="34" charset="0"/>
+                <a:cs typeface="Arial" panose="020B0604020202020204" pitchFamily="34" charset="0"/>
+              </a:rPr>
+              <a:t>If items need to be removed, iterate in reverse or use list comprehensions to avoid altering the list in place. </a:t>
+            </a:r>
+          </a:p>
+          <a:p>
+            <a:pPr marL="688975" lvl="2" indent="-230188">
+              <a:buFont typeface="Arial" panose="020B0604020202020204" pitchFamily="34" charset="0"/>
+              <a:buChar char="•"/>
+            </a:pPr>
+            <a:r>
+              <a:rPr lang="en-US" sz="2400">
+                <a:solidFill>
+                  <a:schemeClr val="accent1">
+                    <a:lumMod val="50000"/>
+                  </a:schemeClr>
+                </a:solidFill>
+                <a:latin typeface="Arial" panose="020B0604020202020204" pitchFamily="34" charset="0"/>
+                <a:cs typeface="Arial" panose="020B0604020202020204" pitchFamily="34" charset="0"/>
+              </a:rPr>
+              <a:t>For performance-sensitive operations, consider using filter() or itertools.dropwhile() for efficient, memory-safe modifications.</a:t>
+            </a:r>
+          </a:p>
+        </p:txBody>
+      </p:sp>
+    </p:spTree>
+    <p:extLst>
+      <p:ext uri="{BB962C8B-B14F-4D97-AF65-F5344CB8AC3E}">
+        <p14:creationId xmlns:p14="http://schemas.microsoft.com/office/powerpoint/2010/main" val="2775493843"/>
+      </p:ext>
+    </p:extLst>
+  </p:cSld>
+  <p:clrMapOvr>
+    <a:masterClrMapping/>
+  </p:clrMapOvr>
+</p:sld>
+</file>
+
+<file path=ppt/slides/slide24.xml><?xml version="1.0" encoding="utf-8"?>
+<p:sld xmlns:a="http://schemas.openxmlformats.org/drawingml/2006/main" xmlns:r="http://schemas.openxmlformats.org/officeDocument/2006/relationships" xmlns:p="http://schemas.openxmlformats.org/presentationml/2006/main">
+  <p:cSld>
+    <p:spTree>
+      <p:nvGrpSpPr>
+        <p:cNvPr id="1" name="">
+          <a:extLst>
+            <a:ext uri="{FF2B5EF4-FFF2-40B4-BE49-F238E27FC236}">
+              <a16:creationId xmlns:a16="http://schemas.microsoft.com/office/drawing/2014/main" id="{979EFB84-3D0D-7367-0063-C3986B0D05C9}"/>
+            </a:ext>
+          </a:extLst>
+        </p:cNvPr>
+        <p:cNvGrpSpPr/>
+        <p:nvPr/>
+      </p:nvGrpSpPr>
+      <p:grpSpPr>
+        <a:xfrm>
+          <a:off x="0" y="0"/>
+          <a:ext cx="0" cy="0"/>
+          <a:chOff x="0" y="0"/>
+          <a:chExt cx="0" cy="0"/>
+        </a:xfrm>
+      </p:grpSpPr>
+      <p:pic>
+        <p:nvPicPr>
+          <p:cNvPr id="3" name="Picture 2" descr="A white and blue background&#10;&#10;Description automatically generated">
+            <a:extLst>
+              <a:ext uri="{FF2B5EF4-FFF2-40B4-BE49-F238E27FC236}">
+                <a16:creationId xmlns:a16="http://schemas.microsoft.com/office/drawing/2014/main" id="{EDED5750-818D-A40F-111D-0A4652B830A3}"/>
+              </a:ext>
+            </a:extLst>
+          </p:cNvPr>
+          <p:cNvPicPr>
+            <a:picLocks noChangeAspect="1"/>
+          </p:cNvPicPr>
+          <p:nvPr/>
+        </p:nvPicPr>
+        <p:blipFill>
+          <a:blip r:embed="rId2"/>
+          <a:stretch>
+            <a:fillRect/>
+          </a:stretch>
+        </p:blipFill>
+        <p:spPr>
+          <a:xfrm>
+            <a:off x="0" y="-33129"/>
+            <a:ext cx="12192000" cy="6891129"/>
+          </a:xfrm>
+          <a:prstGeom prst="rect">
+            <a:avLst/>
+          </a:prstGeom>
+        </p:spPr>
+      </p:pic>
+      <p:sp>
+        <p:nvSpPr>
+          <p:cNvPr id="4" name="TextBox 3">
+            <a:extLst>
+              <a:ext uri="{FF2B5EF4-FFF2-40B4-BE49-F238E27FC236}">
+                <a16:creationId xmlns:a16="http://schemas.microsoft.com/office/drawing/2014/main" id="{BE9A21A6-BB09-8F10-D28E-56286829E786}"/>
+              </a:ext>
+            </a:extLst>
+          </p:cNvPr>
+          <p:cNvSpPr txBox="1"/>
+          <p:nvPr/>
+        </p:nvSpPr>
+        <p:spPr>
+          <a:xfrm>
+            <a:off x="476250" y="136955"/>
+            <a:ext cx="10519035" cy="646331"/>
+          </a:xfrm>
+          <a:prstGeom prst="rect">
+            <a:avLst/>
+          </a:prstGeom>
+          <a:noFill/>
+        </p:spPr>
+        <p:txBody>
+          <a:bodyPr wrap="square" rtlCol="0">
+            <a:spAutoFit/>
+          </a:bodyPr>
+          <a:lstStyle/>
+          <a:p>
+            <a:r>
+              <a:rPr lang="en-US" sz="3600">
+                <a:solidFill>
+                  <a:schemeClr val="accent1">
+                    <a:lumMod val="50000"/>
+                  </a:schemeClr>
+                </a:solidFill>
+                <a:latin typeface="Arial" panose="020B0604020202020204" pitchFamily="34" charset="0"/>
+                <a:cs typeface="Arial" panose="020B0604020202020204" pitchFamily="34" charset="0"/>
+              </a:rPr>
+              <a:t>Using Reverse Iteration (Safe Removal)</a:t>
+            </a:r>
+          </a:p>
+        </p:txBody>
+      </p:sp>
+      <p:sp>
+        <p:nvSpPr>
+          <p:cNvPr id="5" name="TextBox 4">
+            <a:extLst>
+              <a:ext uri="{FF2B5EF4-FFF2-40B4-BE49-F238E27FC236}">
+                <a16:creationId xmlns:a16="http://schemas.microsoft.com/office/drawing/2014/main" id="{F5389C96-476E-43CE-57A8-A9712A330B2D}"/>
+              </a:ext>
+            </a:extLst>
+          </p:cNvPr>
+          <p:cNvSpPr txBox="1"/>
+          <p:nvPr/>
+        </p:nvSpPr>
+        <p:spPr>
+          <a:xfrm>
+            <a:off x="604267" y="906971"/>
+            <a:ext cx="11101958" cy="4339650"/>
+          </a:xfrm>
+          <a:prstGeom prst="rect">
+            <a:avLst/>
+          </a:prstGeom>
+          <a:noFill/>
+        </p:spPr>
+        <p:txBody>
+          <a:bodyPr wrap="square" rtlCol="0">
+            <a:spAutoFit/>
+          </a:bodyPr>
+          <a:lstStyle/>
+          <a:p>
+            <a:pPr marL="228600" lvl="1" indent="-228600">
+              <a:buFont typeface="Arial" panose="020B0604020202020204" pitchFamily="34" charset="0"/>
+              <a:buChar char="•"/>
+            </a:pPr>
+            <a:r>
+              <a:rPr lang="en-US" sz="2800"/>
+              <a:t>Iterating in reverse ensures that index shifts do not affect upcoming elements.</a:t>
+            </a:r>
+            <a:endParaRPr lang="en-US" sz="2800">
+              <a:solidFill>
+                <a:schemeClr val="accent1">
+                  <a:lumMod val="50000"/>
+                </a:schemeClr>
+              </a:solidFill>
+              <a:latin typeface="Arial" panose="020B0604020202020204" pitchFamily="34" charset="0"/>
+              <a:cs typeface="Arial" panose="020B0604020202020204" pitchFamily="34" charset="0"/>
+            </a:endParaRPr>
+          </a:p>
+          <a:p>
+            <a:pPr marL="1587" lvl="1"/>
+            <a:endParaRPr lang="en-US" sz="2800">
+              <a:solidFill>
+                <a:schemeClr val="accent1">
+                  <a:lumMod val="50000"/>
+                </a:schemeClr>
+              </a:solidFill>
+              <a:latin typeface="Arial" panose="020B0604020202020204" pitchFamily="34" charset="0"/>
+              <a:cs typeface="Arial" panose="020B0604020202020204" pitchFamily="34" charset="0"/>
+            </a:endParaRPr>
+          </a:p>
+          <a:p>
+            <a:pPr marL="914400" lvl="1"/>
+            <a:r>
+              <a:rPr lang="en-US" sz="2400" b="1">
+                <a:solidFill>
+                  <a:schemeClr val="accent1">
+                    <a:lumMod val="50000"/>
+                  </a:schemeClr>
+                </a:solidFill>
+                <a:latin typeface="Consolas" panose="020B0609020204030204" pitchFamily="49" charset="0"/>
+                <a:cs typeface="Arial" panose="020B0604020202020204" pitchFamily="34" charset="0"/>
+              </a:rPr>
+              <a:t>numbers = [1, 2, 3, 4, 5, 6]</a:t>
+            </a:r>
+          </a:p>
+          <a:p>
+            <a:pPr marL="914400" lvl="1"/>
+            <a:endParaRPr lang="en-US" sz="2400" b="1">
+              <a:solidFill>
+                <a:schemeClr val="accent1">
+                  <a:lumMod val="50000"/>
+                </a:schemeClr>
+              </a:solidFill>
+              <a:latin typeface="Consolas" panose="020B0609020204030204" pitchFamily="49" charset="0"/>
+              <a:cs typeface="Arial" panose="020B0604020202020204" pitchFamily="34" charset="0"/>
+            </a:endParaRPr>
+          </a:p>
+          <a:p>
+            <a:pPr marL="914400" lvl="1"/>
+            <a:r>
+              <a:rPr lang="en-US" sz="2400" b="1">
+                <a:solidFill>
+                  <a:schemeClr val="accent1">
+                    <a:lumMod val="50000"/>
+                  </a:schemeClr>
+                </a:solidFill>
+                <a:latin typeface="Consolas" panose="020B0609020204030204" pitchFamily="49" charset="0"/>
+                <a:cs typeface="Arial" panose="020B0604020202020204" pitchFamily="34" charset="0"/>
+              </a:rPr>
+              <a:t># Iterate in reverse</a:t>
+            </a:r>
+          </a:p>
+          <a:p>
+            <a:pPr marL="914400" lvl="1"/>
+            <a:r>
+              <a:rPr lang="en-US" sz="2400" b="1">
+                <a:solidFill>
+                  <a:schemeClr val="accent1">
+                    <a:lumMod val="50000"/>
+                  </a:schemeClr>
+                </a:solidFill>
+                <a:latin typeface="Consolas" panose="020B0609020204030204" pitchFamily="49" charset="0"/>
+                <a:cs typeface="Arial" panose="020B0604020202020204" pitchFamily="34" charset="0"/>
+              </a:rPr>
+              <a:t>for i in range(len(numbers) - 1, -1, -1):  </a:t>
+            </a:r>
+          </a:p>
+          <a:p>
+            <a:pPr marL="914400" lvl="1"/>
+            <a:r>
+              <a:rPr lang="en-US" sz="2400" b="1">
+                <a:solidFill>
+                  <a:schemeClr val="accent1">
+                    <a:lumMod val="50000"/>
+                  </a:schemeClr>
+                </a:solidFill>
+                <a:latin typeface="Consolas" panose="020B0609020204030204" pitchFamily="49" charset="0"/>
+                <a:cs typeface="Arial" panose="020B0604020202020204" pitchFamily="34" charset="0"/>
+              </a:rPr>
+              <a:t>    if numbers[i] % 2 == 0:        </a:t>
+            </a:r>
+          </a:p>
+          <a:p>
+            <a:pPr marL="914400" lvl="1"/>
+            <a:r>
+              <a:rPr lang="en-US" sz="2400" b="1">
+                <a:solidFill>
+                  <a:schemeClr val="accent1">
+                    <a:lumMod val="50000"/>
+                  </a:schemeClr>
+                </a:solidFill>
+                <a:latin typeface="Consolas" panose="020B0609020204030204" pitchFamily="49" charset="0"/>
+                <a:cs typeface="Arial" panose="020B0604020202020204" pitchFamily="34" charset="0"/>
+              </a:rPr>
+              <a:t>        del numbers[i]  </a:t>
+            </a:r>
+          </a:p>
+          <a:p>
+            <a:pPr marL="914400" lvl="1"/>
+            <a:endParaRPr lang="en-US" sz="2400" b="1">
+              <a:solidFill>
+                <a:schemeClr val="accent1">
+                  <a:lumMod val="50000"/>
+                </a:schemeClr>
+              </a:solidFill>
+              <a:latin typeface="Consolas" panose="020B0609020204030204" pitchFamily="49" charset="0"/>
+              <a:cs typeface="Arial" panose="020B0604020202020204" pitchFamily="34" charset="0"/>
+            </a:endParaRPr>
+          </a:p>
+          <a:p>
+            <a:pPr marL="914400" lvl="1"/>
+            <a:r>
+              <a:rPr lang="en-US" sz="2400" b="1">
+                <a:solidFill>
+                  <a:schemeClr val="accent1">
+                    <a:lumMod val="50000"/>
+                  </a:schemeClr>
+                </a:solidFill>
+                <a:latin typeface="Consolas" panose="020B0609020204030204" pitchFamily="49" charset="0"/>
+                <a:cs typeface="Arial" panose="020B0604020202020204" pitchFamily="34" charset="0"/>
+              </a:rPr>
+              <a:t>print(numbers)</a:t>
+            </a:r>
+          </a:p>
+        </p:txBody>
+      </p:sp>
+      <p:sp>
+        <p:nvSpPr>
+          <p:cNvPr id="6" name="TextBox 5">
+            <a:extLst>
+              <a:ext uri="{FF2B5EF4-FFF2-40B4-BE49-F238E27FC236}">
+                <a16:creationId xmlns:a16="http://schemas.microsoft.com/office/drawing/2014/main" id="{0130E3EB-58D3-B07D-3E1E-DC0666173865}"/>
+              </a:ext>
+            </a:extLst>
+          </p:cNvPr>
+          <p:cNvSpPr txBox="1"/>
+          <p:nvPr/>
+        </p:nvSpPr>
+        <p:spPr>
+          <a:xfrm>
+            <a:off x="5291138" y="5435680"/>
+            <a:ext cx="1385887" cy="523220"/>
+          </a:xfrm>
+          <a:prstGeom prst="rect">
+            <a:avLst/>
+          </a:prstGeom>
+          <a:solidFill>
+            <a:srgbClr val="FFFF00"/>
+          </a:solidFill>
+        </p:spPr>
+        <p:txBody>
+          <a:bodyPr wrap="square">
+            <a:spAutoFit/>
+          </a:bodyPr>
+          <a:lstStyle/>
+          <a:p>
+            <a:r>
+              <a:rPr lang="en-US" sz="2800" b="1"/>
+              <a:t>[1, 3, 5]</a:t>
+            </a:r>
+          </a:p>
+        </p:txBody>
+      </p:sp>
+    </p:spTree>
+    <p:extLst>
+      <p:ext uri="{BB962C8B-B14F-4D97-AF65-F5344CB8AC3E}">
+        <p14:creationId xmlns:p14="http://schemas.microsoft.com/office/powerpoint/2010/main" val="969066288"/>
+      </p:ext>
+    </p:extLst>
+  </p:cSld>
+  <p:clrMapOvr>
+    <a:masterClrMapping/>
+  </p:clrMapOvr>
+</p:sld>
+</file>
+
+<file path=ppt/slides/slide25.xml><?xml version="1.0" encoding="utf-8"?>
+<p:sld xmlns:a="http://schemas.openxmlformats.org/drawingml/2006/main" xmlns:r="http://schemas.openxmlformats.org/officeDocument/2006/relationships" xmlns:p="http://schemas.openxmlformats.org/presentationml/2006/main">
+  <p:cSld>
+    <p:spTree>
+      <p:nvGrpSpPr>
+        <p:cNvPr id="1" name="">
+          <a:extLst>
+            <a:ext uri="{FF2B5EF4-FFF2-40B4-BE49-F238E27FC236}">
+              <a16:creationId xmlns:a16="http://schemas.microsoft.com/office/drawing/2014/main" id="{3AAC2422-7CE6-7D84-0AE3-94DEF1A7E030}"/>
+            </a:ext>
+          </a:extLst>
+        </p:cNvPr>
+        <p:cNvGrpSpPr/>
+        <p:nvPr/>
+      </p:nvGrpSpPr>
+      <p:grpSpPr>
+        <a:xfrm>
+          <a:off x="0" y="0"/>
+          <a:ext cx="0" cy="0"/>
+          <a:chOff x="0" y="0"/>
+          <a:chExt cx="0" cy="0"/>
+        </a:xfrm>
+      </p:grpSpPr>
+      <p:pic>
+        <p:nvPicPr>
+          <p:cNvPr id="3" name="Picture 2" descr="A white and blue background&#10;&#10;Description automatically generated">
+            <a:extLst>
+              <a:ext uri="{FF2B5EF4-FFF2-40B4-BE49-F238E27FC236}">
+                <a16:creationId xmlns:a16="http://schemas.microsoft.com/office/drawing/2014/main" id="{8014DCA3-E931-CAE2-3499-0024589E6080}"/>
+              </a:ext>
+            </a:extLst>
+          </p:cNvPr>
+          <p:cNvPicPr>
+            <a:picLocks noChangeAspect="1"/>
+          </p:cNvPicPr>
+          <p:nvPr/>
+        </p:nvPicPr>
+        <p:blipFill>
+          <a:blip r:embed="rId2"/>
+          <a:stretch>
+            <a:fillRect/>
+          </a:stretch>
+        </p:blipFill>
+        <p:spPr>
+          <a:xfrm>
+            <a:off x="0" y="-33129"/>
+            <a:ext cx="12192000" cy="6891129"/>
+          </a:xfrm>
+          <a:prstGeom prst="rect">
+            <a:avLst/>
+          </a:prstGeom>
+        </p:spPr>
+      </p:pic>
+      <p:sp>
+        <p:nvSpPr>
+          <p:cNvPr id="4" name="TextBox 3">
+            <a:extLst>
+              <a:ext uri="{FF2B5EF4-FFF2-40B4-BE49-F238E27FC236}">
+                <a16:creationId xmlns:a16="http://schemas.microsoft.com/office/drawing/2014/main" id="{E17A7DD1-FFC3-B1D9-01F7-C649ABC1AD24}"/>
+              </a:ext>
+            </a:extLst>
+          </p:cNvPr>
+          <p:cNvSpPr txBox="1"/>
+          <p:nvPr/>
+        </p:nvSpPr>
+        <p:spPr>
+          <a:xfrm>
+            <a:off x="476250" y="136955"/>
+            <a:ext cx="11101958" cy="646331"/>
+          </a:xfrm>
+          <a:prstGeom prst="rect">
+            <a:avLst/>
+          </a:prstGeom>
+          <a:noFill/>
+        </p:spPr>
+        <p:txBody>
+          <a:bodyPr wrap="square" rtlCol="0">
+            <a:spAutoFit/>
+          </a:bodyPr>
+          <a:lstStyle/>
+          <a:p>
+            <a:r>
+              <a:rPr lang="en-US" sz="3600">
+                <a:solidFill>
+                  <a:schemeClr val="accent1">
+                    <a:lumMod val="50000"/>
+                  </a:schemeClr>
+                </a:solidFill>
+                <a:latin typeface="Arial" panose="020B0604020202020204" pitchFamily="34" charset="0"/>
+                <a:cs typeface="Arial" panose="020B0604020202020204" pitchFamily="34" charset="0"/>
+              </a:rPr>
+              <a:t> Using List Comprehension (Creates a New List)</a:t>
+            </a:r>
+          </a:p>
+        </p:txBody>
+      </p:sp>
+      <p:sp>
+        <p:nvSpPr>
+          <p:cNvPr id="5" name="TextBox 4">
+            <a:extLst>
+              <a:ext uri="{FF2B5EF4-FFF2-40B4-BE49-F238E27FC236}">
+                <a16:creationId xmlns:a16="http://schemas.microsoft.com/office/drawing/2014/main" id="{8D813845-1056-402D-FA51-DC1231486164}"/>
+              </a:ext>
+            </a:extLst>
+          </p:cNvPr>
+          <p:cNvSpPr txBox="1"/>
+          <p:nvPr/>
+        </p:nvSpPr>
+        <p:spPr>
+          <a:xfrm>
+            <a:off x="604267" y="906971"/>
+            <a:ext cx="11101958" cy="2800767"/>
+          </a:xfrm>
+          <a:prstGeom prst="rect">
+            <a:avLst/>
+          </a:prstGeom>
+          <a:noFill/>
+        </p:spPr>
+        <p:txBody>
+          <a:bodyPr wrap="square" rtlCol="0">
+            <a:spAutoFit/>
+          </a:bodyPr>
+          <a:lstStyle/>
+          <a:p>
+            <a:pPr marL="228600" lvl="1" indent="-228600">
+              <a:buFont typeface="Arial" panose="020B0604020202020204" pitchFamily="34" charset="0"/>
+              <a:buChar char="•"/>
+            </a:pPr>
+            <a:r>
+              <a:rPr lang="en-US" sz="2800"/>
+              <a:t> Using a list comprehension avoids modifying the original list directly.</a:t>
+            </a:r>
+          </a:p>
+          <a:p>
+            <a:pPr marL="228600" lvl="1" indent="-228600">
+              <a:buFont typeface="Arial" panose="020B0604020202020204" pitchFamily="34" charset="0"/>
+              <a:buChar char="•"/>
+            </a:pPr>
+            <a:endParaRPr lang="en-US" sz="2800">
+              <a:solidFill>
+                <a:schemeClr val="accent1">
+                  <a:lumMod val="50000"/>
+                </a:schemeClr>
+              </a:solidFill>
+              <a:latin typeface="Arial" panose="020B0604020202020204" pitchFamily="34" charset="0"/>
+              <a:cs typeface="Arial" panose="020B0604020202020204" pitchFamily="34" charset="0"/>
+            </a:endParaRPr>
+          </a:p>
+          <a:p>
+            <a:pPr marL="914400" lvl="1"/>
+            <a:r>
+              <a:rPr lang="en-US" sz="2400" b="1">
+                <a:solidFill>
+                  <a:schemeClr val="accent1">
+                    <a:lumMod val="50000"/>
+                  </a:schemeClr>
+                </a:solidFill>
+                <a:latin typeface="Consolas" panose="020B0609020204030204" pitchFamily="49" charset="0"/>
+                <a:cs typeface="Arial" panose="020B0604020202020204" pitchFamily="34" charset="0"/>
+              </a:rPr>
+              <a:t>numbers = [1, 2, 3, 4, 5, 6]</a:t>
+            </a:r>
+          </a:p>
+          <a:p>
+            <a:pPr marL="914400" lvl="1"/>
+            <a:endParaRPr lang="en-US" sz="2400" b="1">
+              <a:solidFill>
+                <a:schemeClr val="accent1">
+                  <a:lumMod val="50000"/>
+                </a:schemeClr>
+              </a:solidFill>
+              <a:latin typeface="Consolas" panose="020B0609020204030204" pitchFamily="49" charset="0"/>
+              <a:cs typeface="Arial" panose="020B0604020202020204" pitchFamily="34" charset="0"/>
+            </a:endParaRPr>
+          </a:p>
+          <a:p>
+            <a:pPr marL="914400" lvl="1"/>
+            <a:r>
+              <a:rPr lang="en-US" sz="2400" b="1">
+                <a:solidFill>
+                  <a:schemeClr val="accent1">
+                    <a:lumMod val="50000"/>
+                  </a:schemeClr>
+                </a:solidFill>
+                <a:latin typeface="Consolas" panose="020B0609020204030204" pitchFamily="49" charset="0"/>
+                <a:cs typeface="Arial" panose="020B0604020202020204" pitchFamily="34" charset="0"/>
+              </a:rPr>
+              <a:t># Remove even numbers</a:t>
+            </a:r>
+          </a:p>
+          <a:p>
+            <a:pPr marL="914400" lvl="1"/>
+            <a:r>
+              <a:rPr lang="en-US" sz="2400" b="1">
+                <a:solidFill>
+                  <a:schemeClr val="accent1">
+                    <a:lumMod val="50000"/>
+                  </a:schemeClr>
+                </a:solidFill>
+                <a:latin typeface="Consolas" panose="020B0609020204030204" pitchFamily="49" charset="0"/>
+                <a:cs typeface="Arial" panose="020B0604020202020204" pitchFamily="34" charset="0"/>
+              </a:rPr>
+              <a:t>filtered_numbers = [x for x in numbers if x % 2 != 0]  </a:t>
+            </a:r>
+          </a:p>
+          <a:p>
+            <a:pPr marL="914400" lvl="1"/>
+            <a:r>
+              <a:rPr lang="en-US" sz="2400" b="1">
+                <a:solidFill>
+                  <a:schemeClr val="accent1">
+                    <a:lumMod val="50000"/>
+                  </a:schemeClr>
+                </a:solidFill>
+                <a:latin typeface="Consolas" panose="020B0609020204030204" pitchFamily="49" charset="0"/>
+                <a:cs typeface="Arial" panose="020B0604020202020204" pitchFamily="34" charset="0"/>
+              </a:rPr>
+              <a:t>print(filtered_numbers)</a:t>
+            </a:r>
+          </a:p>
+        </p:txBody>
+      </p:sp>
+      <p:sp>
+        <p:nvSpPr>
+          <p:cNvPr id="6" name="TextBox 5">
+            <a:extLst>
+              <a:ext uri="{FF2B5EF4-FFF2-40B4-BE49-F238E27FC236}">
+                <a16:creationId xmlns:a16="http://schemas.microsoft.com/office/drawing/2014/main" id="{E4053BE7-D4E2-09FB-9A2C-57AD5C374A0B}"/>
+              </a:ext>
+            </a:extLst>
+          </p:cNvPr>
+          <p:cNvSpPr txBox="1"/>
+          <p:nvPr/>
+        </p:nvSpPr>
+        <p:spPr>
+          <a:xfrm>
+            <a:off x="5472113" y="4739364"/>
+            <a:ext cx="1385887" cy="523220"/>
+          </a:xfrm>
+          <a:prstGeom prst="rect">
+            <a:avLst/>
+          </a:prstGeom>
+          <a:solidFill>
+            <a:srgbClr val="FFFF00"/>
+          </a:solidFill>
+        </p:spPr>
+        <p:txBody>
+          <a:bodyPr wrap="square">
+            <a:spAutoFit/>
+          </a:bodyPr>
+          <a:lstStyle/>
+          <a:p>
+            <a:r>
+              <a:rPr lang="en-US" sz="2800" b="1"/>
+              <a:t>[1, 3, 5]</a:t>
+            </a:r>
+          </a:p>
+        </p:txBody>
+      </p:sp>
+    </p:spTree>
+    <p:extLst>
+      <p:ext uri="{BB962C8B-B14F-4D97-AF65-F5344CB8AC3E}">
+        <p14:creationId xmlns:p14="http://schemas.microsoft.com/office/powerpoint/2010/main" val="1314178683"/>
+      </p:ext>
+    </p:extLst>
+  </p:cSld>
+  <p:clrMapOvr>
+    <a:masterClrMapping/>
+  </p:clrMapOvr>
+</p:sld>
+</file>
+
+<file path=ppt/slides/slide26.xml><?xml version="1.0" encoding="utf-8"?>
+<p:sld xmlns:a="http://schemas.openxmlformats.org/drawingml/2006/main" xmlns:r="http://schemas.openxmlformats.org/officeDocument/2006/relationships" xmlns:p="http://schemas.openxmlformats.org/presentationml/2006/main">
+  <p:cSld>
+    <p:spTree>
+      <p:nvGrpSpPr>
+        <p:cNvPr id="1" name="">
+          <a:extLst>
+            <a:ext uri="{FF2B5EF4-FFF2-40B4-BE49-F238E27FC236}">
+              <a16:creationId xmlns:a16="http://schemas.microsoft.com/office/drawing/2014/main" id="{6E8F22BC-62A8-FCA2-0FE3-1586B6A51A49}"/>
+            </a:ext>
+          </a:extLst>
+        </p:cNvPr>
+        <p:cNvGrpSpPr/>
+        <p:nvPr/>
+      </p:nvGrpSpPr>
+      <p:grpSpPr>
+        <a:xfrm>
+          <a:off x="0" y="0"/>
+          <a:ext cx="0" cy="0"/>
+          <a:chOff x="0" y="0"/>
+          <a:chExt cx="0" cy="0"/>
+        </a:xfrm>
+      </p:grpSpPr>
+      <p:pic>
+        <p:nvPicPr>
+          <p:cNvPr id="3" name="Picture 2" descr="A white and blue background&#10;&#10;Description automatically generated">
+            <a:extLst>
+              <a:ext uri="{FF2B5EF4-FFF2-40B4-BE49-F238E27FC236}">
+                <a16:creationId xmlns:a16="http://schemas.microsoft.com/office/drawing/2014/main" id="{E6164322-01AE-6EA7-52FF-CD53C0760796}"/>
+              </a:ext>
+            </a:extLst>
+          </p:cNvPr>
+          <p:cNvPicPr>
+            <a:picLocks noChangeAspect="1"/>
+          </p:cNvPicPr>
+          <p:nvPr/>
+        </p:nvPicPr>
+        <p:blipFill>
+          <a:blip r:embed="rId2"/>
+          <a:stretch>
+            <a:fillRect/>
+          </a:stretch>
+        </p:blipFill>
+        <p:spPr>
+          <a:xfrm>
+            <a:off x="0" y="-33129"/>
+            <a:ext cx="12192000" cy="6891129"/>
+          </a:xfrm>
+          <a:prstGeom prst="rect">
+            <a:avLst/>
+          </a:prstGeom>
+        </p:spPr>
+      </p:pic>
+      <p:sp>
+        <p:nvSpPr>
+          <p:cNvPr id="4" name="TextBox 3">
+            <a:extLst>
+              <a:ext uri="{FF2B5EF4-FFF2-40B4-BE49-F238E27FC236}">
+                <a16:creationId xmlns:a16="http://schemas.microsoft.com/office/drawing/2014/main" id="{744D3C5A-FFC3-4A61-A56D-1E138C8A20B8}"/>
+              </a:ext>
+            </a:extLst>
+          </p:cNvPr>
+          <p:cNvSpPr txBox="1"/>
+          <p:nvPr/>
+        </p:nvSpPr>
+        <p:spPr>
+          <a:xfrm>
+            <a:off x="476250" y="136955"/>
+            <a:ext cx="11101958" cy="646331"/>
+          </a:xfrm>
+          <a:prstGeom prst="rect">
+            <a:avLst/>
+          </a:prstGeom>
+          <a:noFill/>
+        </p:spPr>
+        <p:txBody>
+          <a:bodyPr wrap="square" rtlCol="0">
+            <a:spAutoFit/>
+          </a:bodyPr>
+          <a:lstStyle/>
+          <a:p>
+            <a:r>
+              <a:rPr lang="en-US" sz="3600">
+                <a:solidFill>
+                  <a:schemeClr val="accent1">
+                    <a:lumMod val="50000"/>
+                  </a:schemeClr>
+                </a:solidFill>
+                <a:latin typeface="Arial" panose="020B0604020202020204" pitchFamily="34" charset="0"/>
+                <a:cs typeface="Arial" panose="020B0604020202020204" pitchFamily="34" charset="0"/>
+              </a:rPr>
+              <a:t>Using filter() (Efficient for Large Lists)</a:t>
+            </a:r>
+          </a:p>
+        </p:txBody>
+      </p:sp>
+      <p:sp>
+        <p:nvSpPr>
+          <p:cNvPr id="5" name="TextBox 4">
+            <a:extLst>
+              <a:ext uri="{FF2B5EF4-FFF2-40B4-BE49-F238E27FC236}">
+                <a16:creationId xmlns:a16="http://schemas.microsoft.com/office/drawing/2014/main" id="{B51D9A3C-1DE2-E900-7068-B3AD57D258E1}"/>
+              </a:ext>
+            </a:extLst>
+          </p:cNvPr>
+          <p:cNvSpPr txBox="1"/>
+          <p:nvPr/>
+        </p:nvSpPr>
+        <p:spPr>
+          <a:xfrm>
+            <a:off x="614077" y="1116521"/>
+            <a:ext cx="11101958" cy="3293209"/>
+          </a:xfrm>
+          <a:prstGeom prst="rect">
+            <a:avLst/>
+          </a:prstGeom>
+          <a:noFill/>
+        </p:spPr>
+        <p:txBody>
+          <a:bodyPr wrap="square" rtlCol="0">
+            <a:spAutoFit/>
+          </a:bodyPr>
+          <a:lstStyle/>
+          <a:p>
+            <a:pPr marL="228600" lvl="1" indent="-228600">
+              <a:buFont typeface="Arial" panose="020B0604020202020204" pitchFamily="34" charset="0"/>
+              <a:buChar char="•"/>
+            </a:pPr>
+            <a:r>
+              <a:rPr lang="en-US" sz="2800"/>
+              <a:t>filter() is memory-efficient as it processes elements lazily (generates elements one by one as needed, reducing memory usage for large datasets)</a:t>
+            </a:r>
+          </a:p>
+          <a:p>
+            <a:pPr marL="228600" lvl="1" indent="-228600">
+              <a:buFont typeface="Arial" panose="020B0604020202020204" pitchFamily="34" charset="0"/>
+              <a:buChar char="•"/>
+            </a:pPr>
+            <a:endParaRPr lang="en-US" sz="2800">
+              <a:solidFill>
+                <a:schemeClr val="accent1">
+                  <a:lumMod val="50000"/>
+                </a:schemeClr>
+              </a:solidFill>
+              <a:latin typeface="Arial" panose="020B0604020202020204" pitchFamily="34" charset="0"/>
+              <a:cs typeface="Arial" panose="020B0604020202020204" pitchFamily="34" charset="0"/>
+            </a:endParaRPr>
+          </a:p>
+          <a:p>
+            <a:pPr lvl="1"/>
+            <a:r>
+              <a:rPr lang="en-US" sz="2400" b="1">
+                <a:solidFill>
+                  <a:schemeClr val="accent1">
+                    <a:lumMod val="50000"/>
+                  </a:schemeClr>
+                </a:solidFill>
+                <a:latin typeface="Consolas" panose="020B0609020204030204" pitchFamily="49" charset="0"/>
+                <a:cs typeface="Arial" panose="020B0604020202020204" pitchFamily="34" charset="0"/>
+              </a:rPr>
+              <a:t>numbers = [1, 2, 3, 4, 5, 6]</a:t>
+            </a:r>
+          </a:p>
+          <a:p>
+            <a:pPr lvl="1"/>
+            <a:endParaRPr lang="en-US" sz="2400" b="1">
+              <a:solidFill>
+                <a:schemeClr val="accent1">
+                  <a:lumMod val="50000"/>
+                </a:schemeClr>
+              </a:solidFill>
+              <a:latin typeface="Consolas" panose="020B0609020204030204" pitchFamily="49" charset="0"/>
+              <a:cs typeface="Arial" panose="020B0604020202020204" pitchFamily="34" charset="0"/>
+            </a:endParaRPr>
+          </a:p>
+          <a:p>
+            <a:pPr lvl="1"/>
+            <a:r>
+              <a:rPr lang="en-US" sz="2400" b="1">
+                <a:solidFill>
+                  <a:schemeClr val="accent1">
+                    <a:lumMod val="50000"/>
+                  </a:schemeClr>
+                </a:solidFill>
+                <a:latin typeface="Consolas" panose="020B0609020204030204" pitchFamily="49" charset="0"/>
+                <a:cs typeface="Arial" panose="020B0604020202020204" pitchFamily="34" charset="0"/>
+              </a:rPr>
+              <a:t>filtered_numbers = list(filter(lambda x: x % 2 != 0, numbers))</a:t>
+            </a:r>
+          </a:p>
+          <a:p>
+            <a:pPr lvl="1"/>
+            <a:r>
+              <a:rPr lang="en-US" sz="2400" b="1">
+                <a:solidFill>
+                  <a:schemeClr val="accent1">
+                    <a:lumMod val="50000"/>
+                  </a:schemeClr>
+                </a:solidFill>
+                <a:latin typeface="Consolas" panose="020B0609020204030204" pitchFamily="49" charset="0"/>
+                <a:cs typeface="Arial" panose="020B0604020202020204" pitchFamily="34" charset="0"/>
+              </a:rPr>
+              <a:t>print(filtered_numbers)</a:t>
+            </a:r>
+          </a:p>
+        </p:txBody>
+      </p:sp>
+      <p:sp>
+        <p:nvSpPr>
+          <p:cNvPr id="6" name="TextBox 5">
+            <a:extLst>
+              <a:ext uri="{FF2B5EF4-FFF2-40B4-BE49-F238E27FC236}">
+                <a16:creationId xmlns:a16="http://schemas.microsoft.com/office/drawing/2014/main" id="{4FC8CB6F-A2BC-C8D8-4ED3-11F5DA23731E}"/>
+              </a:ext>
+            </a:extLst>
+          </p:cNvPr>
+          <p:cNvSpPr txBox="1"/>
+          <p:nvPr/>
+        </p:nvSpPr>
+        <p:spPr>
+          <a:xfrm>
+            <a:off x="5472113" y="4739364"/>
+            <a:ext cx="1385887" cy="523220"/>
+          </a:xfrm>
+          <a:prstGeom prst="rect">
+            <a:avLst/>
+          </a:prstGeom>
+          <a:solidFill>
+            <a:srgbClr val="FFFF00"/>
+          </a:solidFill>
+        </p:spPr>
+        <p:txBody>
+          <a:bodyPr wrap="square">
+            <a:spAutoFit/>
+          </a:bodyPr>
+          <a:lstStyle/>
+          <a:p>
+            <a:r>
+              <a:rPr lang="en-US" sz="2800" b="1"/>
+              <a:t>[1, 3, 5]</a:t>
+            </a:r>
+          </a:p>
+        </p:txBody>
+      </p:sp>
+    </p:spTree>
+    <p:extLst>
+      <p:ext uri="{BB962C8B-B14F-4D97-AF65-F5344CB8AC3E}">
+        <p14:creationId xmlns:p14="http://schemas.microsoft.com/office/powerpoint/2010/main" val="2035032349"/>
+      </p:ext>
+    </p:extLst>
+  </p:cSld>
+  <p:clrMapOvr>
+    <a:masterClrMapping/>
+  </p:clrMapOvr>
+</p:sld>
+</file>
+
+<file path=ppt/slides/slide27.xml><?xml version="1.0" encoding="utf-8"?>
+<p:sld xmlns:a="http://schemas.openxmlformats.org/drawingml/2006/main" xmlns:r="http://schemas.openxmlformats.org/officeDocument/2006/relationships" xmlns:p="http://schemas.openxmlformats.org/presentationml/2006/main">
+  <p:cSld>
+    <p:spTree>
+      <p:nvGrpSpPr>
+        <p:cNvPr id="1" name="">
+          <a:extLst>
+            <a:ext uri="{FF2B5EF4-FFF2-40B4-BE49-F238E27FC236}">
+              <a16:creationId xmlns:a16="http://schemas.microsoft.com/office/drawing/2014/main" id="{2ABF0D0C-A878-2999-763A-D41CDE39731C}"/>
+            </a:ext>
+          </a:extLst>
+        </p:cNvPr>
+        <p:cNvGrpSpPr/>
+        <p:nvPr/>
+      </p:nvGrpSpPr>
+      <p:grpSpPr>
+        <a:xfrm>
+          <a:off x="0" y="0"/>
+          <a:ext cx="0" cy="0"/>
+          <a:chOff x="0" y="0"/>
+          <a:chExt cx="0" cy="0"/>
+        </a:xfrm>
+      </p:grpSpPr>
+      <p:pic>
+        <p:nvPicPr>
+          <p:cNvPr id="3" name="Picture 2" descr="A white and blue background&#10;&#10;Description automatically generated">
+            <a:extLst>
+              <a:ext uri="{FF2B5EF4-FFF2-40B4-BE49-F238E27FC236}">
+                <a16:creationId xmlns:a16="http://schemas.microsoft.com/office/drawing/2014/main" id="{0D6ACC45-80EF-0B98-3E40-59334FFFD759}"/>
+              </a:ext>
+            </a:extLst>
+          </p:cNvPr>
+          <p:cNvPicPr>
+            <a:picLocks noChangeAspect="1"/>
+          </p:cNvPicPr>
+          <p:nvPr/>
+        </p:nvPicPr>
+        <p:blipFill>
+          <a:blip r:embed="rId2"/>
+          <a:stretch>
+            <a:fillRect/>
+          </a:stretch>
+        </p:blipFill>
+        <p:spPr>
+          <a:xfrm>
+            <a:off x="43149" y="-33129"/>
+            <a:ext cx="12192000" cy="6891129"/>
+          </a:xfrm>
+          <a:prstGeom prst="rect">
+            <a:avLst/>
+          </a:prstGeom>
+        </p:spPr>
+      </p:pic>
+      <p:sp>
+        <p:nvSpPr>
+          <p:cNvPr id="4" name="TextBox 3">
+            <a:extLst>
+              <a:ext uri="{FF2B5EF4-FFF2-40B4-BE49-F238E27FC236}">
+                <a16:creationId xmlns:a16="http://schemas.microsoft.com/office/drawing/2014/main" id="{FB763A94-ED1F-39C2-78B4-657D63D0F7F9}"/>
+              </a:ext>
+            </a:extLst>
+          </p:cNvPr>
+          <p:cNvSpPr txBox="1"/>
+          <p:nvPr/>
+        </p:nvSpPr>
+        <p:spPr>
+          <a:xfrm>
+            <a:off x="397668" y="228429"/>
+            <a:ext cx="11534775" cy="646331"/>
+          </a:xfrm>
+          <a:prstGeom prst="rect">
+            <a:avLst/>
+          </a:prstGeom>
+          <a:noFill/>
+        </p:spPr>
+        <p:txBody>
+          <a:bodyPr wrap="square" rtlCol="0">
+            <a:spAutoFit/>
+          </a:bodyPr>
+          <a:lstStyle/>
+          <a:p>
+            <a:r>
+              <a:rPr lang="en-US" sz="3600">
+                <a:solidFill>
+                  <a:schemeClr val="accent1">
+                    <a:lumMod val="50000"/>
+                  </a:schemeClr>
+                </a:solidFill>
+                <a:latin typeface="Arial" panose="020B0604020202020204" pitchFamily="34" charset="0"/>
+                <a:cs typeface="Arial" panose="020B0604020202020204" pitchFamily="34" charset="0"/>
+              </a:rPr>
+              <a:t>Using itertools.dropwhile() (Remove Leading Elements)</a:t>
+            </a:r>
+          </a:p>
+        </p:txBody>
+      </p:sp>
+      <p:sp>
+        <p:nvSpPr>
+          <p:cNvPr id="5" name="TextBox 4">
+            <a:extLst>
+              <a:ext uri="{FF2B5EF4-FFF2-40B4-BE49-F238E27FC236}">
+                <a16:creationId xmlns:a16="http://schemas.microsoft.com/office/drawing/2014/main" id="{368FE557-59CD-2CD3-F481-43813EC6378B}"/>
+              </a:ext>
+            </a:extLst>
+          </p:cNvPr>
+          <p:cNvSpPr txBox="1"/>
+          <p:nvPr/>
+        </p:nvSpPr>
+        <p:spPr>
+          <a:xfrm>
+            <a:off x="614077" y="1116521"/>
+            <a:ext cx="11534774" cy="3231654"/>
+          </a:xfrm>
+          <a:prstGeom prst="rect">
+            <a:avLst/>
+          </a:prstGeom>
+          <a:noFill/>
+        </p:spPr>
+        <p:txBody>
+          <a:bodyPr wrap="square" rtlCol="0">
+            <a:spAutoFit/>
+          </a:bodyPr>
+          <a:lstStyle/>
+          <a:p>
+            <a:pPr marL="228600" lvl="1" indent="-228600">
+              <a:buFont typeface="Arial" panose="020B0604020202020204" pitchFamily="34" charset="0"/>
+              <a:buChar char="•"/>
+            </a:pPr>
+            <a:r>
+              <a:rPr lang="en-US" sz="2800"/>
+              <a:t>dropwhile() stops dropping elements as soon as a condition fails. </a:t>
+            </a:r>
+          </a:p>
+          <a:p>
+            <a:pPr marL="228600" lvl="1" indent="-228600">
+              <a:buFont typeface="Arial" panose="020B0604020202020204" pitchFamily="34" charset="0"/>
+              <a:buChar char="•"/>
+            </a:pPr>
+            <a:r>
+              <a:rPr lang="en-US" sz="2800"/>
+              <a:t>This is useful for sorted lists where unwanted items are at the front.</a:t>
+            </a:r>
+          </a:p>
+          <a:p>
+            <a:pPr marL="228600" lvl="1" indent="-228600">
+              <a:buFont typeface="Arial" panose="020B0604020202020204" pitchFamily="34" charset="0"/>
+              <a:buChar char="•"/>
+            </a:pPr>
+            <a:endParaRPr lang="en-US" sz="2800">
+              <a:solidFill>
+                <a:schemeClr val="accent1">
+                  <a:lumMod val="50000"/>
+                </a:schemeClr>
+              </a:solidFill>
+              <a:latin typeface="Arial" panose="020B0604020202020204" pitchFamily="34" charset="0"/>
+              <a:cs typeface="Arial" panose="020B0604020202020204" pitchFamily="34" charset="0"/>
+            </a:endParaRPr>
+          </a:p>
+          <a:p>
+            <a:pPr marL="228600" lvl="1"/>
+            <a:r>
+              <a:rPr lang="en-US" sz="2400" b="1">
+                <a:solidFill>
+                  <a:schemeClr val="accent1">
+                    <a:lumMod val="50000"/>
+                  </a:schemeClr>
+                </a:solidFill>
+                <a:latin typeface="Consolas" panose="020B0609020204030204" pitchFamily="49" charset="0"/>
+                <a:cs typeface="Arial" panose="020B0604020202020204" pitchFamily="34" charset="0"/>
+              </a:rPr>
+              <a:t>from itertools import dropwhile</a:t>
+            </a:r>
+          </a:p>
+          <a:p>
+            <a:pPr marL="228600" lvl="1"/>
+            <a:endParaRPr lang="en-US" sz="2400" b="1">
+              <a:solidFill>
+                <a:schemeClr val="accent1">
+                  <a:lumMod val="50000"/>
+                </a:schemeClr>
+              </a:solidFill>
+              <a:latin typeface="Consolas" panose="020B0609020204030204" pitchFamily="49" charset="0"/>
+              <a:cs typeface="Arial" panose="020B0604020202020204" pitchFamily="34" charset="0"/>
+            </a:endParaRPr>
+          </a:p>
+          <a:p>
+            <a:pPr marL="228600" lvl="1"/>
+            <a:r>
+              <a:rPr lang="en-US" sz="2400" b="1">
+                <a:solidFill>
+                  <a:schemeClr val="accent1">
+                    <a:lumMod val="50000"/>
+                  </a:schemeClr>
+                </a:solidFill>
+                <a:latin typeface="Consolas" panose="020B0609020204030204" pitchFamily="49" charset="0"/>
+                <a:cs typeface="Arial" panose="020B0604020202020204" pitchFamily="34" charset="0"/>
+              </a:rPr>
+              <a:t>numbers = [2, 4, 6, 1, 3, 5]</a:t>
+            </a:r>
+          </a:p>
+          <a:p>
+            <a:pPr marL="228600" lvl="1"/>
+            <a:r>
+              <a:rPr lang="en-US" sz="2400" b="1">
+                <a:solidFill>
+                  <a:schemeClr val="accent1">
+                    <a:lumMod val="50000"/>
+                  </a:schemeClr>
+                </a:solidFill>
+                <a:latin typeface="Consolas" panose="020B0609020204030204" pitchFamily="49" charset="0"/>
+                <a:cs typeface="Arial" panose="020B0604020202020204" pitchFamily="34" charset="0"/>
+              </a:rPr>
+              <a:t>remaining_numbers = list(dropwhile(lambda x: x % 2 == 0, numbers))</a:t>
+            </a:r>
+          </a:p>
+          <a:p>
+            <a:pPr marL="228600" lvl="1"/>
+            <a:r>
+              <a:rPr lang="en-US" sz="2400" b="1">
+                <a:solidFill>
+                  <a:schemeClr val="accent1">
+                    <a:lumMod val="50000"/>
+                  </a:schemeClr>
+                </a:solidFill>
+                <a:latin typeface="Consolas" panose="020B0609020204030204" pitchFamily="49" charset="0"/>
+                <a:cs typeface="Arial" panose="020B0604020202020204" pitchFamily="34" charset="0"/>
+              </a:rPr>
+              <a:t>print(remaining_numbers)</a:t>
+            </a:r>
+          </a:p>
+        </p:txBody>
+      </p:sp>
+      <p:sp>
+        <p:nvSpPr>
+          <p:cNvPr id="6" name="TextBox 5">
+            <a:extLst>
+              <a:ext uri="{FF2B5EF4-FFF2-40B4-BE49-F238E27FC236}">
+                <a16:creationId xmlns:a16="http://schemas.microsoft.com/office/drawing/2014/main" id="{9D6F0A39-A3CC-C19F-B02E-AEB0AA4AE292}"/>
+              </a:ext>
+            </a:extLst>
+          </p:cNvPr>
+          <p:cNvSpPr txBox="1"/>
+          <p:nvPr/>
+        </p:nvSpPr>
+        <p:spPr>
+          <a:xfrm>
+            <a:off x="5472113" y="4739364"/>
+            <a:ext cx="1385887" cy="523220"/>
+          </a:xfrm>
+          <a:prstGeom prst="rect">
+            <a:avLst/>
+          </a:prstGeom>
+          <a:solidFill>
+            <a:srgbClr val="FFFF00"/>
+          </a:solidFill>
+        </p:spPr>
+        <p:txBody>
+          <a:bodyPr wrap="square">
+            <a:spAutoFit/>
+          </a:bodyPr>
+          <a:lstStyle/>
+          <a:p>
+            <a:r>
+              <a:rPr lang="en-US" sz="2800" b="1"/>
+              <a:t>[1, 3, 5]</a:t>
+            </a:r>
+          </a:p>
+        </p:txBody>
+      </p:sp>
+    </p:spTree>
+    <p:extLst>
+      <p:ext uri="{BB962C8B-B14F-4D97-AF65-F5344CB8AC3E}">
+        <p14:creationId xmlns:p14="http://schemas.microsoft.com/office/powerpoint/2010/main" val="2662719336"/>
+      </p:ext>
+    </p:extLst>
+  </p:cSld>
+  <p:clrMapOvr>
+    <a:masterClrMapping/>
+  </p:clrMapOvr>
+</p:sld>
+</file>
+
+<file path=ppt/slides/slide28.xml><?xml version="1.0" encoding="utf-8"?>
+<p:sld xmlns:a="http://schemas.openxmlformats.org/drawingml/2006/main" xmlns:r="http://schemas.openxmlformats.org/officeDocument/2006/relationships" xmlns:p="http://schemas.openxmlformats.org/presentationml/2006/main">
+  <p:cSld>
+    <p:spTree>
+      <p:nvGrpSpPr>
+        <p:cNvPr id="1" name="">
+          <a:extLst>
+            <a:ext uri="{FF2B5EF4-FFF2-40B4-BE49-F238E27FC236}">
+              <a16:creationId xmlns:a16="http://schemas.microsoft.com/office/drawing/2014/main" id="{AD7AD56E-A206-1EEC-3822-49F56A5DC2BA}"/>
+            </a:ext>
+          </a:extLst>
+        </p:cNvPr>
+        <p:cNvGrpSpPr/>
+        <p:nvPr/>
+      </p:nvGrpSpPr>
+      <p:grpSpPr>
+        <a:xfrm>
+          <a:off x="0" y="0"/>
+          <a:ext cx="0" cy="0"/>
+          <a:chOff x="0" y="0"/>
+          <a:chExt cx="0" cy="0"/>
+        </a:xfrm>
+      </p:grpSpPr>
+      <p:pic>
+        <p:nvPicPr>
+          <p:cNvPr id="3" name="Picture 2" descr="A white and blue background&#10;&#10;Description automatically generated">
+            <a:extLst>
+              <a:ext uri="{FF2B5EF4-FFF2-40B4-BE49-F238E27FC236}">
+                <a16:creationId xmlns:a16="http://schemas.microsoft.com/office/drawing/2014/main" id="{6067919F-18A3-0674-C8E3-811FA5936DB1}"/>
+              </a:ext>
+            </a:extLst>
+          </p:cNvPr>
+          <p:cNvPicPr>
+            <a:picLocks noChangeAspect="1"/>
+          </p:cNvPicPr>
+          <p:nvPr/>
+        </p:nvPicPr>
+        <p:blipFill>
+          <a:blip r:embed="rId2"/>
+          <a:stretch>
+            <a:fillRect/>
+          </a:stretch>
+        </p:blipFill>
+        <p:spPr>
+          <a:xfrm>
+            <a:off x="0" y="-33129"/>
+            <a:ext cx="12192000" cy="6891129"/>
+          </a:xfrm>
+          <a:prstGeom prst="rect">
+            <a:avLst/>
+          </a:prstGeom>
+        </p:spPr>
+      </p:pic>
+      <p:sp>
+        <p:nvSpPr>
+          <p:cNvPr id="4" name="TextBox 3">
+            <a:extLst>
+              <a:ext uri="{FF2B5EF4-FFF2-40B4-BE49-F238E27FC236}">
+                <a16:creationId xmlns:a16="http://schemas.microsoft.com/office/drawing/2014/main" id="{BB5B4A96-E408-CCB1-D5A3-06E315E5F059}"/>
+              </a:ext>
+            </a:extLst>
+          </p:cNvPr>
+          <p:cNvSpPr txBox="1"/>
+          <p:nvPr/>
+        </p:nvSpPr>
+        <p:spPr>
+          <a:xfrm>
+            <a:off x="604266" y="136955"/>
+            <a:ext cx="10391019" cy="646331"/>
+          </a:xfrm>
+          <a:prstGeom prst="rect">
+            <a:avLst/>
+          </a:prstGeom>
+          <a:noFill/>
+        </p:spPr>
+        <p:txBody>
+          <a:bodyPr wrap="square" rtlCol="0">
+            <a:spAutoFit/>
+          </a:bodyPr>
+          <a:lstStyle/>
+          <a:p>
+            <a:r>
+              <a:rPr lang="en-US" sz="3600">
+                <a:solidFill>
+                  <a:schemeClr val="accent1">
+                    <a:lumMod val="50000"/>
+                  </a:schemeClr>
+                </a:solidFill>
+                <a:latin typeface="Arial" panose="020B0604020202020204" pitchFamily="34" charset="0"/>
+                <a:cs typeface="Arial" panose="020B0604020202020204" pitchFamily="34" charset="0"/>
+              </a:rPr>
+              <a:t>Handling Index Errors Gracefully (Dictionaries)</a:t>
+            </a:r>
+          </a:p>
+        </p:txBody>
+      </p:sp>
+      <p:sp>
+        <p:nvSpPr>
+          <p:cNvPr id="5" name="TextBox 4">
+            <a:extLst>
+              <a:ext uri="{FF2B5EF4-FFF2-40B4-BE49-F238E27FC236}">
+                <a16:creationId xmlns:a16="http://schemas.microsoft.com/office/drawing/2014/main" id="{7DF1EA63-7C13-F91D-C2B9-43B469355014}"/>
+              </a:ext>
+            </a:extLst>
+          </p:cNvPr>
+          <p:cNvSpPr txBox="1"/>
+          <p:nvPr/>
+        </p:nvSpPr>
+        <p:spPr>
+          <a:xfrm>
+            <a:off x="836614" y="906971"/>
+            <a:ext cx="10323564" cy="1569660"/>
+          </a:xfrm>
+          <a:prstGeom prst="rect">
+            <a:avLst/>
+          </a:prstGeom>
+          <a:noFill/>
+        </p:spPr>
+        <p:txBody>
+          <a:bodyPr wrap="square" rtlCol="0">
+            <a:spAutoFit/>
+          </a:bodyPr>
+          <a:lstStyle/>
+          <a:p>
+            <a:pPr marL="231775" indent="-230188">
+              <a:buFont typeface="Arial" panose="020B0604020202020204" pitchFamily="34" charset="0"/>
+              <a:buChar char="•"/>
+            </a:pPr>
+            <a:endParaRPr lang="en-US" sz="2400">
+              <a:solidFill>
+                <a:schemeClr val="accent1">
+                  <a:lumMod val="50000"/>
+                </a:schemeClr>
+              </a:solidFill>
+              <a:latin typeface="Arial" panose="020B0604020202020204" pitchFamily="34" charset="0"/>
+              <a:cs typeface="Arial" panose="020B0604020202020204" pitchFamily="34" charset="0"/>
+            </a:endParaRPr>
+          </a:p>
+          <a:p>
+            <a:pPr marL="231775" indent="-230188">
+              <a:buFont typeface="Arial" panose="020B0604020202020204" pitchFamily="34" charset="0"/>
+              <a:buChar char="•"/>
+            </a:pPr>
+            <a:r>
+              <a:rPr lang="en-US" sz="2400">
+                <a:solidFill>
+                  <a:schemeClr val="accent1">
+                    <a:lumMod val="50000"/>
+                  </a:schemeClr>
+                </a:solidFill>
+                <a:latin typeface="Arial" panose="020B0604020202020204" pitchFamily="34" charset="0"/>
+                <a:cs typeface="Arial" panose="020B0604020202020204" pitchFamily="34" charset="0"/>
+              </a:rPr>
+              <a:t>Prefer dict.get() for dictionaries instead of direct key access.</a:t>
+            </a:r>
+          </a:p>
+          <a:p>
+            <a:pPr marL="231775" indent="-230188">
+              <a:buFont typeface="Arial" panose="020B0604020202020204" pitchFamily="34" charset="0"/>
+              <a:buChar char="•"/>
+            </a:pPr>
+            <a:r>
+              <a:rPr lang="en-US" sz="2400">
+                <a:solidFill>
+                  <a:schemeClr val="accent1">
+                    <a:lumMod val="50000"/>
+                  </a:schemeClr>
+                </a:solidFill>
+                <a:latin typeface="Arial" panose="020B0604020202020204" pitchFamily="34" charset="0"/>
+                <a:cs typeface="Arial" panose="020B0604020202020204" pitchFamily="34" charset="0"/>
+              </a:rPr>
+              <a:t>Use defaultdict for missing dictionary keys.</a:t>
+            </a:r>
+          </a:p>
+          <a:p>
+            <a:pPr marL="231775" indent="-230188">
+              <a:buFont typeface="Arial" panose="020B0604020202020204" pitchFamily="34" charset="0"/>
+              <a:buChar char="•"/>
+            </a:pPr>
+            <a:r>
+              <a:rPr lang="en-US" sz="2400">
+                <a:solidFill>
+                  <a:schemeClr val="accent1">
+                    <a:lumMod val="50000"/>
+                  </a:schemeClr>
+                </a:solidFill>
+                <a:latin typeface="Arial" panose="020B0604020202020204" pitchFamily="34" charset="0"/>
+                <a:cs typeface="Arial" panose="020B0604020202020204" pitchFamily="34" charset="0"/>
+              </a:rPr>
+              <a:t>Prefer get() for optional dictionary lookups.</a:t>
+            </a:r>
+          </a:p>
+        </p:txBody>
+      </p:sp>
+    </p:spTree>
+    <p:extLst>
+      <p:ext uri="{BB962C8B-B14F-4D97-AF65-F5344CB8AC3E}">
+        <p14:creationId xmlns:p14="http://schemas.microsoft.com/office/powerpoint/2010/main" val="3885808635"/>
+      </p:ext>
+    </p:extLst>
+  </p:cSld>
+  <p:clrMapOvr>
+    <a:masterClrMapping/>
+  </p:clrMapOvr>
+</p:sld>
+</file>
+
+<file path=ppt/slides/slide29.xml><?xml version="1.0" encoding="utf-8"?>
+<p:sld xmlns:a="http://schemas.openxmlformats.org/drawingml/2006/main" xmlns:r="http://schemas.openxmlformats.org/officeDocument/2006/relationships" xmlns:p="http://schemas.openxmlformats.org/presentationml/2006/main">
+  <p:cSld>
+    <p:spTree>
+      <p:nvGrpSpPr>
+        <p:cNvPr id="1" name="">
+          <a:extLst>
+            <a:ext uri="{FF2B5EF4-FFF2-40B4-BE49-F238E27FC236}">
+              <a16:creationId xmlns:a16="http://schemas.microsoft.com/office/drawing/2014/main" id="{986D872C-E703-1333-8961-D37AB2337B58}"/>
+            </a:ext>
+          </a:extLst>
+        </p:cNvPr>
+        <p:cNvGrpSpPr/>
+        <p:nvPr/>
+      </p:nvGrpSpPr>
+      <p:grpSpPr>
+        <a:xfrm>
+          <a:off x="0" y="0"/>
+          <a:ext cx="0" cy="0"/>
+          <a:chOff x="0" y="0"/>
+          <a:chExt cx="0" cy="0"/>
+        </a:xfrm>
+      </p:grpSpPr>
+      <p:pic>
+        <p:nvPicPr>
+          <p:cNvPr id="3" name="Picture 2" descr="A white and blue background&#10;&#10;Description automatically generated">
+            <a:extLst>
+              <a:ext uri="{FF2B5EF4-FFF2-40B4-BE49-F238E27FC236}">
+                <a16:creationId xmlns:a16="http://schemas.microsoft.com/office/drawing/2014/main" id="{64AD6237-F4AC-A21A-D86F-42B6B102BD47}"/>
+              </a:ext>
+            </a:extLst>
+          </p:cNvPr>
+          <p:cNvPicPr>
+            <a:picLocks noChangeAspect="1"/>
+          </p:cNvPicPr>
+          <p:nvPr/>
+        </p:nvPicPr>
+        <p:blipFill>
+          <a:blip r:embed="rId2"/>
+          <a:stretch>
+            <a:fillRect/>
+          </a:stretch>
+        </p:blipFill>
+        <p:spPr>
+          <a:xfrm>
+            <a:off x="0" y="-33129"/>
+            <a:ext cx="12192000" cy="6891129"/>
+          </a:xfrm>
+          <a:prstGeom prst="rect">
+            <a:avLst/>
+          </a:prstGeom>
+        </p:spPr>
+      </p:pic>
+      <p:sp>
+        <p:nvSpPr>
+          <p:cNvPr id="4" name="TextBox 3">
+            <a:extLst>
+              <a:ext uri="{FF2B5EF4-FFF2-40B4-BE49-F238E27FC236}">
+                <a16:creationId xmlns:a16="http://schemas.microsoft.com/office/drawing/2014/main" id="{1A4B7406-491F-B083-FC26-26BD7458B9A8}"/>
+              </a:ext>
+            </a:extLst>
+          </p:cNvPr>
+          <p:cNvSpPr txBox="1"/>
+          <p:nvPr/>
+        </p:nvSpPr>
+        <p:spPr>
+          <a:xfrm>
+            <a:off x="604266" y="136955"/>
+            <a:ext cx="10391019" cy="646331"/>
+          </a:xfrm>
+          <a:prstGeom prst="rect">
+            <a:avLst/>
+          </a:prstGeom>
+          <a:noFill/>
+        </p:spPr>
+        <p:txBody>
+          <a:bodyPr wrap="square" rtlCol="0">
+            <a:spAutoFit/>
+          </a:bodyPr>
+          <a:lstStyle/>
+          <a:p>
+            <a:r>
+              <a:rPr lang="en-US" sz="3600">
+                <a:solidFill>
+                  <a:schemeClr val="accent1">
+                    <a:lumMod val="50000"/>
+                  </a:schemeClr>
+                </a:solidFill>
+                <a:latin typeface="Arial" panose="020B0604020202020204" pitchFamily="34" charset="0"/>
+                <a:cs typeface="Arial" panose="020B0604020202020204" pitchFamily="34" charset="0"/>
+              </a:rPr>
               <a:t>Using Safer Data Structures</a:t>
             </a:r>
           </a:p>
@@ -7347,418 +10149,6 @@
     <p:extLst>
       <p:ext uri="{BB962C8B-B14F-4D97-AF65-F5344CB8AC3E}">
         <p14:creationId xmlns:p14="http://schemas.microsoft.com/office/powerpoint/2010/main" val="725852954"/>
-      </p:ext>
-    </p:extLst>
-  </p:cSld>
-  <p:clrMapOvr>
-    <a:masterClrMapping/>
-  </p:clrMapOvr>
-</p:sld>
-</file>
-
-<file path=ppt/slides/slide21.xml><?xml version="1.0" encoding="utf-8"?>
-<p:sld xmlns:a="http://schemas.openxmlformats.org/drawingml/2006/main" xmlns:r="http://schemas.openxmlformats.org/officeDocument/2006/relationships" xmlns:p="http://schemas.openxmlformats.org/presentationml/2006/main">
-  <p:cSld>
-    <p:spTree>
-      <p:nvGrpSpPr>
-        <p:cNvPr id="1" name="">
-          <a:extLst>
-            <a:ext uri="{FF2B5EF4-FFF2-40B4-BE49-F238E27FC236}">
-              <a16:creationId xmlns:a16="http://schemas.microsoft.com/office/drawing/2014/main" id="{38A6AAEF-67B5-DA56-3F7D-D718B0002B84}"/>
-            </a:ext>
-          </a:extLst>
-        </p:cNvPr>
-        <p:cNvGrpSpPr/>
-        <p:nvPr/>
-      </p:nvGrpSpPr>
-      <p:grpSpPr>
-        <a:xfrm>
-          <a:off x="0" y="0"/>
-          <a:ext cx="0" cy="0"/>
-          <a:chOff x="0" y="0"/>
-          <a:chExt cx="0" cy="0"/>
-        </a:xfrm>
-      </p:grpSpPr>
-      <p:pic>
-        <p:nvPicPr>
-          <p:cNvPr id="3" name="Picture 2" descr="A white and blue background&#10;&#10;Description automatically generated">
-            <a:extLst>
-              <a:ext uri="{FF2B5EF4-FFF2-40B4-BE49-F238E27FC236}">
-                <a16:creationId xmlns:a16="http://schemas.microsoft.com/office/drawing/2014/main" id="{9FF758E4-E181-0F79-4E1C-1E66B093AA5B}"/>
-              </a:ext>
-            </a:extLst>
-          </p:cNvPr>
-          <p:cNvPicPr>
-            <a:picLocks noChangeAspect="1"/>
-          </p:cNvPicPr>
-          <p:nvPr/>
-        </p:nvPicPr>
-        <p:blipFill>
-          <a:blip r:embed="rId2"/>
-          <a:stretch>
-            <a:fillRect/>
-          </a:stretch>
-        </p:blipFill>
-        <p:spPr>
-          <a:xfrm>
-            <a:off x="112427" y="-269823"/>
-            <a:ext cx="12192000" cy="6891129"/>
-          </a:xfrm>
-          <a:prstGeom prst="rect">
-            <a:avLst/>
-          </a:prstGeom>
-        </p:spPr>
-      </p:pic>
-      <p:sp>
-        <p:nvSpPr>
-          <p:cNvPr id="4" name="TextBox 3">
-            <a:extLst>
-              <a:ext uri="{FF2B5EF4-FFF2-40B4-BE49-F238E27FC236}">
-                <a16:creationId xmlns:a16="http://schemas.microsoft.com/office/drawing/2014/main" id="{40F61035-2F11-D950-B3A8-A720C420C78E}"/>
-              </a:ext>
-            </a:extLst>
-          </p:cNvPr>
-          <p:cNvSpPr txBox="1"/>
-          <p:nvPr/>
-        </p:nvSpPr>
-        <p:spPr>
-          <a:xfrm>
-            <a:off x="604266" y="136955"/>
-            <a:ext cx="10391019" cy="646331"/>
-          </a:xfrm>
-          <a:prstGeom prst="rect">
-            <a:avLst/>
-          </a:prstGeom>
-          <a:noFill/>
-        </p:spPr>
-        <p:txBody>
-          <a:bodyPr wrap="square" rtlCol="0">
-            <a:spAutoFit/>
-          </a:bodyPr>
-          <a:lstStyle/>
-          <a:p>
-            <a:pPr marL="457200" indent="-457200">
-              <a:buFont typeface="+mj-lt"/>
-              <a:buAutoNum type="arabicPeriod"/>
-            </a:pPr>
-            <a:r>
-              <a:rPr lang="en-US" sz="3600">
-                <a:solidFill>
-                  <a:schemeClr val="accent1">
-                    <a:lumMod val="50000"/>
-                  </a:schemeClr>
-                </a:solidFill>
-                <a:latin typeface="Arial" panose="020B0604020202020204" pitchFamily="34" charset="0"/>
-                <a:cs typeface="Arial" panose="020B0604020202020204" pitchFamily="34" charset="0"/>
-              </a:rPr>
-              <a:t>Loops, Lists, Tuples, and Dictionaries</a:t>
-            </a:r>
-          </a:p>
-        </p:txBody>
-      </p:sp>
-      <p:sp>
-        <p:nvSpPr>
-          <p:cNvPr id="5" name="TextBox 4">
-            <a:extLst>
-              <a:ext uri="{FF2B5EF4-FFF2-40B4-BE49-F238E27FC236}">
-                <a16:creationId xmlns:a16="http://schemas.microsoft.com/office/drawing/2014/main" id="{89574967-AED0-16E6-85AB-FDEB7F994609}"/>
-              </a:ext>
-            </a:extLst>
-          </p:cNvPr>
-          <p:cNvSpPr txBox="1"/>
-          <p:nvPr/>
-        </p:nvSpPr>
-        <p:spPr>
-          <a:xfrm>
-            <a:off x="776653" y="876991"/>
-            <a:ext cx="10323564" cy="5632311"/>
-          </a:xfrm>
-          <a:prstGeom prst="rect">
-            <a:avLst/>
-          </a:prstGeom>
-          <a:noFill/>
-        </p:spPr>
-        <p:txBody>
-          <a:bodyPr wrap="square" rtlCol="0">
-            <a:spAutoFit/>
-          </a:bodyPr>
-          <a:lstStyle/>
-          <a:p>
-            <a:pPr marL="457200" indent="-457200">
-              <a:buFont typeface="Arial" panose="020B0604020202020204" pitchFamily="34" charset="0"/>
-              <a:buChar char="•"/>
-            </a:pPr>
-            <a:r>
-              <a:rPr lang="en-US" sz="2400">
-                <a:solidFill>
-                  <a:schemeClr val="accent1">
-                    <a:lumMod val="50000"/>
-                  </a:schemeClr>
-                </a:solidFill>
-                <a:latin typeface="Arial" panose="020B0604020202020204" pitchFamily="34" charset="0"/>
-                <a:cs typeface="Arial" panose="020B0604020202020204" pitchFamily="34" charset="0"/>
-              </a:rPr>
-              <a:t>Secure Iteration Practices</a:t>
-            </a:r>
-          </a:p>
-          <a:p>
-            <a:pPr marL="914400" lvl="1" indent="-457200">
-              <a:buFont typeface="Arial" panose="020B0604020202020204" pitchFamily="34" charset="0"/>
-              <a:buChar char="•"/>
-            </a:pPr>
-            <a:r>
-              <a:rPr lang="en-US" sz="2400">
-                <a:solidFill>
-                  <a:schemeClr val="accent1">
-                    <a:lumMod val="50000"/>
-                  </a:schemeClr>
-                </a:solidFill>
-                <a:latin typeface="Arial" panose="020B0604020202020204" pitchFamily="34" charset="0"/>
-                <a:cs typeface="Arial" panose="020B0604020202020204" pitchFamily="34" charset="0"/>
-              </a:rPr>
-              <a:t>Avoid infinite loops and ensuring proper termination</a:t>
-            </a:r>
-          </a:p>
-          <a:p>
-            <a:pPr marL="914400" lvl="1" indent="-457200">
-              <a:buFont typeface="Arial" panose="020B0604020202020204" pitchFamily="34" charset="0"/>
-              <a:buChar char="•"/>
-            </a:pPr>
-            <a:r>
-              <a:rPr lang="en-US" sz="2400">
-                <a:solidFill>
-                  <a:schemeClr val="accent1">
-                    <a:lumMod val="50000"/>
-                  </a:schemeClr>
-                </a:solidFill>
-                <a:latin typeface="Arial" panose="020B0604020202020204" pitchFamily="34" charset="0"/>
-                <a:cs typeface="Arial" panose="020B0604020202020204" pitchFamily="34" charset="0"/>
-              </a:rPr>
-              <a:t>Use generator expressions for memory-efficient iteration</a:t>
-            </a:r>
-          </a:p>
-          <a:p>
-            <a:pPr marL="457200" indent="-457200">
-              <a:buFont typeface="Arial" panose="020B0604020202020204" pitchFamily="34" charset="0"/>
-              <a:buChar char="•"/>
-            </a:pPr>
-            <a:r>
-              <a:rPr lang="en-US" sz="2400">
-                <a:solidFill>
-                  <a:schemeClr val="accent1">
-                    <a:lumMod val="50000"/>
-                  </a:schemeClr>
-                </a:solidFill>
-                <a:latin typeface="Arial" panose="020B0604020202020204" pitchFamily="34" charset="0"/>
-                <a:cs typeface="Arial" panose="020B0604020202020204" pitchFamily="34" charset="0"/>
-              </a:rPr>
-              <a:t>Lists and Tuples: Security Considerations</a:t>
-            </a:r>
-          </a:p>
-          <a:p>
-            <a:pPr marL="914400" lvl="1" indent="-457200">
-              <a:buFont typeface="Arial" panose="020B0604020202020204" pitchFamily="34" charset="0"/>
-              <a:buChar char="•"/>
-            </a:pPr>
-            <a:r>
-              <a:rPr lang="en-US" sz="2400">
-                <a:solidFill>
-                  <a:schemeClr val="accent1">
-                    <a:lumMod val="50000"/>
-                  </a:schemeClr>
-                </a:solidFill>
-                <a:latin typeface="Arial" panose="020B0604020202020204" pitchFamily="34" charset="0"/>
-                <a:cs typeface="Arial" panose="020B0604020202020204" pitchFamily="34" charset="0"/>
-              </a:rPr>
-              <a:t>Prevent unintended data modifications in lists</a:t>
-            </a:r>
-          </a:p>
-          <a:p>
-            <a:pPr marL="914400" lvl="1" indent="-457200">
-              <a:buFont typeface="Arial" panose="020B0604020202020204" pitchFamily="34" charset="0"/>
-              <a:buChar char="•"/>
-            </a:pPr>
-            <a:r>
-              <a:rPr lang="en-US" sz="2400">
-                <a:solidFill>
-                  <a:schemeClr val="accent1">
-                    <a:lumMod val="50000"/>
-                  </a:schemeClr>
-                </a:solidFill>
-                <a:latin typeface="Arial" panose="020B0604020202020204" pitchFamily="34" charset="0"/>
-                <a:cs typeface="Arial" panose="020B0604020202020204" pitchFamily="34" charset="0"/>
-              </a:rPr>
-              <a:t>Use tuples for immutable, security-sensitive data</a:t>
-            </a:r>
-          </a:p>
-          <a:p>
-            <a:pPr marL="914400" lvl="1" indent="-457200">
-              <a:buFont typeface="Arial" panose="020B0604020202020204" pitchFamily="34" charset="0"/>
-              <a:buChar char="•"/>
-            </a:pPr>
-            <a:r>
-              <a:rPr lang="en-US" sz="2400">
-                <a:solidFill>
-                  <a:schemeClr val="accent1">
-                    <a:lumMod val="50000"/>
-                  </a:schemeClr>
-                </a:solidFill>
-                <a:latin typeface="Arial" panose="020B0604020202020204" pitchFamily="34" charset="0"/>
-                <a:cs typeface="Arial" panose="020B0604020202020204" pitchFamily="34" charset="0"/>
-              </a:rPr>
-              <a:t>Avoid index errors and boundary overflows</a:t>
-            </a:r>
-          </a:p>
-          <a:p>
-            <a:pPr marL="457200" indent="-457200">
-              <a:buFont typeface="Arial" panose="020B0604020202020204" pitchFamily="34" charset="0"/>
-              <a:buChar char="•"/>
-            </a:pPr>
-            <a:r>
-              <a:rPr lang="en-US" sz="2400">
-                <a:solidFill>
-                  <a:schemeClr val="accent1">
-                    <a:lumMod val="50000"/>
-                  </a:schemeClr>
-                </a:solidFill>
-                <a:latin typeface="Arial" panose="020B0604020202020204" pitchFamily="34" charset="0"/>
-                <a:cs typeface="Arial" panose="020B0604020202020204" pitchFamily="34" charset="0"/>
-              </a:rPr>
-              <a:t>Dictionaries and Secure Data Handling</a:t>
-            </a:r>
-          </a:p>
-          <a:p>
-            <a:pPr marL="914400" lvl="1" indent="-457200">
-              <a:buFont typeface="Arial" panose="020B0604020202020204" pitchFamily="34" charset="0"/>
-              <a:buChar char="•"/>
-            </a:pPr>
-            <a:r>
-              <a:rPr lang="en-US" sz="2400">
-                <a:solidFill>
-                  <a:schemeClr val="accent1">
-                    <a:lumMod val="50000"/>
-                  </a:schemeClr>
-                </a:solidFill>
-                <a:latin typeface="Arial" panose="020B0604020202020204" pitchFamily="34" charset="0"/>
-                <a:cs typeface="Arial" panose="020B0604020202020204" pitchFamily="34" charset="0"/>
-              </a:rPr>
-              <a:t>Prevent key collisions in sensitive data</a:t>
-            </a:r>
-          </a:p>
-          <a:p>
-            <a:pPr marL="914400" lvl="1" indent="-457200">
-              <a:buFont typeface="Arial" panose="020B0604020202020204" pitchFamily="34" charset="0"/>
-              <a:buChar char="•"/>
-            </a:pPr>
-            <a:r>
-              <a:rPr lang="en-US" sz="2400">
-                <a:solidFill>
-                  <a:schemeClr val="accent1">
-                    <a:lumMod val="50000"/>
-                  </a:schemeClr>
-                </a:solidFill>
-                <a:latin typeface="Arial" panose="020B0604020202020204" pitchFamily="34" charset="0"/>
-                <a:cs typeface="Arial" panose="020B0604020202020204" pitchFamily="34" charset="0"/>
-              </a:rPr>
-              <a:t>Handle missing keys securely to avoid runtime errors</a:t>
-            </a:r>
-          </a:p>
-          <a:p>
-            <a:pPr marL="914400" lvl="1" indent="-457200">
-              <a:buFont typeface="Arial" panose="020B0604020202020204" pitchFamily="34" charset="0"/>
-              <a:buChar char="•"/>
-            </a:pPr>
-            <a:r>
-              <a:rPr lang="en-US" sz="2400">
-                <a:solidFill>
-                  <a:schemeClr val="accent1">
-                    <a:lumMod val="50000"/>
-                  </a:schemeClr>
-                </a:solidFill>
-                <a:latin typeface="Arial" panose="020B0604020202020204" pitchFamily="34" charset="0"/>
-                <a:cs typeface="Arial" panose="020B0604020202020204" pitchFamily="34" charset="0"/>
-              </a:rPr>
-              <a:t>Use defaultdict and exception handling for safe lookups</a:t>
-            </a:r>
-          </a:p>
-          <a:p>
-            <a:pPr marL="457200" indent="-457200">
-              <a:buFont typeface="Arial" panose="020B0604020202020204" pitchFamily="34" charset="0"/>
-              <a:buChar char="•"/>
-            </a:pPr>
-            <a:r>
-              <a:rPr lang="en-US" sz="2400">
-                <a:solidFill>
-                  <a:schemeClr val="accent1">
-                    <a:lumMod val="50000"/>
-                  </a:schemeClr>
-                </a:solidFill>
-                <a:latin typeface="Arial" panose="020B0604020202020204" pitchFamily="34" charset="0"/>
-                <a:cs typeface="Arial" panose="020B0604020202020204" pitchFamily="34" charset="0"/>
-              </a:rPr>
-              <a:t>Mitigating Risks in Data Structures</a:t>
-            </a:r>
-          </a:p>
-          <a:p>
-            <a:pPr marL="914400" lvl="1" indent="-457200">
-              <a:buFont typeface="Arial" panose="020B0604020202020204" pitchFamily="34" charset="0"/>
-              <a:buChar char="•"/>
-            </a:pPr>
-            <a:r>
-              <a:rPr lang="en-US" sz="2400">
-                <a:solidFill>
-                  <a:schemeClr val="accent1">
-                    <a:lumMod val="50000"/>
-                  </a:schemeClr>
-                </a:solidFill>
-                <a:latin typeface="Arial" panose="020B0604020202020204" pitchFamily="34" charset="0"/>
-                <a:cs typeface="Arial" panose="020B0604020202020204" pitchFamily="34" charset="0"/>
-              </a:rPr>
-              <a:t>Avoid mutable default arguments in function definitions</a:t>
-            </a:r>
-          </a:p>
-          <a:p>
-            <a:pPr marL="914400" lvl="1" indent="-457200">
-              <a:buFont typeface="Arial" panose="020B0604020202020204" pitchFamily="34" charset="0"/>
-              <a:buChar char="•"/>
-            </a:pPr>
-            <a:r>
-              <a:rPr lang="en-US" sz="2400">
-                <a:solidFill>
-                  <a:schemeClr val="accent1">
-                    <a:lumMod val="50000"/>
-                  </a:schemeClr>
-                </a:solidFill>
-                <a:latin typeface="Arial" panose="020B0604020202020204" pitchFamily="34" charset="0"/>
-                <a:cs typeface="Arial" panose="020B0604020202020204" pitchFamily="34" charset="0"/>
-              </a:rPr>
-              <a:t>Prevent race conditions when modifying shared data</a:t>
-            </a:r>
-          </a:p>
-          <a:p>
-            <a:pPr marL="914400" lvl="1" indent="-457200">
-              <a:buFont typeface="Arial" panose="020B0604020202020204" pitchFamily="34" charset="0"/>
-              <a:buChar char="•"/>
-            </a:pPr>
-            <a:r>
-              <a:rPr lang="en-US" sz="2400">
-                <a:solidFill>
-                  <a:schemeClr val="accent1">
-                    <a:lumMod val="50000"/>
-                  </a:schemeClr>
-                </a:solidFill>
-                <a:latin typeface="Arial" panose="020B0604020202020204" pitchFamily="34" charset="0"/>
-                <a:cs typeface="Arial" panose="020B0604020202020204" pitchFamily="34" charset="0"/>
-              </a:rPr>
-              <a:t>Use secure hashing techniques for dictionary keys</a:t>
-            </a:r>
-          </a:p>
-        </p:txBody>
-      </p:sp>
-    </p:spTree>
-    <p:extLst>
-      <p:ext uri="{BB962C8B-B14F-4D97-AF65-F5344CB8AC3E}">
-        <p14:creationId xmlns:p14="http://schemas.microsoft.com/office/powerpoint/2010/main" val="2144214793"/>
       </p:ext>
     </p:extLst>
   </p:cSld>
@@ -8038,6 +10428,418 @@
     <p:extLst>
       <p:ext uri="{BB962C8B-B14F-4D97-AF65-F5344CB8AC3E}">
         <p14:creationId xmlns:p14="http://schemas.microsoft.com/office/powerpoint/2010/main" val="1212907822"/>
+      </p:ext>
+    </p:extLst>
+  </p:cSld>
+  <p:clrMapOvr>
+    <a:masterClrMapping/>
+  </p:clrMapOvr>
+</p:sld>
+</file>
+
+<file path=ppt/slides/slide30.xml><?xml version="1.0" encoding="utf-8"?>
+<p:sld xmlns:a="http://schemas.openxmlformats.org/drawingml/2006/main" xmlns:r="http://schemas.openxmlformats.org/officeDocument/2006/relationships" xmlns:p="http://schemas.openxmlformats.org/presentationml/2006/main">
+  <p:cSld>
+    <p:spTree>
+      <p:nvGrpSpPr>
+        <p:cNvPr id="1" name="">
+          <a:extLst>
+            <a:ext uri="{FF2B5EF4-FFF2-40B4-BE49-F238E27FC236}">
+              <a16:creationId xmlns:a16="http://schemas.microsoft.com/office/drawing/2014/main" id="{38A6AAEF-67B5-DA56-3F7D-D718B0002B84}"/>
+            </a:ext>
+          </a:extLst>
+        </p:cNvPr>
+        <p:cNvGrpSpPr/>
+        <p:nvPr/>
+      </p:nvGrpSpPr>
+      <p:grpSpPr>
+        <a:xfrm>
+          <a:off x="0" y="0"/>
+          <a:ext cx="0" cy="0"/>
+          <a:chOff x="0" y="0"/>
+          <a:chExt cx="0" cy="0"/>
+        </a:xfrm>
+      </p:grpSpPr>
+      <p:pic>
+        <p:nvPicPr>
+          <p:cNvPr id="3" name="Picture 2" descr="A white and blue background&#10;&#10;Description automatically generated">
+            <a:extLst>
+              <a:ext uri="{FF2B5EF4-FFF2-40B4-BE49-F238E27FC236}">
+                <a16:creationId xmlns:a16="http://schemas.microsoft.com/office/drawing/2014/main" id="{9FF758E4-E181-0F79-4E1C-1E66B093AA5B}"/>
+              </a:ext>
+            </a:extLst>
+          </p:cNvPr>
+          <p:cNvPicPr>
+            <a:picLocks noChangeAspect="1"/>
+          </p:cNvPicPr>
+          <p:nvPr/>
+        </p:nvPicPr>
+        <p:blipFill>
+          <a:blip r:embed="rId2"/>
+          <a:stretch>
+            <a:fillRect/>
+          </a:stretch>
+        </p:blipFill>
+        <p:spPr>
+          <a:xfrm>
+            <a:off x="112427" y="-269823"/>
+            <a:ext cx="12192000" cy="6891129"/>
+          </a:xfrm>
+          <a:prstGeom prst="rect">
+            <a:avLst/>
+          </a:prstGeom>
+        </p:spPr>
+      </p:pic>
+      <p:sp>
+        <p:nvSpPr>
+          <p:cNvPr id="4" name="TextBox 3">
+            <a:extLst>
+              <a:ext uri="{FF2B5EF4-FFF2-40B4-BE49-F238E27FC236}">
+                <a16:creationId xmlns:a16="http://schemas.microsoft.com/office/drawing/2014/main" id="{40F61035-2F11-D950-B3A8-A720C420C78E}"/>
+              </a:ext>
+            </a:extLst>
+          </p:cNvPr>
+          <p:cNvSpPr txBox="1"/>
+          <p:nvPr/>
+        </p:nvSpPr>
+        <p:spPr>
+          <a:xfrm>
+            <a:off x="604266" y="136955"/>
+            <a:ext cx="10391019" cy="646331"/>
+          </a:xfrm>
+          <a:prstGeom prst="rect">
+            <a:avLst/>
+          </a:prstGeom>
+          <a:noFill/>
+        </p:spPr>
+        <p:txBody>
+          <a:bodyPr wrap="square" rtlCol="0">
+            <a:spAutoFit/>
+          </a:bodyPr>
+          <a:lstStyle/>
+          <a:p>
+            <a:pPr marL="457200" indent="-457200">
+              <a:buFont typeface="+mj-lt"/>
+              <a:buAutoNum type="arabicPeriod"/>
+            </a:pPr>
+            <a:r>
+              <a:rPr lang="en-US" sz="3600">
+                <a:solidFill>
+                  <a:schemeClr val="accent1">
+                    <a:lumMod val="50000"/>
+                  </a:schemeClr>
+                </a:solidFill>
+                <a:latin typeface="Arial" panose="020B0604020202020204" pitchFamily="34" charset="0"/>
+                <a:cs typeface="Arial" panose="020B0604020202020204" pitchFamily="34" charset="0"/>
+              </a:rPr>
+              <a:t>Loops, Lists, Tuples, and Dictionaries</a:t>
+            </a:r>
+          </a:p>
+        </p:txBody>
+      </p:sp>
+      <p:sp>
+        <p:nvSpPr>
+          <p:cNvPr id="5" name="TextBox 4">
+            <a:extLst>
+              <a:ext uri="{FF2B5EF4-FFF2-40B4-BE49-F238E27FC236}">
+                <a16:creationId xmlns:a16="http://schemas.microsoft.com/office/drawing/2014/main" id="{89574967-AED0-16E6-85AB-FDEB7F994609}"/>
+              </a:ext>
+            </a:extLst>
+          </p:cNvPr>
+          <p:cNvSpPr txBox="1"/>
+          <p:nvPr/>
+        </p:nvSpPr>
+        <p:spPr>
+          <a:xfrm>
+            <a:off x="776653" y="876991"/>
+            <a:ext cx="10323564" cy="5632311"/>
+          </a:xfrm>
+          <a:prstGeom prst="rect">
+            <a:avLst/>
+          </a:prstGeom>
+          <a:noFill/>
+        </p:spPr>
+        <p:txBody>
+          <a:bodyPr wrap="square" rtlCol="0">
+            <a:spAutoFit/>
+          </a:bodyPr>
+          <a:lstStyle/>
+          <a:p>
+            <a:pPr marL="457200" indent="-457200">
+              <a:buFont typeface="Arial" panose="020B0604020202020204" pitchFamily="34" charset="0"/>
+              <a:buChar char="•"/>
+            </a:pPr>
+            <a:r>
+              <a:rPr lang="en-US" sz="2400">
+                <a:solidFill>
+                  <a:schemeClr val="accent1">
+                    <a:lumMod val="50000"/>
+                  </a:schemeClr>
+                </a:solidFill>
+                <a:latin typeface="Arial" panose="020B0604020202020204" pitchFamily="34" charset="0"/>
+                <a:cs typeface="Arial" panose="020B0604020202020204" pitchFamily="34" charset="0"/>
+              </a:rPr>
+              <a:t>Secure Iteration Practices</a:t>
+            </a:r>
+          </a:p>
+          <a:p>
+            <a:pPr marL="914400" lvl="1" indent="-457200">
+              <a:buFont typeface="Arial" panose="020B0604020202020204" pitchFamily="34" charset="0"/>
+              <a:buChar char="•"/>
+            </a:pPr>
+            <a:r>
+              <a:rPr lang="en-US" sz="2400">
+                <a:solidFill>
+                  <a:schemeClr val="accent1">
+                    <a:lumMod val="50000"/>
+                  </a:schemeClr>
+                </a:solidFill>
+                <a:latin typeface="Arial" panose="020B0604020202020204" pitchFamily="34" charset="0"/>
+                <a:cs typeface="Arial" panose="020B0604020202020204" pitchFamily="34" charset="0"/>
+              </a:rPr>
+              <a:t>Avoid infinite loops and ensuring proper termination</a:t>
+            </a:r>
+          </a:p>
+          <a:p>
+            <a:pPr marL="914400" lvl="1" indent="-457200">
+              <a:buFont typeface="Arial" panose="020B0604020202020204" pitchFamily="34" charset="0"/>
+              <a:buChar char="•"/>
+            </a:pPr>
+            <a:r>
+              <a:rPr lang="en-US" sz="2400">
+                <a:solidFill>
+                  <a:schemeClr val="accent1">
+                    <a:lumMod val="50000"/>
+                  </a:schemeClr>
+                </a:solidFill>
+                <a:latin typeface="Arial" panose="020B0604020202020204" pitchFamily="34" charset="0"/>
+                <a:cs typeface="Arial" panose="020B0604020202020204" pitchFamily="34" charset="0"/>
+              </a:rPr>
+              <a:t>Use generator expressions for memory-efficient iteration</a:t>
+            </a:r>
+          </a:p>
+          <a:p>
+            <a:pPr marL="457200" indent="-457200">
+              <a:buFont typeface="Arial" panose="020B0604020202020204" pitchFamily="34" charset="0"/>
+              <a:buChar char="•"/>
+            </a:pPr>
+            <a:r>
+              <a:rPr lang="en-US" sz="2400">
+                <a:solidFill>
+                  <a:schemeClr val="accent1">
+                    <a:lumMod val="50000"/>
+                  </a:schemeClr>
+                </a:solidFill>
+                <a:latin typeface="Arial" panose="020B0604020202020204" pitchFamily="34" charset="0"/>
+                <a:cs typeface="Arial" panose="020B0604020202020204" pitchFamily="34" charset="0"/>
+              </a:rPr>
+              <a:t>Lists and Tuples: Security Considerations</a:t>
+            </a:r>
+          </a:p>
+          <a:p>
+            <a:pPr marL="914400" lvl="1" indent="-457200">
+              <a:buFont typeface="Arial" panose="020B0604020202020204" pitchFamily="34" charset="0"/>
+              <a:buChar char="•"/>
+            </a:pPr>
+            <a:r>
+              <a:rPr lang="en-US" sz="2400">
+                <a:solidFill>
+                  <a:schemeClr val="accent1">
+                    <a:lumMod val="50000"/>
+                  </a:schemeClr>
+                </a:solidFill>
+                <a:latin typeface="Arial" panose="020B0604020202020204" pitchFamily="34" charset="0"/>
+                <a:cs typeface="Arial" panose="020B0604020202020204" pitchFamily="34" charset="0"/>
+              </a:rPr>
+              <a:t>Prevent unintended data modifications in lists</a:t>
+            </a:r>
+          </a:p>
+          <a:p>
+            <a:pPr marL="914400" lvl="1" indent="-457200">
+              <a:buFont typeface="Arial" panose="020B0604020202020204" pitchFamily="34" charset="0"/>
+              <a:buChar char="•"/>
+            </a:pPr>
+            <a:r>
+              <a:rPr lang="en-US" sz="2400">
+                <a:solidFill>
+                  <a:schemeClr val="accent1">
+                    <a:lumMod val="50000"/>
+                  </a:schemeClr>
+                </a:solidFill>
+                <a:latin typeface="Arial" panose="020B0604020202020204" pitchFamily="34" charset="0"/>
+                <a:cs typeface="Arial" panose="020B0604020202020204" pitchFamily="34" charset="0"/>
+              </a:rPr>
+              <a:t>Use tuples for immutable, security-sensitive data</a:t>
+            </a:r>
+          </a:p>
+          <a:p>
+            <a:pPr marL="914400" lvl="1" indent="-457200">
+              <a:buFont typeface="Arial" panose="020B0604020202020204" pitchFamily="34" charset="0"/>
+              <a:buChar char="•"/>
+            </a:pPr>
+            <a:r>
+              <a:rPr lang="en-US" sz="2400">
+                <a:solidFill>
+                  <a:schemeClr val="accent1">
+                    <a:lumMod val="50000"/>
+                  </a:schemeClr>
+                </a:solidFill>
+                <a:latin typeface="Arial" panose="020B0604020202020204" pitchFamily="34" charset="0"/>
+                <a:cs typeface="Arial" panose="020B0604020202020204" pitchFamily="34" charset="0"/>
+              </a:rPr>
+              <a:t>Avoid index errors and boundary overflows</a:t>
+            </a:r>
+          </a:p>
+          <a:p>
+            <a:pPr marL="457200" indent="-457200">
+              <a:buFont typeface="Arial" panose="020B0604020202020204" pitchFamily="34" charset="0"/>
+              <a:buChar char="•"/>
+            </a:pPr>
+            <a:r>
+              <a:rPr lang="en-US" sz="2400">
+                <a:solidFill>
+                  <a:schemeClr val="accent1">
+                    <a:lumMod val="50000"/>
+                  </a:schemeClr>
+                </a:solidFill>
+                <a:latin typeface="Arial" panose="020B0604020202020204" pitchFamily="34" charset="0"/>
+                <a:cs typeface="Arial" panose="020B0604020202020204" pitchFamily="34" charset="0"/>
+              </a:rPr>
+              <a:t>Dictionaries and Secure Data Handling</a:t>
+            </a:r>
+          </a:p>
+          <a:p>
+            <a:pPr marL="914400" lvl="1" indent="-457200">
+              <a:buFont typeface="Arial" panose="020B0604020202020204" pitchFamily="34" charset="0"/>
+              <a:buChar char="•"/>
+            </a:pPr>
+            <a:r>
+              <a:rPr lang="en-US" sz="2400">
+                <a:solidFill>
+                  <a:schemeClr val="accent1">
+                    <a:lumMod val="50000"/>
+                  </a:schemeClr>
+                </a:solidFill>
+                <a:latin typeface="Arial" panose="020B0604020202020204" pitchFamily="34" charset="0"/>
+                <a:cs typeface="Arial" panose="020B0604020202020204" pitchFamily="34" charset="0"/>
+              </a:rPr>
+              <a:t>Prevent key collisions in sensitive data</a:t>
+            </a:r>
+          </a:p>
+          <a:p>
+            <a:pPr marL="914400" lvl="1" indent="-457200">
+              <a:buFont typeface="Arial" panose="020B0604020202020204" pitchFamily="34" charset="0"/>
+              <a:buChar char="•"/>
+            </a:pPr>
+            <a:r>
+              <a:rPr lang="en-US" sz="2400">
+                <a:solidFill>
+                  <a:schemeClr val="accent1">
+                    <a:lumMod val="50000"/>
+                  </a:schemeClr>
+                </a:solidFill>
+                <a:latin typeface="Arial" panose="020B0604020202020204" pitchFamily="34" charset="0"/>
+                <a:cs typeface="Arial" panose="020B0604020202020204" pitchFamily="34" charset="0"/>
+              </a:rPr>
+              <a:t>Handle missing keys securely to avoid runtime errors</a:t>
+            </a:r>
+          </a:p>
+          <a:p>
+            <a:pPr marL="914400" lvl="1" indent="-457200">
+              <a:buFont typeface="Arial" panose="020B0604020202020204" pitchFamily="34" charset="0"/>
+              <a:buChar char="•"/>
+            </a:pPr>
+            <a:r>
+              <a:rPr lang="en-US" sz="2400">
+                <a:solidFill>
+                  <a:schemeClr val="accent1">
+                    <a:lumMod val="50000"/>
+                  </a:schemeClr>
+                </a:solidFill>
+                <a:latin typeface="Arial" panose="020B0604020202020204" pitchFamily="34" charset="0"/>
+                <a:cs typeface="Arial" panose="020B0604020202020204" pitchFamily="34" charset="0"/>
+              </a:rPr>
+              <a:t>Use defaultdict and exception handling for safe lookups</a:t>
+            </a:r>
+          </a:p>
+          <a:p>
+            <a:pPr marL="457200" indent="-457200">
+              <a:buFont typeface="Arial" panose="020B0604020202020204" pitchFamily="34" charset="0"/>
+              <a:buChar char="•"/>
+            </a:pPr>
+            <a:r>
+              <a:rPr lang="en-US" sz="2400">
+                <a:solidFill>
+                  <a:schemeClr val="accent1">
+                    <a:lumMod val="50000"/>
+                  </a:schemeClr>
+                </a:solidFill>
+                <a:latin typeface="Arial" panose="020B0604020202020204" pitchFamily="34" charset="0"/>
+                <a:cs typeface="Arial" panose="020B0604020202020204" pitchFamily="34" charset="0"/>
+              </a:rPr>
+              <a:t>Mitigating Risks in Data Structures</a:t>
+            </a:r>
+          </a:p>
+          <a:p>
+            <a:pPr marL="914400" lvl="1" indent="-457200">
+              <a:buFont typeface="Arial" panose="020B0604020202020204" pitchFamily="34" charset="0"/>
+              <a:buChar char="•"/>
+            </a:pPr>
+            <a:r>
+              <a:rPr lang="en-US" sz="2400">
+                <a:solidFill>
+                  <a:schemeClr val="accent1">
+                    <a:lumMod val="50000"/>
+                  </a:schemeClr>
+                </a:solidFill>
+                <a:latin typeface="Arial" panose="020B0604020202020204" pitchFamily="34" charset="0"/>
+                <a:cs typeface="Arial" panose="020B0604020202020204" pitchFamily="34" charset="0"/>
+              </a:rPr>
+              <a:t>Avoid mutable default arguments in function definitions</a:t>
+            </a:r>
+          </a:p>
+          <a:p>
+            <a:pPr marL="914400" lvl="1" indent="-457200">
+              <a:buFont typeface="Arial" panose="020B0604020202020204" pitchFamily="34" charset="0"/>
+              <a:buChar char="•"/>
+            </a:pPr>
+            <a:r>
+              <a:rPr lang="en-US" sz="2400">
+                <a:solidFill>
+                  <a:schemeClr val="accent1">
+                    <a:lumMod val="50000"/>
+                  </a:schemeClr>
+                </a:solidFill>
+                <a:latin typeface="Arial" panose="020B0604020202020204" pitchFamily="34" charset="0"/>
+                <a:cs typeface="Arial" panose="020B0604020202020204" pitchFamily="34" charset="0"/>
+              </a:rPr>
+              <a:t>Prevent race conditions when modifying shared data</a:t>
+            </a:r>
+          </a:p>
+          <a:p>
+            <a:pPr marL="914400" lvl="1" indent="-457200">
+              <a:buFont typeface="Arial" panose="020B0604020202020204" pitchFamily="34" charset="0"/>
+              <a:buChar char="•"/>
+            </a:pPr>
+            <a:r>
+              <a:rPr lang="en-US" sz="2400">
+                <a:solidFill>
+                  <a:schemeClr val="accent1">
+                    <a:lumMod val="50000"/>
+                  </a:schemeClr>
+                </a:solidFill>
+                <a:latin typeface="Arial" panose="020B0604020202020204" pitchFamily="34" charset="0"/>
+                <a:cs typeface="Arial" panose="020B0604020202020204" pitchFamily="34" charset="0"/>
+              </a:rPr>
+              <a:t>Use secure hashing techniques for dictionary keys</a:t>
+            </a:r>
+          </a:p>
+        </p:txBody>
+      </p:sp>
+    </p:spTree>
+    <p:extLst>
+      <p:ext uri="{BB962C8B-B14F-4D97-AF65-F5344CB8AC3E}">
+        <p14:creationId xmlns:p14="http://schemas.microsoft.com/office/powerpoint/2010/main" val="2144214793"/>
       </p:ext>
     </p:extLst>
   </p:cSld>

--- a/Slides-Day2.pptx
+++ b/Slides-Day2.pptx
@@ -33,8 +33,9 @@
     <p:sldId id="288" r:id="rId27"/>
     <p:sldId id="289" r:id="rId28"/>
     <p:sldId id="276" r:id="rId29"/>
-    <p:sldId id="275" r:id="rId30"/>
-    <p:sldId id="270" r:id="rId31"/>
+    <p:sldId id="290" r:id="rId30"/>
+    <p:sldId id="275" r:id="rId31"/>
+    <p:sldId id="270" r:id="rId32"/>
   </p:sldIdLst>
   <p:sldSz cx="12192000" cy="6858000"/>
   <p:notesSz cx="6858000" cy="9144000"/>
@@ -288,7 +289,7 @@
           <a:p>
             <a:fld id="{CD989C08-BA69-4AD3-98E9-D53C63F6E1B1}" type="datetimeFigureOut">
               <a:rPr lang="en-US" smtClean="0"/>
-              <a:t>3/19/2025</a:t>
+              <a:t>3/30/2025</a:t>
             </a:fld>
             <a:endParaRPr lang="en-US"/>
           </a:p>
@@ -486,7 +487,7 @@
           <a:p>
             <a:fld id="{CD989C08-BA69-4AD3-98E9-D53C63F6E1B1}" type="datetimeFigureOut">
               <a:rPr lang="en-US" smtClean="0"/>
-              <a:t>3/19/2025</a:t>
+              <a:t>3/30/2025</a:t>
             </a:fld>
             <a:endParaRPr lang="en-US"/>
           </a:p>
@@ -694,7 +695,7 @@
           <a:p>
             <a:fld id="{CD989C08-BA69-4AD3-98E9-D53C63F6E1B1}" type="datetimeFigureOut">
               <a:rPr lang="en-US" smtClean="0"/>
-              <a:t>3/19/2025</a:t>
+              <a:t>3/30/2025</a:t>
             </a:fld>
             <a:endParaRPr lang="en-US"/>
           </a:p>
@@ -892,7 +893,7 @@
           <a:p>
             <a:fld id="{CD989C08-BA69-4AD3-98E9-D53C63F6E1B1}" type="datetimeFigureOut">
               <a:rPr lang="en-US" smtClean="0"/>
-              <a:t>3/19/2025</a:t>
+              <a:t>3/30/2025</a:t>
             </a:fld>
             <a:endParaRPr lang="en-US"/>
           </a:p>
@@ -1167,7 +1168,7 @@
           <a:p>
             <a:fld id="{CD989C08-BA69-4AD3-98E9-D53C63F6E1B1}" type="datetimeFigureOut">
               <a:rPr lang="en-US" smtClean="0"/>
-              <a:t>3/19/2025</a:t>
+              <a:t>3/30/2025</a:t>
             </a:fld>
             <a:endParaRPr lang="en-US"/>
           </a:p>
@@ -1432,7 +1433,7 @@
           <a:p>
             <a:fld id="{CD989C08-BA69-4AD3-98E9-D53C63F6E1B1}" type="datetimeFigureOut">
               <a:rPr lang="en-US" smtClean="0"/>
-              <a:t>3/19/2025</a:t>
+              <a:t>3/30/2025</a:t>
             </a:fld>
             <a:endParaRPr lang="en-US"/>
           </a:p>
@@ -1844,7 +1845,7 @@
           <a:p>
             <a:fld id="{CD989C08-BA69-4AD3-98E9-D53C63F6E1B1}" type="datetimeFigureOut">
               <a:rPr lang="en-US" smtClean="0"/>
-              <a:t>3/19/2025</a:t>
+              <a:t>3/30/2025</a:t>
             </a:fld>
             <a:endParaRPr lang="en-US"/>
           </a:p>
@@ -1985,7 +1986,7 @@
           <a:p>
             <a:fld id="{CD989C08-BA69-4AD3-98E9-D53C63F6E1B1}" type="datetimeFigureOut">
               <a:rPr lang="en-US" smtClean="0"/>
-              <a:t>3/19/2025</a:t>
+              <a:t>3/30/2025</a:t>
             </a:fld>
             <a:endParaRPr lang="en-US"/>
           </a:p>
@@ -2098,7 +2099,7 @@
           <a:p>
             <a:fld id="{CD989C08-BA69-4AD3-98E9-D53C63F6E1B1}" type="datetimeFigureOut">
               <a:rPr lang="en-US" smtClean="0"/>
-              <a:t>3/19/2025</a:t>
+              <a:t>3/30/2025</a:t>
             </a:fld>
             <a:endParaRPr lang="en-US"/>
           </a:p>
@@ -2409,7 +2410,7 @@
           <a:p>
             <a:fld id="{CD989C08-BA69-4AD3-98E9-D53C63F6E1B1}" type="datetimeFigureOut">
               <a:rPr lang="en-US" smtClean="0"/>
-              <a:t>3/19/2025</a:t>
+              <a:t>3/30/2025</a:t>
             </a:fld>
             <a:endParaRPr lang="en-US"/>
           </a:p>
@@ -2697,7 +2698,7 @@
           <a:p>
             <a:fld id="{CD989C08-BA69-4AD3-98E9-D53C63F6E1B1}" type="datetimeFigureOut">
               <a:rPr lang="en-US" smtClean="0"/>
-              <a:t>3/19/2025</a:t>
+              <a:t>3/30/2025</a:t>
             </a:fld>
             <a:endParaRPr lang="en-US"/>
           </a:p>
@@ -2938,7 +2939,7 @@
           <a:p>
             <a:fld id="{CD989C08-BA69-4AD3-98E9-D53C63F6E1B1}" type="datetimeFigureOut">
               <a:rPr lang="en-US" smtClean="0"/>
-              <a:t>3/19/2025</a:t>
+              <a:t>3/30/2025</a:t>
             </a:fld>
             <a:endParaRPr lang="en-US"/>
           </a:p>
@@ -9692,7 +9693,7 @@
         <p:spPr>
           <a:xfrm>
             <a:off x="604266" y="136955"/>
-            <a:ext cx="10391019" cy="646331"/>
+            <a:ext cx="10391019" cy="523220"/>
           </a:xfrm>
           <a:prstGeom prst="rect">
             <a:avLst/>
@@ -9706,16 +9707,16 @@
           <a:lstStyle/>
           <a:p>
             <a:r>
-              <a:rPr lang="en-US" sz="3600">
-                <a:solidFill>
-                  <a:schemeClr val="accent1">
-                    <a:lumMod val="50000"/>
-                  </a:schemeClr>
-                </a:solidFill>
-                <a:latin typeface="Arial" panose="020B0604020202020204" pitchFamily="34" charset="0"/>
-                <a:cs typeface="Arial" panose="020B0604020202020204" pitchFamily="34" charset="0"/>
-              </a:rPr>
-              <a:t>Handling Index Errors Gracefully (Dictionaries)</a:t>
+              <a:rPr lang="en-US" sz="2800">
+                <a:solidFill>
+                  <a:schemeClr val="accent1">
+                    <a:lumMod val="50000"/>
+                  </a:schemeClr>
+                </a:solidFill>
+                <a:latin typeface="Arial" panose="020B0604020202020204" pitchFamily="34" charset="0"/>
+                <a:cs typeface="Arial" panose="020B0604020202020204" pitchFamily="34" charset="0"/>
+              </a:rPr>
+              <a:t>Use dict.get() for Dictionaries Instead of Direct Key Access</a:t>
             </a:r>
           </a:p>
         </p:txBody>
@@ -9734,8 +9735,8 @@
         </p:nvSpPr>
         <p:spPr>
           <a:xfrm>
-            <a:off x="836614" y="906971"/>
-            <a:ext cx="10323564" cy="1569660"/>
+            <a:off x="786607" y="964443"/>
+            <a:ext cx="10323564" cy="3785652"/>
           </a:xfrm>
           <a:prstGeom prst="rect">
             <a:avLst/>
@@ -9752,15 +9753,18 @@
               <a:buFont typeface="Arial" panose="020B0604020202020204" pitchFamily="34" charset="0"/>
               <a:buChar char="•"/>
             </a:pPr>
-            <a:endParaRPr lang="en-US" sz="2400">
-              <a:solidFill>
-                <a:schemeClr val="accent1">
-                  <a:lumMod val="50000"/>
-                </a:schemeClr>
-              </a:solidFill>
-              <a:latin typeface="Arial" panose="020B0604020202020204" pitchFamily="34" charset="0"/>
-              <a:cs typeface="Arial" panose="020B0604020202020204" pitchFamily="34" charset="0"/>
-            </a:endParaRPr>
+            <a:r>
+              <a:rPr lang="en-US" sz="2400">
+                <a:solidFill>
+                  <a:schemeClr val="accent1">
+                    <a:lumMod val="50000"/>
+                  </a:schemeClr>
+                </a:solidFill>
+                <a:latin typeface="Arial" panose="020B0604020202020204" pitchFamily="34" charset="0"/>
+                <a:cs typeface="Arial" panose="020B0604020202020204" pitchFamily="34" charset="0"/>
+              </a:rPr>
+              <a:t>Using dict.get() for dictionary access in Python is generally safer than direct key access (e.g., my_dict['key']) because it prevents potential KeyError exceptions that could disrupt program flow or unintentionally expose sensitive error messages. </a:t>
+            </a:r>
           </a:p>
           <a:p>
             <a:pPr marL="231775" indent="-230188">
@@ -9777,7 +9781,7 @@
                 <a:latin typeface="Arial" panose="020B0604020202020204" pitchFamily="34" charset="0"/>
                 <a:cs typeface="Arial" panose="020B0604020202020204" pitchFamily="34" charset="0"/>
               </a:rPr>
-              <a:t>Prefer dict.get() for dictionaries instead of direct key access.</a:t>
+              <a:t>dict.get() allows a default return value to be specified when the key is missing, helping to avoid unhandled exceptions and reduce the likelihood of information leakage or crashes due to unexpected input or data manipulation by malicious users. </a:t>
             </a:r>
           </a:p>
           <a:p>
@@ -9795,25 +9799,7 @@
                 <a:latin typeface="Arial" panose="020B0604020202020204" pitchFamily="34" charset="0"/>
                 <a:cs typeface="Arial" panose="020B0604020202020204" pitchFamily="34" charset="0"/>
               </a:rPr>
-              <a:t>Use defaultdict for missing dictionary keys.</a:t>
-            </a:r>
-          </a:p>
-          <a:p>
-            <a:pPr marL="231775" indent="-230188">
-              <a:buFont typeface="Arial" panose="020B0604020202020204" pitchFamily="34" charset="0"/>
-              <a:buChar char="•"/>
-            </a:pPr>
-            <a:r>
-              <a:rPr lang="en-US" sz="2400">
-                <a:solidFill>
-                  <a:schemeClr val="accent1">
-                    <a:lumMod val="50000"/>
-                  </a:schemeClr>
-                </a:solidFill>
-                <a:latin typeface="Arial" panose="020B0604020202020204" pitchFamily="34" charset="0"/>
-                <a:cs typeface="Arial" panose="020B0604020202020204" pitchFamily="34" charset="0"/>
-              </a:rPr>
-              <a:t>Prefer get() for optional dictionary lookups.</a:t>
+              <a:t>This supports more fault-tolerant code that handles edge cases gracefully</a:t>
             </a:r>
           </a:p>
         </p:txBody>
@@ -9839,7 +9825,7 @@
         <p:cNvPr id="1" name="">
           <a:extLst>
             <a:ext uri="{FF2B5EF4-FFF2-40B4-BE49-F238E27FC236}">
-              <a16:creationId xmlns:a16="http://schemas.microsoft.com/office/drawing/2014/main" id="{986D872C-E703-1333-8961-D37AB2337B58}"/>
+              <a16:creationId xmlns:a16="http://schemas.microsoft.com/office/drawing/2014/main" id="{BE4E01A6-8AF4-78E3-42EA-F8FBD89E228F}"/>
             </a:ext>
           </a:extLst>
         </p:cNvPr>
@@ -9859,7 +9845,7 @@
           <p:cNvPr id="3" name="Picture 2" descr="A white and blue background&#10;&#10;Description automatically generated">
             <a:extLst>
               <a:ext uri="{FF2B5EF4-FFF2-40B4-BE49-F238E27FC236}">
-                <a16:creationId xmlns:a16="http://schemas.microsoft.com/office/drawing/2014/main" id="{64AD6237-F4AC-A21A-D86F-42B6B102BD47}"/>
+                <a16:creationId xmlns:a16="http://schemas.microsoft.com/office/drawing/2014/main" id="{57F14B90-56D6-AA66-E232-9E890A6625E1}"/>
               </a:ext>
             </a:extLst>
           </p:cNvPr>
@@ -9889,7 +9875,7 @@
           <p:cNvPr id="4" name="TextBox 3">
             <a:extLst>
               <a:ext uri="{FF2B5EF4-FFF2-40B4-BE49-F238E27FC236}">
-                <a16:creationId xmlns:a16="http://schemas.microsoft.com/office/drawing/2014/main" id="{1A4B7406-491F-B083-FC26-26BD7458B9A8}"/>
+                <a16:creationId xmlns:a16="http://schemas.microsoft.com/office/drawing/2014/main" id="{EA694544-2C65-EB5C-92F7-652033CD5FEE}"/>
               </a:ext>
             </a:extLst>
           </p:cNvPr>
@@ -9899,7 +9885,7 @@
         <p:spPr>
           <a:xfrm>
             <a:off x="604266" y="136955"/>
-            <a:ext cx="10391019" cy="646331"/>
+            <a:ext cx="10391019" cy="1200329"/>
           </a:xfrm>
           <a:prstGeom prst="rect">
             <a:avLst/>
@@ -9922,8 +9908,19 @@
                 <a:latin typeface="Arial" panose="020B0604020202020204" pitchFamily="34" charset="0"/>
                 <a:cs typeface="Arial" panose="020B0604020202020204" pitchFamily="34" charset="0"/>
               </a:rPr>
-              <a:t>Using Safer Data Structures</a:t>
-            </a:r>
+              <a:t>Use defaultdict for Missing Dictionary Keys</a:t>
+            </a:r>
+          </a:p>
+          <a:p>
+            <a:endParaRPr lang="en-US" sz="3600">
+              <a:solidFill>
+                <a:schemeClr val="accent1">
+                  <a:lumMod val="50000"/>
+                </a:schemeClr>
+              </a:solidFill>
+              <a:latin typeface="Arial" panose="020B0604020202020204" pitchFamily="34" charset="0"/>
+              <a:cs typeface="Arial" panose="020B0604020202020204" pitchFamily="34" charset="0"/>
+            </a:endParaRPr>
           </a:p>
         </p:txBody>
       </p:sp>
@@ -9932,7 +9929,7 @@
           <p:cNvPr id="5" name="TextBox 4">
             <a:extLst>
               <a:ext uri="{FF2B5EF4-FFF2-40B4-BE49-F238E27FC236}">
-                <a16:creationId xmlns:a16="http://schemas.microsoft.com/office/drawing/2014/main" id="{B81C8176-5C01-4C22-D6C4-0DFE4E41F9F8}"/>
+                <a16:creationId xmlns:a16="http://schemas.microsoft.com/office/drawing/2014/main" id="{2356057B-1EF2-29D3-E3C6-C8D8D8678C99}"/>
               </a:ext>
             </a:extLst>
           </p:cNvPr>
@@ -9942,7 +9939,7 @@
         <p:spPr>
           <a:xfrm>
             <a:off x="836614" y="906971"/>
-            <a:ext cx="10323564" cy="4770537"/>
+            <a:ext cx="10323564" cy="4524315"/>
           </a:xfrm>
           <a:prstGeom prst="rect">
             <a:avLst/>
@@ -9969,7 +9966,23 @@
                 <a:latin typeface="Arial" panose="020B0604020202020204" pitchFamily="34" charset="0"/>
                 <a:cs typeface="Arial" panose="020B0604020202020204" pitchFamily="34" charset="0"/>
               </a:rPr>
-              <a:t>Use collections.deque for fixed-size buffers.</a:t>
+              <a:t>Using collections.defaultdict (</a:t>
+            </a:r>
+            <a:r>
+              <a:rPr lang="en-US" sz="2400"/>
+              <a:t>a built-in class in Python) </a:t>
+            </a:r>
+            <a:r>
+              <a:rPr lang="en-US" sz="2400">
+                <a:solidFill>
+                  <a:schemeClr val="accent1">
+                    <a:lumMod val="50000"/>
+                  </a:schemeClr>
+                </a:solidFill>
+                <a:latin typeface="Arial" panose="020B0604020202020204" pitchFamily="34" charset="0"/>
+                <a:cs typeface="Arial" panose="020B0604020202020204" pitchFamily="34" charset="0"/>
+              </a:rPr>
+              <a:t>is a proactive way to handle missing dictionary keys without raising exceptions, thereby enhancing code reliability and security. </a:t>
             </a:r>
           </a:p>
           <a:p>
@@ -9977,15 +9990,18 @@
               <a:buFont typeface="Arial" panose="020B0604020202020204" pitchFamily="34" charset="0"/>
               <a:buChar char="•"/>
             </a:pPr>
-            <a:endParaRPr lang="en-US" sz="2400">
-              <a:solidFill>
-                <a:schemeClr val="accent1">
-                  <a:lumMod val="50000"/>
-                </a:schemeClr>
-              </a:solidFill>
-              <a:latin typeface="Arial" panose="020B0604020202020204" pitchFamily="34" charset="0"/>
-              <a:cs typeface="Arial" panose="020B0604020202020204" pitchFamily="34" charset="0"/>
-            </a:endParaRPr>
+            <a:r>
+              <a:rPr lang="en-US" sz="2400">
+                <a:solidFill>
+                  <a:schemeClr val="accent1">
+                    <a:lumMod val="50000"/>
+                  </a:schemeClr>
+                </a:solidFill>
+                <a:latin typeface="Arial" panose="020B0604020202020204" pitchFamily="34" charset="0"/>
+                <a:cs typeface="Arial" panose="020B0604020202020204" pitchFamily="34" charset="0"/>
+              </a:rPr>
+              <a:t>By specifying a default factory function, such as int or list, defaultdict automatically initializes missing keys with a safe, predictable value. This prevents KeyError exceptions that might otherwise expose implementation details or crash the application due to unanticipated input. </a:t>
+            </a:r>
           </a:p>
           <a:p>
             <a:pPr marL="231775" indent="-230188">
@@ -10002,145 +10018,7 @@
                 <a:latin typeface="Arial" panose="020B0604020202020204" pitchFamily="34" charset="0"/>
                 <a:cs typeface="Arial" panose="020B0604020202020204" pitchFamily="34" charset="0"/>
               </a:rPr>
-              <a:t>Consider slicing to limit index access.</a:t>
-            </a:r>
-          </a:p>
-          <a:p>
-            <a:pPr marL="688975" lvl="1" indent="-230188">
-              <a:buFont typeface="Arial" panose="020B0604020202020204" pitchFamily="34" charset="0"/>
-              <a:buChar char="•"/>
-            </a:pPr>
-            <a:r>
-              <a:rPr lang="en-US" sz="2000">
-                <a:solidFill>
-                  <a:schemeClr val="accent1">
-                    <a:lumMod val="50000"/>
-                  </a:schemeClr>
-                </a:solidFill>
-                <a:latin typeface="Arial" panose="020B0604020202020204" pitchFamily="34" charset="0"/>
-                <a:cs typeface="Arial" panose="020B0604020202020204" pitchFamily="34" charset="0"/>
-              </a:rPr>
-              <a:t>Unlike direct indexing (my_list[3]), which would raise an IndexError if the index is out of bounds, slicing gracefully handles it.</a:t>
-            </a:r>
-          </a:p>
-          <a:p>
-            <a:pPr marL="231775" indent="-230188">
-              <a:buFont typeface="Arial" panose="020B0604020202020204" pitchFamily="34" charset="0"/>
-              <a:buChar char="•"/>
-            </a:pPr>
-            <a:endParaRPr lang="en-US" sz="2400">
-              <a:solidFill>
-                <a:schemeClr val="accent1">
-                  <a:lumMod val="50000"/>
-                </a:schemeClr>
-              </a:solidFill>
-              <a:latin typeface="Arial" panose="020B0604020202020204" pitchFamily="34" charset="0"/>
-              <a:cs typeface="Arial" panose="020B0604020202020204" pitchFamily="34" charset="0"/>
-            </a:endParaRPr>
-          </a:p>
-          <a:p>
-            <a:pPr marL="914400"/>
-            <a:r>
-              <a:rPr lang="en-US" sz="2400" b="1">
-                <a:solidFill>
-                  <a:schemeClr val="accent1">
-                    <a:lumMod val="50000"/>
-                  </a:schemeClr>
-                </a:solidFill>
-                <a:latin typeface="Consolas" panose="020B0609020204030204" pitchFamily="49" charset="0"/>
-                <a:cs typeface="Arial" panose="020B0604020202020204" pitchFamily="34" charset="0"/>
-              </a:rPr>
-              <a:t>my_list = [10, 20, 30]</a:t>
-            </a:r>
-          </a:p>
-          <a:p>
-            <a:pPr marL="914400"/>
-            <a:r>
-              <a:rPr lang="en-US" sz="2400" b="1">
-                <a:solidFill>
-                  <a:schemeClr val="accent1">
-                    <a:lumMod val="50000"/>
-                  </a:schemeClr>
-                </a:solidFill>
-                <a:latin typeface="Consolas" panose="020B0609020204030204" pitchFamily="49" charset="0"/>
-                <a:cs typeface="Arial" panose="020B0604020202020204" pitchFamily="34" charset="0"/>
-              </a:rPr>
-              <a:t>print(my_list[5])  # IndexError: index out of range</a:t>
-            </a:r>
-          </a:p>
-          <a:p>
-            <a:pPr marL="914400"/>
-            <a:endParaRPr lang="en-US" sz="2400" b="1">
-              <a:solidFill>
-                <a:schemeClr val="accent1">
-                  <a:lumMod val="50000"/>
-                </a:schemeClr>
-              </a:solidFill>
-              <a:latin typeface="Consolas" panose="020B0609020204030204" pitchFamily="49" charset="0"/>
-              <a:cs typeface="Arial" panose="020B0604020202020204" pitchFamily="34" charset="0"/>
-            </a:endParaRPr>
-          </a:p>
-          <a:p>
-            <a:pPr marL="914400"/>
-            <a:r>
-              <a:rPr lang="en-US" sz="2400" b="1">
-                <a:solidFill>
-                  <a:schemeClr val="accent1">
-                    <a:lumMod val="50000"/>
-                  </a:schemeClr>
-                </a:solidFill>
-                <a:latin typeface="Consolas" panose="020B0609020204030204" pitchFamily="49" charset="0"/>
-                <a:cs typeface="Arial" panose="020B0604020202020204" pitchFamily="34" charset="0"/>
-              </a:rPr>
-              <a:t>my_list = [10, 20, 30]</a:t>
-            </a:r>
-          </a:p>
-          <a:p>
-            <a:pPr marL="914400"/>
-            <a:r>
-              <a:rPr lang="en-US" sz="2400" b="1">
-                <a:solidFill>
-                  <a:schemeClr val="accent1">
-                    <a:lumMod val="50000"/>
-                  </a:schemeClr>
-                </a:solidFill>
-                <a:latin typeface="Consolas" panose="020B0609020204030204" pitchFamily="49" charset="0"/>
-                <a:cs typeface="Arial" panose="020B0604020202020204" pitchFamily="34" charset="0"/>
-              </a:rPr>
-              <a:t>print(my_list[:5])  # Prevents out-of-range errors</a:t>
-            </a:r>
-          </a:p>
-          <a:p>
-            <a:pPr marL="231775" indent="-230188">
-              <a:buFont typeface="Arial" panose="020B0604020202020204" pitchFamily="34" charset="0"/>
-              <a:buChar char="•"/>
-            </a:pPr>
-            <a:endParaRPr lang="en-US" sz="2400">
-              <a:solidFill>
-                <a:schemeClr val="accent1">
-                  <a:lumMod val="50000"/>
-                </a:schemeClr>
-              </a:solidFill>
-              <a:latin typeface="Arial" panose="020B0604020202020204" pitchFamily="34" charset="0"/>
-              <a:cs typeface="Arial" panose="020B0604020202020204" pitchFamily="34" charset="0"/>
-            </a:endParaRPr>
-          </a:p>
-          <a:p>
-            <a:pPr marL="231775" indent="-230188">
-              <a:buFont typeface="Arial" panose="020B0604020202020204" pitchFamily="34" charset="0"/>
-              <a:buChar char="•"/>
-            </a:pPr>
-            <a:r>
-              <a:rPr lang="en-US" sz="2400">
-                <a:solidFill>
-                  <a:schemeClr val="accent1">
-                    <a:lumMod val="50000"/>
-                  </a:schemeClr>
-                </a:solidFill>
-                <a:latin typeface="Arial" panose="020B0604020202020204" pitchFamily="34" charset="0"/>
-                <a:cs typeface="Arial" panose="020B0604020202020204" pitchFamily="34" charset="0"/>
-              </a:rPr>
-              <a:t>Avoid unnecessary manual index tracking when using loops.</a:t>
+              <a:t>Especially in scenarios where input data is partially controlled by users, using defaultdict can help maintain program integrity, reduce error-handling complexity, and safeguard against logic flaws that could be exploited by attackers.</a:t>
             </a:r>
           </a:p>
         </p:txBody>
@@ -10148,7 +10026,7 @@
     </p:spTree>
     <p:extLst>
       <p:ext uri="{BB962C8B-B14F-4D97-AF65-F5344CB8AC3E}">
-        <p14:creationId xmlns:p14="http://schemas.microsoft.com/office/powerpoint/2010/main" val="725852954"/>
+        <p14:creationId xmlns:p14="http://schemas.microsoft.com/office/powerpoint/2010/main" val="1028685535"/>
       </p:ext>
     </p:extLst>
   </p:cSld>
@@ -10438,6 +10316,333 @@
 </file>
 
 <file path=ppt/slides/slide30.xml><?xml version="1.0" encoding="utf-8"?>
+<p:sld xmlns:a="http://schemas.openxmlformats.org/drawingml/2006/main" xmlns:r="http://schemas.openxmlformats.org/officeDocument/2006/relationships" xmlns:p="http://schemas.openxmlformats.org/presentationml/2006/main">
+  <p:cSld>
+    <p:spTree>
+      <p:nvGrpSpPr>
+        <p:cNvPr id="1" name="">
+          <a:extLst>
+            <a:ext uri="{FF2B5EF4-FFF2-40B4-BE49-F238E27FC236}">
+              <a16:creationId xmlns:a16="http://schemas.microsoft.com/office/drawing/2014/main" id="{986D872C-E703-1333-8961-D37AB2337B58}"/>
+            </a:ext>
+          </a:extLst>
+        </p:cNvPr>
+        <p:cNvGrpSpPr/>
+        <p:nvPr/>
+      </p:nvGrpSpPr>
+      <p:grpSpPr>
+        <a:xfrm>
+          <a:off x="0" y="0"/>
+          <a:ext cx="0" cy="0"/>
+          <a:chOff x="0" y="0"/>
+          <a:chExt cx="0" cy="0"/>
+        </a:xfrm>
+      </p:grpSpPr>
+      <p:pic>
+        <p:nvPicPr>
+          <p:cNvPr id="3" name="Picture 2" descr="A white and blue background&#10;&#10;Description automatically generated">
+            <a:extLst>
+              <a:ext uri="{FF2B5EF4-FFF2-40B4-BE49-F238E27FC236}">
+                <a16:creationId xmlns:a16="http://schemas.microsoft.com/office/drawing/2014/main" id="{64AD6237-F4AC-A21A-D86F-42B6B102BD47}"/>
+              </a:ext>
+            </a:extLst>
+          </p:cNvPr>
+          <p:cNvPicPr>
+            <a:picLocks noChangeAspect="1"/>
+          </p:cNvPicPr>
+          <p:nvPr/>
+        </p:nvPicPr>
+        <p:blipFill>
+          <a:blip r:embed="rId2"/>
+          <a:stretch>
+            <a:fillRect/>
+          </a:stretch>
+        </p:blipFill>
+        <p:spPr>
+          <a:xfrm>
+            <a:off x="0" y="-33129"/>
+            <a:ext cx="12192000" cy="6891129"/>
+          </a:xfrm>
+          <a:prstGeom prst="rect">
+            <a:avLst/>
+          </a:prstGeom>
+        </p:spPr>
+      </p:pic>
+      <p:sp>
+        <p:nvSpPr>
+          <p:cNvPr id="4" name="TextBox 3">
+            <a:extLst>
+              <a:ext uri="{FF2B5EF4-FFF2-40B4-BE49-F238E27FC236}">
+                <a16:creationId xmlns:a16="http://schemas.microsoft.com/office/drawing/2014/main" id="{1A4B7406-491F-B083-FC26-26BD7458B9A8}"/>
+              </a:ext>
+            </a:extLst>
+          </p:cNvPr>
+          <p:cNvSpPr txBox="1"/>
+          <p:nvPr/>
+        </p:nvSpPr>
+        <p:spPr>
+          <a:xfrm>
+            <a:off x="604266" y="136955"/>
+            <a:ext cx="10391019" cy="646331"/>
+          </a:xfrm>
+          <a:prstGeom prst="rect">
+            <a:avLst/>
+          </a:prstGeom>
+          <a:noFill/>
+        </p:spPr>
+        <p:txBody>
+          <a:bodyPr wrap="square" rtlCol="0">
+            <a:spAutoFit/>
+          </a:bodyPr>
+          <a:lstStyle/>
+          <a:p>
+            <a:r>
+              <a:rPr lang="en-US" sz="3600">
+                <a:solidFill>
+                  <a:schemeClr val="accent1">
+                    <a:lumMod val="50000"/>
+                  </a:schemeClr>
+                </a:solidFill>
+                <a:latin typeface="Arial" panose="020B0604020202020204" pitchFamily="34" charset="0"/>
+                <a:cs typeface="Arial" panose="020B0604020202020204" pitchFamily="34" charset="0"/>
+              </a:rPr>
+              <a:t>Using Safer Data Structures</a:t>
+            </a:r>
+          </a:p>
+        </p:txBody>
+      </p:sp>
+      <p:sp>
+        <p:nvSpPr>
+          <p:cNvPr id="5" name="TextBox 4">
+            <a:extLst>
+              <a:ext uri="{FF2B5EF4-FFF2-40B4-BE49-F238E27FC236}">
+                <a16:creationId xmlns:a16="http://schemas.microsoft.com/office/drawing/2014/main" id="{B81C8176-5C01-4C22-D6C4-0DFE4E41F9F8}"/>
+              </a:ext>
+            </a:extLst>
+          </p:cNvPr>
+          <p:cNvSpPr txBox="1"/>
+          <p:nvPr/>
+        </p:nvSpPr>
+        <p:spPr>
+          <a:xfrm>
+            <a:off x="836614" y="906971"/>
+            <a:ext cx="10323564" cy="4770537"/>
+          </a:xfrm>
+          <a:prstGeom prst="rect">
+            <a:avLst/>
+          </a:prstGeom>
+          <a:noFill/>
+        </p:spPr>
+        <p:txBody>
+          <a:bodyPr wrap="square" rtlCol="0">
+            <a:spAutoFit/>
+          </a:bodyPr>
+          <a:lstStyle/>
+          <a:p>
+            <a:pPr marL="231775" indent="-230188">
+              <a:buFont typeface="Arial" panose="020B0604020202020204" pitchFamily="34" charset="0"/>
+              <a:buChar char="•"/>
+            </a:pPr>
+            <a:r>
+              <a:rPr lang="en-US" sz="2400">
+                <a:solidFill>
+                  <a:schemeClr val="accent1">
+                    <a:lumMod val="50000"/>
+                  </a:schemeClr>
+                </a:solidFill>
+                <a:latin typeface="Arial" panose="020B0604020202020204" pitchFamily="34" charset="0"/>
+                <a:cs typeface="Arial" panose="020B0604020202020204" pitchFamily="34" charset="0"/>
+              </a:rPr>
+              <a:t>Use collections.deque for fixed-size buffers.</a:t>
+            </a:r>
+          </a:p>
+          <a:p>
+            <a:pPr marL="231775" indent="-230188">
+              <a:buFont typeface="Arial" panose="020B0604020202020204" pitchFamily="34" charset="0"/>
+              <a:buChar char="•"/>
+            </a:pPr>
+            <a:endParaRPr lang="en-US" sz="2400">
+              <a:solidFill>
+                <a:schemeClr val="accent1">
+                  <a:lumMod val="50000"/>
+                </a:schemeClr>
+              </a:solidFill>
+              <a:latin typeface="Arial" panose="020B0604020202020204" pitchFamily="34" charset="0"/>
+              <a:cs typeface="Arial" panose="020B0604020202020204" pitchFamily="34" charset="0"/>
+            </a:endParaRPr>
+          </a:p>
+          <a:p>
+            <a:pPr marL="231775" indent="-230188">
+              <a:buFont typeface="Arial" panose="020B0604020202020204" pitchFamily="34" charset="0"/>
+              <a:buChar char="•"/>
+            </a:pPr>
+            <a:r>
+              <a:rPr lang="en-US" sz="2400">
+                <a:solidFill>
+                  <a:schemeClr val="accent1">
+                    <a:lumMod val="50000"/>
+                  </a:schemeClr>
+                </a:solidFill>
+                <a:latin typeface="Arial" panose="020B0604020202020204" pitchFamily="34" charset="0"/>
+                <a:cs typeface="Arial" panose="020B0604020202020204" pitchFamily="34" charset="0"/>
+              </a:rPr>
+              <a:t>Consider slicing to limit index access.</a:t>
+            </a:r>
+          </a:p>
+          <a:p>
+            <a:pPr marL="688975" lvl="1" indent="-230188">
+              <a:buFont typeface="Arial" panose="020B0604020202020204" pitchFamily="34" charset="0"/>
+              <a:buChar char="•"/>
+            </a:pPr>
+            <a:r>
+              <a:rPr lang="en-US" sz="2000">
+                <a:solidFill>
+                  <a:schemeClr val="accent1">
+                    <a:lumMod val="50000"/>
+                  </a:schemeClr>
+                </a:solidFill>
+                <a:latin typeface="Arial" panose="020B0604020202020204" pitchFamily="34" charset="0"/>
+                <a:cs typeface="Arial" panose="020B0604020202020204" pitchFamily="34" charset="0"/>
+              </a:rPr>
+              <a:t>Unlike direct indexing (my_list[3]), which would raise an IndexError if the index is out of bounds, slicing gracefully handles it.</a:t>
+            </a:r>
+          </a:p>
+          <a:p>
+            <a:pPr marL="231775" indent="-230188">
+              <a:buFont typeface="Arial" panose="020B0604020202020204" pitchFamily="34" charset="0"/>
+              <a:buChar char="•"/>
+            </a:pPr>
+            <a:endParaRPr lang="en-US" sz="2400">
+              <a:solidFill>
+                <a:schemeClr val="accent1">
+                  <a:lumMod val="50000"/>
+                </a:schemeClr>
+              </a:solidFill>
+              <a:latin typeface="Arial" panose="020B0604020202020204" pitchFamily="34" charset="0"/>
+              <a:cs typeface="Arial" panose="020B0604020202020204" pitchFamily="34" charset="0"/>
+            </a:endParaRPr>
+          </a:p>
+          <a:p>
+            <a:pPr marL="914400"/>
+            <a:r>
+              <a:rPr lang="en-US" sz="2400" b="1">
+                <a:solidFill>
+                  <a:schemeClr val="accent1">
+                    <a:lumMod val="50000"/>
+                  </a:schemeClr>
+                </a:solidFill>
+                <a:latin typeface="Consolas" panose="020B0609020204030204" pitchFamily="49" charset="0"/>
+                <a:cs typeface="Arial" panose="020B0604020202020204" pitchFamily="34" charset="0"/>
+              </a:rPr>
+              <a:t>my_list = [10, 20, 30]</a:t>
+            </a:r>
+          </a:p>
+          <a:p>
+            <a:pPr marL="914400"/>
+            <a:r>
+              <a:rPr lang="en-US" sz="2400" b="1">
+                <a:solidFill>
+                  <a:schemeClr val="accent1">
+                    <a:lumMod val="50000"/>
+                  </a:schemeClr>
+                </a:solidFill>
+                <a:latin typeface="Consolas" panose="020B0609020204030204" pitchFamily="49" charset="0"/>
+                <a:cs typeface="Arial" panose="020B0604020202020204" pitchFamily="34" charset="0"/>
+              </a:rPr>
+              <a:t>print(my_list[5])  # IndexError: index out of range</a:t>
+            </a:r>
+          </a:p>
+          <a:p>
+            <a:pPr marL="914400"/>
+            <a:endParaRPr lang="en-US" sz="2400" b="1">
+              <a:solidFill>
+                <a:schemeClr val="accent1">
+                  <a:lumMod val="50000"/>
+                </a:schemeClr>
+              </a:solidFill>
+              <a:latin typeface="Consolas" panose="020B0609020204030204" pitchFamily="49" charset="0"/>
+              <a:cs typeface="Arial" panose="020B0604020202020204" pitchFamily="34" charset="0"/>
+            </a:endParaRPr>
+          </a:p>
+          <a:p>
+            <a:pPr marL="914400"/>
+            <a:r>
+              <a:rPr lang="en-US" sz="2400" b="1">
+                <a:solidFill>
+                  <a:schemeClr val="accent1">
+                    <a:lumMod val="50000"/>
+                  </a:schemeClr>
+                </a:solidFill>
+                <a:latin typeface="Consolas" panose="020B0609020204030204" pitchFamily="49" charset="0"/>
+                <a:cs typeface="Arial" panose="020B0604020202020204" pitchFamily="34" charset="0"/>
+              </a:rPr>
+              <a:t>my_list = [10, 20, 30]</a:t>
+            </a:r>
+          </a:p>
+          <a:p>
+            <a:pPr marL="914400"/>
+            <a:r>
+              <a:rPr lang="en-US" sz="2400" b="1">
+                <a:solidFill>
+                  <a:schemeClr val="accent1">
+                    <a:lumMod val="50000"/>
+                  </a:schemeClr>
+                </a:solidFill>
+                <a:latin typeface="Consolas" panose="020B0609020204030204" pitchFamily="49" charset="0"/>
+                <a:cs typeface="Arial" panose="020B0604020202020204" pitchFamily="34" charset="0"/>
+              </a:rPr>
+              <a:t>print(my_list[:5])  # Prevents out-of-range errors</a:t>
+            </a:r>
+          </a:p>
+          <a:p>
+            <a:pPr marL="231775" indent="-230188">
+              <a:buFont typeface="Arial" panose="020B0604020202020204" pitchFamily="34" charset="0"/>
+              <a:buChar char="•"/>
+            </a:pPr>
+            <a:endParaRPr lang="en-US" sz="2400">
+              <a:solidFill>
+                <a:schemeClr val="accent1">
+                  <a:lumMod val="50000"/>
+                </a:schemeClr>
+              </a:solidFill>
+              <a:latin typeface="Arial" panose="020B0604020202020204" pitchFamily="34" charset="0"/>
+              <a:cs typeface="Arial" panose="020B0604020202020204" pitchFamily="34" charset="0"/>
+            </a:endParaRPr>
+          </a:p>
+          <a:p>
+            <a:pPr marL="231775" indent="-230188">
+              <a:buFont typeface="Arial" panose="020B0604020202020204" pitchFamily="34" charset="0"/>
+              <a:buChar char="•"/>
+            </a:pPr>
+            <a:r>
+              <a:rPr lang="en-US" sz="2400">
+                <a:solidFill>
+                  <a:schemeClr val="accent1">
+                    <a:lumMod val="50000"/>
+                  </a:schemeClr>
+                </a:solidFill>
+                <a:latin typeface="Arial" panose="020B0604020202020204" pitchFamily="34" charset="0"/>
+                <a:cs typeface="Arial" panose="020B0604020202020204" pitchFamily="34" charset="0"/>
+              </a:rPr>
+              <a:t>Avoid unnecessary manual index tracking when using loops.</a:t>
+            </a:r>
+          </a:p>
+        </p:txBody>
+      </p:sp>
+    </p:spTree>
+    <p:extLst>
+      <p:ext uri="{BB962C8B-B14F-4D97-AF65-F5344CB8AC3E}">
+        <p14:creationId xmlns:p14="http://schemas.microsoft.com/office/powerpoint/2010/main" val="725852954"/>
+      </p:ext>
+    </p:extLst>
+  </p:cSld>
+  <p:clrMapOvr>
+    <a:masterClrMapping/>
+  </p:clrMapOvr>
+</p:sld>
+</file>
+
+<file path=ppt/slides/slide31.xml><?xml version="1.0" encoding="utf-8"?>
 <p:sld xmlns:a="http://schemas.openxmlformats.org/drawingml/2006/main" xmlns:r="http://schemas.openxmlformats.org/officeDocument/2006/relationships" xmlns:p="http://schemas.openxmlformats.org/presentationml/2006/main">
   <p:cSld>
     <p:spTree>

--- a/Slides-Day2.pptx
+++ b/Slides-Day2.pptx
@@ -289,7 +289,7 @@
           <a:p>
             <a:fld id="{CD989C08-BA69-4AD3-98E9-D53C63F6E1B1}" type="datetimeFigureOut">
               <a:rPr lang="en-US" smtClean="0"/>
-              <a:t>3/30/2025</a:t>
+              <a:t>4/28/2025</a:t>
             </a:fld>
             <a:endParaRPr lang="en-US"/>
           </a:p>
@@ -487,7 +487,7 @@
           <a:p>
             <a:fld id="{CD989C08-BA69-4AD3-98E9-D53C63F6E1B1}" type="datetimeFigureOut">
               <a:rPr lang="en-US" smtClean="0"/>
-              <a:t>3/30/2025</a:t>
+              <a:t>4/28/2025</a:t>
             </a:fld>
             <a:endParaRPr lang="en-US"/>
           </a:p>
@@ -695,7 +695,7 @@
           <a:p>
             <a:fld id="{CD989C08-BA69-4AD3-98E9-D53C63F6E1B1}" type="datetimeFigureOut">
               <a:rPr lang="en-US" smtClean="0"/>
-              <a:t>3/30/2025</a:t>
+              <a:t>4/28/2025</a:t>
             </a:fld>
             <a:endParaRPr lang="en-US"/>
           </a:p>
@@ -893,7 +893,7 @@
           <a:p>
             <a:fld id="{CD989C08-BA69-4AD3-98E9-D53C63F6E1B1}" type="datetimeFigureOut">
               <a:rPr lang="en-US" smtClean="0"/>
-              <a:t>3/30/2025</a:t>
+              <a:t>4/28/2025</a:t>
             </a:fld>
             <a:endParaRPr lang="en-US"/>
           </a:p>
@@ -1168,7 +1168,7 @@
           <a:p>
             <a:fld id="{CD989C08-BA69-4AD3-98E9-D53C63F6E1B1}" type="datetimeFigureOut">
               <a:rPr lang="en-US" smtClean="0"/>
-              <a:t>3/30/2025</a:t>
+              <a:t>4/28/2025</a:t>
             </a:fld>
             <a:endParaRPr lang="en-US"/>
           </a:p>
@@ -1433,7 +1433,7 @@
           <a:p>
             <a:fld id="{CD989C08-BA69-4AD3-98E9-D53C63F6E1B1}" type="datetimeFigureOut">
               <a:rPr lang="en-US" smtClean="0"/>
-              <a:t>3/30/2025</a:t>
+              <a:t>4/28/2025</a:t>
             </a:fld>
             <a:endParaRPr lang="en-US"/>
           </a:p>
@@ -1845,7 +1845,7 @@
           <a:p>
             <a:fld id="{CD989C08-BA69-4AD3-98E9-D53C63F6E1B1}" type="datetimeFigureOut">
               <a:rPr lang="en-US" smtClean="0"/>
-              <a:t>3/30/2025</a:t>
+              <a:t>4/28/2025</a:t>
             </a:fld>
             <a:endParaRPr lang="en-US"/>
           </a:p>
@@ -1986,7 +1986,7 @@
           <a:p>
             <a:fld id="{CD989C08-BA69-4AD3-98E9-D53C63F6E1B1}" type="datetimeFigureOut">
               <a:rPr lang="en-US" smtClean="0"/>
-              <a:t>3/30/2025</a:t>
+              <a:t>4/28/2025</a:t>
             </a:fld>
             <a:endParaRPr lang="en-US"/>
           </a:p>
@@ -2099,7 +2099,7 @@
           <a:p>
             <a:fld id="{CD989C08-BA69-4AD3-98E9-D53C63F6E1B1}" type="datetimeFigureOut">
               <a:rPr lang="en-US" smtClean="0"/>
-              <a:t>3/30/2025</a:t>
+              <a:t>4/28/2025</a:t>
             </a:fld>
             <a:endParaRPr lang="en-US"/>
           </a:p>
@@ -2410,7 +2410,7 @@
           <a:p>
             <a:fld id="{CD989C08-BA69-4AD3-98E9-D53C63F6E1B1}" type="datetimeFigureOut">
               <a:rPr lang="en-US" smtClean="0"/>
-              <a:t>3/30/2025</a:t>
+              <a:t>4/28/2025</a:t>
             </a:fld>
             <a:endParaRPr lang="en-US"/>
           </a:p>
@@ -2698,7 +2698,7 @@
           <a:p>
             <a:fld id="{CD989C08-BA69-4AD3-98E9-D53C63F6E1B1}" type="datetimeFigureOut">
               <a:rPr lang="en-US" smtClean="0"/>
-              <a:t>3/30/2025</a:t>
+              <a:t>4/28/2025</a:t>
             </a:fld>
             <a:endParaRPr lang="en-US"/>
           </a:p>
@@ -2939,7 +2939,7 @@
           <a:p>
             <a:fld id="{CD989C08-BA69-4AD3-98E9-D53C63F6E1B1}" type="datetimeFigureOut">
               <a:rPr lang="en-US" smtClean="0"/>
-              <a:t>3/30/2025</a:t>
+              <a:t>4/28/2025</a:t>
             </a:fld>
             <a:endParaRPr lang="en-US"/>
           </a:p>
